--- a/slides/CSC336-Lecture-11-Core-JavaScript-ES6.pptx
+++ b/slides/CSC336-Lecture-11-Core-JavaScript-ES6.pptx
@@ -4438,79 +4438,44 @@
       </p:sp>
       <p:sp>
         <p:nvSpPr>
-          <p:cNvPr id="6" name="Text 4"/>
-          <p:cNvSpPr txBox="1"/>
-          <p:nvPr/>
-        </p:nvSpPr>
-        <p:spPr>
-          <a:xfrm>
-            <a:off x="640080" y="6446520"/>
-            <a:ext cx="8686800" cy="292608"/>
-          </a:xfrm>
-          <a:prstGeom prst="rect">
-            <a:avLst/>
-          </a:prstGeom>
-          <a:noFill/>
-          <a:ln/>
-        </p:spPr>
-        <p:txBody>
-          <a:bodyPr wrap="square" lIns="0" tIns="0" rIns="0" bIns="0" rtlCol="0" anchor="ctr"/>
-          <a:lstStyle/>
-          <a:p>
-            <a:pPr algn="l" indent="0" marL="0">
-              <a:buNone/>
-            </a:pPr>
-            <a:r>
-              <a:rPr lang="en-US" sz="900" dirty="0">
-                <a:solidFill>
-                  <a:srgbClr val="9AA3D8"/>
-                </a:solidFill>
-                <a:latin typeface="Calibri" pitchFamily="34" charset="0"/>
-                <a:ea typeface="Calibri" pitchFamily="34" charset="-122"/>
-                <a:cs typeface="Calibri" pitchFamily="34" charset="-120"/>
-              </a:rPr>
-              <a:t>Usman Akram  •  COMSATS University Islamabad</a:t>
-            </a:r>
-            <a:endParaRPr lang="en-US" sz="900" dirty="0"/>
-          </a:p>
-        </p:txBody>
-      </p:sp>
-      <p:sp>
-        <p:nvSpPr>
-          <p:cNvPr id="7" name="Text 5"/>
-          <p:cNvSpPr txBox="1"/>
-          <p:nvPr/>
-        </p:nvSpPr>
-        <p:spPr>
-          <a:xfrm>
-            <a:off x="11155680" y="6446520"/>
-            <a:ext cx="457200" cy="292608"/>
-          </a:xfrm>
-          <a:prstGeom prst="rect">
-            <a:avLst/>
-          </a:prstGeom>
-          <a:noFill/>
-          <a:ln/>
-        </p:spPr>
-        <p:txBody>
-          <a:bodyPr wrap="square" lIns="0" tIns="0" rIns="0" bIns="0" rtlCol="0" anchor="ctr"/>
-          <a:lstStyle/>
-          <a:p>
-            <a:pPr algn="r" indent="0" marL="0">
-              <a:buNone/>
-            </a:pPr>
-            <a:r>
-              <a:rPr lang="en-US" sz="900" dirty="0">
-                <a:solidFill>
-                  <a:srgbClr val="9AA3D8"/>
-                </a:solidFill>
-                <a:latin typeface="Calibri" pitchFamily="34" charset="0"/>
-                <a:ea typeface="Calibri" pitchFamily="34" charset="-122"/>
-                <a:cs typeface="Calibri" pitchFamily="34" charset="-120"/>
-              </a:rPr>
-              <a:t>1</a:t>
-            </a:r>
-            <a:endParaRPr lang="en-US" sz="900" dirty="0"/>
+          <p:cNvPr id="8" name="cuinotes-footer-mark"/>
+          <p:cNvSpPr txBox="1"/>
+          <p:nvPr/>
+        </p:nvSpPr>
+        <p:spPr>
+          <a:xfrm>
+            <a:off x="9951720" y="6455664"/>
+            <a:ext cx="2011680" cy="292608"/>
+          </a:xfrm>
+          <a:prstGeom prst="rect">
+            <a:avLst/>
+          </a:prstGeom>
+          <a:noFill/>
+        </p:spPr>
+        <p:txBody>
+          <a:bodyPr wrap="none" lIns="0" rIns="0" tIns="0" bIns="0">
+            <a:spAutoFit/>
+          </a:bodyPr>
+          <a:lstStyle/>
+          <a:p>
+            <a:pPr algn="r"/>
+            <a:r>
+              <a:rPr sz="1000">
+                <a:solidFill>
+                  <a:srgbClr val="8A939B"/>
+                </a:solidFill>
+                <a:hlinkClick r:id="rId3"/>
+              </a:rPr>
+              <a:t>cuinotes.com</a:t>
+            </a:r>
+            <a:r>
+              <a:rPr sz="1000">
+                <a:solidFill>
+                  <a:srgbClr val="8A939B"/>
+                </a:solidFill>
+              </a:rPr>
+              <a:t>  ·  1</a:t>
+            </a:r>
           </a:p>
         </p:txBody>
       </p:sp>
@@ -4650,6 +4615,10 @@
             <a:prstDash val="solid"/>
           </a:ln>
         </p:spPr>
+        <p:txBody>
+          <a:bodyPr/>
+          <a:p/>
+        </p:txBody>
       </p:sp>
       <p:sp>
         <p:nvSpPr>
@@ -4731,79 +4700,44 @@
       </p:sp>
       <p:sp>
         <p:nvSpPr>
-          <p:cNvPr id="7" name="Text 5"/>
-          <p:cNvSpPr txBox="1"/>
-          <p:nvPr/>
-        </p:nvSpPr>
-        <p:spPr>
-          <a:xfrm>
-            <a:off x="640080" y="6446520"/>
-            <a:ext cx="8686800" cy="292608"/>
-          </a:xfrm>
-          <a:prstGeom prst="rect">
-            <a:avLst/>
-          </a:prstGeom>
-          <a:noFill/>
-          <a:ln/>
-        </p:spPr>
-        <p:txBody>
-          <a:bodyPr wrap="square" lIns="0" tIns="0" rIns="0" bIns="0" rtlCol="0" anchor="ctr"/>
-          <a:lstStyle/>
-          <a:p>
-            <a:pPr algn="l" indent="0" marL="0">
-              <a:buNone/>
-            </a:pPr>
-            <a:r>
-              <a:rPr lang="en-US" sz="900" dirty="0">
-                <a:solidFill>
-                  <a:srgbClr val="5D5D72"/>
-                </a:solidFill>
-                <a:latin typeface="Calibri" pitchFamily="34" charset="0"/>
-                <a:ea typeface="Calibri" pitchFamily="34" charset="-122"/>
-                <a:cs typeface="Calibri" pitchFamily="34" charset="-120"/>
-              </a:rPr>
-              <a:t>Usman Akram  •  COMSATS University Islamabad</a:t>
-            </a:r>
-            <a:endParaRPr lang="en-US" sz="900" dirty="0"/>
-          </a:p>
-        </p:txBody>
-      </p:sp>
-      <p:sp>
-        <p:nvSpPr>
-          <p:cNvPr id="8" name="Text 6"/>
-          <p:cNvSpPr txBox="1"/>
-          <p:nvPr/>
-        </p:nvSpPr>
-        <p:spPr>
-          <a:xfrm>
-            <a:off x="11155680" y="6446520"/>
-            <a:ext cx="457200" cy="292608"/>
-          </a:xfrm>
-          <a:prstGeom prst="rect">
-            <a:avLst/>
-          </a:prstGeom>
-          <a:noFill/>
-          <a:ln/>
-        </p:spPr>
-        <p:txBody>
-          <a:bodyPr wrap="square" lIns="0" tIns="0" rIns="0" bIns="0" rtlCol="0" anchor="ctr"/>
-          <a:lstStyle/>
-          <a:p>
-            <a:pPr algn="r" indent="0" marL="0">
-              <a:buNone/>
-            </a:pPr>
-            <a:r>
-              <a:rPr lang="en-US" sz="900" dirty="0">
-                <a:solidFill>
-                  <a:srgbClr val="5D5D72"/>
-                </a:solidFill>
-                <a:latin typeface="Calibri" pitchFamily="34" charset="0"/>
-                <a:ea typeface="Calibri" pitchFamily="34" charset="-122"/>
-                <a:cs typeface="Calibri" pitchFamily="34" charset="-120"/>
-              </a:rPr>
-              <a:t>10</a:t>
-            </a:r>
-            <a:endParaRPr lang="en-US" sz="900" dirty="0"/>
+          <p:cNvPr id="9" name="cuinotes-footer-mark"/>
+          <p:cNvSpPr txBox="1"/>
+          <p:nvPr/>
+        </p:nvSpPr>
+        <p:spPr>
+          <a:xfrm>
+            <a:off x="9951720" y="6455664"/>
+            <a:ext cx="2011680" cy="292608"/>
+          </a:xfrm>
+          <a:prstGeom prst="rect">
+            <a:avLst/>
+          </a:prstGeom>
+          <a:noFill/>
+        </p:spPr>
+        <p:txBody>
+          <a:bodyPr wrap="none" lIns="0" rIns="0" tIns="0" bIns="0">
+            <a:spAutoFit/>
+          </a:bodyPr>
+          <a:lstStyle/>
+          <a:p>
+            <a:pPr algn="r"/>
+            <a:r>
+              <a:rPr sz="1000">
+                <a:solidFill>
+                  <a:srgbClr val="8A939B"/>
+                </a:solidFill>
+                <a:hlinkClick r:id="rId3"/>
+              </a:rPr>
+              <a:t>cuinotes.com</a:t>
+            </a:r>
+            <a:r>
+              <a:rPr sz="1000">
+                <a:solidFill>
+                  <a:srgbClr val="8A939B"/>
+                </a:solidFill>
+              </a:rPr>
+              <a:t>  ·  10</a:t>
+            </a:r>
           </a:p>
         </p:txBody>
       </p:sp>
@@ -4938,6 +4872,10 @@
           </a:solidFill>
           <a:ln/>
         </p:spPr>
+        <p:txBody>
+          <a:bodyPr/>
+          <a:p/>
+        </p:txBody>
       </p:sp>
       <p:sp>
         <p:nvSpPr>
@@ -5023,79 +4961,44 @@
       </p:sp>
       <p:sp>
         <p:nvSpPr>
-          <p:cNvPr id="6" name="Text 4"/>
-          <p:cNvSpPr txBox="1"/>
-          <p:nvPr/>
-        </p:nvSpPr>
-        <p:spPr>
-          <a:xfrm>
-            <a:off x="640080" y="6446520"/>
-            <a:ext cx="8686800" cy="292608"/>
-          </a:xfrm>
-          <a:prstGeom prst="rect">
-            <a:avLst/>
-          </a:prstGeom>
-          <a:noFill/>
-          <a:ln/>
-        </p:spPr>
-        <p:txBody>
-          <a:bodyPr wrap="square" lIns="0" tIns="0" rIns="0" bIns="0" rtlCol="0" anchor="ctr"/>
-          <a:lstStyle/>
-          <a:p>
-            <a:pPr algn="l" indent="0" marL="0">
-              <a:buNone/>
-            </a:pPr>
-            <a:r>
-              <a:rPr lang="en-US" sz="900" dirty="0">
-                <a:solidFill>
-                  <a:srgbClr val="5D5D72"/>
-                </a:solidFill>
-                <a:latin typeface="Calibri" pitchFamily="34" charset="0"/>
-                <a:ea typeface="Calibri" pitchFamily="34" charset="-122"/>
-                <a:cs typeface="Calibri" pitchFamily="34" charset="-120"/>
-              </a:rPr>
-              <a:t>Usman Akram  •  COMSATS University Islamabad</a:t>
-            </a:r>
-            <a:endParaRPr lang="en-US" sz="900" dirty="0"/>
-          </a:p>
-        </p:txBody>
-      </p:sp>
-      <p:sp>
-        <p:nvSpPr>
-          <p:cNvPr id="7" name="Text 5"/>
-          <p:cNvSpPr txBox="1"/>
-          <p:nvPr/>
-        </p:nvSpPr>
-        <p:spPr>
-          <a:xfrm>
-            <a:off x="11155680" y="6446520"/>
-            <a:ext cx="457200" cy="292608"/>
-          </a:xfrm>
-          <a:prstGeom prst="rect">
-            <a:avLst/>
-          </a:prstGeom>
-          <a:noFill/>
-          <a:ln/>
-        </p:spPr>
-        <p:txBody>
-          <a:bodyPr wrap="square" lIns="0" tIns="0" rIns="0" bIns="0" rtlCol="0" anchor="ctr"/>
-          <a:lstStyle/>
-          <a:p>
-            <a:pPr algn="r" indent="0" marL="0">
-              <a:buNone/>
-            </a:pPr>
-            <a:r>
-              <a:rPr lang="en-US" sz="900" dirty="0">
-                <a:solidFill>
-                  <a:srgbClr val="5D5D72"/>
-                </a:solidFill>
-                <a:latin typeface="Calibri" pitchFamily="34" charset="0"/>
-                <a:ea typeface="Calibri" pitchFamily="34" charset="-122"/>
-                <a:cs typeface="Calibri" pitchFamily="34" charset="-120"/>
-              </a:rPr>
-              <a:t>11</a:t>
-            </a:r>
-            <a:endParaRPr lang="en-US" sz="900" dirty="0"/>
+          <p:cNvPr id="8" name="cuinotes-footer-mark"/>
+          <p:cNvSpPr txBox="1"/>
+          <p:nvPr/>
+        </p:nvSpPr>
+        <p:spPr>
+          <a:xfrm>
+            <a:off x="9951720" y="6455664"/>
+            <a:ext cx="2011680" cy="292608"/>
+          </a:xfrm>
+          <a:prstGeom prst="rect">
+            <a:avLst/>
+          </a:prstGeom>
+          <a:noFill/>
+        </p:spPr>
+        <p:txBody>
+          <a:bodyPr wrap="none" lIns="0" rIns="0" tIns="0" bIns="0">
+            <a:spAutoFit/>
+          </a:bodyPr>
+          <a:lstStyle/>
+          <a:p>
+            <a:pPr algn="r"/>
+            <a:r>
+              <a:rPr sz="1000">
+                <a:solidFill>
+                  <a:srgbClr val="8A939B"/>
+                </a:solidFill>
+                <a:hlinkClick r:id="rId3"/>
+              </a:rPr>
+              <a:t>cuinotes.com</a:t>
+            </a:r>
+            <a:r>
+              <a:rPr sz="1000">
+                <a:solidFill>
+                  <a:srgbClr val="8A939B"/>
+                </a:solidFill>
+              </a:rPr>
+              <a:t>  ·  11</a:t>
+            </a:r>
           </a:p>
         </p:txBody>
       </p:sp>
@@ -6055,79 +5958,44 @@
       </p:graphicFrame>
       <p:sp>
         <p:nvSpPr>
-          <p:cNvPr id="5" name="Text 2"/>
-          <p:cNvSpPr txBox="1"/>
-          <p:nvPr/>
-        </p:nvSpPr>
-        <p:spPr>
-          <a:xfrm>
-            <a:off x="640080" y="6446520"/>
-            <a:ext cx="8686800" cy="292608"/>
-          </a:xfrm>
-          <a:prstGeom prst="rect">
-            <a:avLst/>
-          </a:prstGeom>
-          <a:noFill/>
-          <a:ln/>
-        </p:spPr>
-        <p:txBody>
-          <a:bodyPr wrap="square" lIns="0" tIns="0" rIns="0" bIns="0" rtlCol="0" anchor="ctr"/>
-          <a:lstStyle/>
-          <a:p>
-            <a:pPr algn="l" indent="0" marL="0">
-              <a:buNone/>
-            </a:pPr>
-            <a:r>
-              <a:rPr lang="en-US" sz="900" dirty="0">
-                <a:solidFill>
-                  <a:srgbClr val="5D5D72"/>
-                </a:solidFill>
-                <a:latin typeface="Calibri" pitchFamily="34" charset="0"/>
-                <a:ea typeface="Calibri" pitchFamily="34" charset="-122"/>
-                <a:cs typeface="Calibri" pitchFamily="34" charset="-120"/>
-              </a:rPr>
-              <a:t>Usman Akram  •  COMSATS University Islamabad</a:t>
-            </a:r>
-            <a:endParaRPr lang="en-US" sz="900" dirty="0"/>
-          </a:p>
-        </p:txBody>
-      </p:sp>
-      <p:sp>
-        <p:nvSpPr>
-          <p:cNvPr id="6" name="Text 3"/>
-          <p:cNvSpPr txBox="1"/>
-          <p:nvPr/>
-        </p:nvSpPr>
-        <p:spPr>
-          <a:xfrm>
-            <a:off x="11155680" y="6446520"/>
-            <a:ext cx="457200" cy="292608"/>
-          </a:xfrm>
-          <a:prstGeom prst="rect">
-            <a:avLst/>
-          </a:prstGeom>
-          <a:noFill/>
-          <a:ln/>
-        </p:spPr>
-        <p:txBody>
-          <a:bodyPr wrap="square" lIns="0" tIns="0" rIns="0" bIns="0" rtlCol="0" anchor="ctr"/>
-          <a:lstStyle/>
-          <a:p>
-            <a:pPr algn="r" indent="0" marL="0">
-              <a:buNone/>
-            </a:pPr>
-            <a:r>
-              <a:rPr lang="en-US" sz="900" dirty="0">
-                <a:solidFill>
-                  <a:srgbClr val="5D5D72"/>
-                </a:solidFill>
-                <a:latin typeface="Calibri" pitchFamily="34" charset="0"/>
-                <a:ea typeface="Calibri" pitchFamily="34" charset="-122"/>
-                <a:cs typeface="Calibri" pitchFamily="34" charset="-120"/>
-              </a:rPr>
-              <a:t>12</a:t>
-            </a:r>
-            <a:endParaRPr lang="en-US" sz="900" dirty="0"/>
+          <p:cNvPr id="14" name="cuinotes-footer-mark"/>
+          <p:cNvSpPr txBox="1"/>
+          <p:nvPr/>
+        </p:nvSpPr>
+        <p:spPr>
+          <a:xfrm>
+            <a:off x="9951720" y="6455664"/>
+            <a:ext cx="2011680" cy="292608"/>
+          </a:xfrm>
+          <a:prstGeom prst="rect">
+            <a:avLst/>
+          </a:prstGeom>
+          <a:noFill/>
+        </p:spPr>
+        <p:txBody>
+          <a:bodyPr wrap="none" lIns="0" rIns="0" tIns="0" bIns="0">
+            <a:spAutoFit/>
+          </a:bodyPr>
+          <a:lstStyle/>
+          <a:p>
+            <a:pPr algn="r"/>
+            <a:r>
+              <a:rPr sz="1000">
+                <a:solidFill>
+                  <a:srgbClr val="8A939B"/>
+                </a:solidFill>
+                <a:hlinkClick r:id="rId3"/>
+              </a:rPr>
+              <a:t>cuinotes.com</a:t>
+            </a:r>
+            <a:r>
+              <a:rPr sz="1000">
+                <a:solidFill>
+                  <a:srgbClr val="8A939B"/>
+                </a:solidFill>
+              </a:rPr>
+              <a:t>  ·  12</a:t>
+            </a:r>
           </a:p>
         </p:txBody>
       </p:sp>
@@ -6262,6 +6130,10 @@
           </a:solidFill>
           <a:ln/>
         </p:spPr>
+        <p:txBody>
+          <a:bodyPr/>
+          <a:p/>
+        </p:txBody>
       </p:sp>
       <p:sp>
         <p:nvSpPr>
@@ -6535,79 +6407,44 @@
       </p:sp>
       <p:sp>
         <p:nvSpPr>
-          <p:cNvPr id="7" name="Text 5"/>
-          <p:cNvSpPr txBox="1"/>
-          <p:nvPr/>
-        </p:nvSpPr>
-        <p:spPr>
-          <a:xfrm>
-            <a:off x="640080" y="6446520"/>
-            <a:ext cx="8686800" cy="292608"/>
-          </a:xfrm>
-          <a:prstGeom prst="rect">
-            <a:avLst/>
-          </a:prstGeom>
-          <a:noFill/>
-          <a:ln/>
-        </p:spPr>
-        <p:txBody>
-          <a:bodyPr wrap="square" lIns="0" tIns="0" rIns="0" bIns="0" rtlCol="0" anchor="ctr"/>
-          <a:lstStyle/>
-          <a:p>
-            <a:pPr algn="l" indent="0" marL="0">
-              <a:buNone/>
-            </a:pPr>
-            <a:r>
-              <a:rPr lang="en-US" sz="900" dirty="0">
-                <a:solidFill>
-                  <a:srgbClr val="5D5D72"/>
-                </a:solidFill>
-                <a:latin typeface="Calibri" pitchFamily="34" charset="0"/>
-                <a:ea typeface="Calibri" pitchFamily="34" charset="-122"/>
-                <a:cs typeface="Calibri" pitchFamily="34" charset="-120"/>
-              </a:rPr>
-              <a:t>Usman Akram  •  COMSATS University Islamabad</a:t>
-            </a:r>
-            <a:endParaRPr lang="en-US" sz="900" dirty="0"/>
-          </a:p>
-        </p:txBody>
-      </p:sp>
-      <p:sp>
-        <p:nvSpPr>
-          <p:cNvPr id="8" name="Text 6"/>
-          <p:cNvSpPr txBox="1"/>
-          <p:nvPr/>
-        </p:nvSpPr>
-        <p:spPr>
-          <a:xfrm>
-            <a:off x="11155680" y="6446520"/>
-            <a:ext cx="457200" cy="292608"/>
-          </a:xfrm>
-          <a:prstGeom prst="rect">
-            <a:avLst/>
-          </a:prstGeom>
-          <a:noFill/>
-          <a:ln/>
-        </p:spPr>
-        <p:txBody>
-          <a:bodyPr wrap="square" lIns="0" tIns="0" rIns="0" bIns="0" rtlCol="0" anchor="ctr"/>
-          <a:lstStyle/>
-          <a:p>
-            <a:pPr algn="r" indent="0" marL="0">
-              <a:buNone/>
-            </a:pPr>
-            <a:r>
-              <a:rPr lang="en-US" sz="900" dirty="0">
-                <a:solidFill>
-                  <a:srgbClr val="5D5D72"/>
-                </a:solidFill>
-                <a:latin typeface="Calibri" pitchFamily="34" charset="0"/>
-                <a:ea typeface="Calibri" pitchFamily="34" charset="-122"/>
-                <a:cs typeface="Calibri" pitchFamily="34" charset="-120"/>
-              </a:rPr>
-              <a:t>13</a:t>
-            </a:r>
-            <a:endParaRPr lang="en-US" sz="900" dirty="0"/>
+          <p:cNvPr id="9" name="cuinotes-footer-mark"/>
+          <p:cNvSpPr txBox="1"/>
+          <p:nvPr/>
+        </p:nvSpPr>
+        <p:spPr>
+          <a:xfrm>
+            <a:off x="9951720" y="6455664"/>
+            <a:ext cx="2011680" cy="292608"/>
+          </a:xfrm>
+          <a:prstGeom prst="rect">
+            <a:avLst/>
+          </a:prstGeom>
+          <a:noFill/>
+        </p:spPr>
+        <p:txBody>
+          <a:bodyPr wrap="none" lIns="0" rIns="0" tIns="0" bIns="0">
+            <a:spAutoFit/>
+          </a:bodyPr>
+          <a:lstStyle/>
+          <a:p>
+            <a:pPr algn="r"/>
+            <a:r>
+              <a:rPr sz="1000">
+                <a:solidFill>
+                  <a:srgbClr val="8A939B"/>
+                </a:solidFill>
+                <a:hlinkClick r:id="rId3"/>
+              </a:rPr>
+              <a:t>cuinotes.com</a:t>
+            </a:r>
+            <a:r>
+              <a:rPr sz="1000">
+                <a:solidFill>
+                  <a:srgbClr val="8A939B"/>
+                </a:solidFill>
+              </a:rPr>
+              <a:t>  ·  13</a:t>
+            </a:r>
           </a:p>
         </p:txBody>
       </p:sp>
@@ -6742,6 +6579,10 @@
           </a:solidFill>
           <a:ln/>
         </p:spPr>
+        <p:txBody>
+          <a:bodyPr/>
+          <a:p/>
+        </p:txBody>
       </p:sp>
       <p:sp>
         <p:nvSpPr>
@@ -6906,79 +6747,44 @@
       </p:sp>
       <p:sp>
         <p:nvSpPr>
-          <p:cNvPr id="7" name="Text 5"/>
-          <p:cNvSpPr txBox="1"/>
-          <p:nvPr/>
-        </p:nvSpPr>
-        <p:spPr>
-          <a:xfrm>
-            <a:off x="640080" y="6446520"/>
-            <a:ext cx="8686800" cy="292608"/>
-          </a:xfrm>
-          <a:prstGeom prst="rect">
-            <a:avLst/>
-          </a:prstGeom>
-          <a:noFill/>
-          <a:ln/>
-        </p:spPr>
-        <p:txBody>
-          <a:bodyPr wrap="square" lIns="0" tIns="0" rIns="0" bIns="0" rtlCol="0" anchor="ctr"/>
-          <a:lstStyle/>
-          <a:p>
-            <a:pPr algn="l" indent="0" marL="0">
-              <a:buNone/>
-            </a:pPr>
-            <a:r>
-              <a:rPr lang="en-US" sz="900" dirty="0">
-                <a:solidFill>
-                  <a:srgbClr val="5D5D72"/>
-                </a:solidFill>
-                <a:latin typeface="Calibri" pitchFamily="34" charset="0"/>
-                <a:ea typeface="Calibri" pitchFamily="34" charset="-122"/>
-                <a:cs typeface="Calibri" pitchFamily="34" charset="-120"/>
-              </a:rPr>
-              <a:t>Usman Akram  •  COMSATS University Islamabad</a:t>
-            </a:r>
-            <a:endParaRPr lang="en-US" sz="900" dirty="0"/>
-          </a:p>
-        </p:txBody>
-      </p:sp>
-      <p:sp>
-        <p:nvSpPr>
-          <p:cNvPr id="8" name="Text 6"/>
-          <p:cNvSpPr txBox="1"/>
-          <p:nvPr/>
-        </p:nvSpPr>
-        <p:spPr>
-          <a:xfrm>
-            <a:off x="11155680" y="6446520"/>
-            <a:ext cx="457200" cy="292608"/>
-          </a:xfrm>
-          <a:prstGeom prst="rect">
-            <a:avLst/>
-          </a:prstGeom>
-          <a:noFill/>
-          <a:ln/>
-        </p:spPr>
-        <p:txBody>
-          <a:bodyPr wrap="square" lIns="0" tIns="0" rIns="0" bIns="0" rtlCol="0" anchor="ctr"/>
-          <a:lstStyle/>
-          <a:p>
-            <a:pPr algn="r" indent="0" marL="0">
-              <a:buNone/>
-            </a:pPr>
-            <a:r>
-              <a:rPr lang="en-US" sz="900" dirty="0">
-                <a:solidFill>
-                  <a:srgbClr val="5D5D72"/>
-                </a:solidFill>
-                <a:latin typeface="Calibri" pitchFamily="34" charset="0"/>
-                <a:ea typeface="Calibri" pitchFamily="34" charset="-122"/>
-                <a:cs typeface="Calibri" pitchFamily="34" charset="-120"/>
-              </a:rPr>
-              <a:t>14</a:t>
-            </a:r>
-            <a:endParaRPr lang="en-US" sz="900" dirty="0"/>
+          <p:cNvPr id="9" name="cuinotes-footer-mark"/>
+          <p:cNvSpPr txBox="1"/>
+          <p:nvPr/>
+        </p:nvSpPr>
+        <p:spPr>
+          <a:xfrm>
+            <a:off x="9951720" y="6455664"/>
+            <a:ext cx="2011680" cy="292608"/>
+          </a:xfrm>
+          <a:prstGeom prst="rect">
+            <a:avLst/>
+          </a:prstGeom>
+          <a:noFill/>
+        </p:spPr>
+        <p:txBody>
+          <a:bodyPr wrap="none" lIns="0" rIns="0" tIns="0" bIns="0">
+            <a:spAutoFit/>
+          </a:bodyPr>
+          <a:lstStyle/>
+          <a:p>
+            <a:pPr algn="r"/>
+            <a:r>
+              <a:rPr sz="1000">
+                <a:solidFill>
+                  <a:srgbClr val="8A939B"/>
+                </a:solidFill>
+                <a:hlinkClick r:id="rId3"/>
+              </a:rPr>
+              <a:t>cuinotes.com</a:t>
+            </a:r>
+            <a:r>
+              <a:rPr sz="1000">
+                <a:solidFill>
+                  <a:srgbClr val="8A939B"/>
+                </a:solidFill>
+              </a:rPr>
+              <a:t>  ·  14</a:t>
+            </a:r>
           </a:p>
         </p:txBody>
       </p:sp>
@@ -7118,6 +6924,10 @@
             <a:prstDash val="solid"/>
           </a:ln>
         </p:spPr>
+        <p:txBody>
+          <a:bodyPr/>
+          <a:p/>
+        </p:txBody>
       </p:sp>
       <p:sp>
         <p:nvSpPr>
@@ -7199,79 +7009,44 @@
       </p:sp>
       <p:sp>
         <p:nvSpPr>
-          <p:cNvPr id="7" name="Text 5"/>
-          <p:cNvSpPr txBox="1"/>
-          <p:nvPr/>
-        </p:nvSpPr>
-        <p:spPr>
-          <a:xfrm>
-            <a:off x="640080" y="6446520"/>
-            <a:ext cx="8686800" cy="292608"/>
-          </a:xfrm>
-          <a:prstGeom prst="rect">
-            <a:avLst/>
-          </a:prstGeom>
-          <a:noFill/>
-          <a:ln/>
-        </p:spPr>
-        <p:txBody>
-          <a:bodyPr wrap="square" lIns="0" tIns="0" rIns="0" bIns="0" rtlCol="0" anchor="ctr"/>
-          <a:lstStyle/>
-          <a:p>
-            <a:pPr algn="l" indent="0" marL="0">
-              <a:buNone/>
-            </a:pPr>
-            <a:r>
-              <a:rPr lang="en-US" sz="900" dirty="0">
-                <a:solidFill>
-                  <a:srgbClr val="5D5D72"/>
-                </a:solidFill>
-                <a:latin typeface="Calibri" pitchFamily="34" charset="0"/>
-                <a:ea typeface="Calibri" pitchFamily="34" charset="-122"/>
-                <a:cs typeface="Calibri" pitchFamily="34" charset="-120"/>
-              </a:rPr>
-              <a:t>Usman Akram  •  COMSATS University Islamabad</a:t>
-            </a:r>
-            <a:endParaRPr lang="en-US" sz="900" dirty="0"/>
-          </a:p>
-        </p:txBody>
-      </p:sp>
-      <p:sp>
-        <p:nvSpPr>
-          <p:cNvPr id="8" name="Text 6"/>
-          <p:cNvSpPr txBox="1"/>
-          <p:nvPr/>
-        </p:nvSpPr>
-        <p:spPr>
-          <a:xfrm>
-            <a:off x="11155680" y="6446520"/>
-            <a:ext cx="457200" cy="292608"/>
-          </a:xfrm>
-          <a:prstGeom prst="rect">
-            <a:avLst/>
-          </a:prstGeom>
-          <a:noFill/>
-          <a:ln/>
-        </p:spPr>
-        <p:txBody>
-          <a:bodyPr wrap="square" lIns="0" tIns="0" rIns="0" bIns="0" rtlCol="0" anchor="ctr"/>
-          <a:lstStyle/>
-          <a:p>
-            <a:pPr algn="r" indent="0" marL="0">
-              <a:buNone/>
-            </a:pPr>
-            <a:r>
-              <a:rPr lang="en-US" sz="900" dirty="0">
-                <a:solidFill>
-                  <a:srgbClr val="5D5D72"/>
-                </a:solidFill>
-                <a:latin typeface="Calibri" pitchFamily="34" charset="0"/>
-                <a:ea typeface="Calibri" pitchFamily="34" charset="-122"/>
-                <a:cs typeface="Calibri" pitchFamily="34" charset="-120"/>
-              </a:rPr>
-              <a:t>15</a:t>
-            </a:r>
-            <a:endParaRPr lang="en-US" sz="900" dirty="0"/>
+          <p:cNvPr id="9" name="cuinotes-footer-mark"/>
+          <p:cNvSpPr txBox="1"/>
+          <p:nvPr/>
+        </p:nvSpPr>
+        <p:spPr>
+          <a:xfrm>
+            <a:off x="9951720" y="6455664"/>
+            <a:ext cx="2011680" cy="292608"/>
+          </a:xfrm>
+          <a:prstGeom prst="rect">
+            <a:avLst/>
+          </a:prstGeom>
+          <a:noFill/>
+        </p:spPr>
+        <p:txBody>
+          <a:bodyPr wrap="none" lIns="0" rIns="0" tIns="0" bIns="0">
+            <a:spAutoFit/>
+          </a:bodyPr>
+          <a:lstStyle/>
+          <a:p>
+            <a:pPr algn="r"/>
+            <a:r>
+              <a:rPr sz="1000">
+                <a:solidFill>
+                  <a:srgbClr val="8A939B"/>
+                </a:solidFill>
+                <a:hlinkClick r:id="rId3"/>
+              </a:rPr>
+              <a:t>cuinotes.com</a:t>
+            </a:r>
+            <a:r>
+              <a:rPr sz="1000">
+                <a:solidFill>
+                  <a:srgbClr val="8A939B"/>
+                </a:solidFill>
+              </a:rPr>
+              <a:t>  ·  15</a:t>
+            </a:r>
           </a:p>
         </p:txBody>
       </p:sp>
@@ -7406,6 +7181,10 @@
           </a:solidFill>
           <a:ln/>
         </p:spPr>
+        <p:txBody>
+          <a:bodyPr/>
+          <a:p/>
+        </p:txBody>
       </p:sp>
       <p:sp>
         <p:nvSpPr>
@@ -7660,79 +7439,44 @@
       </p:sp>
       <p:sp>
         <p:nvSpPr>
-          <p:cNvPr id="6" name="Text 4"/>
-          <p:cNvSpPr txBox="1"/>
-          <p:nvPr/>
-        </p:nvSpPr>
-        <p:spPr>
-          <a:xfrm>
-            <a:off x="640080" y="6446520"/>
-            <a:ext cx="8686800" cy="292608"/>
-          </a:xfrm>
-          <a:prstGeom prst="rect">
-            <a:avLst/>
-          </a:prstGeom>
-          <a:noFill/>
-          <a:ln/>
-        </p:spPr>
-        <p:txBody>
-          <a:bodyPr wrap="square" lIns="0" tIns="0" rIns="0" bIns="0" rtlCol="0" anchor="ctr"/>
-          <a:lstStyle/>
-          <a:p>
-            <a:pPr algn="l" indent="0" marL="0">
-              <a:buNone/>
-            </a:pPr>
-            <a:r>
-              <a:rPr lang="en-US" sz="900" dirty="0">
-                <a:solidFill>
-                  <a:srgbClr val="5D5D72"/>
-                </a:solidFill>
-                <a:latin typeface="Calibri" pitchFamily="34" charset="0"/>
-                <a:ea typeface="Calibri" pitchFamily="34" charset="-122"/>
-                <a:cs typeface="Calibri" pitchFamily="34" charset="-120"/>
-              </a:rPr>
-              <a:t>Usman Akram  •  COMSATS University Islamabad</a:t>
-            </a:r>
-            <a:endParaRPr lang="en-US" sz="900" dirty="0"/>
-          </a:p>
-        </p:txBody>
-      </p:sp>
-      <p:sp>
-        <p:nvSpPr>
-          <p:cNvPr id="7" name="Text 5"/>
-          <p:cNvSpPr txBox="1"/>
-          <p:nvPr/>
-        </p:nvSpPr>
-        <p:spPr>
-          <a:xfrm>
-            <a:off x="11155680" y="6446520"/>
-            <a:ext cx="457200" cy="292608"/>
-          </a:xfrm>
-          <a:prstGeom prst="rect">
-            <a:avLst/>
-          </a:prstGeom>
-          <a:noFill/>
-          <a:ln/>
-        </p:spPr>
-        <p:txBody>
-          <a:bodyPr wrap="square" lIns="0" tIns="0" rIns="0" bIns="0" rtlCol="0" anchor="ctr"/>
-          <a:lstStyle/>
-          <a:p>
-            <a:pPr algn="r" indent="0" marL="0">
-              <a:buNone/>
-            </a:pPr>
-            <a:r>
-              <a:rPr lang="en-US" sz="900" dirty="0">
-                <a:solidFill>
-                  <a:srgbClr val="5D5D72"/>
-                </a:solidFill>
-                <a:latin typeface="Calibri" pitchFamily="34" charset="0"/>
-                <a:ea typeface="Calibri" pitchFamily="34" charset="-122"/>
-                <a:cs typeface="Calibri" pitchFamily="34" charset="-120"/>
-              </a:rPr>
-              <a:t>16</a:t>
-            </a:r>
-            <a:endParaRPr lang="en-US" sz="900" dirty="0"/>
+          <p:cNvPr id="8" name="cuinotes-footer-mark"/>
+          <p:cNvSpPr txBox="1"/>
+          <p:nvPr/>
+        </p:nvSpPr>
+        <p:spPr>
+          <a:xfrm>
+            <a:off x="9951720" y="6455664"/>
+            <a:ext cx="2011680" cy="292608"/>
+          </a:xfrm>
+          <a:prstGeom prst="rect">
+            <a:avLst/>
+          </a:prstGeom>
+          <a:noFill/>
+        </p:spPr>
+        <p:txBody>
+          <a:bodyPr wrap="none" lIns="0" rIns="0" tIns="0" bIns="0">
+            <a:spAutoFit/>
+          </a:bodyPr>
+          <a:lstStyle/>
+          <a:p>
+            <a:pPr algn="r"/>
+            <a:r>
+              <a:rPr sz="1000">
+                <a:solidFill>
+                  <a:srgbClr val="8A939B"/>
+                </a:solidFill>
+                <a:hlinkClick r:id="rId3"/>
+              </a:rPr>
+              <a:t>cuinotes.com</a:t>
+            </a:r>
+            <a:r>
+              <a:rPr sz="1000">
+                <a:solidFill>
+                  <a:srgbClr val="8A939B"/>
+                </a:solidFill>
+              </a:rPr>
+              <a:t>  ·  16</a:t>
+            </a:r>
           </a:p>
         </p:txBody>
       </p:sp>
@@ -7867,6 +7611,10 @@
           </a:solidFill>
           <a:ln/>
         </p:spPr>
+        <p:txBody>
+          <a:bodyPr/>
+          <a:p/>
+        </p:txBody>
       </p:sp>
       <p:sp>
         <p:nvSpPr>
@@ -8111,79 +7859,44 @@
       </p:sp>
       <p:sp>
         <p:nvSpPr>
-          <p:cNvPr id="7" name="Text 5"/>
-          <p:cNvSpPr txBox="1"/>
-          <p:nvPr/>
-        </p:nvSpPr>
-        <p:spPr>
-          <a:xfrm>
-            <a:off x="640080" y="6446520"/>
-            <a:ext cx="8686800" cy="292608"/>
-          </a:xfrm>
-          <a:prstGeom prst="rect">
-            <a:avLst/>
-          </a:prstGeom>
-          <a:noFill/>
-          <a:ln/>
-        </p:spPr>
-        <p:txBody>
-          <a:bodyPr wrap="square" lIns="0" tIns="0" rIns="0" bIns="0" rtlCol="0" anchor="ctr"/>
-          <a:lstStyle/>
-          <a:p>
-            <a:pPr algn="l" indent="0" marL="0">
-              <a:buNone/>
-            </a:pPr>
-            <a:r>
-              <a:rPr lang="en-US" sz="900" dirty="0">
-                <a:solidFill>
-                  <a:srgbClr val="5D5D72"/>
-                </a:solidFill>
-                <a:latin typeface="Calibri" pitchFamily="34" charset="0"/>
-                <a:ea typeface="Calibri" pitchFamily="34" charset="-122"/>
-                <a:cs typeface="Calibri" pitchFamily="34" charset="-120"/>
-              </a:rPr>
-              <a:t>Usman Akram  •  COMSATS University Islamabad</a:t>
-            </a:r>
-            <a:endParaRPr lang="en-US" sz="900" dirty="0"/>
-          </a:p>
-        </p:txBody>
-      </p:sp>
-      <p:sp>
-        <p:nvSpPr>
-          <p:cNvPr id="8" name="Text 6"/>
-          <p:cNvSpPr txBox="1"/>
-          <p:nvPr/>
-        </p:nvSpPr>
-        <p:spPr>
-          <a:xfrm>
-            <a:off x="11155680" y="6446520"/>
-            <a:ext cx="457200" cy="292608"/>
-          </a:xfrm>
-          <a:prstGeom prst="rect">
-            <a:avLst/>
-          </a:prstGeom>
-          <a:noFill/>
-          <a:ln/>
-        </p:spPr>
-        <p:txBody>
-          <a:bodyPr wrap="square" lIns="0" tIns="0" rIns="0" bIns="0" rtlCol="0" anchor="ctr"/>
-          <a:lstStyle/>
-          <a:p>
-            <a:pPr algn="r" indent="0" marL="0">
-              <a:buNone/>
-            </a:pPr>
-            <a:r>
-              <a:rPr lang="en-US" sz="900" dirty="0">
-                <a:solidFill>
-                  <a:srgbClr val="5D5D72"/>
-                </a:solidFill>
-                <a:latin typeface="Calibri" pitchFamily="34" charset="0"/>
-                <a:ea typeface="Calibri" pitchFamily="34" charset="-122"/>
-                <a:cs typeface="Calibri" pitchFamily="34" charset="-120"/>
-              </a:rPr>
-              <a:t>17</a:t>
-            </a:r>
-            <a:endParaRPr lang="en-US" sz="900" dirty="0"/>
+          <p:cNvPr id="9" name="cuinotes-footer-mark"/>
+          <p:cNvSpPr txBox="1"/>
+          <p:nvPr/>
+        </p:nvSpPr>
+        <p:spPr>
+          <a:xfrm>
+            <a:off x="9951720" y="6455664"/>
+            <a:ext cx="2011680" cy="292608"/>
+          </a:xfrm>
+          <a:prstGeom prst="rect">
+            <a:avLst/>
+          </a:prstGeom>
+          <a:noFill/>
+        </p:spPr>
+        <p:txBody>
+          <a:bodyPr wrap="none" lIns="0" rIns="0" tIns="0" bIns="0">
+            <a:spAutoFit/>
+          </a:bodyPr>
+          <a:lstStyle/>
+          <a:p>
+            <a:pPr algn="r"/>
+            <a:r>
+              <a:rPr sz="1000">
+                <a:solidFill>
+                  <a:srgbClr val="8A939B"/>
+                </a:solidFill>
+                <a:hlinkClick r:id="rId3"/>
+              </a:rPr>
+              <a:t>cuinotes.com</a:t>
+            </a:r>
+            <a:r>
+              <a:rPr sz="1000">
+                <a:solidFill>
+                  <a:srgbClr val="8A939B"/>
+                </a:solidFill>
+              </a:rPr>
+              <a:t>  ·  17</a:t>
+            </a:r>
           </a:p>
         </p:txBody>
       </p:sp>
@@ -8316,6 +8029,10 @@
           </a:solidFill>
           <a:ln/>
         </p:spPr>
+        <p:txBody>
+          <a:bodyPr/>
+          <a:p/>
+        </p:txBody>
       </p:sp>
       <p:sp>
         <p:nvSpPr>
@@ -8414,6 +8131,10 @@
           </a:solidFill>
           <a:ln/>
         </p:spPr>
+        <p:txBody>
+          <a:bodyPr/>
+          <a:p/>
+        </p:txBody>
       </p:sp>
       <p:sp>
         <p:nvSpPr>
@@ -8512,6 +8233,10 @@
           </a:solidFill>
           <a:ln/>
         </p:spPr>
+        <p:txBody>
+          <a:bodyPr/>
+          <a:p/>
+        </p:txBody>
       </p:sp>
       <p:sp>
         <p:nvSpPr>
@@ -8593,79 +8318,44 @@
       </p:sp>
       <p:sp>
         <p:nvSpPr>
-          <p:cNvPr id="13" name="Text 11"/>
-          <p:cNvSpPr txBox="1"/>
-          <p:nvPr/>
-        </p:nvSpPr>
-        <p:spPr>
-          <a:xfrm>
-            <a:off x="640080" y="6446520"/>
-            <a:ext cx="8686800" cy="292608"/>
-          </a:xfrm>
-          <a:prstGeom prst="rect">
-            <a:avLst/>
-          </a:prstGeom>
-          <a:noFill/>
-          <a:ln/>
-        </p:spPr>
-        <p:txBody>
-          <a:bodyPr wrap="square" lIns="0" tIns="0" rIns="0" bIns="0" rtlCol="0" anchor="ctr"/>
-          <a:lstStyle/>
-          <a:p>
-            <a:pPr algn="l" indent="0" marL="0">
-              <a:buNone/>
-            </a:pPr>
-            <a:r>
-              <a:rPr lang="en-US" sz="900" dirty="0">
-                <a:solidFill>
-                  <a:srgbClr val="5D5D72"/>
-                </a:solidFill>
-                <a:latin typeface="Calibri" pitchFamily="34" charset="0"/>
-                <a:ea typeface="Calibri" pitchFamily="34" charset="-122"/>
-                <a:cs typeface="Calibri" pitchFamily="34" charset="-120"/>
-              </a:rPr>
-              <a:t>Usman Akram  •  COMSATS University Islamabad</a:t>
-            </a:r>
-            <a:endParaRPr lang="en-US" sz="900" dirty="0"/>
-          </a:p>
-        </p:txBody>
-      </p:sp>
-      <p:sp>
-        <p:nvSpPr>
-          <p:cNvPr id="14" name="Text 12"/>
-          <p:cNvSpPr txBox="1"/>
-          <p:nvPr/>
-        </p:nvSpPr>
-        <p:spPr>
-          <a:xfrm>
-            <a:off x="11155680" y="6446520"/>
-            <a:ext cx="457200" cy="292608"/>
-          </a:xfrm>
-          <a:prstGeom prst="rect">
-            <a:avLst/>
-          </a:prstGeom>
-          <a:noFill/>
-          <a:ln/>
-        </p:spPr>
-        <p:txBody>
-          <a:bodyPr wrap="square" lIns="0" tIns="0" rIns="0" bIns="0" rtlCol="0" anchor="ctr"/>
-          <a:lstStyle/>
-          <a:p>
-            <a:pPr algn="r" indent="0" marL="0">
-              <a:buNone/>
-            </a:pPr>
-            <a:r>
-              <a:rPr lang="en-US" sz="900" dirty="0">
-                <a:solidFill>
-                  <a:srgbClr val="5D5D72"/>
-                </a:solidFill>
-                <a:latin typeface="Calibri" pitchFamily="34" charset="0"/>
-                <a:ea typeface="Calibri" pitchFamily="34" charset="-122"/>
-                <a:cs typeface="Calibri" pitchFamily="34" charset="-120"/>
-              </a:rPr>
-              <a:t>18</a:t>
-            </a:r>
-            <a:endParaRPr lang="en-US" sz="900" dirty="0"/>
+          <p:cNvPr id="15" name="cuinotes-footer-mark"/>
+          <p:cNvSpPr txBox="1"/>
+          <p:nvPr/>
+        </p:nvSpPr>
+        <p:spPr>
+          <a:xfrm>
+            <a:off x="9951720" y="6455664"/>
+            <a:ext cx="2011680" cy="292608"/>
+          </a:xfrm>
+          <a:prstGeom prst="rect">
+            <a:avLst/>
+          </a:prstGeom>
+          <a:noFill/>
+        </p:spPr>
+        <p:txBody>
+          <a:bodyPr wrap="none" lIns="0" rIns="0" tIns="0" bIns="0">
+            <a:spAutoFit/>
+          </a:bodyPr>
+          <a:lstStyle/>
+          <a:p>
+            <a:pPr algn="r"/>
+            <a:r>
+              <a:rPr sz="1000">
+                <a:solidFill>
+                  <a:srgbClr val="8A939B"/>
+                </a:solidFill>
+                <a:hlinkClick r:id="rId3"/>
+              </a:rPr>
+              <a:t>cuinotes.com</a:t>
+            </a:r>
+            <a:r>
+              <a:rPr sz="1000">
+                <a:solidFill>
+                  <a:srgbClr val="8A939B"/>
+                </a:solidFill>
+              </a:rPr>
+              <a:t>  ·  18</a:t>
+            </a:r>
           </a:p>
         </p:txBody>
       </p:sp>
@@ -8800,6 +8490,10 @@
           </a:solidFill>
           <a:ln/>
         </p:spPr>
+        <p:txBody>
+          <a:bodyPr/>
+          <a:p/>
+        </p:txBody>
       </p:sp>
       <p:sp>
         <p:nvSpPr>
@@ -8985,79 +8679,44 @@
       </p:sp>
       <p:sp>
         <p:nvSpPr>
-          <p:cNvPr id="6" name="Text 4"/>
-          <p:cNvSpPr txBox="1"/>
-          <p:nvPr/>
-        </p:nvSpPr>
-        <p:spPr>
-          <a:xfrm>
-            <a:off x="640080" y="6446520"/>
-            <a:ext cx="8686800" cy="292608"/>
-          </a:xfrm>
-          <a:prstGeom prst="rect">
-            <a:avLst/>
-          </a:prstGeom>
-          <a:noFill/>
-          <a:ln/>
-        </p:spPr>
-        <p:txBody>
-          <a:bodyPr wrap="square" lIns="0" tIns="0" rIns="0" bIns="0" rtlCol="0" anchor="ctr"/>
-          <a:lstStyle/>
-          <a:p>
-            <a:pPr algn="l" indent="0" marL="0">
-              <a:buNone/>
-            </a:pPr>
-            <a:r>
-              <a:rPr lang="en-US" sz="900" dirty="0">
-                <a:solidFill>
-                  <a:srgbClr val="5D5D72"/>
-                </a:solidFill>
-                <a:latin typeface="Calibri" pitchFamily="34" charset="0"/>
-                <a:ea typeface="Calibri" pitchFamily="34" charset="-122"/>
-                <a:cs typeface="Calibri" pitchFamily="34" charset="-120"/>
-              </a:rPr>
-              <a:t>Usman Akram  •  COMSATS University Islamabad</a:t>
-            </a:r>
-            <a:endParaRPr lang="en-US" sz="900" dirty="0"/>
-          </a:p>
-        </p:txBody>
-      </p:sp>
-      <p:sp>
-        <p:nvSpPr>
-          <p:cNvPr id="7" name="Text 5"/>
-          <p:cNvSpPr txBox="1"/>
-          <p:nvPr/>
-        </p:nvSpPr>
-        <p:spPr>
-          <a:xfrm>
-            <a:off x="11155680" y="6446520"/>
-            <a:ext cx="457200" cy="292608"/>
-          </a:xfrm>
-          <a:prstGeom prst="rect">
-            <a:avLst/>
-          </a:prstGeom>
-          <a:noFill/>
-          <a:ln/>
-        </p:spPr>
-        <p:txBody>
-          <a:bodyPr wrap="square" lIns="0" tIns="0" rIns="0" bIns="0" rtlCol="0" anchor="ctr"/>
-          <a:lstStyle/>
-          <a:p>
-            <a:pPr algn="r" indent="0" marL="0">
-              <a:buNone/>
-            </a:pPr>
-            <a:r>
-              <a:rPr lang="en-US" sz="900" dirty="0">
-                <a:solidFill>
-                  <a:srgbClr val="5D5D72"/>
-                </a:solidFill>
-                <a:latin typeface="Calibri" pitchFamily="34" charset="0"/>
-                <a:ea typeface="Calibri" pitchFamily="34" charset="-122"/>
-                <a:cs typeface="Calibri" pitchFamily="34" charset="-120"/>
-              </a:rPr>
-              <a:t>19</a:t>
-            </a:r>
-            <a:endParaRPr lang="en-US" sz="900" dirty="0"/>
+          <p:cNvPr id="8" name="cuinotes-footer-mark"/>
+          <p:cNvSpPr txBox="1"/>
+          <p:nvPr/>
+        </p:nvSpPr>
+        <p:spPr>
+          <a:xfrm>
+            <a:off x="9951720" y="6455664"/>
+            <a:ext cx="2011680" cy="292608"/>
+          </a:xfrm>
+          <a:prstGeom prst="rect">
+            <a:avLst/>
+          </a:prstGeom>
+          <a:noFill/>
+        </p:spPr>
+        <p:txBody>
+          <a:bodyPr wrap="none" lIns="0" rIns="0" tIns="0" bIns="0">
+            <a:spAutoFit/>
+          </a:bodyPr>
+          <a:lstStyle/>
+          <a:p>
+            <a:pPr algn="r"/>
+            <a:r>
+              <a:rPr sz="1000">
+                <a:solidFill>
+                  <a:srgbClr val="8A939B"/>
+                </a:solidFill>
+                <a:hlinkClick r:id="rId3"/>
+              </a:rPr>
+              <a:t>cuinotes.com</a:t>
+            </a:r>
+            <a:r>
+              <a:rPr sz="1000">
+                <a:solidFill>
+                  <a:srgbClr val="8A939B"/>
+                </a:solidFill>
+              </a:rPr>
+              <a:t>  ·  19</a:t>
+            </a:r>
           </a:p>
         </p:txBody>
       </p:sp>
@@ -9190,6 +8849,10 @@
           </a:solidFill>
           <a:ln/>
         </p:spPr>
+        <p:txBody>
+          <a:bodyPr/>
+          <a:p/>
+        </p:txBody>
       </p:sp>
       <p:sp>
         <p:nvSpPr>
@@ -9288,6 +8951,10 @@
           </a:solidFill>
           <a:ln/>
         </p:spPr>
+        <p:txBody>
+          <a:bodyPr/>
+          <a:p/>
+        </p:txBody>
       </p:sp>
       <p:sp>
         <p:nvSpPr>
@@ -9386,6 +9053,10 @@
           </a:solidFill>
           <a:ln/>
         </p:spPr>
+        <p:txBody>
+          <a:bodyPr/>
+          <a:p/>
+        </p:txBody>
       </p:sp>
       <p:sp>
         <p:nvSpPr>
@@ -9484,6 +9155,10 @@
           </a:solidFill>
           <a:ln/>
         </p:spPr>
+        <p:txBody>
+          <a:bodyPr/>
+          <a:p/>
+        </p:txBody>
       </p:sp>
       <p:sp>
         <p:nvSpPr>
@@ -9582,6 +9257,10 @@
           </a:solidFill>
           <a:ln/>
         </p:spPr>
+        <p:txBody>
+          <a:bodyPr/>
+          <a:p/>
+        </p:txBody>
       </p:sp>
       <p:sp>
         <p:nvSpPr>
@@ -9680,6 +9359,10 @@
           </a:solidFill>
           <a:ln/>
         </p:spPr>
+        <p:txBody>
+          <a:bodyPr/>
+          <a:p/>
+        </p:txBody>
       </p:sp>
       <p:sp>
         <p:nvSpPr>
@@ -9778,6 +9461,10 @@
           </a:solidFill>
           <a:ln/>
         </p:spPr>
+        <p:txBody>
+          <a:bodyPr/>
+          <a:p/>
+        </p:txBody>
       </p:sp>
       <p:sp>
         <p:nvSpPr>
@@ -9876,6 +9563,10 @@
           </a:solidFill>
           <a:ln/>
         </p:spPr>
+        <p:txBody>
+          <a:bodyPr/>
+          <a:p/>
+        </p:txBody>
       </p:sp>
       <p:sp>
         <p:nvSpPr>
@@ -9957,79 +9648,44 @@
       </p:sp>
       <p:sp>
         <p:nvSpPr>
-          <p:cNvPr id="28" name="Text 26"/>
-          <p:cNvSpPr txBox="1"/>
-          <p:nvPr/>
-        </p:nvSpPr>
-        <p:spPr>
-          <a:xfrm>
-            <a:off x="640080" y="6446520"/>
-            <a:ext cx="8686800" cy="292608"/>
-          </a:xfrm>
-          <a:prstGeom prst="rect">
-            <a:avLst/>
-          </a:prstGeom>
-          <a:noFill/>
-          <a:ln/>
-        </p:spPr>
-        <p:txBody>
-          <a:bodyPr wrap="square" lIns="0" tIns="0" rIns="0" bIns="0" rtlCol="0" anchor="ctr"/>
-          <a:lstStyle/>
-          <a:p>
-            <a:pPr algn="l" indent="0" marL="0">
-              <a:buNone/>
-            </a:pPr>
-            <a:r>
-              <a:rPr lang="en-US" sz="900" dirty="0">
-                <a:solidFill>
-                  <a:srgbClr val="5D5D72"/>
-                </a:solidFill>
-                <a:latin typeface="Calibri" pitchFamily="34" charset="0"/>
-                <a:ea typeface="Calibri" pitchFamily="34" charset="-122"/>
-                <a:cs typeface="Calibri" pitchFamily="34" charset="-120"/>
-              </a:rPr>
-              <a:t>Usman Akram  •  COMSATS University Islamabad</a:t>
-            </a:r>
-            <a:endParaRPr lang="en-US" sz="900" dirty="0"/>
-          </a:p>
-        </p:txBody>
-      </p:sp>
-      <p:sp>
-        <p:nvSpPr>
-          <p:cNvPr id="29" name="Text 27"/>
-          <p:cNvSpPr txBox="1"/>
-          <p:nvPr/>
-        </p:nvSpPr>
-        <p:spPr>
-          <a:xfrm>
-            <a:off x="11155680" y="6446520"/>
-            <a:ext cx="457200" cy="292608"/>
-          </a:xfrm>
-          <a:prstGeom prst="rect">
-            <a:avLst/>
-          </a:prstGeom>
-          <a:noFill/>
-          <a:ln/>
-        </p:spPr>
-        <p:txBody>
-          <a:bodyPr wrap="square" lIns="0" tIns="0" rIns="0" bIns="0" rtlCol="0" anchor="ctr"/>
-          <a:lstStyle/>
-          <a:p>
-            <a:pPr algn="r" indent="0" marL="0">
-              <a:buNone/>
-            </a:pPr>
-            <a:r>
-              <a:rPr lang="en-US" sz="900" dirty="0">
-                <a:solidFill>
-                  <a:srgbClr val="5D5D72"/>
-                </a:solidFill>
-                <a:latin typeface="Calibri" pitchFamily="34" charset="0"/>
-                <a:ea typeface="Calibri" pitchFamily="34" charset="-122"/>
-                <a:cs typeface="Calibri" pitchFamily="34" charset="-120"/>
-              </a:rPr>
-              <a:t>2</a:t>
-            </a:r>
-            <a:endParaRPr lang="en-US" sz="900" dirty="0"/>
+          <p:cNvPr id="30" name="cuinotes-footer-mark"/>
+          <p:cNvSpPr txBox="1"/>
+          <p:nvPr/>
+        </p:nvSpPr>
+        <p:spPr>
+          <a:xfrm>
+            <a:off x="9951720" y="6455664"/>
+            <a:ext cx="2011680" cy="292608"/>
+          </a:xfrm>
+          <a:prstGeom prst="rect">
+            <a:avLst/>
+          </a:prstGeom>
+          <a:noFill/>
+        </p:spPr>
+        <p:txBody>
+          <a:bodyPr wrap="none" lIns="0" rIns="0" tIns="0" bIns="0">
+            <a:spAutoFit/>
+          </a:bodyPr>
+          <a:lstStyle/>
+          <a:p>
+            <a:pPr algn="r"/>
+            <a:r>
+              <a:rPr sz="1000">
+                <a:solidFill>
+                  <a:srgbClr val="8A939B"/>
+                </a:solidFill>
+                <a:hlinkClick r:id="rId3"/>
+              </a:rPr>
+              <a:t>cuinotes.com</a:t>
+            </a:r>
+            <a:r>
+              <a:rPr sz="1000">
+                <a:solidFill>
+                  <a:srgbClr val="8A939B"/>
+                </a:solidFill>
+              </a:rPr>
+              <a:t>  ·  2</a:t>
+            </a:r>
           </a:p>
         </p:txBody>
       </p:sp>
@@ -10164,6 +9820,10 @@
           </a:solidFill>
           <a:ln/>
         </p:spPr>
+        <p:txBody>
+          <a:bodyPr/>
+          <a:p/>
+        </p:txBody>
       </p:sp>
       <p:sp>
         <p:nvSpPr>
@@ -10317,79 +9977,44 @@
       </p:sp>
       <p:sp>
         <p:nvSpPr>
-          <p:cNvPr id="7" name="Text 5"/>
-          <p:cNvSpPr txBox="1"/>
-          <p:nvPr/>
-        </p:nvSpPr>
-        <p:spPr>
-          <a:xfrm>
-            <a:off x="640080" y="6446520"/>
-            <a:ext cx="8686800" cy="292608"/>
-          </a:xfrm>
-          <a:prstGeom prst="rect">
-            <a:avLst/>
-          </a:prstGeom>
-          <a:noFill/>
-          <a:ln/>
-        </p:spPr>
-        <p:txBody>
-          <a:bodyPr wrap="square" lIns="0" tIns="0" rIns="0" bIns="0" rtlCol="0" anchor="ctr"/>
-          <a:lstStyle/>
-          <a:p>
-            <a:pPr algn="l" indent="0" marL="0">
-              <a:buNone/>
-            </a:pPr>
-            <a:r>
-              <a:rPr lang="en-US" sz="900" dirty="0">
-                <a:solidFill>
-                  <a:srgbClr val="5D5D72"/>
-                </a:solidFill>
-                <a:latin typeface="Calibri" pitchFamily="34" charset="0"/>
-                <a:ea typeface="Calibri" pitchFamily="34" charset="-122"/>
-                <a:cs typeface="Calibri" pitchFamily="34" charset="-120"/>
-              </a:rPr>
-              <a:t>Usman Akram  •  COMSATS University Islamabad</a:t>
-            </a:r>
-            <a:endParaRPr lang="en-US" sz="900" dirty="0"/>
-          </a:p>
-        </p:txBody>
-      </p:sp>
-      <p:sp>
-        <p:nvSpPr>
-          <p:cNvPr id="8" name="Text 6"/>
-          <p:cNvSpPr txBox="1"/>
-          <p:nvPr/>
-        </p:nvSpPr>
-        <p:spPr>
-          <a:xfrm>
-            <a:off x="11155680" y="6446520"/>
-            <a:ext cx="457200" cy="292608"/>
-          </a:xfrm>
-          <a:prstGeom prst="rect">
-            <a:avLst/>
-          </a:prstGeom>
-          <a:noFill/>
-          <a:ln/>
-        </p:spPr>
-        <p:txBody>
-          <a:bodyPr wrap="square" lIns="0" tIns="0" rIns="0" bIns="0" rtlCol="0" anchor="ctr"/>
-          <a:lstStyle/>
-          <a:p>
-            <a:pPr algn="r" indent="0" marL="0">
-              <a:buNone/>
-            </a:pPr>
-            <a:r>
-              <a:rPr lang="en-US" sz="900" dirty="0">
-                <a:solidFill>
-                  <a:srgbClr val="5D5D72"/>
-                </a:solidFill>
-                <a:latin typeface="Calibri" pitchFamily="34" charset="0"/>
-                <a:ea typeface="Calibri" pitchFamily="34" charset="-122"/>
-                <a:cs typeface="Calibri" pitchFamily="34" charset="-120"/>
-              </a:rPr>
-              <a:t>20</a:t>
-            </a:r>
-            <a:endParaRPr lang="en-US" sz="900" dirty="0"/>
+          <p:cNvPr id="9" name="cuinotes-footer-mark"/>
+          <p:cNvSpPr txBox="1"/>
+          <p:nvPr/>
+        </p:nvSpPr>
+        <p:spPr>
+          <a:xfrm>
+            <a:off x="9951720" y="6455664"/>
+            <a:ext cx="2011680" cy="292608"/>
+          </a:xfrm>
+          <a:prstGeom prst="rect">
+            <a:avLst/>
+          </a:prstGeom>
+          <a:noFill/>
+        </p:spPr>
+        <p:txBody>
+          <a:bodyPr wrap="none" lIns="0" rIns="0" tIns="0" bIns="0">
+            <a:spAutoFit/>
+          </a:bodyPr>
+          <a:lstStyle/>
+          <a:p>
+            <a:pPr algn="r"/>
+            <a:r>
+              <a:rPr sz="1000">
+                <a:solidFill>
+                  <a:srgbClr val="8A939B"/>
+                </a:solidFill>
+                <a:hlinkClick r:id="rId3"/>
+              </a:rPr>
+              <a:t>cuinotes.com</a:t>
+            </a:r>
+            <a:r>
+              <a:rPr sz="1000">
+                <a:solidFill>
+                  <a:srgbClr val="8A939B"/>
+                </a:solidFill>
+              </a:rPr>
+              <a:t>  ·  20</a:t>
+            </a:r>
           </a:p>
         </p:txBody>
       </p:sp>
@@ -10529,6 +10154,10 @@
             <a:prstDash val="solid"/>
           </a:ln>
         </p:spPr>
+        <p:txBody>
+          <a:bodyPr/>
+          <a:p/>
+        </p:txBody>
       </p:sp>
       <p:sp>
         <p:nvSpPr>
@@ -10610,79 +10239,44 @@
       </p:sp>
       <p:sp>
         <p:nvSpPr>
-          <p:cNvPr id="7" name="Text 5"/>
-          <p:cNvSpPr txBox="1"/>
-          <p:nvPr/>
-        </p:nvSpPr>
-        <p:spPr>
-          <a:xfrm>
-            <a:off x="640080" y="6446520"/>
-            <a:ext cx="8686800" cy="292608"/>
-          </a:xfrm>
-          <a:prstGeom prst="rect">
-            <a:avLst/>
-          </a:prstGeom>
-          <a:noFill/>
-          <a:ln/>
-        </p:spPr>
-        <p:txBody>
-          <a:bodyPr wrap="square" lIns="0" tIns="0" rIns="0" bIns="0" rtlCol="0" anchor="ctr"/>
-          <a:lstStyle/>
-          <a:p>
-            <a:pPr algn="l" indent="0" marL="0">
-              <a:buNone/>
-            </a:pPr>
-            <a:r>
-              <a:rPr lang="en-US" sz="900" dirty="0">
-                <a:solidFill>
-                  <a:srgbClr val="5D5D72"/>
-                </a:solidFill>
-                <a:latin typeface="Calibri" pitchFamily="34" charset="0"/>
-                <a:ea typeface="Calibri" pitchFamily="34" charset="-122"/>
-                <a:cs typeface="Calibri" pitchFamily="34" charset="-120"/>
-              </a:rPr>
-              <a:t>Usman Akram  •  COMSATS University Islamabad</a:t>
-            </a:r>
-            <a:endParaRPr lang="en-US" sz="900" dirty="0"/>
-          </a:p>
-        </p:txBody>
-      </p:sp>
-      <p:sp>
-        <p:nvSpPr>
-          <p:cNvPr id="8" name="Text 6"/>
-          <p:cNvSpPr txBox="1"/>
-          <p:nvPr/>
-        </p:nvSpPr>
-        <p:spPr>
-          <a:xfrm>
-            <a:off x="11155680" y="6446520"/>
-            <a:ext cx="457200" cy="292608"/>
-          </a:xfrm>
-          <a:prstGeom prst="rect">
-            <a:avLst/>
-          </a:prstGeom>
-          <a:noFill/>
-          <a:ln/>
-        </p:spPr>
-        <p:txBody>
-          <a:bodyPr wrap="square" lIns="0" tIns="0" rIns="0" bIns="0" rtlCol="0" anchor="ctr"/>
-          <a:lstStyle/>
-          <a:p>
-            <a:pPr algn="r" indent="0" marL="0">
-              <a:buNone/>
-            </a:pPr>
-            <a:r>
-              <a:rPr lang="en-US" sz="900" dirty="0">
-                <a:solidFill>
-                  <a:srgbClr val="5D5D72"/>
-                </a:solidFill>
-                <a:latin typeface="Calibri" pitchFamily="34" charset="0"/>
-                <a:ea typeface="Calibri" pitchFamily="34" charset="-122"/>
-                <a:cs typeface="Calibri" pitchFamily="34" charset="-120"/>
-              </a:rPr>
-              <a:t>21</a:t>
-            </a:r>
-            <a:endParaRPr lang="en-US" sz="900" dirty="0"/>
+          <p:cNvPr id="9" name="cuinotes-footer-mark"/>
+          <p:cNvSpPr txBox="1"/>
+          <p:nvPr/>
+        </p:nvSpPr>
+        <p:spPr>
+          <a:xfrm>
+            <a:off x="9951720" y="6455664"/>
+            <a:ext cx="2011680" cy="292608"/>
+          </a:xfrm>
+          <a:prstGeom prst="rect">
+            <a:avLst/>
+          </a:prstGeom>
+          <a:noFill/>
+        </p:spPr>
+        <p:txBody>
+          <a:bodyPr wrap="none" lIns="0" rIns="0" tIns="0" bIns="0">
+            <a:spAutoFit/>
+          </a:bodyPr>
+          <a:lstStyle/>
+          <a:p>
+            <a:pPr algn="r"/>
+            <a:r>
+              <a:rPr sz="1000">
+                <a:solidFill>
+                  <a:srgbClr val="8A939B"/>
+                </a:solidFill>
+                <a:hlinkClick r:id="rId3"/>
+              </a:rPr>
+              <a:t>cuinotes.com</a:t>
+            </a:r>
+            <a:r>
+              <a:rPr sz="1000">
+                <a:solidFill>
+                  <a:srgbClr val="8A939B"/>
+                </a:solidFill>
+              </a:rPr>
+              <a:t>  ·  21</a:t>
+            </a:r>
           </a:p>
         </p:txBody>
       </p:sp>
@@ -10817,6 +10411,10 @@
           </a:solidFill>
           <a:ln/>
         </p:spPr>
+        <p:txBody>
+          <a:bodyPr/>
+          <a:p/>
+        </p:txBody>
       </p:sp>
       <p:sp>
         <p:nvSpPr>
@@ -11080,79 +10678,44 @@
       </p:sp>
       <p:sp>
         <p:nvSpPr>
-          <p:cNvPr id="6" name="Text 4"/>
-          <p:cNvSpPr txBox="1"/>
-          <p:nvPr/>
-        </p:nvSpPr>
-        <p:spPr>
-          <a:xfrm>
-            <a:off x="640080" y="6446520"/>
-            <a:ext cx="8686800" cy="292608"/>
-          </a:xfrm>
-          <a:prstGeom prst="rect">
-            <a:avLst/>
-          </a:prstGeom>
-          <a:noFill/>
-          <a:ln/>
-        </p:spPr>
-        <p:txBody>
-          <a:bodyPr wrap="square" lIns="0" tIns="0" rIns="0" bIns="0" rtlCol="0" anchor="ctr"/>
-          <a:lstStyle/>
-          <a:p>
-            <a:pPr algn="l" indent="0" marL="0">
-              <a:buNone/>
-            </a:pPr>
-            <a:r>
-              <a:rPr lang="en-US" sz="900" dirty="0">
-                <a:solidFill>
-                  <a:srgbClr val="5D5D72"/>
-                </a:solidFill>
-                <a:latin typeface="Calibri" pitchFamily="34" charset="0"/>
-                <a:ea typeface="Calibri" pitchFamily="34" charset="-122"/>
-                <a:cs typeface="Calibri" pitchFamily="34" charset="-120"/>
-              </a:rPr>
-              <a:t>Usman Akram  •  COMSATS University Islamabad</a:t>
-            </a:r>
-            <a:endParaRPr lang="en-US" sz="900" dirty="0"/>
-          </a:p>
-        </p:txBody>
-      </p:sp>
-      <p:sp>
-        <p:nvSpPr>
-          <p:cNvPr id="7" name="Text 5"/>
-          <p:cNvSpPr txBox="1"/>
-          <p:nvPr/>
-        </p:nvSpPr>
-        <p:spPr>
-          <a:xfrm>
-            <a:off x="11155680" y="6446520"/>
-            <a:ext cx="457200" cy="292608"/>
-          </a:xfrm>
-          <a:prstGeom prst="rect">
-            <a:avLst/>
-          </a:prstGeom>
-          <a:noFill/>
-          <a:ln/>
-        </p:spPr>
-        <p:txBody>
-          <a:bodyPr wrap="square" lIns="0" tIns="0" rIns="0" bIns="0" rtlCol="0" anchor="ctr"/>
-          <a:lstStyle/>
-          <a:p>
-            <a:pPr algn="r" indent="0" marL="0">
-              <a:buNone/>
-            </a:pPr>
-            <a:r>
-              <a:rPr lang="en-US" sz="900" dirty="0">
-                <a:solidFill>
-                  <a:srgbClr val="5D5D72"/>
-                </a:solidFill>
-                <a:latin typeface="Calibri" pitchFamily="34" charset="0"/>
-                <a:ea typeface="Calibri" pitchFamily="34" charset="-122"/>
-                <a:cs typeface="Calibri" pitchFamily="34" charset="-120"/>
-              </a:rPr>
-              <a:t>22</a:t>
-            </a:r>
-            <a:endParaRPr lang="en-US" sz="900" dirty="0"/>
+          <p:cNvPr id="8" name="cuinotes-footer-mark"/>
+          <p:cNvSpPr txBox="1"/>
+          <p:nvPr/>
+        </p:nvSpPr>
+        <p:spPr>
+          <a:xfrm>
+            <a:off x="9951720" y="6455664"/>
+            <a:ext cx="2011680" cy="292608"/>
+          </a:xfrm>
+          <a:prstGeom prst="rect">
+            <a:avLst/>
+          </a:prstGeom>
+          <a:noFill/>
+        </p:spPr>
+        <p:txBody>
+          <a:bodyPr wrap="none" lIns="0" rIns="0" tIns="0" bIns="0">
+            <a:spAutoFit/>
+          </a:bodyPr>
+          <a:lstStyle/>
+          <a:p>
+            <a:pPr algn="r"/>
+            <a:r>
+              <a:rPr sz="1000">
+                <a:solidFill>
+                  <a:srgbClr val="8A939B"/>
+                </a:solidFill>
+                <a:hlinkClick r:id="rId3"/>
+              </a:rPr>
+              <a:t>cuinotes.com</a:t>
+            </a:r>
+            <a:r>
+              <a:rPr sz="1000">
+                <a:solidFill>
+                  <a:srgbClr val="8A939B"/>
+                </a:solidFill>
+              </a:rPr>
+              <a:t>  ·  22</a:t>
+            </a:r>
           </a:p>
         </p:txBody>
       </p:sp>
@@ -11292,6 +10855,10 @@
             <a:prstDash val="solid"/>
           </a:ln>
         </p:spPr>
+        <p:txBody>
+          <a:bodyPr/>
+          <a:p/>
+        </p:txBody>
       </p:sp>
       <p:sp>
         <p:nvSpPr>
@@ -11373,79 +10940,44 @@
       </p:sp>
       <p:sp>
         <p:nvSpPr>
-          <p:cNvPr id="7" name="Text 5"/>
-          <p:cNvSpPr txBox="1"/>
-          <p:nvPr/>
-        </p:nvSpPr>
-        <p:spPr>
-          <a:xfrm>
-            <a:off x="640080" y="6446520"/>
-            <a:ext cx="8686800" cy="292608"/>
-          </a:xfrm>
-          <a:prstGeom prst="rect">
-            <a:avLst/>
-          </a:prstGeom>
-          <a:noFill/>
-          <a:ln/>
-        </p:spPr>
-        <p:txBody>
-          <a:bodyPr wrap="square" lIns="0" tIns="0" rIns="0" bIns="0" rtlCol="0" anchor="ctr"/>
-          <a:lstStyle/>
-          <a:p>
-            <a:pPr algn="l" indent="0" marL="0">
-              <a:buNone/>
-            </a:pPr>
-            <a:r>
-              <a:rPr lang="en-US" sz="900" dirty="0">
-                <a:solidFill>
-                  <a:srgbClr val="5D5D72"/>
-                </a:solidFill>
-                <a:latin typeface="Calibri" pitchFamily="34" charset="0"/>
-                <a:ea typeface="Calibri" pitchFamily="34" charset="-122"/>
-                <a:cs typeface="Calibri" pitchFamily="34" charset="-120"/>
-              </a:rPr>
-              <a:t>Usman Akram  •  COMSATS University Islamabad</a:t>
-            </a:r>
-            <a:endParaRPr lang="en-US" sz="900" dirty="0"/>
-          </a:p>
-        </p:txBody>
-      </p:sp>
-      <p:sp>
-        <p:nvSpPr>
-          <p:cNvPr id="8" name="Text 6"/>
-          <p:cNvSpPr txBox="1"/>
-          <p:nvPr/>
-        </p:nvSpPr>
-        <p:spPr>
-          <a:xfrm>
-            <a:off x="11155680" y="6446520"/>
-            <a:ext cx="457200" cy="292608"/>
-          </a:xfrm>
-          <a:prstGeom prst="rect">
-            <a:avLst/>
-          </a:prstGeom>
-          <a:noFill/>
-          <a:ln/>
-        </p:spPr>
-        <p:txBody>
-          <a:bodyPr wrap="square" lIns="0" tIns="0" rIns="0" bIns="0" rtlCol="0" anchor="ctr"/>
-          <a:lstStyle/>
-          <a:p>
-            <a:pPr algn="r" indent="0" marL="0">
-              <a:buNone/>
-            </a:pPr>
-            <a:r>
-              <a:rPr lang="en-US" sz="900" dirty="0">
-                <a:solidFill>
-                  <a:srgbClr val="5D5D72"/>
-                </a:solidFill>
-                <a:latin typeface="Calibri" pitchFamily="34" charset="0"/>
-                <a:ea typeface="Calibri" pitchFamily="34" charset="-122"/>
-                <a:cs typeface="Calibri" pitchFamily="34" charset="-120"/>
-              </a:rPr>
-              <a:t>23</a:t>
-            </a:r>
-            <a:endParaRPr lang="en-US" sz="900" dirty="0"/>
+          <p:cNvPr id="9" name="cuinotes-footer-mark"/>
+          <p:cNvSpPr txBox="1"/>
+          <p:nvPr/>
+        </p:nvSpPr>
+        <p:spPr>
+          <a:xfrm>
+            <a:off x="9951720" y="6455664"/>
+            <a:ext cx="2011680" cy="292608"/>
+          </a:xfrm>
+          <a:prstGeom prst="rect">
+            <a:avLst/>
+          </a:prstGeom>
+          <a:noFill/>
+        </p:spPr>
+        <p:txBody>
+          <a:bodyPr wrap="none" lIns="0" rIns="0" tIns="0" bIns="0">
+            <a:spAutoFit/>
+          </a:bodyPr>
+          <a:lstStyle/>
+          <a:p>
+            <a:pPr algn="r"/>
+            <a:r>
+              <a:rPr sz="1000">
+                <a:solidFill>
+                  <a:srgbClr val="8A939B"/>
+                </a:solidFill>
+                <a:hlinkClick r:id="rId3"/>
+              </a:rPr>
+              <a:t>cuinotes.com</a:t>
+            </a:r>
+            <a:r>
+              <a:rPr sz="1000">
+                <a:solidFill>
+                  <a:srgbClr val="8A939B"/>
+                </a:solidFill>
+              </a:rPr>
+              <a:t>  ·  23</a:t>
+            </a:r>
           </a:p>
         </p:txBody>
       </p:sp>
@@ -11580,6 +11112,10 @@
           </a:solidFill>
           <a:ln/>
         </p:spPr>
+        <p:txBody>
+          <a:bodyPr/>
+          <a:p/>
+        </p:txBody>
       </p:sp>
       <p:sp>
         <p:nvSpPr>
@@ -11794,79 +11330,44 @@
       </p:sp>
       <p:sp>
         <p:nvSpPr>
-          <p:cNvPr id="6" name="Text 4"/>
-          <p:cNvSpPr txBox="1"/>
-          <p:nvPr/>
-        </p:nvSpPr>
-        <p:spPr>
-          <a:xfrm>
-            <a:off x="640080" y="6446520"/>
-            <a:ext cx="8686800" cy="292608"/>
-          </a:xfrm>
-          <a:prstGeom prst="rect">
-            <a:avLst/>
-          </a:prstGeom>
-          <a:noFill/>
-          <a:ln/>
-        </p:spPr>
-        <p:txBody>
-          <a:bodyPr wrap="square" lIns="0" tIns="0" rIns="0" bIns="0" rtlCol="0" anchor="ctr"/>
-          <a:lstStyle/>
-          <a:p>
-            <a:pPr algn="l" indent="0" marL="0">
-              <a:buNone/>
-            </a:pPr>
-            <a:r>
-              <a:rPr lang="en-US" sz="900" dirty="0">
-                <a:solidFill>
-                  <a:srgbClr val="5D5D72"/>
-                </a:solidFill>
-                <a:latin typeface="Calibri" pitchFamily="34" charset="0"/>
-                <a:ea typeface="Calibri" pitchFamily="34" charset="-122"/>
-                <a:cs typeface="Calibri" pitchFamily="34" charset="-120"/>
-              </a:rPr>
-              <a:t>Usman Akram  •  COMSATS University Islamabad</a:t>
-            </a:r>
-            <a:endParaRPr lang="en-US" sz="900" dirty="0"/>
-          </a:p>
-        </p:txBody>
-      </p:sp>
-      <p:sp>
-        <p:nvSpPr>
-          <p:cNvPr id="7" name="Text 5"/>
-          <p:cNvSpPr txBox="1"/>
-          <p:nvPr/>
-        </p:nvSpPr>
-        <p:spPr>
-          <a:xfrm>
-            <a:off x="11155680" y="6446520"/>
-            <a:ext cx="457200" cy="292608"/>
-          </a:xfrm>
-          <a:prstGeom prst="rect">
-            <a:avLst/>
-          </a:prstGeom>
-          <a:noFill/>
-          <a:ln/>
-        </p:spPr>
-        <p:txBody>
-          <a:bodyPr wrap="square" lIns="0" tIns="0" rIns="0" bIns="0" rtlCol="0" anchor="ctr"/>
-          <a:lstStyle/>
-          <a:p>
-            <a:pPr algn="r" indent="0" marL="0">
-              <a:buNone/>
-            </a:pPr>
-            <a:r>
-              <a:rPr lang="en-US" sz="900" dirty="0">
-                <a:solidFill>
-                  <a:srgbClr val="5D5D72"/>
-                </a:solidFill>
-                <a:latin typeface="Calibri" pitchFamily="34" charset="0"/>
-                <a:ea typeface="Calibri" pitchFamily="34" charset="-122"/>
-                <a:cs typeface="Calibri" pitchFamily="34" charset="-120"/>
-              </a:rPr>
-              <a:t>24</a:t>
-            </a:r>
-            <a:endParaRPr lang="en-US" sz="900" dirty="0"/>
+          <p:cNvPr id="8" name="cuinotes-footer-mark"/>
+          <p:cNvSpPr txBox="1"/>
+          <p:nvPr/>
+        </p:nvSpPr>
+        <p:spPr>
+          <a:xfrm>
+            <a:off x="9951720" y="6455664"/>
+            <a:ext cx="2011680" cy="292608"/>
+          </a:xfrm>
+          <a:prstGeom prst="rect">
+            <a:avLst/>
+          </a:prstGeom>
+          <a:noFill/>
+        </p:spPr>
+        <p:txBody>
+          <a:bodyPr wrap="none" lIns="0" rIns="0" tIns="0" bIns="0">
+            <a:spAutoFit/>
+          </a:bodyPr>
+          <a:lstStyle/>
+          <a:p>
+            <a:pPr algn="r"/>
+            <a:r>
+              <a:rPr sz="1000">
+                <a:solidFill>
+                  <a:srgbClr val="8A939B"/>
+                </a:solidFill>
+                <a:hlinkClick r:id="rId3"/>
+              </a:rPr>
+              <a:t>cuinotes.com</a:t>
+            </a:r>
+            <a:r>
+              <a:rPr sz="1000">
+                <a:solidFill>
+                  <a:srgbClr val="8A939B"/>
+                </a:solidFill>
+              </a:rPr>
+              <a:t>  ·  24</a:t>
+            </a:r>
           </a:p>
         </p:txBody>
       </p:sp>
@@ -12001,6 +11502,10 @@
           </a:solidFill>
           <a:ln/>
         </p:spPr>
+        <p:txBody>
+          <a:bodyPr/>
+          <a:p/>
+        </p:txBody>
       </p:sp>
       <p:sp>
         <p:nvSpPr>
@@ -12184,79 +11689,44 @@
       </p:sp>
       <p:sp>
         <p:nvSpPr>
-          <p:cNvPr id="6" name="Text 4"/>
-          <p:cNvSpPr txBox="1"/>
-          <p:nvPr/>
-        </p:nvSpPr>
-        <p:spPr>
-          <a:xfrm>
-            <a:off x="640080" y="6446520"/>
-            <a:ext cx="8686800" cy="292608"/>
-          </a:xfrm>
-          <a:prstGeom prst="rect">
-            <a:avLst/>
-          </a:prstGeom>
-          <a:noFill/>
-          <a:ln/>
-        </p:spPr>
-        <p:txBody>
-          <a:bodyPr wrap="square" lIns="0" tIns="0" rIns="0" bIns="0" rtlCol="0" anchor="ctr"/>
-          <a:lstStyle/>
-          <a:p>
-            <a:pPr algn="l" indent="0" marL="0">
-              <a:buNone/>
-            </a:pPr>
-            <a:r>
-              <a:rPr lang="en-US" sz="900" dirty="0">
-                <a:solidFill>
-                  <a:srgbClr val="5D5D72"/>
-                </a:solidFill>
-                <a:latin typeface="Calibri" pitchFamily="34" charset="0"/>
-                <a:ea typeface="Calibri" pitchFamily="34" charset="-122"/>
-                <a:cs typeface="Calibri" pitchFamily="34" charset="-120"/>
-              </a:rPr>
-              <a:t>Usman Akram  •  COMSATS University Islamabad</a:t>
-            </a:r>
-            <a:endParaRPr lang="en-US" sz="900" dirty="0"/>
-          </a:p>
-        </p:txBody>
-      </p:sp>
-      <p:sp>
-        <p:nvSpPr>
-          <p:cNvPr id="7" name="Text 5"/>
-          <p:cNvSpPr txBox="1"/>
-          <p:nvPr/>
-        </p:nvSpPr>
-        <p:spPr>
-          <a:xfrm>
-            <a:off x="11155680" y="6446520"/>
-            <a:ext cx="457200" cy="292608"/>
-          </a:xfrm>
-          <a:prstGeom prst="rect">
-            <a:avLst/>
-          </a:prstGeom>
-          <a:noFill/>
-          <a:ln/>
-        </p:spPr>
-        <p:txBody>
-          <a:bodyPr wrap="square" lIns="0" tIns="0" rIns="0" bIns="0" rtlCol="0" anchor="ctr"/>
-          <a:lstStyle/>
-          <a:p>
-            <a:pPr algn="r" indent="0" marL="0">
-              <a:buNone/>
-            </a:pPr>
-            <a:r>
-              <a:rPr lang="en-US" sz="900" dirty="0">
-                <a:solidFill>
-                  <a:srgbClr val="5D5D72"/>
-                </a:solidFill>
-                <a:latin typeface="Calibri" pitchFamily="34" charset="0"/>
-                <a:ea typeface="Calibri" pitchFamily="34" charset="-122"/>
-                <a:cs typeface="Calibri" pitchFamily="34" charset="-120"/>
-              </a:rPr>
-              <a:t>25</a:t>
-            </a:r>
-            <a:endParaRPr lang="en-US" sz="900" dirty="0"/>
+          <p:cNvPr id="8" name="cuinotes-footer-mark"/>
+          <p:cNvSpPr txBox="1"/>
+          <p:nvPr/>
+        </p:nvSpPr>
+        <p:spPr>
+          <a:xfrm>
+            <a:off x="9951720" y="6455664"/>
+            <a:ext cx="2011680" cy="292608"/>
+          </a:xfrm>
+          <a:prstGeom prst="rect">
+            <a:avLst/>
+          </a:prstGeom>
+          <a:noFill/>
+        </p:spPr>
+        <p:txBody>
+          <a:bodyPr wrap="none" lIns="0" rIns="0" tIns="0" bIns="0">
+            <a:spAutoFit/>
+          </a:bodyPr>
+          <a:lstStyle/>
+          <a:p>
+            <a:pPr algn="r"/>
+            <a:r>
+              <a:rPr sz="1000">
+                <a:solidFill>
+                  <a:srgbClr val="8A939B"/>
+                </a:solidFill>
+                <a:hlinkClick r:id="rId3"/>
+              </a:rPr>
+              <a:t>cuinotes.com</a:t>
+            </a:r>
+            <a:r>
+              <a:rPr sz="1000">
+                <a:solidFill>
+                  <a:srgbClr val="8A939B"/>
+                </a:solidFill>
+              </a:rPr>
+              <a:t>  ·  25</a:t>
+            </a:r>
           </a:p>
         </p:txBody>
       </p:sp>
@@ -12396,6 +11866,10 @@
             <a:prstDash val="solid"/>
           </a:ln>
         </p:spPr>
+        <p:txBody>
+          <a:bodyPr/>
+          <a:p/>
+        </p:txBody>
       </p:sp>
       <p:sp>
         <p:nvSpPr>
@@ -12477,79 +11951,44 @@
       </p:sp>
       <p:sp>
         <p:nvSpPr>
-          <p:cNvPr id="7" name="Text 5"/>
-          <p:cNvSpPr txBox="1"/>
-          <p:nvPr/>
-        </p:nvSpPr>
-        <p:spPr>
-          <a:xfrm>
-            <a:off x="640080" y="6446520"/>
-            <a:ext cx="8686800" cy="292608"/>
-          </a:xfrm>
-          <a:prstGeom prst="rect">
-            <a:avLst/>
-          </a:prstGeom>
-          <a:noFill/>
-          <a:ln/>
-        </p:spPr>
-        <p:txBody>
-          <a:bodyPr wrap="square" lIns="0" tIns="0" rIns="0" bIns="0" rtlCol="0" anchor="ctr"/>
-          <a:lstStyle/>
-          <a:p>
-            <a:pPr algn="l" indent="0" marL="0">
-              <a:buNone/>
-            </a:pPr>
-            <a:r>
-              <a:rPr lang="en-US" sz="900" dirty="0">
-                <a:solidFill>
-                  <a:srgbClr val="5D5D72"/>
-                </a:solidFill>
-                <a:latin typeface="Calibri" pitchFamily="34" charset="0"/>
-                <a:ea typeface="Calibri" pitchFamily="34" charset="-122"/>
-                <a:cs typeface="Calibri" pitchFamily="34" charset="-120"/>
-              </a:rPr>
-              <a:t>Usman Akram  •  COMSATS University Islamabad</a:t>
-            </a:r>
-            <a:endParaRPr lang="en-US" sz="900" dirty="0"/>
-          </a:p>
-        </p:txBody>
-      </p:sp>
-      <p:sp>
-        <p:nvSpPr>
-          <p:cNvPr id="8" name="Text 6"/>
-          <p:cNvSpPr txBox="1"/>
-          <p:nvPr/>
-        </p:nvSpPr>
-        <p:spPr>
-          <a:xfrm>
-            <a:off x="11155680" y="6446520"/>
-            <a:ext cx="457200" cy="292608"/>
-          </a:xfrm>
-          <a:prstGeom prst="rect">
-            <a:avLst/>
-          </a:prstGeom>
-          <a:noFill/>
-          <a:ln/>
-        </p:spPr>
-        <p:txBody>
-          <a:bodyPr wrap="square" lIns="0" tIns="0" rIns="0" bIns="0" rtlCol="0" anchor="ctr"/>
-          <a:lstStyle/>
-          <a:p>
-            <a:pPr algn="r" indent="0" marL="0">
-              <a:buNone/>
-            </a:pPr>
-            <a:r>
-              <a:rPr lang="en-US" sz="900" dirty="0">
-                <a:solidFill>
-                  <a:srgbClr val="5D5D72"/>
-                </a:solidFill>
-                <a:latin typeface="Calibri" pitchFamily="34" charset="0"/>
-                <a:ea typeface="Calibri" pitchFamily="34" charset="-122"/>
-                <a:cs typeface="Calibri" pitchFamily="34" charset="-120"/>
-              </a:rPr>
-              <a:t>26</a:t>
-            </a:r>
-            <a:endParaRPr lang="en-US" sz="900" dirty="0"/>
+          <p:cNvPr id="9" name="cuinotes-footer-mark"/>
+          <p:cNvSpPr txBox="1"/>
+          <p:nvPr/>
+        </p:nvSpPr>
+        <p:spPr>
+          <a:xfrm>
+            <a:off x="9951720" y="6455664"/>
+            <a:ext cx="2011680" cy="292608"/>
+          </a:xfrm>
+          <a:prstGeom prst="rect">
+            <a:avLst/>
+          </a:prstGeom>
+          <a:noFill/>
+        </p:spPr>
+        <p:txBody>
+          <a:bodyPr wrap="none" lIns="0" rIns="0" tIns="0" bIns="0">
+            <a:spAutoFit/>
+          </a:bodyPr>
+          <a:lstStyle/>
+          <a:p>
+            <a:pPr algn="r"/>
+            <a:r>
+              <a:rPr sz="1000">
+                <a:solidFill>
+                  <a:srgbClr val="8A939B"/>
+                </a:solidFill>
+                <a:hlinkClick r:id="rId3"/>
+              </a:rPr>
+              <a:t>cuinotes.com</a:t>
+            </a:r>
+            <a:r>
+              <a:rPr sz="1000">
+                <a:solidFill>
+                  <a:srgbClr val="8A939B"/>
+                </a:solidFill>
+              </a:rPr>
+              <a:t>  ·  26</a:t>
+            </a:r>
           </a:p>
         </p:txBody>
       </p:sp>
@@ -12684,6 +12123,10 @@
           </a:solidFill>
           <a:ln/>
         </p:spPr>
+        <p:txBody>
+          <a:bodyPr/>
+          <a:p/>
+        </p:txBody>
       </p:sp>
       <p:sp>
         <p:nvSpPr>
@@ -12887,79 +12330,44 @@
       </p:sp>
       <p:sp>
         <p:nvSpPr>
-          <p:cNvPr id="6" name="Text 4"/>
-          <p:cNvSpPr txBox="1"/>
-          <p:nvPr/>
-        </p:nvSpPr>
-        <p:spPr>
-          <a:xfrm>
-            <a:off x="640080" y="6446520"/>
-            <a:ext cx="8686800" cy="292608"/>
-          </a:xfrm>
-          <a:prstGeom prst="rect">
-            <a:avLst/>
-          </a:prstGeom>
-          <a:noFill/>
-          <a:ln/>
-        </p:spPr>
-        <p:txBody>
-          <a:bodyPr wrap="square" lIns="0" tIns="0" rIns="0" bIns="0" rtlCol="0" anchor="ctr"/>
-          <a:lstStyle/>
-          <a:p>
-            <a:pPr algn="l" indent="0" marL="0">
-              <a:buNone/>
-            </a:pPr>
-            <a:r>
-              <a:rPr lang="en-US" sz="900" dirty="0">
-                <a:solidFill>
-                  <a:srgbClr val="5D5D72"/>
-                </a:solidFill>
-                <a:latin typeface="Calibri" pitchFamily="34" charset="0"/>
-                <a:ea typeface="Calibri" pitchFamily="34" charset="-122"/>
-                <a:cs typeface="Calibri" pitchFamily="34" charset="-120"/>
-              </a:rPr>
-              <a:t>Usman Akram  •  COMSATS University Islamabad</a:t>
-            </a:r>
-            <a:endParaRPr lang="en-US" sz="900" dirty="0"/>
-          </a:p>
-        </p:txBody>
-      </p:sp>
-      <p:sp>
-        <p:nvSpPr>
-          <p:cNvPr id="7" name="Text 5"/>
-          <p:cNvSpPr txBox="1"/>
-          <p:nvPr/>
-        </p:nvSpPr>
-        <p:spPr>
-          <a:xfrm>
-            <a:off x="11155680" y="6446520"/>
-            <a:ext cx="457200" cy="292608"/>
-          </a:xfrm>
-          <a:prstGeom prst="rect">
-            <a:avLst/>
-          </a:prstGeom>
-          <a:noFill/>
-          <a:ln/>
-        </p:spPr>
-        <p:txBody>
-          <a:bodyPr wrap="square" lIns="0" tIns="0" rIns="0" bIns="0" rtlCol="0" anchor="ctr"/>
-          <a:lstStyle/>
-          <a:p>
-            <a:pPr algn="r" indent="0" marL="0">
-              <a:buNone/>
-            </a:pPr>
-            <a:r>
-              <a:rPr lang="en-US" sz="900" dirty="0">
-                <a:solidFill>
-                  <a:srgbClr val="5D5D72"/>
-                </a:solidFill>
-                <a:latin typeface="Calibri" pitchFamily="34" charset="0"/>
-                <a:ea typeface="Calibri" pitchFamily="34" charset="-122"/>
-                <a:cs typeface="Calibri" pitchFamily="34" charset="-120"/>
-              </a:rPr>
-              <a:t>27</a:t>
-            </a:r>
-            <a:endParaRPr lang="en-US" sz="900" dirty="0"/>
+          <p:cNvPr id="8" name="cuinotes-footer-mark"/>
+          <p:cNvSpPr txBox="1"/>
+          <p:nvPr/>
+        </p:nvSpPr>
+        <p:spPr>
+          <a:xfrm>
+            <a:off x="9951720" y="6455664"/>
+            <a:ext cx="2011680" cy="292608"/>
+          </a:xfrm>
+          <a:prstGeom prst="rect">
+            <a:avLst/>
+          </a:prstGeom>
+          <a:noFill/>
+        </p:spPr>
+        <p:txBody>
+          <a:bodyPr wrap="none" lIns="0" rIns="0" tIns="0" bIns="0">
+            <a:spAutoFit/>
+          </a:bodyPr>
+          <a:lstStyle/>
+          <a:p>
+            <a:pPr algn="r"/>
+            <a:r>
+              <a:rPr sz="1000">
+                <a:solidFill>
+                  <a:srgbClr val="8A939B"/>
+                </a:solidFill>
+                <a:hlinkClick r:id="rId3"/>
+              </a:rPr>
+              <a:t>cuinotes.com</a:t>
+            </a:r>
+            <a:r>
+              <a:rPr sz="1000">
+                <a:solidFill>
+                  <a:srgbClr val="8A939B"/>
+                </a:solidFill>
+              </a:rPr>
+              <a:t>  ·  27</a:t>
+            </a:r>
           </a:p>
         </p:txBody>
       </p:sp>
@@ -13094,6 +12502,10 @@
           </a:solidFill>
           <a:ln/>
         </p:spPr>
+        <p:txBody>
+          <a:bodyPr/>
+          <a:p/>
+        </p:txBody>
       </p:sp>
       <p:sp>
         <p:nvSpPr>
@@ -13308,79 +12720,44 @@
       </p:sp>
       <p:sp>
         <p:nvSpPr>
-          <p:cNvPr id="6" name="Text 4"/>
-          <p:cNvSpPr txBox="1"/>
-          <p:nvPr/>
-        </p:nvSpPr>
-        <p:spPr>
-          <a:xfrm>
-            <a:off x="640080" y="6446520"/>
-            <a:ext cx="8686800" cy="292608"/>
-          </a:xfrm>
-          <a:prstGeom prst="rect">
-            <a:avLst/>
-          </a:prstGeom>
-          <a:noFill/>
-          <a:ln/>
-        </p:spPr>
-        <p:txBody>
-          <a:bodyPr wrap="square" lIns="0" tIns="0" rIns="0" bIns="0" rtlCol="0" anchor="ctr"/>
-          <a:lstStyle/>
-          <a:p>
-            <a:pPr algn="l" indent="0" marL="0">
-              <a:buNone/>
-            </a:pPr>
-            <a:r>
-              <a:rPr lang="en-US" sz="900" dirty="0">
-                <a:solidFill>
-                  <a:srgbClr val="5D5D72"/>
-                </a:solidFill>
-                <a:latin typeface="Calibri" pitchFamily="34" charset="0"/>
-                <a:ea typeface="Calibri" pitchFamily="34" charset="-122"/>
-                <a:cs typeface="Calibri" pitchFamily="34" charset="-120"/>
-              </a:rPr>
-              <a:t>Usman Akram  •  COMSATS University Islamabad</a:t>
-            </a:r>
-            <a:endParaRPr lang="en-US" sz="900" dirty="0"/>
-          </a:p>
-        </p:txBody>
-      </p:sp>
-      <p:sp>
-        <p:nvSpPr>
-          <p:cNvPr id="7" name="Text 5"/>
-          <p:cNvSpPr txBox="1"/>
-          <p:nvPr/>
-        </p:nvSpPr>
-        <p:spPr>
-          <a:xfrm>
-            <a:off x="11155680" y="6446520"/>
-            <a:ext cx="457200" cy="292608"/>
-          </a:xfrm>
-          <a:prstGeom prst="rect">
-            <a:avLst/>
-          </a:prstGeom>
-          <a:noFill/>
-          <a:ln/>
-        </p:spPr>
-        <p:txBody>
-          <a:bodyPr wrap="square" lIns="0" tIns="0" rIns="0" bIns="0" rtlCol="0" anchor="ctr"/>
-          <a:lstStyle/>
-          <a:p>
-            <a:pPr algn="r" indent="0" marL="0">
-              <a:buNone/>
-            </a:pPr>
-            <a:r>
-              <a:rPr lang="en-US" sz="900" dirty="0">
-                <a:solidFill>
-                  <a:srgbClr val="5D5D72"/>
-                </a:solidFill>
-                <a:latin typeface="Calibri" pitchFamily="34" charset="0"/>
-                <a:ea typeface="Calibri" pitchFamily="34" charset="-122"/>
-                <a:cs typeface="Calibri" pitchFamily="34" charset="-120"/>
-              </a:rPr>
-              <a:t>28</a:t>
-            </a:r>
-            <a:endParaRPr lang="en-US" sz="900" dirty="0"/>
+          <p:cNvPr id="8" name="cuinotes-footer-mark"/>
+          <p:cNvSpPr txBox="1"/>
+          <p:nvPr/>
+        </p:nvSpPr>
+        <p:spPr>
+          <a:xfrm>
+            <a:off x="9951720" y="6455664"/>
+            <a:ext cx="2011680" cy="292608"/>
+          </a:xfrm>
+          <a:prstGeom prst="rect">
+            <a:avLst/>
+          </a:prstGeom>
+          <a:noFill/>
+        </p:spPr>
+        <p:txBody>
+          <a:bodyPr wrap="none" lIns="0" rIns="0" tIns="0" bIns="0">
+            <a:spAutoFit/>
+          </a:bodyPr>
+          <a:lstStyle/>
+          <a:p>
+            <a:pPr algn="r"/>
+            <a:r>
+              <a:rPr sz="1000">
+                <a:solidFill>
+                  <a:srgbClr val="8A939B"/>
+                </a:solidFill>
+                <a:hlinkClick r:id="rId3"/>
+              </a:rPr>
+              <a:t>cuinotes.com</a:t>
+            </a:r>
+            <a:r>
+              <a:rPr sz="1000">
+                <a:solidFill>
+                  <a:srgbClr val="8A939B"/>
+                </a:solidFill>
+              </a:rPr>
+              <a:t>  ·  28</a:t>
+            </a:r>
           </a:p>
         </p:txBody>
       </p:sp>
@@ -13515,6 +12892,10 @@
           </a:solidFill>
           <a:ln/>
         </p:spPr>
+        <p:txBody>
+          <a:bodyPr/>
+          <a:p/>
+        </p:txBody>
       </p:sp>
       <p:sp>
         <p:nvSpPr>
@@ -13748,79 +13129,44 @@
       </p:sp>
       <p:sp>
         <p:nvSpPr>
-          <p:cNvPr id="7" name="Text 5"/>
-          <p:cNvSpPr txBox="1"/>
-          <p:nvPr/>
-        </p:nvSpPr>
-        <p:spPr>
-          <a:xfrm>
-            <a:off x="640080" y="6446520"/>
-            <a:ext cx="8686800" cy="292608"/>
-          </a:xfrm>
-          <a:prstGeom prst="rect">
-            <a:avLst/>
-          </a:prstGeom>
-          <a:noFill/>
-          <a:ln/>
-        </p:spPr>
-        <p:txBody>
-          <a:bodyPr wrap="square" lIns="0" tIns="0" rIns="0" bIns="0" rtlCol="0" anchor="ctr"/>
-          <a:lstStyle/>
-          <a:p>
-            <a:pPr algn="l" indent="0" marL="0">
-              <a:buNone/>
-            </a:pPr>
-            <a:r>
-              <a:rPr lang="en-US" sz="900" dirty="0">
-                <a:solidFill>
-                  <a:srgbClr val="5D5D72"/>
-                </a:solidFill>
-                <a:latin typeface="Calibri" pitchFamily="34" charset="0"/>
-                <a:ea typeface="Calibri" pitchFamily="34" charset="-122"/>
-                <a:cs typeface="Calibri" pitchFamily="34" charset="-120"/>
-              </a:rPr>
-              <a:t>Usman Akram  •  COMSATS University Islamabad</a:t>
-            </a:r>
-            <a:endParaRPr lang="en-US" sz="900" dirty="0"/>
-          </a:p>
-        </p:txBody>
-      </p:sp>
-      <p:sp>
-        <p:nvSpPr>
-          <p:cNvPr id="8" name="Text 6"/>
-          <p:cNvSpPr txBox="1"/>
-          <p:nvPr/>
-        </p:nvSpPr>
-        <p:spPr>
-          <a:xfrm>
-            <a:off x="11155680" y="6446520"/>
-            <a:ext cx="457200" cy="292608"/>
-          </a:xfrm>
-          <a:prstGeom prst="rect">
-            <a:avLst/>
-          </a:prstGeom>
-          <a:noFill/>
-          <a:ln/>
-        </p:spPr>
-        <p:txBody>
-          <a:bodyPr wrap="square" lIns="0" tIns="0" rIns="0" bIns="0" rtlCol="0" anchor="ctr"/>
-          <a:lstStyle/>
-          <a:p>
-            <a:pPr algn="r" indent="0" marL="0">
-              <a:buNone/>
-            </a:pPr>
-            <a:r>
-              <a:rPr lang="en-US" sz="900" dirty="0">
-                <a:solidFill>
-                  <a:srgbClr val="5D5D72"/>
-                </a:solidFill>
-                <a:latin typeface="Calibri" pitchFamily="34" charset="0"/>
-                <a:ea typeface="Calibri" pitchFamily="34" charset="-122"/>
-                <a:cs typeface="Calibri" pitchFamily="34" charset="-120"/>
-              </a:rPr>
-              <a:t>29</a:t>
-            </a:r>
-            <a:endParaRPr lang="en-US" sz="900" dirty="0"/>
+          <p:cNvPr id="9" name="cuinotes-footer-mark"/>
+          <p:cNvSpPr txBox="1"/>
+          <p:nvPr/>
+        </p:nvSpPr>
+        <p:spPr>
+          <a:xfrm>
+            <a:off x="9951720" y="6455664"/>
+            <a:ext cx="2011680" cy="292608"/>
+          </a:xfrm>
+          <a:prstGeom prst="rect">
+            <a:avLst/>
+          </a:prstGeom>
+          <a:noFill/>
+        </p:spPr>
+        <p:txBody>
+          <a:bodyPr wrap="none" lIns="0" rIns="0" tIns="0" bIns="0">
+            <a:spAutoFit/>
+          </a:bodyPr>
+          <a:lstStyle/>
+          <a:p>
+            <a:pPr algn="r"/>
+            <a:r>
+              <a:rPr sz="1000">
+                <a:solidFill>
+                  <a:srgbClr val="8A939B"/>
+                </a:solidFill>
+                <a:hlinkClick r:id="rId3"/>
+              </a:rPr>
+              <a:t>cuinotes.com</a:t>
+            </a:r>
+            <a:r>
+              <a:rPr sz="1000">
+                <a:solidFill>
+                  <a:srgbClr val="8A939B"/>
+                </a:solidFill>
+              </a:rPr>
+              <a:t>  ·  29</a:t>
+            </a:r>
           </a:p>
         </p:txBody>
       </p:sp>
@@ -14830,79 +14176,44 @@
       </p:sp>
       <p:sp>
         <p:nvSpPr>
-          <p:cNvPr id="6" name="Text 3"/>
-          <p:cNvSpPr txBox="1"/>
-          <p:nvPr/>
-        </p:nvSpPr>
-        <p:spPr>
-          <a:xfrm>
-            <a:off x="640080" y="6446520"/>
-            <a:ext cx="8686800" cy="292608"/>
-          </a:xfrm>
-          <a:prstGeom prst="rect">
-            <a:avLst/>
-          </a:prstGeom>
-          <a:noFill/>
-          <a:ln/>
-        </p:spPr>
-        <p:txBody>
-          <a:bodyPr wrap="square" lIns="0" tIns="0" rIns="0" bIns="0" rtlCol="0" anchor="ctr"/>
-          <a:lstStyle/>
-          <a:p>
-            <a:pPr algn="l" indent="0" marL="0">
-              <a:buNone/>
-            </a:pPr>
-            <a:r>
-              <a:rPr lang="en-US" sz="900" dirty="0">
-                <a:solidFill>
-                  <a:srgbClr val="5D5D72"/>
-                </a:solidFill>
-                <a:latin typeface="Calibri" pitchFamily="34" charset="0"/>
-                <a:ea typeface="Calibri" pitchFamily="34" charset="-122"/>
-                <a:cs typeface="Calibri" pitchFamily="34" charset="-120"/>
-              </a:rPr>
-              <a:t>Usman Akram  •  COMSATS University Islamabad</a:t>
-            </a:r>
-            <a:endParaRPr lang="en-US" sz="900" dirty="0"/>
-          </a:p>
-        </p:txBody>
-      </p:sp>
-      <p:sp>
-        <p:nvSpPr>
-          <p:cNvPr id="7" name="Text 4"/>
-          <p:cNvSpPr txBox="1"/>
-          <p:nvPr/>
-        </p:nvSpPr>
-        <p:spPr>
-          <a:xfrm>
-            <a:off x="11155680" y="6446520"/>
-            <a:ext cx="457200" cy="292608"/>
-          </a:xfrm>
-          <a:prstGeom prst="rect">
-            <a:avLst/>
-          </a:prstGeom>
-          <a:noFill/>
-          <a:ln/>
-        </p:spPr>
-        <p:txBody>
-          <a:bodyPr wrap="square" lIns="0" tIns="0" rIns="0" bIns="0" rtlCol="0" anchor="ctr"/>
-          <a:lstStyle/>
-          <a:p>
-            <a:pPr algn="r" indent="0" marL="0">
-              <a:buNone/>
-            </a:pPr>
-            <a:r>
-              <a:rPr lang="en-US" sz="900" dirty="0">
-                <a:solidFill>
-                  <a:srgbClr val="5D5D72"/>
-                </a:solidFill>
-                <a:latin typeface="Calibri" pitchFamily="34" charset="0"/>
-                <a:ea typeface="Calibri" pitchFamily="34" charset="-122"/>
-                <a:cs typeface="Calibri" pitchFamily="34" charset="-120"/>
-              </a:rPr>
-              <a:t>3</a:t>
-            </a:r>
-            <a:endParaRPr lang="en-US" sz="900" dirty="0"/>
+          <p:cNvPr id="8" name="cuinotes-footer-mark"/>
+          <p:cNvSpPr txBox="1"/>
+          <p:nvPr/>
+        </p:nvSpPr>
+        <p:spPr>
+          <a:xfrm>
+            <a:off x="9951720" y="6455664"/>
+            <a:ext cx="2011680" cy="292608"/>
+          </a:xfrm>
+          <a:prstGeom prst="rect">
+            <a:avLst/>
+          </a:prstGeom>
+          <a:noFill/>
+        </p:spPr>
+        <p:txBody>
+          <a:bodyPr wrap="none" lIns="0" rIns="0" tIns="0" bIns="0">
+            <a:spAutoFit/>
+          </a:bodyPr>
+          <a:lstStyle/>
+          <a:p>
+            <a:pPr algn="r"/>
+            <a:r>
+              <a:rPr sz="1000">
+                <a:solidFill>
+                  <a:srgbClr val="8A939B"/>
+                </a:solidFill>
+                <a:hlinkClick r:id="rId3"/>
+              </a:rPr>
+              <a:t>cuinotes.com</a:t>
+            </a:r>
+            <a:r>
+              <a:rPr sz="1000">
+                <a:solidFill>
+                  <a:srgbClr val="8A939B"/>
+                </a:solidFill>
+              </a:rPr>
+              <a:t>  ·  3</a:t>
+            </a:r>
           </a:p>
         </p:txBody>
       </p:sp>
@@ -15042,6 +14353,10 @@
             <a:prstDash val="solid"/>
           </a:ln>
         </p:spPr>
+        <p:txBody>
+          <a:bodyPr/>
+          <a:p/>
+        </p:txBody>
       </p:sp>
       <p:sp>
         <p:nvSpPr>
@@ -15123,79 +14438,44 @@
       </p:sp>
       <p:sp>
         <p:nvSpPr>
-          <p:cNvPr id="7" name="Text 5"/>
-          <p:cNvSpPr txBox="1"/>
-          <p:nvPr/>
-        </p:nvSpPr>
-        <p:spPr>
-          <a:xfrm>
-            <a:off x="640080" y="6446520"/>
-            <a:ext cx="8686800" cy="292608"/>
-          </a:xfrm>
-          <a:prstGeom prst="rect">
-            <a:avLst/>
-          </a:prstGeom>
-          <a:noFill/>
-          <a:ln/>
-        </p:spPr>
-        <p:txBody>
-          <a:bodyPr wrap="square" lIns="0" tIns="0" rIns="0" bIns="0" rtlCol="0" anchor="ctr"/>
-          <a:lstStyle/>
-          <a:p>
-            <a:pPr algn="l" indent="0" marL="0">
-              <a:buNone/>
-            </a:pPr>
-            <a:r>
-              <a:rPr lang="en-US" sz="900" dirty="0">
-                <a:solidFill>
-                  <a:srgbClr val="5D5D72"/>
-                </a:solidFill>
-                <a:latin typeface="Calibri" pitchFamily="34" charset="0"/>
-                <a:ea typeface="Calibri" pitchFamily="34" charset="-122"/>
-                <a:cs typeface="Calibri" pitchFamily="34" charset="-120"/>
-              </a:rPr>
-              <a:t>Usman Akram  •  COMSATS University Islamabad</a:t>
-            </a:r>
-            <a:endParaRPr lang="en-US" sz="900" dirty="0"/>
-          </a:p>
-        </p:txBody>
-      </p:sp>
-      <p:sp>
-        <p:nvSpPr>
-          <p:cNvPr id="8" name="Text 6"/>
-          <p:cNvSpPr txBox="1"/>
-          <p:nvPr/>
-        </p:nvSpPr>
-        <p:spPr>
-          <a:xfrm>
-            <a:off x="11155680" y="6446520"/>
-            <a:ext cx="457200" cy="292608"/>
-          </a:xfrm>
-          <a:prstGeom prst="rect">
-            <a:avLst/>
-          </a:prstGeom>
-          <a:noFill/>
-          <a:ln/>
-        </p:spPr>
-        <p:txBody>
-          <a:bodyPr wrap="square" lIns="0" tIns="0" rIns="0" bIns="0" rtlCol="0" anchor="ctr"/>
-          <a:lstStyle/>
-          <a:p>
-            <a:pPr algn="r" indent="0" marL="0">
-              <a:buNone/>
-            </a:pPr>
-            <a:r>
-              <a:rPr lang="en-US" sz="900" dirty="0">
-                <a:solidFill>
-                  <a:srgbClr val="5D5D72"/>
-                </a:solidFill>
-                <a:latin typeface="Calibri" pitchFamily="34" charset="0"/>
-                <a:ea typeface="Calibri" pitchFamily="34" charset="-122"/>
-                <a:cs typeface="Calibri" pitchFamily="34" charset="-120"/>
-              </a:rPr>
-              <a:t>30</a:t>
-            </a:r>
-            <a:endParaRPr lang="en-US" sz="900" dirty="0"/>
+          <p:cNvPr id="9" name="cuinotes-footer-mark"/>
+          <p:cNvSpPr txBox="1"/>
+          <p:nvPr/>
+        </p:nvSpPr>
+        <p:spPr>
+          <a:xfrm>
+            <a:off x="9951720" y="6455664"/>
+            <a:ext cx="2011680" cy="292608"/>
+          </a:xfrm>
+          <a:prstGeom prst="rect">
+            <a:avLst/>
+          </a:prstGeom>
+          <a:noFill/>
+        </p:spPr>
+        <p:txBody>
+          <a:bodyPr wrap="none" lIns="0" rIns="0" tIns="0" bIns="0">
+            <a:spAutoFit/>
+          </a:bodyPr>
+          <a:lstStyle/>
+          <a:p>
+            <a:pPr algn="r"/>
+            <a:r>
+              <a:rPr sz="1000">
+                <a:solidFill>
+                  <a:srgbClr val="8A939B"/>
+                </a:solidFill>
+                <a:hlinkClick r:id="rId3"/>
+              </a:rPr>
+              <a:t>cuinotes.com</a:t>
+            </a:r>
+            <a:r>
+              <a:rPr sz="1000">
+                <a:solidFill>
+                  <a:srgbClr val="8A939B"/>
+                </a:solidFill>
+              </a:rPr>
+              <a:t>  ·  30</a:t>
+            </a:r>
           </a:p>
         </p:txBody>
       </p:sp>
@@ -15330,6 +14610,10 @@
           </a:solidFill>
           <a:ln/>
         </p:spPr>
+        <p:txBody>
+          <a:bodyPr/>
+          <a:p/>
+        </p:txBody>
       </p:sp>
       <p:sp>
         <p:nvSpPr>
@@ -15574,79 +14858,44 @@
       </p:sp>
       <p:sp>
         <p:nvSpPr>
-          <p:cNvPr id="7" name="Text 5"/>
-          <p:cNvSpPr txBox="1"/>
-          <p:nvPr/>
-        </p:nvSpPr>
-        <p:spPr>
-          <a:xfrm>
-            <a:off x="640080" y="6446520"/>
-            <a:ext cx="8686800" cy="292608"/>
-          </a:xfrm>
-          <a:prstGeom prst="rect">
-            <a:avLst/>
-          </a:prstGeom>
-          <a:noFill/>
-          <a:ln/>
-        </p:spPr>
-        <p:txBody>
-          <a:bodyPr wrap="square" lIns="0" tIns="0" rIns="0" bIns="0" rtlCol="0" anchor="ctr"/>
-          <a:lstStyle/>
-          <a:p>
-            <a:pPr algn="l" indent="0" marL="0">
-              <a:buNone/>
-            </a:pPr>
-            <a:r>
-              <a:rPr lang="en-US" sz="900" dirty="0">
-                <a:solidFill>
-                  <a:srgbClr val="5D5D72"/>
-                </a:solidFill>
-                <a:latin typeface="Calibri" pitchFamily="34" charset="0"/>
-                <a:ea typeface="Calibri" pitchFamily="34" charset="-122"/>
-                <a:cs typeface="Calibri" pitchFamily="34" charset="-120"/>
-              </a:rPr>
-              <a:t>Usman Akram  •  COMSATS University Islamabad</a:t>
-            </a:r>
-            <a:endParaRPr lang="en-US" sz="900" dirty="0"/>
-          </a:p>
-        </p:txBody>
-      </p:sp>
-      <p:sp>
-        <p:nvSpPr>
-          <p:cNvPr id="8" name="Text 6"/>
-          <p:cNvSpPr txBox="1"/>
-          <p:nvPr/>
-        </p:nvSpPr>
-        <p:spPr>
-          <a:xfrm>
-            <a:off x="11155680" y="6446520"/>
-            <a:ext cx="457200" cy="292608"/>
-          </a:xfrm>
-          <a:prstGeom prst="rect">
-            <a:avLst/>
-          </a:prstGeom>
-          <a:noFill/>
-          <a:ln/>
-        </p:spPr>
-        <p:txBody>
-          <a:bodyPr wrap="square" lIns="0" tIns="0" rIns="0" bIns="0" rtlCol="0" anchor="ctr"/>
-          <a:lstStyle/>
-          <a:p>
-            <a:pPr algn="r" indent="0" marL="0">
-              <a:buNone/>
-            </a:pPr>
-            <a:r>
-              <a:rPr lang="en-US" sz="900" dirty="0">
-                <a:solidFill>
-                  <a:srgbClr val="5D5D72"/>
-                </a:solidFill>
-                <a:latin typeface="Calibri" pitchFamily="34" charset="0"/>
-                <a:ea typeface="Calibri" pitchFamily="34" charset="-122"/>
-                <a:cs typeface="Calibri" pitchFamily="34" charset="-120"/>
-              </a:rPr>
-              <a:t>31</a:t>
-            </a:r>
-            <a:endParaRPr lang="en-US" sz="900" dirty="0"/>
+          <p:cNvPr id="9" name="cuinotes-footer-mark"/>
+          <p:cNvSpPr txBox="1"/>
+          <p:nvPr/>
+        </p:nvSpPr>
+        <p:spPr>
+          <a:xfrm>
+            <a:off x="9951720" y="6455664"/>
+            <a:ext cx="2011680" cy="292608"/>
+          </a:xfrm>
+          <a:prstGeom prst="rect">
+            <a:avLst/>
+          </a:prstGeom>
+          <a:noFill/>
+        </p:spPr>
+        <p:txBody>
+          <a:bodyPr wrap="none" lIns="0" rIns="0" tIns="0" bIns="0">
+            <a:spAutoFit/>
+          </a:bodyPr>
+          <a:lstStyle/>
+          <a:p>
+            <a:pPr algn="r"/>
+            <a:r>
+              <a:rPr sz="1000">
+                <a:solidFill>
+                  <a:srgbClr val="8A939B"/>
+                </a:solidFill>
+                <a:hlinkClick r:id="rId3"/>
+              </a:rPr>
+              <a:t>cuinotes.com</a:t>
+            </a:r>
+            <a:r>
+              <a:rPr sz="1000">
+                <a:solidFill>
+                  <a:srgbClr val="8A939B"/>
+                </a:solidFill>
+              </a:rPr>
+              <a:t>  ·  31</a:t>
+            </a:r>
           </a:p>
         </p:txBody>
       </p:sp>
@@ -15781,6 +15030,10 @@
           </a:solidFill>
           <a:ln/>
         </p:spPr>
+        <p:txBody>
+          <a:bodyPr/>
+          <a:p/>
+        </p:txBody>
       </p:sp>
       <p:sp>
         <p:nvSpPr>
@@ -16103,79 +15356,44 @@
       </p:sp>
       <p:sp>
         <p:nvSpPr>
-          <p:cNvPr id="7" name="Text 5"/>
-          <p:cNvSpPr txBox="1"/>
-          <p:nvPr/>
-        </p:nvSpPr>
-        <p:spPr>
-          <a:xfrm>
-            <a:off x="640080" y="6446520"/>
-            <a:ext cx="8686800" cy="292608"/>
-          </a:xfrm>
-          <a:prstGeom prst="rect">
-            <a:avLst/>
-          </a:prstGeom>
-          <a:noFill/>
-          <a:ln/>
-        </p:spPr>
-        <p:txBody>
-          <a:bodyPr wrap="square" lIns="0" tIns="0" rIns="0" bIns="0" rtlCol="0" anchor="ctr"/>
-          <a:lstStyle/>
-          <a:p>
-            <a:pPr algn="l" indent="0" marL="0">
-              <a:buNone/>
-            </a:pPr>
-            <a:r>
-              <a:rPr lang="en-US" sz="900" dirty="0">
-                <a:solidFill>
-                  <a:srgbClr val="5D5D72"/>
-                </a:solidFill>
-                <a:latin typeface="Calibri" pitchFamily="34" charset="0"/>
-                <a:ea typeface="Calibri" pitchFamily="34" charset="-122"/>
-                <a:cs typeface="Calibri" pitchFamily="34" charset="-120"/>
-              </a:rPr>
-              <a:t>Usman Akram  •  COMSATS University Islamabad</a:t>
-            </a:r>
-            <a:endParaRPr lang="en-US" sz="900" dirty="0"/>
-          </a:p>
-        </p:txBody>
-      </p:sp>
-      <p:sp>
-        <p:nvSpPr>
-          <p:cNvPr id="8" name="Text 6"/>
-          <p:cNvSpPr txBox="1"/>
-          <p:nvPr/>
-        </p:nvSpPr>
-        <p:spPr>
-          <a:xfrm>
-            <a:off x="11155680" y="6446520"/>
-            <a:ext cx="457200" cy="292608"/>
-          </a:xfrm>
-          <a:prstGeom prst="rect">
-            <a:avLst/>
-          </a:prstGeom>
-          <a:noFill/>
-          <a:ln/>
-        </p:spPr>
-        <p:txBody>
-          <a:bodyPr wrap="square" lIns="0" tIns="0" rIns="0" bIns="0" rtlCol="0" anchor="ctr"/>
-          <a:lstStyle/>
-          <a:p>
-            <a:pPr algn="r" indent="0" marL="0">
-              <a:buNone/>
-            </a:pPr>
-            <a:r>
-              <a:rPr lang="en-US" sz="900" dirty="0">
-                <a:solidFill>
-                  <a:srgbClr val="5D5D72"/>
-                </a:solidFill>
-                <a:latin typeface="Calibri" pitchFamily="34" charset="0"/>
-                <a:ea typeface="Calibri" pitchFamily="34" charset="-122"/>
-                <a:cs typeface="Calibri" pitchFamily="34" charset="-120"/>
-              </a:rPr>
-              <a:t>32</a:t>
-            </a:r>
-            <a:endParaRPr lang="en-US" sz="900" dirty="0"/>
+          <p:cNvPr id="9" name="cuinotes-footer-mark"/>
+          <p:cNvSpPr txBox="1"/>
+          <p:nvPr/>
+        </p:nvSpPr>
+        <p:spPr>
+          <a:xfrm>
+            <a:off x="9951720" y="6455664"/>
+            <a:ext cx="2011680" cy="292608"/>
+          </a:xfrm>
+          <a:prstGeom prst="rect">
+            <a:avLst/>
+          </a:prstGeom>
+          <a:noFill/>
+        </p:spPr>
+        <p:txBody>
+          <a:bodyPr wrap="none" lIns="0" rIns="0" tIns="0" bIns="0">
+            <a:spAutoFit/>
+          </a:bodyPr>
+          <a:lstStyle/>
+          <a:p>
+            <a:pPr algn="r"/>
+            <a:r>
+              <a:rPr sz="1000">
+                <a:solidFill>
+                  <a:srgbClr val="8A939B"/>
+                </a:solidFill>
+                <a:hlinkClick r:id="rId3"/>
+              </a:rPr>
+              <a:t>cuinotes.com</a:t>
+            </a:r>
+            <a:r>
+              <a:rPr sz="1000">
+                <a:solidFill>
+                  <a:srgbClr val="8A939B"/>
+                </a:solidFill>
+              </a:rPr>
+              <a:t>  ·  32</a:t>
+            </a:r>
           </a:p>
         </p:txBody>
       </p:sp>
@@ -16308,6 +15526,10 @@
           </a:solidFill>
           <a:ln/>
         </p:spPr>
+        <p:txBody>
+          <a:bodyPr/>
+          <a:p/>
+        </p:txBody>
       </p:sp>
       <p:sp>
         <p:nvSpPr>
@@ -16406,6 +15628,10 @@
           </a:solidFill>
           <a:ln/>
         </p:spPr>
+        <p:txBody>
+          <a:bodyPr/>
+          <a:p/>
+        </p:txBody>
       </p:sp>
       <p:sp>
         <p:nvSpPr>
@@ -16504,6 +15730,10 @@
           </a:solidFill>
           <a:ln/>
         </p:spPr>
+        <p:txBody>
+          <a:bodyPr/>
+          <a:p/>
+        </p:txBody>
       </p:sp>
       <p:sp>
         <p:nvSpPr>
@@ -16585,79 +15815,44 @@
       </p:sp>
       <p:sp>
         <p:nvSpPr>
-          <p:cNvPr id="13" name="Text 11"/>
-          <p:cNvSpPr txBox="1"/>
-          <p:nvPr/>
-        </p:nvSpPr>
-        <p:spPr>
-          <a:xfrm>
-            <a:off x="640080" y="6446520"/>
-            <a:ext cx="8686800" cy="292608"/>
-          </a:xfrm>
-          <a:prstGeom prst="rect">
-            <a:avLst/>
-          </a:prstGeom>
-          <a:noFill/>
-          <a:ln/>
-        </p:spPr>
-        <p:txBody>
-          <a:bodyPr wrap="square" lIns="0" tIns="0" rIns="0" bIns="0" rtlCol="0" anchor="ctr"/>
-          <a:lstStyle/>
-          <a:p>
-            <a:pPr algn="l" indent="0" marL="0">
-              <a:buNone/>
-            </a:pPr>
-            <a:r>
-              <a:rPr lang="en-US" sz="900" dirty="0">
-                <a:solidFill>
-                  <a:srgbClr val="5D5D72"/>
-                </a:solidFill>
-                <a:latin typeface="Calibri" pitchFamily="34" charset="0"/>
-                <a:ea typeface="Calibri" pitchFamily="34" charset="-122"/>
-                <a:cs typeface="Calibri" pitchFamily="34" charset="-120"/>
-              </a:rPr>
-              <a:t>Usman Akram  •  COMSATS University Islamabad</a:t>
-            </a:r>
-            <a:endParaRPr lang="en-US" sz="900" dirty="0"/>
-          </a:p>
-        </p:txBody>
-      </p:sp>
-      <p:sp>
-        <p:nvSpPr>
-          <p:cNvPr id="14" name="Text 12"/>
-          <p:cNvSpPr txBox="1"/>
-          <p:nvPr/>
-        </p:nvSpPr>
-        <p:spPr>
-          <a:xfrm>
-            <a:off x="11155680" y="6446520"/>
-            <a:ext cx="457200" cy="292608"/>
-          </a:xfrm>
-          <a:prstGeom prst="rect">
-            <a:avLst/>
-          </a:prstGeom>
-          <a:noFill/>
-          <a:ln/>
-        </p:spPr>
-        <p:txBody>
-          <a:bodyPr wrap="square" lIns="0" tIns="0" rIns="0" bIns="0" rtlCol="0" anchor="ctr"/>
-          <a:lstStyle/>
-          <a:p>
-            <a:pPr algn="r" indent="0" marL="0">
-              <a:buNone/>
-            </a:pPr>
-            <a:r>
-              <a:rPr lang="en-US" sz="900" dirty="0">
-                <a:solidFill>
-                  <a:srgbClr val="5D5D72"/>
-                </a:solidFill>
-                <a:latin typeface="Calibri" pitchFamily="34" charset="0"/>
-                <a:ea typeface="Calibri" pitchFamily="34" charset="-122"/>
-                <a:cs typeface="Calibri" pitchFamily="34" charset="-120"/>
-              </a:rPr>
-              <a:t>33</a:t>
-            </a:r>
-            <a:endParaRPr lang="en-US" sz="900" dirty="0"/>
+          <p:cNvPr id="15" name="cuinotes-footer-mark"/>
+          <p:cNvSpPr txBox="1"/>
+          <p:nvPr/>
+        </p:nvSpPr>
+        <p:spPr>
+          <a:xfrm>
+            <a:off x="9951720" y="6455664"/>
+            <a:ext cx="2011680" cy="292608"/>
+          </a:xfrm>
+          <a:prstGeom prst="rect">
+            <a:avLst/>
+          </a:prstGeom>
+          <a:noFill/>
+        </p:spPr>
+        <p:txBody>
+          <a:bodyPr wrap="none" lIns="0" rIns="0" tIns="0" bIns="0">
+            <a:spAutoFit/>
+          </a:bodyPr>
+          <a:lstStyle/>
+          <a:p>
+            <a:pPr algn="r"/>
+            <a:r>
+              <a:rPr sz="1000">
+                <a:solidFill>
+                  <a:srgbClr val="8A939B"/>
+                </a:solidFill>
+                <a:hlinkClick r:id="rId3"/>
+              </a:rPr>
+              <a:t>cuinotes.com</a:t>
+            </a:r>
+            <a:r>
+              <a:rPr sz="1000">
+                <a:solidFill>
+                  <a:srgbClr val="8A939B"/>
+                </a:solidFill>
+              </a:rPr>
+              <a:t>  ·  33</a:t>
+            </a:r>
           </a:p>
         </p:txBody>
       </p:sp>
@@ -16792,6 +15987,10 @@
           </a:solidFill>
           <a:ln/>
         </p:spPr>
+        <p:txBody>
+          <a:bodyPr/>
+          <a:p/>
+        </p:txBody>
       </p:sp>
       <p:sp>
         <p:nvSpPr>
@@ -17045,79 +16244,44 @@
       </p:sp>
       <p:sp>
         <p:nvSpPr>
-          <p:cNvPr id="7" name="Text 5"/>
-          <p:cNvSpPr txBox="1"/>
-          <p:nvPr/>
-        </p:nvSpPr>
-        <p:spPr>
-          <a:xfrm>
-            <a:off x="640080" y="6446520"/>
-            <a:ext cx="8686800" cy="292608"/>
-          </a:xfrm>
-          <a:prstGeom prst="rect">
-            <a:avLst/>
-          </a:prstGeom>
-          <a:noFill/>
-          <a:ln/>
-        </p:spPr>
-        <p:txBody>
-          <a:bodyPr wrap="square" lIns="0" tIns="0" rIns="0" bIns="0" rtlCol="0" anchor="ctr"/>
-          <a:lstStyle/>
-          <a:p>
-            <a:pPr algn="l" indent="0" marL="0">
-              <a:buNone/>
-            </a:pPr>
-            <a:r>
-              <a:rPr lang="en-US" sz="900" dirty="0">
-                <a:solidFill>
-                  <a:srgbClr val="5D5D72"/>
-                </a:solidFill>
-                <a:latin typeface="Calibri" pitchFamily="34" charset="0"/>
-                <a:ea typeface="Calibri" pitchFamily="34" charset="-122"/>
-                <a:cs typeface="Calibri" pitchFamily="34" charset="-120"/>
-              </a:rPr>
-              <a:t>Usman Akram  •  COMSATS University Islamabad</a:t>
-            </a:r>
-            <a:endParaRPr lang="en-US" sz="900" dirty="0"/>
-          </a:p>
-        </p:txBody>
-      </p:sp>
-      <p:sp>
-        <p:nvSpPr>
-          <p:cNvPr id="8" name="Text 6"/>
-          <p:cNvSpPr txBox="1"/>
-          <p:nvPr/>
-        </p:nvSpPr>
-        <p:spPr>
-          <a:xfrm>
-            <a:off x="11155680" y="6446520"/>
-            <a:ext cx="457200" cy="292608"/>
-          </a:xfrm>
-          <a:prstGeom prst="rect">
-            <a:avLst/>
-          </a:prstGeom>
-          <a:noFill/>
-          <a:ln/>
-        </p:spPr>
-        <p:txBody>
-          <a:bodyPr wrap="square" lIns="0" tIns="0" rIns="0" bIns="0" rtlCol="0" anchor="ctr"/>
-          <a:lstStyle/>
-          <a:p>
-            <a:pPr algn="r" indent="0" marL="0">
-              <a:buNone/>
-            </a:pPr>
-            <a:r>
-              <a:rPr lang="en-US" sz="900" dirty="0">
-                <a:solidFill>
-                  <a:srgbClr val="5D5D72"/>
-                </a:solidFill>
-                <a:latin typeface="Calibri" pitchFamily="34" charset="0"/>
-                <a:ea typeface="Calibri" pitchFamily="34" charset="-122"/>
-                <a:cs typeface="Calibri" pitchFamily="34" charset="-120"/>
-              </a:rPr>
-              <a:t>34</a:t>
-            </a:r>
-            <a:endParaRPr lang="en-US" sz="900" dirty="0"/>
+          <p:cNvPr id="9" name="cuinotes-footer-mark"/>
+          <p:cNvSpPr txBox="1"/>
+          <p:nvPr/>
+        </p:nvSpPr>
+        <p:spPr>
+          <a:xfrm>
+            <a:off x="9951720" y="6455664"/>
+            <a:ext cx="2011680" cy="292608"/>
+          </a:xfrm>
+          <a:prstGeom prst="rect">
+            <a:avLst/>
+          </a:prstGeom>
+          <a:noFill/>
+        </p:spPr>
+        <p:txBody>
+          <a:bodyPr wrap="none" lIns="0" rIns="0" tIns="0" bIns="0">
+            <a:spAutoFit/>
+          </a:bodyPr>
+          <a:lstStyle/>
+          <a:p>
+            <a:pPr algn="r"/>
+            <a:r>
+              <a:rPr sz="1000">
+                <a:solidFill>
+                  <a:srgbClr val="8A939B"/>
+                </a:solidFill>
+                <a:hlinkClick r:id="rId3"/>
+              </a:rPr>
+              <a:t>cuinotes.com</a:t>
+            </a:r>
+            <a:r>
+              <a:rPr sz="1000">
+                <a:solidFill>
+                  <a:srgbClr val="8A939B"/>
+                </a:solidFill>
+              </a:rPr>
+              <a:t>  ·  34</a:t>
+            </a:r>
           </a:p>
         </p:txBody>
       </p:sp>
@@ -17252,6 +16416,10 @@
           </a:solidFill>
           <a:ln/>
         </p:spPr>
+        <p:txBody>
+          <a:bodyPr/>
+          <a:p/>
+        </p:txBody>
       </p:sp>
       <p:sp>
         <p:nvSpPr>
@@ -17506,79 +16674,44 @@
       </p:sp>
       <p:sp>
         <p:nvSpPr>
-          <p:cNvPr id="6" name="Text 4"/>
-          <p:cNvSpPr txBox="1"/>
-          <p:nvPr/>
-        </p:nvSpPr>
-        <p:spPr>
-          <a:xfrm>
-            <a:off x="640080" y="6446520"/>
-            <a:ext cx="8686800" cy="292608"/>
-          </a:xfrm>
-          <a:prstGeom prst="rect">
-            <a:avLst/>
-          </a:prstGeom>
-          <a:noFill/>
-          <a:ln/>
-        </p:spPr>
-        <p:txBody>
-          <a:bodyPr wrap="square" lIns="0" tIns="0" rIns="0" bIns="0" rtlCol="0" anchor="ctr"/>
-          <a:lstStyle/>
-          <a:p>
-            <a:pPr algn="l" indent="0" marL="0">
-              <a:buNone/>
-            </a:pPr>
-            <a:r>
-              <a:rPr lang="en-US" sz="900" dirty="0">
-                <a:solidFill>
-                  <a:srgbClr val="5D5D72"/>
-                </a:solidFill>
-                <a:latin typeface="Calibri" pitchFamily="34" charset="0"/>
-                <a:ea typeface="Calibri" pitchFamily="34" charset="-122"/>
-                <a:cs typeface="Calibri" pitchFamily="34" charset="-120"/>
-              </a:rPr>
-              <a:t>Usman Akram  •  COMSATS University Islamabad</a:t>
-            </a:r>
-            <a:endParaRPr lang="en-US" sz="900" dirty="0"/>
-          </a:p>
-        </p:txBody>
-      </p:sp>
-      <p:sp>
-        <p:nvSpPr>
-          <p:cNvPr id="7" name="Text 5"/>
-          <p:cNvSpPr txBox="1"/>
-          <p:nvPr/>
-        </p:nvSpPr>
-        <p:spPr>
-          <a:xfrm>
-            <a:off x="11155680" y="6446520"/>
-            <a:ext cx="457200" cy="292608"/>
-          </a:xfrm>
-          <a:prstGeom prst="rect">
-            <a:avLst/>
-          </a:prstGeom>
-          <a:noFill/>
-          <a:ln/>
-        </p:spPr>
-        <p:txBody>
-          <a:bodyPr wrap="square" lIns="0" tIns="0" rIns="0" bIns="0" rtlCol="0" anchor="ctr"/>
-          <a:lstStyle/>
-          <a:p>
-            <a:pPr algn="r" indent="0" marL="0">
-              <a:buNone/>
-            </a:pPr>
-            <a:r>
-              <a:rPr lang="en-US" sz="900" dirty="0">
-                <a:solidFill>
-                  <a:srgbClr val="5D5D72"/>
-                </a:solidFill>
-                <a:latin typeface="Calibri" pitchFamily="34" charset="0"/>
-                <a:ea typeface="Calibri" pitchFamily="34" charset="-122"/>
-                <a:cs typeface="Calibri" pitchFamily="34" charset="-120"/>
-              </a:rPr>
-              <a:t>35</a:t>
-            </a:r>
-            <a:endParaRPr lang="en-US" sz="900" dirty="0"/>
+          <p:cNvPr id="8" name="cuinotes-footer-mark"/>
+          <p:cNvSpPr txBox="1"/>
+          <p:nvPr/>
+        </p:nvSpPr>
+        <p:spPr>
+          <a:xfrm>
+            <a:off x="9951720" y="6455664"/>
+            <a:ext cx="2011680" cy="292608"/>
+          </a:xfrm>
+          <a:prstGeom prst="rect">
+            <a:avLst/>
+          </a:prstGeom>
+          <a:noFill/>
+        </p:spPr>
+        <p:txBody>
+          <a:bodyPr wrap="none" lIns="0" rIns="0" tIns="0" bIns="0">
+            <a:spAutoFit/>
+          </a:bodyPr>
+          <a:lstStyle/>
+          <a:p>
+            <a:pPr algn="r"/>
+            <a:r>
+              <a:rPr sz="1000">
+                <a:solidFill>
+                  <a:srgbClr val="8A939B"/>
+                </a:solidFill>
+                <a:hlinkClick r:id="rId3"/>
+              </a:rPr>
+              <a:t>cuinotes.com</a:t>
+            </a:r>
+            <a:r>
+              <a:rPr sz="1000">
+                <a:solidFill>
+                  <a:srgbClr val="8A939B"/>
+                </a:solidFill>
+              </a:rPr>
+              <a:t>  ·  35</a:t>
+            </a:r>
           </a:p>
         </p:txBody>
       </p:sp>
@@ -17713,6 +16846,10 @@
           </a:solidFill>
           <a:ln/>
         </p:spPr>
+        <p:txBody>
+          <a:bodyPr/>
+          <a:p/>
+        </p:txBody>
       </p:sp>
       <p:sp>
         <p:nvSpPr>
@@ -17964,79 +17101,44 @@
       </p:sp>
       <p:sp>
         <p:nvSpPr>
-          <p:cNvPr id="7" name="Text 5"/>
-          <p:cNvSpPr txBox="1"/>
-          <p:nvPr/>
-        </p:nvSpPr>
-        <p:spPr>
-          <a:xfrm>
-            <a:off x="640080" y="6446520"/>
-            <a:ext cx="8686800" cy="292608"/>
-          </a:xfrm>
-          <a:prstGeom prst="rect">
-            <a:avLst/>
-          </a:prstGeom>
-          <a:noFill/>
-          <a:ln/>
-        </p:spPr>
-        <p:txBody>
-          <a:bodyPr wrap="square" lIns="0" tIns="0" rIns="0" bIns="0" rtlCol="0" anchor="ctr"/>
-          <a:lstStyle/>
-          <a:p>
-            <a:pPr algn="l" indent="0" marL="0">
-              <a:buNone/>
-            </a:pPr>
-            <a:r>
-              <a:rPr lang="en-US" sz="900" dirty="0">
-                <a:solidFill>
-                  <a:srgbClr val="5D5D72"/>
-                </a:solidFill>
-                <a:latin typeface="Calibri" pitchFamily="34" charset="0"/>
-                <a:ea typeface="Calibri" pitchFamily="34" charset="-122"/>
-                <a:cs typeface="Calibri" pitchFamily="34" charset="-120"/>
-              </a:rPr>
-              <a:t>Usman Akram  •  COMSATS University Islamabad</a:t>
-            </a:r>
-            <a:endParaRPr lang="en-US" sz="900" dirty="0"/>
-          </a:p>
-        </p:txBody>
-      </p:sp>
-      <p:sp>
-        <p:nvSpPr>
-          <p:cNvPr id="8" name="Text 6"/>
-          <p:cNvSpPr txBox="1"/>
-          <p:nvPr/>
-        </p:nvSpPr>
-        <p:spPr>
-          <a:xfrm>
-            <a:off x="11155680" y="6446520"/>
-            <a:ext cx="457200" cy="292608"/>
-          </a:xfrm>
-          <a:prstGeom prst="rect">
-            <a:avLst/>
-          </a:prstGeom>
-          <a:noFill/>
-          <a:ln/>
-        </p:spPr>
-        <p:txBody>
-          <a:bodyPr wrap="square" lIns="0" tIns="0" rIns="0" bIns="0" rtlCol="0" anchor="ctr"/>
-          <a:lstStyle/>
-          <a:p>
-            <a:pPr algn="r" indent="0" marL="0">
-              <a:buNone/>
-            </a:pPr>
-            <a:r>
-              <a:rPr lang="en-US" sz="900" dirty="0">
-                <a:solidFill>
-                  <a:srgbClr val="5D5D72"/>
-                </a:solidFill>
-                <a:latin typeface="Calibri" pitchFamily="34" charset="0"/>
-                <a:ea typeface="Calibri" pitchFamily="34" charset="-122"/>
-                <a:cs typeface="Calibri" pitchFamily="34" charset="-120"/>
-              </a:rPr>
-              <a:t>36</a:t>
-            </a:r>
-            <a:endParaRPr lang="en-US" sz="900" dirty="0"/>
+          <p:cNvPr id="9" name="cuinotes-footer-mark"/>
+          <p:cNvSpPr txBox="1"/>
+          <p:nvPr/>
+        </p:nvSpPr>
+        <p:spPr>
+          <a:xfrm>
+            <a:off x="9951720" y="6455664"/>
+            <a:ext cx="2011680" cy="292608"/>
+          </a:xfrm>
+          <a:prstGeom prst="rect">
+            <a:avLst/>
+          </a:prstGeom>
+          <a:noFill/>
+        </p:spPr>
+        <p:txBody>
+          <a:bodyPr wrap="none" lIns="0" rIns="0" tIns="0" bIns="0">
+            <a:spAutoFit/>
+          </a:bodyPr>
+          <a:lstStyle/>
+          <a:p>
+            <a:pPr algn="r"/>
+            <a:r>
+              <a:rPr sz="1000">
+                <a:solidFill>
+                  <a:srgbClr val="8A939B"/>
+                </a:solidFill>
+                <a:hlinkClick r:id="rId3"/>
+              </a:rPr>
+              <a:t>cuinotes.com</a:t>
+            </a:r>
+            <a:r>
+              <a:rPr sz="1000">
+                <a:solidFill>
+                  <a:srgbClr val="8A939B"/>
+                </a:solidFill>
+              </a:rPr>
+              <a:t>  ·  36</a:t>
+            </a:r>
           </a:p>
         </p:txBody>
       </p:sp>
@@ -18171,6 +17273,10 @@
           </a:solidFill>
           <a:ln/>
         </p:spPr>
+        <p:txBody>
+          <a:bodyPr/>
+          <a:p/>
+        </p:txBody>
       </p:sp>
       <p:sp>
         <p:nvSpPr>
@@ -18404,79 +17510,44 @@
       </p:sp>
       <p:sp>
         <p:nvSpPr>
-          <p:cNvPr id="7" name="Text 5"/>
-          <p:cNvSpPr txBox="1"/>
-          <p:nvPr/>
-        </p:nvSpPr>
-        <p:spPr>
-          <a:xfrm>
-            <a:off x="640080" y="6446520"/>
-            <a:ext cx="8686800" cy="292608"/>
-          </a:xfrm>
-          <a:prstGeom prst="rect">
-            <a:avLst/>
-          </a:prstGeom>
-          <a:noFill/>
-          <a:ln/>
-        </p:spPr>
-        <p:txBody>
-          <a:bodyPr wrap="square" lIns="0" tIns="0" rIns="0" bIns="0" rtlCol="0" anchor="ctr"/>
-          <a:lstStyle/>
-          <a:p>
-            <a:pPr algn="l" indent="0" marL="0">
-              <a:buNone/>
-            </a:pPr>
-            <a:r>
-              <a:rPr lang="en-US" sz="900" dirty="0">
-                <a:solidFill>
-                  <a:srgbClr val="5D5D72"/>
-                </a:solidFill>
-                <a:latin typeface="Calibri" pitchFamily="34" charset="0"/>
-                <a:ea typeface="Calibri" pitchFamily="34" charset="-122"/>
-                <a:cs typeface="Calibri" pitchFamily="34" charset="-120"/>
-              </a:rPr>
-              <a:t>Usman Akram  •  COMSATS University Islamabad</a:t>
-            </a:r>
-            <a:endParaRPr lang="en-US" sz="900" dirty="0"/>
-          </a:p>
-        </p:txBody>
-      </p:sp>
-      <p:sp>
-        <p:nvSpPr>
-          <p:cNvPr id="8" name="Text 6"/>
-          <p:cNvSpPr txBox="1"/>
-          <p:nvPr/>
-        </p:nvSpPr>
-        <p:spPr>
-          <a:xfrm>
-            <a:off x="11155680" y="6446520"/>
-            <a:ext cx="457200" cy="292608"/>
-          </a:xfrm>
-          <a:prstGeom prst="rect">
-            <a:avLst/>
-          </a:prstGeom>
-          <a:noFill/>
-          <a:ln/>
-        </p:spPr>
-        <p:txBody>
-          <a:bodyPr wrap="square" lIns="0" tIns="0" rIns="0" bIns="0" rtlCol="0" anchor="ctr"/>
-          <a:lstStyle/>
-          <a:p>
-            <a:pPr algn="r" indent="0" marL="0">
-              <a:buNone/>
-            </a:pPr>
-            <a:r>
-              <a:rPr lang="en-US" sz="900" dirty="0">
-                <a:solidFill>
-                  <a:srgbClr val="5D5D72"/>
-                </a:solidFill>
-                <a:latin typeface="Calibri" pitchFamily="34" charset="0"/>
-                <a:ea typeface="Calibri" pitchFamily="34" charset="-122"/>
-                <a:cs typeface="Calibri" pitchFamily="34" charset="-120"/>
-              </a:rPr>
-              <a:t>37</a:t>
-            </a:r>
-            <a:endParaRPr lang="en-US" sz="900" dirty="0"/>
+          <p:cNvPr id="9" name="cuinotes-footer-mark"/>
+          <p:cNvSpPr txBox="1"/>
+          <p:nvPr/>
+        </p:nvSpPr>
+        <p:spPr>
+          <a:xfrm>
+            <a:off x="9951720" y="6455664"/>
+            <a:ext cx="2011680" cy="292608"/>
+          </a:xfrm>
+          <a:prstGeom prst="rect">
+            <a:avLst/>
+          </a:prstGeom>
+          <a:noFill/>
+        </p:spPr>
+        <p:txBody>
+          <a:bodyPr wrap="none" lIns="0" rIns="0" tIns="0" bIns="0">
+            <a:spAutoFit/>
+          </a:bodyPr>
+          <a:lstStyle/>
+          <a:p>
+            <a:pPr algn="r"/>
+            <a:r>
+              <a:rPr sz="1000">
+                <a:solidFill>
+                  <a:srgbClr val="8A939B"/>
+                </a:solidFill>
+                <a:hlinkClick r:id="rId3"/>
+              </a:rPr>
+              <a:t>cuinotes.com</a:t>
+            </a:r>
+            <a:r>
+              <a:rPr sz="1000">
+                <a:solidFill>
+                  <a:srgbClr val="8A939B"/>
+                </a:solidFill>
+              </a:rPr>
+              <a:t>  ·  37</a:t>
+            </a:r>
           </a:p>
         </p:txBody>
       </p:sp>
@@ -18616,6 +17687,10 @@
             <a:prstDash val="solid"/>
           </a:ln>
         </p:spPr>
+        <p:txBody>
+          <a:bodyPr/>
+          <a:p/>
+        </p:txBody>
       </p:sp>
       <p:sp>
         <p:nvSpPr>
@@ -18697,79 +17772,44 @@
       </p:sp>
       <p:sp>
         <p:nvSpPr>
-          <p:cNvPr id="7" name="Text 5"/>
-          <p:cNvSpPr txBox="1"/>
-          <p:nvPr/>
-        </p:nvSpPr>
-        <p:spPr>
-          <a:xfrm>
-            <a:off x="640080" y="6446520"/>
-            <a:ext cx="8686800" cy="292608"/>
-          </a:xfrm>
-          <a:prstGeom prst="rect">
-            <a:avLst/>
-          </a:prstGeom>
-          <a:noFill/>
-          <a:ln/>
-        </p:spPr>
-        <p:txBody>
-          <a:bodyPr wrap="square" lIns="0" tIns="0" rIns="0" bIns="0" rtlCol="0" anchor="ctr"/>
-          <a:lstStyle/>
-          <a:p>
-            <a:pPr algn="l" indent="0" marL="0">
-              <a:buNone/>
-            </a:pPr>
-            <a:r>
-              <a:rPr lang="en-US" sz="900" dirty="0">
-                <a:solidFill>
-                  <a:srgbClr val="5D5D72"/>
-                </a:solidFill>
-                <a:latin typeface="Calibri" pitchFamily="34" charset="0"/>
-                <a:ea typeface="Calibri" pitchFamily="34" charset="-122"/>
-                <a:cs typeface="Calibri" pitchFamily="34" charset="-120"/>
-              </a:rPr>
-              <a:t>Usman Akram  •  COMSATS University Islamabad</a:t>
-            </a:r>
-            <a:endParaRPr lang="en-US" sz="900" dirty="0"/>
-          </a:p>
-        </p:txBody>
-      </p:sp>
-      <p:sp>
-        <p:nvSpPr>
-          <p:cNvPr id="8" name="Text 6"/>
-          <p:cNvSpPr txBox="1"/>
-          <p:nvPr/>
-        </p:nvSpPr>
-        <p:spPr>
-          <a:xfrm>
-            <a:off x="11155680" y="6446520"/>
-            <a:ext cx="457200" cy="292608"/>
-          </a:xfrm>
-          <a:prstGeom prst="rect">
-            <a:avLst/>
-          </a:prstGeom>
-          <a:noFill/>
-          <a:ln/>
-        </p:spPr>
-        <p:txBody>
-          <a:bodyPr wrap="square" lIns="0" tIns="0" rIns="0" bIns="0" rtlCol="0" anchor="ctr"/>
-          <a:lstStyle/>
-          <a:p>
-            <a:pPr algn="r" indent="0" marL="0">
-              <a:buNone/>
-            </a:pPr>
-            <a:r>
-              <a:rPr lang="en-US" sz="900" dirty="0">
-                <a:solidFill>
-                  <a:srgbClr val="5D5D72"/>
-                </a:solidFill>
-                <a:latin typeface="Calibri" pitchFamily="34" charset="0"/>
-                <a:ea typeface="Calibri" pitchFamily="34" charset="-122"/>
-                <a:cs typeface="Calibri" pitchFamily="34" charset="-120"/>
-              </a:rPr>
-              <a:t>38</a:t>
-            </a:r>
-            <a:endParaRPr lang="en-US" sz="900" dirty="0"/>
+          <p:cNvPr id="9" name="cuinotes-footer-mark"/>
+          <p:cNvSpPr txBox="1"/>
+          <p:nvPr/>
+        </p:nvSpPr>
+        <p:spPr>
+          <a:xfrm>
+            <a:off x="9951720" y="6455664"/>
+            <a:ext cx="2011680" cy="292608"/>
+          </a:xfrm>
+          <a:prstGeom prst="rect">
+            <a:avLst/>
+          </a:prstGeom>
+          <a:noFill/>
+        </p:spPr>
+        <p:txBody>
+          <a:bodyPr wrap="none" lIns="0" rIns="0" tIns="0" bIns="0">
+            <a:spAutoFit/>
+          </a:bodyPr>
+          <a:lstStyle/>
+          <a:p>
+            <a:pPr algn="r"/>
+            <a:r>
+              <a:rPr sz="1000">
+                <a:solidFill>
+                  <a:srgbClr val="8A939B"/>
+                </a:solidFill>
+                <a:hlinkClick r:id="rId3"/>
+              </a:rPr>
+              <a:t>cuinotes.com</a:t>
+            </a:r>
+            <a:r>
+              <a:rPr sz="1000">
+                <a:solidFill>
+                  <a:srgbClr val="8A939B"/>
+                </a:solidFill>
+              </a:rPr>
+              <a:t>  ·  38</a:t>
+            </a:r>
           </a:p>
         </p:txBody>
       </p:sp>
@@ -18902,6 +17942,10 @@
           </a:solidFill>
           <a:ln/>
         </p:spPr>
+        <p:txBody>
+          <a:bodyPr/>
+          <a:p/>
+        </p:txBody>
       </p:sp>
       <p:sp>
         <p:nvSpPr>
@@ -19000,6 +18044,10 @@
           </a:solidFill>
           <a:ln/>
         </p:spPr>
+        <p:txBody>
+          <a:bodyPr/>
+          <a:p/>
+        </p:txBody>
       </p:sp>
       <p:sp>
         <p:nvSpPr>
@@ -19098,6 +18146,10 @@
           </a:solidFill>
           <a:ln/>
         </p:spPr>
+        <p:txBody>
+          <a:bodyPr/>
+          <a:p/>
+        </p:txBody>
       </p:sp>
       <p:sp>
         <p:nvSpPr>
@@ -19196,6 +18248,10 @@
           </a:solidFill>
           <a:ln/>
         </p:spPr>
+        <p:txBody>
+          <a:bodyPr/>
+          <a:p/>
+        </p:txBody>
       </p:sp>
       <p:sp>
         <p:nvSpPr>
@@ -19294,6 +18350,10 @@
           </a:solidFill>
           <a:ln/>
         </p:spPr>
+        <p:txBody>
+          <a:bodyPr/>
+          <a:p/>
+        </p:txBody>
       </p:sp>
       <p:sp>
         <p:nvSpPr>
@@ -19392,6 +18452,10 @@
           </a:solidFill>
           <a:ln/>
         </p:spPr>
+        <p:txBody>
+          <a:bodyPr/>
+          <a:p/>
+        </p:txBody>
       </p:sp>
       <p:sp>
         <p:nvSpPr>
@@ -19490,6 +18554,10 @@
           </a:solidFill>
           <a:ln/>
         </p:spPr>
+        <p:txBody>
+          <a:bodyPr/>
+          <a:p/>
+        </p:txBody>
       </p:sp>
       <p:sp>
         <p:nvSpPr>
@@ -19571,79 +18639,44 @@
       </p:sp>
       <p:sp>
         <p:nvSpPr>
-          <p:cNvPr id="25" name="Text 23"/>
-          <p:cNvSpPr txBox="1"/>
-          <p:nvPr/>
-        </p:nvSpPr>
-        <p:spPr>
-          <a:xfrm>
-            <a:off x="640080" y="6446520"/>
-            <a:ext cx="8686800" cy="292608"/>
-          </a:xfrm>
-          <a:prstGeom prst="rect">
-            <a:avLst/>
-          </a:prstGeom>
-          <a:noFill/>
-          <a:ln/>
-        </p:spPr>
-        <p:txBody>
-          <a:bodyPr wrap="square" lIns="0" tIns="0" rIns="0" bIns="0" rtlCol="0" anchor="ctr"/>
-          <a:lstStyle/>
-          <a:p>
-            <a:pPr algn="l" indent="0" marL="0">
-              <a:buNone/>
-            </a:pPr>
-            <a:r>
-              <a:rPr lang="en-US" sz="900" dirty="0">
-                <a:solidFill>
-                  <a:srgbClr val="9AA3D8"/>
-                </a:solidFill>
-                <a:latin typeface="Calibri" pitchFamily="34" charset="0"/>
-                <a:ea typeface="Calibri" pitchFamily="34" charset="-122"/>
-                <a:cs typeface="Calibri" pitchFamily="34" charset="-120"/>
-              </a:rPr>
-              <a:t>Usman Akram  •  COMSATS University Islamabad</a:t>
-            </a:r>
-            <a:endParaRPr lang="en-US" sz="900" dirty="0"/>
-          </a:p>
-        </p:txBody>
-      </p:sp>
-      <p:sp>
-        <p:nvSpPr>
-          <p:cNvPr id="26" name="Text 24"/>
-          <p:cNvSpPr txBox="1"/>
-          <p:nvPr/>
-        </p:nvSpPr>
-        <p:spPr>
-          <a:xfrm>
-            <a:off x="11155680" y="6446520"/>
-            <a:ext cx="457200" cy="292608"/>
-          </a:xfrm>
-          <a:prstGeom prst="rect">
-            <a:avLst/>
-          </a:prstGeom>
-          <a:noFill/>
-          <a:ln/>
-        </p:spPr>
-        <p:txBody>
-          <a:bodyPr wrap="square" lIns="0" tIns="0" rIns="0" bIns="0" rtlCol="0" anchor="ctr"/>
-          <a:lstStyle/>
-          <a:p>
-            <a:pPr algn="r" indent="0" marL="0">
-              <a:buNone/>
-            </a:pPr>
-            <a:r>
-              <a:rPr lang="en-US" sz="900" dirty="0">
-                <a:solidFill>
-                  <a:srgbClr val="9AA3D8"/>
-                </a:solidFill>
-                <a:latin typeface="Calibri" pitchFamily="34" charset="0"/>
-                <a:ea typeface="Calibri" pitchFamily="34" charset="-122"/>
-                <a:cs typeface="Calibri" pitchFamily="34" charset="-120"/>
-              </a:rPr>
-              <a:t>39</a:t>
-            </a:r>
-            <a:endParaRPr lang="en-US" sz="900" dirty="0"/>
+          <p:cNvPr id="27" name="cuinotes-footer-mark"/>
+          <p:cNvSpPr txBox="1"/>
+          <p:nvPr/>
+        </p:nvSpPr>
+        <p:spPr>
+          <a:xfrm>
+            <a:off x="9951720" y="6455664"/>
+            <a:ext cx="2011680" cy="292608"/>
+          </a:xfrm>
+          <a:prstGeom prst="rect">
+            <a:avLst/>
+          </a:prstGeom>
+          <a:noFill/>
+        </p:spPr>
+        <p:txBody>
+          <a:bodyPr wrap="none" lIns="0" rIns="0" tIns="0" bIns="0">
+            <a:spAutoFit/>
+          </a:bodyPr>
+          <a:lstStyle/>
+          <a:p>
+            <a:pPr algn="r"/>
+            <a:r>
+              <a:rPr sz="1000">
+                <a:solidFill>
+                  <a:srgbClr val="8A939B"/>
+                </a:solidFill>
+                <a:hlinkClick r:id="rId3"/>
+              </a:rPr>
+              <a:t>cuinotes.com</a:t>
+            </a:r>
+            <a:r>
+              <a:rPr sz="1000">
+                <a:solidFill>
+                  <a:srgbClr val="8A939B"/>
+                </a:solidFill>
+              </a:rPr>
+              <a:t>  ·  39</a:t>
+            </a:r>
           </a:p>
         </p:txBody>
       </p:sp>
@@ -19778,6 +18811,10 @@
           </a:solidFill>
           <a:ln/>
         </p:spPr>
+        <p:txBody>
+          <a:bodyPr/>
+          <a:p/>
+        </p:txBody>
       </p:sp>
       <p:sp>
         <p:nvSpPr>
@@ -20020,79 +19057,44 @@
       </p:sp>
       <p:sp>
         <p:nvSpPr>
-          <p:cNvPr id="7" name="Text 5"/>
-          <p:cNvSpPr txBox="1"/>
-          <p:nvPr/>
-        </p:nvSpPr>
-        <p:spPr>
-          <a:xfrm>
-            <a:off x="640080" y="6446520"/>
-            <a:ext cx="8686800" cy="292608"/>
-          </a:xfrm>
-          <a:prstGeom prst="rect">
-            <a:avLst/>
-          </a:prstGeom>
-          <a:noFill/>
-          <a:ln/>
-        </p:spPr>
-        <p:txBody>
-          <a:bodyPr wrap="square" lIns="0" tIns="0" rIns="0" bIns="0" rtlCol="0" anchor="ctr"/>
-          <a:lstStyle/>
-          <a:p>
-            <a:pPr algn="l" indent="0" marL="0">
-              <a:buNone/>
-            </a:pPr>
-            <a:r>
-              <a:rPr lang="en-US" sz="900" dirty="0">
-                <a:solidFill>
-                  <a:srgbClr val="5D5D72"/>
-                </a:solidFill>
-                <a:latin typeface="Calibri" pitchFamily="34" charset="0"/>
-                <a:ea typeface="Calibri" pitchFamily="34" charset="-122"/>
-                <a:cs typeface="Calibri" pitchFamily="34" charset="-120"/>
-              </a:rPr>
-              <a:t>Usman Akram  •  COMSATS University Islamabad</a:t>
-            </a:r>
-            <a:endParaRPr lang="en-US" sz="900" dirty="0"/>
-          </a:p>
-        </p:txBody>
-      </p:sp>
-      <p:sp>
-        <p:nvSpPr>
-          <p:cNvPr id="8" name="Text 6"/>
-          <p:cNvSpPr txBox="1"/>
-          <p:nvPr/>
-        </p:nvSpPr>
-        <p:spPr>
-          <a:xfrm>
-            <a:off x="11155680" y="6446520"/>
-            <a:ext cx="457200" cy="292608"/>
-          </a:xfrm>
-          <a:prstGeom prst="rect">
-            <a:avLst/>
-          </a:prstGeom>
-          <a:noFill/>
-          <a:ln/>
-        </p:spPr>
-        <p:txBody>
-          <a:bodyPr wrap="square" lIns="0" tIns="0" rIns="0" bIns="0" rtlCol="0" anchor="ctr"/>
-          <a:lstStyle/>
-          <a:p>
-            <a:pPr algn="r" indent="0" marL="0">
-              <a:buNone/>
-            </a:pPr>
-            <a:r>
-              <a:rPr lang="en-US" sz="900" dirty="0">
-                <a:solidFill>
-                  <a:srgbClr val="5D5D72"/>
-                </a:solidFill>
-                <a:latin typeface="Calibri" pitchFamily="34" charset="0"/>
-                <a:ea typeface="Calibri" pitchFamily="34" charset="-122"/>
-                <a:cs typeface="Calibri" pitchFamily="34" charset="-120"/>
-              </a:rPr>
-              <a:t>4</a:t>
-            </a:r>
-            <a:endParaRPr lang="en-US" sz="900" dirty="0"/>
+          <p:cNvPr id="9" name="cuinotes-footer-mark"/>
+          <p:cNvSpPr txBox="1"/>
+          <p:nvPr/>
+        </p:nvSpPr>
+        <p:spPr>
+          <a:xfrm>
+            <a:off x="9951720" y="6455664"/>
+            <a:ext cx="2011680" cy="292608"/>
+          </a:xfrm>
+          <a:prstGeom prst="rect">
+            <a:avLst/>
+          </a:prstGeom>
+          <a:noFill/>
+        </p:spPr>
+        <p:txBody>
+          <a:bodyPr wrap="none" lIns="0" rIns="0" tIns="0" bIns="0">
+            <a:spAutoFit/>
+          </a:bodyPr>
+          <a:lstStyle/>
+          <a:p>
+            <a:pPr algn="r"/>
+            <a:r>
+              <a:rPr sz="1000">
+                <a:solidFill>
+                  <a:srgbClr val="8A939B"/>
+                </a:solidFill>
+                <a:hlinkClick r:id="rId3"/>
+              </a:rPr>
+              <a:t>cuinotes.com</a:t>
+            </a:r>
+            <a:r>
+              <a:rPr sz="1000">
+                <a:solidFill>
+                  <a:srgbClr val="8A939B"/>
+                </a:solidFill>
+              </a:rPr>
+              <a:t>  ·  4</a:t>
+            </a:r>
           </a:p>
         </p:txBody>
       </p:sp>
@@ -20227,6 +19229,10 @@
           </a:solidFill>
           <a:ln/>
         </p:spPr>
+        <p:txBody>
+          <a:bodyPr/>
+          <a:p/>
+        </p:txBody>
       </p:sp>
       <p:sp>
         <p:nvSpPr>
@@ -20331,79 +19337,44 @@
       </p:sp>
       <p:sp>
         <p:nvSpPr>
-          <p:cNvPr id="7" name="Text 5"/>
-          <p:cNvSpPr txBox="1"/>
-          <p:nvPr/>
-        </p:nvSpPr>
-        <p:spPr>
-          <a:xfrm>
-            <a:off x="640080" y="6446520"/>
-            <a:ext cx="8686800" cy="292608"/>
-          </a:xfrm>
-          <a:prstGeom prst="rect">
-            <a:avLst/>
-          </a:prstGeom>
-          <a:noFill/>
-          <a:ln/>
-        </p:spPr>
-        <p:txBody>
-          <a:bodyPr wrap="square" lIns="0" tIns="0" rIns="0" bIns="0" rtlCol="0" anchor="ctr"/>
-          <a:lstStyle/>
-          <a:p>
-            <a:pPr algn="l" indent="0" marL="0">
-              <a:buNone/>
-            </a:pPr>
-            <a:r>
-              <a:rPr lang="en-US" sz="900" dirty="0">
-                <a:solidFill>
-                  <a:srgbClr val="5D5D72"/>
-                </a:solidFill>
-                <a:latin typeface="Calibri" pitchFamily="34" charset="0"/>
-                <a:ea typeface="Calibri" pitchFamily="34" charset="-122"/>
-                <a:cs typeface="Calibri" pitchFamily="34" charset="-120"/>
-              </a:rPr>
-              <a:t>Usman Akram  •  COMSATS University Islamabad</a:t>
-            </a:r>
-            <a:endParaRPr lang="en-US" sz="900" dirty="0"/>
-          </a:p>
-        </p:txBody>
-      </p:sp>
-      <p:sp>
-        <p:nvSpPr>
-          <p:cNvPr id="8" name="Text 6"/>
-          <p:cNvSpPr txBox="1"/>
-          <p:nvPr/>
-        </p:nvSpPr>
-        <p:spPr>
-          <a:xfrm>
-            <a:off x="11155680" y="6446520"/>
-            <a:ext cx="457200" cy="292608"/>
-          </a:xfrm>
-          <a:prstGeom prst="rect">
-            <a:avLst/>
-          </a:prstGeom>
-          <a:noFill/>
-          <a:ln/>
-        </p:spPr>
-        <p:txBody>
-          <a:bodyPr wrap="square" lIns="0" tIns="0" rIns="0" bIns="0" rtlCol="0" anchor="ctr"/>
-          <a:lstStyle/>
-          <a:p>
-            <a:pPr algn="r" indent="0" marL="0">
-              <a:buNone/>
-            </a:pPr>
-            <a:r>
-              <a:rPr lang="en-US" sz="900" dirty="0">
-                <a:solidFill>
-                  <a:srgbClr val="5D5D72"/>
-                </a:solidFill>
-                <a:latin typeface="Calibri" pitchFamily="34" charset="0"/>
-                <a:ea typeface="Calibri" pitchFamily="34" charset="-122"/>
-                <a:cs typeface="Calibri" pitchFamily="34" charset="-120"/>
-              </a:rPr>
-              <a:t>5</a:t>
-            </a:r>
-            <a:endParaRPr lang="en-US" sz="900" dirty="0"/>
+          <p:cNvPr id="9" name="cuinotes-footer-mark"/>
+          <p:cNvSpPr txBox="1"/>
+          <p:nvPr/>
+        </p:nvSpPr>
+        <p:spPr>
+          <a:xfrm>
+            <a:off x="9951720" y="6455664"/>
+            <a:ext cx="2011680" cy="292608"/>
+          </a:xfrm>
+          <a:prstGeom prst="rect">
+            <a:avLst/>
+          </a:prstGeom>
+          <a:noFill/>
+        </p:spPr>
+        <p:txBody>
+          <a:bodyPr wrap="none" lIns="0" rIns="0" tIns="0" bIns="0">
+            <a:spAutoFit/>
+          </a:bodyPr>
+          <a:lstStyle/>
+          <a:p>
+            <a:pPr algn="r"/>
+            <a:r>
+              <a:rPr sz="1000">
+                <a:solidFill>
+                  <a:srgbClr val="8A939B"/>
+                </a:solidFill>
+                <a:hlinkClick r:id="rId3"/>
+              </a:rPr>
+              <a:t>cuinotes.com</a:t>
+            </a:r>
+            <a:r>
+              <a:rPr sz="1000">
+                <a:solidFill>
+                  <a:srgbClr val="8A939B"/>
+                </a:solidFill>
+              </a:rPr>
+              <a:t>  ·  5</a:t>
+            </a:r>
           </a:p>
         </p:txBody>
       </p:sp>
@@ -20538,6 +19509,10 @@
           </a:solidFill>
           <a:ln/>
         </p:spPr>
+        <p:txBody>
+          <a:bodyPr/>
+          <a:p/>
+        </p:txBody>
       </p:sp>
       <p:sp>
         <p:nvSpPr>
@@ -20618,6 +19593,10 @@
             <a:tailEnd type="triangle"/>
           </a:ln>
         </p:spPr>
+        <p:txBody>
+          <a:bodyPr/>
+          <a:p/>
+        </p:txBody>
       </p:sp>
       <p:sp>
         <p:nvSpPr>
@@ -20640,6 +19619,10 @@
           </a:solidFill>
           <a:ln/>
         </p:spPr>
+        <p:txBody>
+          <a:bodyPr/>
+          <a:p/>
+        </p:txBody>
       </p:sp>
       <p:sp>
         <p:nvSpPr>
@@ -20720,6 +19703,10 @@
             <a:tailEnd type="triangle"/>
           </a:ln>
         </p:spPr>
+        <p:txBody>
+          <a:bodyPr/>
+          <a:p/>
+        </p:txBody>
       </p:sp>
       <p:sp>
         <p:nvSpPr>
@@ -20742,6 +19729,10 @@
           </a:solidFill>
           <a:ln/>
         </p:spPr>
+        <p:txBody>
+          <a:bodyPr/>
+          <a:p/>
+        </p:txBody>
       </p:sp>
       <p:sp>
         <p:nvSpPr>
@@ -20822,6 +19813,10 @@
             <a:tailEnd type="triangle"/>
           </a:ln>
         </p:spPr>
+        <p:txBody>
+          <a:bodyPr/>
+          <a:p/>
+        </p:txBody>
       </p:sp>
       <p:sp>
         <p:nvSpPr>
@@ -20844,6 +19839,10 @@
           </a:solidFill>
           <a:ln/>
         </p:spPr>
+        <p:txBody>
+          <a:bodyPr/>
+          <a:p/>
+        </p:txBody>
       </p:sp>
       <p:sp>
         <p:nvSpPr>
@@ -20942,79 +19941,44 @@
       </p:sp>
       <p:sp>
         <p:nvSpPr>
-          <p:cNvPr id="16" name="Text 14"/>
-          <p:cNvSpPr txBox="1"/>
-          <p:nvPr/>
-        </p:nvSpPr>
-        <p:spPr>
-          <a:xfrm>
-            <a:off x="640080" y="6446520"/>
-            <a:ext cx="8686800" cy="292608"/>
-          </a:xfrm>
-          <a:prstGeom prst="rect">
-            <a:avLst/>
-          </a:prstGeom>
-          <a:noFill/>
-          <a:ln/>
-        </p:spPr>
-        <p:txBody>
-          <a:bodyPr wrap="square" lIns="0" tIns="0" rIns="0" bIns="0" rtlCol="0" anchor="ctr"/>
-          <a:lstStyle/>
-          <a:p>
-            <a:pPr algn="l" indent="0" marL="0">
-              <a:buNone/>
-            </a:pPr>
-            <a:r>
-              <a:rPr lang="en-US" sz="900" dirty="0">
-                <a:solidFill>
-                  <a:srgbClr val="5D5D72"/>
-                </a:solidFill>
-                <a:latin typeface="Calibri" pitchFamily="34" charset="0"/>
-                <a:ea typeface="Calibri" pitchFamily="34" charset="-122"/>
-                <a:cs typeface="Calibri" pitchFamily="34" charset="-120"/>
-              </a:rPr>
-              <a:t>Usman Akram  •  COMSATS University Islamabad</a:t>
-            </a:r>
-            <a:endParaRPr lang="en-US" sz="900" dirty="0"/>
-          </a:p>
-        </p:txBody>
-      </p:sp>
-      <p:sp>
-        <p:nvSpPr>
-          <p:cNvPr id="17" name="Text 15"/>
-          <p:cNvSpPr txBox="1"/>
-          <p:nvPr/>
-        </p:nvSpPr>
-        <p:spPr>
-          <a:xfrm>
-            <a:off x="11155680" y="6446520"/>
-            <a:ext cx="457200" cy="292608"/>
-          </a:xfrm>
-          <a:prstGeom prst="rect">
-            <a:avLst/>
-          </a:prstGeom>
-          <a:noFill/>
-          <a:ln/>
-        </p:spPr>
-        <p:txBody>
-          <a:bodyPr wrap="square" lIns="0" tIns="0" rIns="0" bIns="0" rtlCol="0" anchor="ctr"/>
-          <a:lstStyle/>
-          <a:p>
-            <a:pPr algn="r" indent="0" marL="0">
-              <a:buNone/>
-            </a:pPr>
-            <a:r>
-              <a:rPr lang="en-US" sz="900" dirty="0">
-                <a:solidFill>
-                  <a:srgbClr val="5D5D72"/>
-                </a:solidFill>
-                <a:latin typeface="Calibri" pitchFamily="34" charset="0"/>
-                <a:ea typeface="Calibri" pitchFamily="34" charset="-122"/>
-                <a:cs typeface="Calibri" pitchFamily="34" charset="-120"/>
-              </a:rPr>
-              <a:t>6</a:t>
-            </a:r>
-            <a:endParaRPr lang="en-US" sz="900" dirty="0"/>
+          <p:cNvPr id="18" name="cuinotes-footer-mark"/>
+          <p:cNvSpPr txBox="1"/>
+          <p:nvPr/>
+        </p:nvSpPr>
+        <p:spPr>
+          <a:xfrm>
+            <a:off x="9951720" y="6455664"/>
+            <a:ext cx="2011680" cy="292608"/>
+          </a:xfrm>
+          <a:prstGeom prst="rect">
+            <a:avLst/>
+          </a:prstGeom>
+          <a:noFill/>
+        </p:spPr>
+        <p:txBody>
+          <a:bodyPr wrap="none" lIns="0" rIns="0" tIns="0" bIns="0">
+            <a:spAutoFit/>
+          </a:bodyPr>
+          <a:lstStyle/>
+          <a:p>
+            <a:pPr algn="r"/>
+            <a:r>
+              <a:rPr sz="1000">
+                <a:solidFill>
+                  <a:srgbClr val="8A939B"/>
+                </a:solidFill>
+                <a:hlinkClick r:id="rId3"/>
+              </a:rPr>
+              <a:t>cuinotes.com</a:t>
+            </a:r>
+            <a:r>
+              <a:rPr sz="1000">
+                <a:solidFill>
+                  <a:srgbClr val="8A939B"/>
+                </a:solidFill>
+              </a:rPr>
+              <a:t>  ·  6</a:t>
+            </a:r>
           </a:p>
         </p:txBody>
       </p:sp>
@@ -21149,6 +20113,10 @@
           </a:solidFill>
           <a:ln/>
         </p:spPr>
+        <p:txBody>
+          <a:bodyPr/>
+          <a:p/>
+        </p:txBody>
       </p:sp>
       <p:sp>
         <p:nvSpPr>
@@ -21229,6 +20197,10 @@
             <a:tailEnd type="triangle"/>
           </a:ln>
         </p:spPr>
+        <p:txBody>
+          <a:bodyPr/>
+          <a:p/>
+        </p:txBody>
       </p:sp>
       <p:sp>
         <p:nvSpPr>
@@ -21251,6 +20223,10 @@
           </a:solidFill>
           <a:ln/>
         </p:spPr>
+        <p:txBody>
+          <a:bodyPr/>
+          <a:p/>
+        </p:txBody>
       </p:sp>
       <p:sp>
         <p:nvSpPr>
@@ -21331,6 +20307,10 @@
             <a:tailEnd type="triangle"/>
           </a:ln>
         </p:spPr>
+        <p:txBody>
+          <a:bodyPr/>
+          <a:p/>
+        </p:txBody>
       </p:sp>
       <p:sp>
         <p:nvSpPr>
@@ -21353,6 +20333,10 @@
           </a:solidFill>
           <a:ln/>
         </p:spPr>
+        <p:txBody>
+          <a:bodyPr/>
+          <a:p/>
+        </p:txBody>
       </p:sp>
       <p:sp>
         <p:nvSpPr>
@@ -21433,6 +20417,10 @@
             <a:tailEnd type="triangle"/>
           </a:ln>
         </p:spPr>
+        <p:txBody>
+          <a:bodyPr/>
+          <a:p/>
+        </p:txBody>
       </p:sp>
       <p:sp>
         <p:nvSpPr>
@@ -21455,6 +20443,10 @@
           </a:solidFill>
           <a:ln/>
         </p:spPr>
+        <p:txBody>
+          <a:bodyPr/>
+          <a:p/>
+        </p:txBody>
       </p:sp>
       <p:sp>
         <p:nvSpPr>
@@ -21553,79 +20545,44 @@
       </p:sp>
       <p:sp>
         <p:nvSpPr>
-          <p:cNvPr id="16" name="Text 14"/>
-          <p:cNvSpPr txBox="1"/>
-          <p:nvPr/>
-        </p:nvSpPr>
-        <p:spPr>
-          <a:xfrm>
-            <a:off x="640080" y="6446520"/>
-            <a:ext cx="8686800" cy="292608"/>
-          </a:xfrm>
-          <a:prstGeom prst="rect">
-            <a:avLst/>
-          </a:prstGeom>
-          <a:noFill/>
-          <a:ln/>
-        </p:spPr>
-        <p:txBody>
-          <a:bodyPr wrap="square" lIns="0" tIns="0" rIns="0" bIns="0" rtlCol="0" anchor="ctr"/>
-          <a:lstStyle/>
-          <a:p>
-            <a:pPr algn="l" indent="0" marL="0">
-              <a:buNone/>
-            </a:pPr>
-            <a:r>
-              <a:rPr lang="en-US" sz="900" dirty="0">
-                <a:solidFill>
-                  <a:srgbClr val="5D5D72"/>
-                </a:solidFill>
-                <a:latin typeface="Calibri" pitchFamily="34" charset="0"/>
-                <a:ea typeface="Calibri" pitchFamily="34" charset="-122"/>
-                <a:cs typeface="Calibri" pitchFamily="34" charset="-120"/>
-              </a:rPr>
-              <a:t>Usman Akram  •  COMSATS University Islamabad</a:t>
-            </a:r>
-            <a:endParaRPr lang="en-US" sz="900" dirty="0"/>
-          </a:p>
-        </p:txBody>
-      </p:sp>
-      <p:sp>
-        <p:nvSpPr>
-          <p:cNvPr id="17" name="Text 15"/>
-          <p:cNvSpPr txBox="1"/>
-          <p:nvPr/>
-        </p:nvSpPr>
-        <p:spPr>
-          <a:xfrm>
-            <a:off x="11155680" y="6446520"/>
-            <a:ext cx="457200" cy="292608"/>
-          </a:xfrm>
-          <a:prstGeom prst="rect">
-            <a:avLst/>
-          </a:prstGeom>
-          <a:noFill/>
-          <a:ln/>
-        </p:spPr>
-        <p:txBody>
-          <a:bodyPr wrap="square" lIns="0" tIns="0" rIns="0" bIns="0" rtlCol="0" anchor="ctr"/>
-          <a:lstStyle/>
-          <a:p>
-            <a:pPr algn="r" indent="0" marL="0">
-              <a:buNone/>
-            </a:pPr>
-            <a:r>
-              <a:rPr lang="en-US" sz="900" dirty="0">
-                <a:solidFill>
-                  <a:srgbClr val="5D5D72"/>
-                </a:solidFill>
-                <a:latin typeface="Calibri" pitchFamily="34" charset="0"/>
-                <a:ea typeface="Calibri" pitchFamily="34" charset="-122"/>
-                <a:cs typeface="Calibri" pitchFamily="34" charset="-120"/>
-              </a:rPr>
-              <a:t>7</a:t>
-            </a:r>
-            <a:endParaRPr lang="en-US" sz="900" dirty="0"/>
+          <p:cNvPr id="18" name="cuinotes-footer-mark"/>
+          <p:cNvSpPr txBox="1"/>
+          <p:nvPr/>
+        </p:nvSpPr>
+        <p:spPr>
+          <a:xfrm>
+            <a:off x="9951720" y="6455664"/>
+            <a:ext cx="2011680" cy="292608"/>
+          </a:xfrm>
+          <a:prstGeom prst="rect">
+            <a:avLst/>
+          </a:prstGeom>
+          <a:noFill/>
+        </p:spPr>
+        <p:txBody>
+          <a:bodyPr wrap="none" lIns="0" rIns="0" tIns="0" bIns="0">
+            <a:spAutoFit/>
+          </a:bodyPr>
+          <a:lstStyle/>
+          <a:p>
+            <a:pPr algn="r"/>
+            <a:r>
+              <a:rPr sz="1000">
+                <a:solidFill>
+                  <a:srgbClr val="8A939B"/>
+                </a:solidFill>
+                <a:hlinkClick r:id="rId3"/>
+              </a:rPr>
+              <a:t>cuinotes.com</a:t>
+            </a:r>
+            <a:r>
+              <a:rPr sz="1000">
+                <a:solidFill>
+                  <a:srgbClr val="8A939B"/>
+                </a:solidFill>
+              </a:rPr>
+              <a:t>  ·  7</a:t>
+            </a:r>
           </a:p>
         </p:txBody>
       </p:sp>
@@ -21765,6 +20722,10 @@
             <a:prstDash val="solid"/>
           </a:ln>
         </p:spPr>
+        <p:txBody>
+          <a:bodyPr/>
+          <a:p/>
+        </p:txBody>
       </p:sp>
       <p:sp>
         <p:nvSpPr>
@@ -21846,79 +20807,44 @@
       </p:sp>
       <p:sp>
         <p:nvSpPr>
-          <p:cNvPr id="7" name="Text 5"/>
-          <p:cNvSpPr txBox="1"/>
-          <p:nvPr/>
-        </p:nvSpPr>
-        <p:spPr>
-          <a:xfrm>
-            <a:off x="640080" y="6446520"/>
-            <a:ext cx="8686800" cy="292608"/>
-          </a:xfrm>
-          <a:prstGeom prst="rect">
-            <a:avLst/>
-          </a:prstGeom>
-          <a:noFill/>
-          <a:ln/>
-        </p:spPr>
-        <p:txBody>
-          <a:bodyPr wrap="square" lIns="0" tIns="0" rIns="0" bIns="0" rtlCol="0" anchor="ctr"/>
-          <a:lstStyle/>
-          <a:p>
-            <a:pPr algn="l" indent="0" marL="0">
-              <a:buNone/>
-            </a:pPr>
-            <a:r>
-              <a:rPr lang="en-US" sz="900" dirty="0">
-                <a:solidFill>
-                  <a:srgbClr val="5D5D72"/>
-                </a:solidFill>
-                <a:latin typeface="Calibri" pitchFamily="34" charset="0"/>
-                <a:ea typeface="Calibri" pitchFamily="34" charset="-122"/>
-                <a:cs typeface="Calibri" pitchFamily="34" charset="-120"/>
-              </a:rPr>
-              <a:t>Usman Akram  •  COMSATS University Islamabad</a:t>
-            </a:r>
-            <a:endParaRPr lang="en-US" sz="900" dirty="0"/>
-          </a:p>
-        </p:txBody>
-      </p:sp>
-      <p:sp>
-        <p:nvSpPr>
-          <p:cNvPr id="8" name="Text 6"/>
-          <p:cNvSpPr txBox="1"/>
-          <p:nvPr/>
-        </p:nvSpPr>
-        <p:spPr>
-          <a:xfrm>
-            <a:off x="11155680" y="6446520"/>
-            <a:ext cx="457200" cy="292608"/>
-          </a:xfrm>
-          <a:prstGeom prst="rect">
-            <a:avLst/>
-          </a:prstGeom>
-          <a:noFill/>
-          <a:ln/>
-        </p:spPr>
-        <p:txBody>
-          <a:bodyPr wrap="square" lIns="0" tIns="0" rIns="0" bIns="0" rtlCol="0" anchor="ctr"/>
-          <a:lstStyle/>
-          <a:p>
-            <a:pPr algn="r" indent="0" marL="0">
-              <a:buNone/>
-            </a:pPr>
-            <a:r>
-              <a:rPr lang="en-US" sz="900" dirty="0">
-                <a:solidFill>
-                  <a:srgbClr val="5D5D72"/>
-                </a:solidFill>
-                <a:latin typeface="Calibri" pitchFamily="34" charset="0"/>
-                <a:ea typeface="Calibri" pitchFamily="34" charset="-122"/>
-                <a:cs typeface="Calibri" pitchFamily="34" charset="-120"/>
-              </a:rPr>
-              <a:t>8</a:t>
-            </a:r>
-            <a:endParaRPr lang="en-US" sz="900" dirty="0"/>
+          <p:cNvPr id="9" name="cuinotes-footer-mark"/>
+          <p:cNvSpPr txBox="1"/>
+          <p:nvPr/>
+        </p:nvSpPr>
+        <p:spPr>
+          <a:xfrm>
+            <a:off x="9951720" y="6455664"/>
+            <a:ext cx="2011680" cy="292608"/>
+          </a:xfrm>
+          <a:prstGeom prst="rect">
+            <a:avLst/>
+          </a:prstGeom>
+          <a:noFill/>
+        </p:spPr>
+        <p:txBody>
+          <a:bodyPr wrap="none" lIns="0" rIns="0" tIns="0" bIns="0">
+            <a:spAutoFit/>
+          </a:bodyPr>
+          <a:lstStyle/>
+          <a:p>
+            <a:pPr algn="r"/>
+            <a:r>
+              <a:rPr sz="1000">
+                <a:solidFill>
+                  <a:srgbClr val="8A939B"/>
+                </a:solidFill>
+                <a:hlinkClick r:id="rId3"/>
+              </a:rPr>
+              <a:t>cuinotes.com</a:t>
+            </a:r>
+            <a:r>
+              <a:rPr sz="1000">
+                <a:solidFill>
+                  <a:srgbClr val="8A939B"/>
+                </a:solidFill>
+              </a:rPr>
+              <a:t>  ·  8</a:t>
+            </a:r>
           </a:p>
         </p:txBody>
       </p:sp>
@@ -22053,6 +20979,10 @@
           </a:solidFill>
           <a:ln/>
         </p:spPr>
+        <p:txBody>
+          <a:bodyPr/>
+          <a:p/>
+        </p:txBody>
       </p:sp>
       <p:sp>
         <p:nvSpPr>
@@ -22177,79 +21107,44 @@
       </p:sp>
       <p:sp>
         <p:nvSpPr>
-          <p:cNvPr id="7" name="Text 5"/>
-          <p:cNvSpPr txBox="1"/>
-          <p:nvPr/>
-        </p:nvSpPr>
-        <p:spPr>
-          <a:xfrm>
-            <a:off x="640080" y="6446520"/>
-            <a:ext cx="8686800" cy="292608"/>
-          </a:xfrm>
-          <a:prstGeom prst="rect">
-            <a:avLst/>
-          </a:prstGeom>
-          <a:noFill/>
-          <a:ln/>
-        </p:spPr>
-        <p:txBody>
-          <a:bodyPr wrap="square" lIns="0" tIns="0" rIns="0" bIns="0" rtlCol="0" anchor="ctr"/>
-          <a:lstStyle/>
-          <a:p>
-            <a:pPr algn="l" indent="0" marL="0">
-              <a:buNone/>
-            </a:pPr>
-            <a:r>
-              <a:rPr lang="en-US" sz="900" dirty="0">
-                <a:solidFill>
-                  <a:srgbClr val="5D5D72"/>
-                </a:solidFill>
-                <a:latin typeface="Calibri" pitchFamily="34" charset="0"/>
-                <a:ea typeface="Calibri" pitchFamily="34" charset="-122"/>
-                <a:cs typeface="Calibri" pitchFamily="34" charset="-120"/>
-              </a:rPr>
-              <a:t>Usman Akram  •  COMSATS University Islamabad</a:t>
-            </a:r>
-            <a:endParaRPr lang="en-US" sz="900" dirty="0"/>
-          </a:p>
-        </p:txBody>
-      </p:sp>
-      <p:sp>
-        <p:nvSpPr>
-          <p:cNvPr id="8" name="Text 6"/>
-          <p:cNvSpPr txBox="1"/>
-          <p:nvPr/>
-        </p:nvSpPr>
-        <p:spPr>
-          <a:xfrm>
-            <a:off x="11155680" y="6446520"/>
-            <a:ext cx="457200" cy="292608"/>
-          </a:xfrm>
-          <a:prstGeom prst="rect">
-            <a:avLst/>
-          </a:prstGeom>
-          <a:noFill/>
-          <a:ln/>
-        </p:spPr>
-        <p:txBody>
-          <a:bodyPr wrap="square" lIns="0" tIns="0" rIns="0" bIns="0" rtlCol="0" anchor="ctr"/>
-          <a:lstStyle/>
-          <a:p>
-            <a:pPr algn="r" indent="0" marL="0">
-              <a:buNone/>
-            </a:pPr>
-            <a:r>
-              <a:rPr lang="en-US" sz="900" dirty="0">
-                <a:solidFill>
-                  <a:srgbClr val="5D5D72"/>
-                </a:solidFill>
-                <a:latin typeface="Calibri" pitchFamily="34" charset="0"/>
-                <a:ea typeface="Calibri" pitchFamily="34" charset="-122"/>
-                <a:cs typeface="Calibri" pitchFamily="34" charset="-120"/>
-              </a:rPr>
-              <a:t>9</a:t>
-            </a:r>
-            <a:endParaRPr lang="en-US" sz="900" dirty="0"/>
+          <p:cNvPr id="9" name="cuinotes-footer-mark"/>
+          <p:cNvSpPr txBox="1"/>
+          <p:nvPr/>
+        </p:nvSpPr>
+        <p:spPr>
+          <a:xfrm>
+            <a:off x="9951720" y="6455664"/>
+            <a:ext cx="2011680" cy="292608"/>
+          </a:xfrm>
+          <a:prstGeom prst="rect">
+            <a:avLst/>
+          </a:prstGeom>
+          <a:noFill/>
+        </p:spPr>
+        <p:txBody>
+          <a:bodyPr wrap="none" lIns="0" rIns="0" tIns="0" bIns="0">
+            <a:spAutoFit/>
+          </a:bodyPr>
+          <a:lstStyle/>
+          <a:p>
+            <a:pPr algn="r"/>
+            <a:r>
+              <a:rPr sz="1000">
+                <a:solidFill>
+                  <a:srgbClr val="8A939B"/>
+                </a:solidFill>
+                <a:hlinkClick r:id="rId3"/>
+              </a:rPr>
+              <a:t>cuinotes.com</a:t>
+            </a:r>
+            <a:r>
+              <a:rPr sz="1000">
+                <a:solidFill>
+                  <a:srgbClr val="8A939B"/>
+                </a:solidFill>
+              </a:rPr>
+              <a:t>  ·  9</a:t>
+            </a:r>
           </a:p>
         </p:txBody>
       </p:sp>

--- a/slides/CSC336-Lecture-11-Core-JavaScript-ES6.pptx
+++ b/slides/CSC336-Lecture-11-Core-JavaScript-ES6.pptx
@@ -19,6 +19,8 @@
     <p:sldId id="267" r:id="rId13"/>
     <p:sldId id="268" r:id="rId14"/>
     <p:sldId id="269" r:id="rId15"/>
+    <p:sldId id="295" r:id="rId46"/>
+    <p:sldId id="296" r:id="rId47"/>
     <p:sldId id="270" r:id="rId16"/>
     <p:sldId id="271" r:id="rId17"/>
     <p:sldId id="272" r:id="rId18"/>
@@ -6567,7 +6569,7 @@
         <p:spPr>
           <a:xfrm>
             <a:off x="640080" y="1965960"/>
-            <a:ext cx="10911535" cy="1882140"/>
+            <a:ext cx="10911535" cy="2452116"/>
           </a:xfrm>
           <a:prstGeom prst="roundRect">
             <a:avLst>
@@ -6593,7 +6595,7 @@
         <p:spPr>
           <a:xfrm>
             <a:off x="960120" y="2194560"/>
-            <a:ext cx="10271455" cy="1424940"/>
+            <a:ext cx="10271455" cy="1994916"/>
           </a:xfrm>
           <a:prstGeom prst="rect">
             <a:avLst/>
@@ -6620,7 +6622,7 @@
                 <a:ea typeface="Courier New" pitchFamily="34" charset="-122"/>
                 <a:cs typeface="Courier New" pitchFamily="34" charset="-120"/>
               </a:rPr>
-              <a:t>console.log("5" + 3);    // "53"  -- number coerced to string, then joined</a:t>
+              <a:t>console.log("5" + 3);        // "53"  -- number coerced to string, then joined</a:t>
             </a:r>
             <a:endParaRPr lang="en-US" sz="1400" dirty="0"/>
           </a:p>
@@ -6640,7 +6642,7 @@
                 <a:ea typeface="Courier New" pitchFamily="34" charset="-122"/>
                 <a:cs typeface="Courier New" pitchFamily="34" charset="-120"/>
               </a:rPr>
-              <a:t>console.log("5" - 3);    // 2     -- string coerced to number</a:t>
+              <a:t>console.log("5" - 3);        // 2     -- string coerced to number</a:t>
             </a:r>
             <a:endParaRPr lang="en-US" sz="1400" dirty="0"/>
           </a:p>
@@ -6660,7 +6662,7 @@
                 <a:ea typeface="Courier New" pitchFamily="34" charset="-122"/>
                 <a:cs typeface="Courier New" pitchFamily="34" charset="-120"/>
               </a:rPr>
-              <a:t>console.log(1 + true);   // 2     -- true coerced to 1</a:t>
+              <a:t>console.log(1 + true);       // 2     -- true coerced to 1</a:t>
             </a:r>
             <a:endParaRPr lang="en-US" sz="1400" dirty="0"/>
           </a:p>
@@ -6680,7 +6682,7 @@
                 <a:ea typeface="Courier New" pitchFamily="34" charset="-122"/>
                 <a:cs typeface="Courier New" pitchFamily="34" charset="-120"/>
               </a:rPr>
-              <a:t>console.log("10" == 10);  // true  -- coercion happens before comparing</a:t>
+              <a:t>console.log(null + 1);       // 1     -- null coerces to 0</a:t>
             </a:r>
             <a:endParaRPr lang="en-US" sz="1400" dirty="0"/>
           </a:p>
@@ -6700,10 +6702,50 @@
                 <a:ea typeface="Courier New" pitchFamily="34" charset="-122"/>
                 <a:cs typeface="Courier New" pitchFamily="34" charset="-120"/>
               </a:rPr>
-              <a:t>console.log("10" === 10); // false -- no coercion, types differ</a:t>
+              <a:t>console.log(undefined + 1);  // NaN   -- undefined coerces to NaN</a:t>
             </a:r>
             <a:endParaRPr lang="en-US" sz="1400" dirty="0"/>
           </a:p>
+          <a:p>
+            <a:pPr indent="0" marL="0">
+              <a:lnSpc>
+                <a:spcPct val="125000"/>
+              </a:lnSpc>
+              <a:buNone/>
+            </a:pPr>
+            <a:r>
+              <a:rPr lang="en-US" sz="1400" dirty="0">
+                <a:solidFill>
+                  <a:srgbClr val="C9D3F5"/>
+                </a:solidFill>
+                <a:latin typeface="Courier New" pitchFamily="34" charset="0"/>
+                <a:ea typeface="Courier New" pitchFamily="34" charset="-122"/>
+                <a:cs typeface="Courier New" pitchFamily="34" charset="-120"/>
+              </a:rPr>
+              <a:t>console.log("10" == 10);     // true  -- coercion happens before comparing</a:t>
+            </a:r>
+            <a:endParaRPr lang="en-US" sz="1400" dirty="0"/>
+          </a:p>
+          <a:p>
+            <a:pPr indent="0" marL="0">
+              <a:lnSpc>
+                <a:spcPct val="125000"/>
+              </a:lnSpc>
+              <a:buNone/>
+            </a:pPr>
+            <a:r>
+              <a:rPr lang="en-US" sz="1400" dirty="0">
+                <a:solidFill>
+                  <a:srgbClr val="C9D3F5"/>
+                </a:solidFill>
+                <a:latin typeface="Courier New" pitchFamily="34" charset="0"/>
+                <a:ea typeface="Courier New" pitchFamily="34" charset="-122"/>
+                <a:cs typeface="Courier New" pitchFamily="34" charset="-120"/>
+              </a:rPr>
+              <a:t>console.log("10" === 10);    // false -- no coercion, types differ</a:t>
+            </a:r>
+            <a:endParaRPr lang="en-US" sz="1400" dirty="0"/>
+          </a:p>
         </p:txBody>
       </p:sp>
       <p:sp>
@@ -6714,8 +6756,8 @@
         </p:nvSpPr>
         <p:spPr>
           <a:xfrm>
-            <a:off x="640080" y="4076700"/>
-            <a:ext cx="10911535" cy="2186940"/>
+            <a:off x="640080" y="4646676"/>
+            <a:ext cx="10911535" cy="1658988"/>
           </a:xfrm>
           <a:prstGeom prst="rect">
             <a:avLst/>
@@ -6739,7 +6781,7 @@
                 <a:ea typeface="Calibri" pitchFamily="34" charset="-122"/>
                 <a:cs typeface="Calibri" pitchFamily="34" charset="-120"/>
               </a:rPr>
-              <a:t>== ("loose equality") converts both sides to a common type first. === ("strict equality") compares value and type, with no conversion.</a:t>
+              <a:t>== (“loose equality”) converts both sides to a common type first. === (“strict equality”) compares value and type, with no conversion. null and undefined behave differently under coercion — that difference trips up beginners constantly.</a:t>
             </a:r>
             <a:endParaRPr lang="en-US" sz="1300" dirty="0"/>
           </a:p>
@@ -7045,7 +7087,7 @@
                   <a:srgbClr val="8A939B"/>
                 </a:solidFill>
               </a:rPr>
-              <a:t>  ·  15</a:t>
+              <a:t>  ·  17</a:t>
             </a:r>
           </a:p>
         </p:txBody>
@@ -7475,7 +7517,7 @@
                   <a:srgbClr val="8A939B"/>
                 </a:solidFill>
               </a:rPr>
-              <a:t>  ·  16</a:t>
+              <a:t>  ·  18</a:t>
             </a:r>
           </a:p>
         </p:txBody>
@@ -7895,7 +7937,7 @@
                   <a:srgbClr val="8A939B"/>
                 </a:solidFill>
               </a:rPr>
-              <a:t>  ·  17</a:t>
+              <a:t>  ·  19</a:t>
             </a:r>
           </a:p>
         </p:txBody>
@@ -8354,7 +8396,7 @@
                   <a:srgbClr val="8A939B"/>
                 </a:solidFill>
               </a:rPr>
-              <a:t>  ·  18</a:t>
+              <a:t>  ·  20</a:t>
             </a:r>
           </a:p>
         </p:txBody>
@@ -8715,7 +8757,7 @@
                   <a:srgbClr val="8A939B"/>
                 </a:solidFill>
               </a:rPr>
-              <a:t>  ·  19</a:t>
+              <a:t>  ·  21</a:t>
             </a:r>
           </a:p>
         </p:txBody>
@@ -10013,7 +10055,7 @@
                   <a:srgbClr val="8A939B"/>
                 </a:solidFill>
               </a:rPr>
-              <a:t>  ·  20</a:t>
+              <a:t>  ·  22</a:t>
             </a:r>
           </a:p>
         </p:txBody>
@@ -10275,7 +10317,7 @@
                   <a:srgbClr val="8A939B"/>
                 </a:solidFill>
               </a:rPr>
-              <a:t>  ·  21</a:t>
+              <a:t>  ·  23</a:t>
             </a:r>
           </a:p>
         </p:txBody>
@@ -10714,7 +10756,7 @@
                   <a:srgbClr val="8A939B"/>
                 </a:solidFill>
               </a:rPr>
-              <a:t>  ·  22</a:t>
+              <a:t>  ·  24</a:t>
             </a:r>
           </a:p>
         </p:txBody>
@@ -10976,7 +11018,7 @@
                   <a:srgbClr val="8A939B"/>
                 </a:solidFill>
               </a:rPr>
-              <a:t>  ·  23</a:t>
+              <a:t>  ·  25</a:t>
             </a:r>
           </a:p>
         </p:txBody>
@@ -11366,7 +11408,7 @@
                   <a:srgbClr val="8A939B"/>
                 </a:solidFill>
               </a:rPr>
-              <a:t>  ·  24</a:t>
+              <a:t>  ·  26</a:t>
             </a:r>
           </a:p>
         </p:txBody>
@@ -11725,7 +11767,7 @@
                   <a:srgbClr val="8A939B"/>
                 </a:solidFill>
               </a:rPr>
-              <a:t>  ·  25</a:t>
+              <a:t>  ·  27</a:t>
             </a:r>
           </a:p>
         </p:txBody>
@@ -11987,7 +12029,7 @@
                   <a:srgbClr val="8A939B"/>
                 </a:solidFill>
               </a:rPr>
-              <a:t>  ·  26</a:t>
+              <a:t>  ·  28</a:t>
             </a:r>
           </a:p>
         </p:txBody>
@@ -12366,7 +12408,7 @@
                   <a:srgbClr val="8A939B"/>
                 </a:solidFill>
               </a:rPr>
-              <a:t>  ·  27</a:t>
+              <a:t>  ·  29</a:t>
             </a:r>
           </a:p>
         </p:txBody>
@@ -12756,7 +12798,7 @@
                   <a:srgbClr val="8A939B"/>
                 </a:solidFill>
               </a:rPr>
-              <a:t>  ·  28</a:t>
+              <a:t>  ·  30</a:t>
             </a:r>
           </a:p>
         </p:txBody>
@@ -13165,7 +13207,7 @@
                   <a:srgbClr val="8A939B"/>
                 </a:solidFill>
               </a:rPr>
-              <a:t>  ·  29</a:t>
+              <a:t>  ·  31</a:t>
             </a:r>
           </a:p>
         </p:txBody>
@@ -14474,7 +14516,7 @@
                   <a:srgbClr val="8A939B"/>
                 </a:solidFill>
               </a:rPr>
-              <a:t>  ·  30</a:t>
+              <a:t>  ·  32</a:t>
             </a:r>
           </a:p>
         </p:txBody>
@@ -14894,7 +14936,7 @@
                   <a:srgbClr val="8A939B"/>
                 </a:solidFill>
               </a:rPr>
-              <a:t>  ·  31</a:t>
+              <a:t>  ·  33</a:t>
             </a:r>
           </a:p>
         </p:txBody>
@@ -15392,7 +15434,7 @@
                   <a:srgbClr val="8A939B"/>
                 </a:solidFill>
               </a:rPr>
-              <a:t>  ·  32</a:t>
+              <a:t>  ·  34</a:t>
             </a:r>
           </a:p>
         </p:txBody>
@@ -15851,7 +15893,7 @@
                   <a:srgbClr val="8A939B"/>
                 </a:solidFill>
               </a:rPr>
-              <a:t>  ·  33</a:t>
+              <a:t>  ·  35</a:t>
             </a:r>
           </a:p>
         </p:txBody>
@@ -16280,7 +16322,7 @@
                   <a:srgbClr val="8A939B"/>
                 </a:solidFill>
               </a:rPr>
-              <a:t>  ·  34</a:t>
+              <a:t>  ·  36</a:t>
             </a:r>
           </a:p>
         </p:txBody>
@@ -16710,7 +16752,7 @@
                   <a:srgbClr val="8A939B"/>
                 </a:solidFill>
               </a:rPr>
-              <a:t>  ·  35</a:t>
+              <a:t>  ·  37</a:t>
             </a:r>
           </a:p>
         </p:txBody>
@@ -17137,7 +17179,7 @@
                   <a:srgbClr val="8A939B"/>
                 </a:solidFill>
               </a:rPr>
-              <a:t>  ·  36</a:t>
+              <a:t>  ·  38</a:t>
             </a:r>
           </a:p>
         </p:txBody>
@@ -17546,7 +17588,7 @@
                   <a:srgbClr val="8A939B"/>
                 </a:solidFill>
               </a:rPr>
-              <a:t>  ·  37</a:t>
+              <a:t>  ·  39</a:t>
             </a:r>
           </a:p>
         </p:txBody>
@@ -17808,7 +17850,7 @@
                   <a:srgbClr val="8A939B"/>
                 </a:solidFill>
               </a:rPr>
-              <a:t>  ·  38</a:t>
+              <a:t>  ·  40</a:t>
             </a:r>
           </a:p>
         </p:txBody>
@@ -18675,7 +18717,7 @@
                   <a:srgbClr val="8A939B"/>
                 </a:solidFill>
               </a:rPr>
-              <a:t>  ·  39</a:t>
+              <a:t>  ·  41</a:t>
             </a:r>
           </a:p>
         </p:txBody>
@@ -19094,6 +19136,766 @@
                 </a:solidFill>
               </a:rPr>
               <a:t>  ·  4</a:t>
+            </a:r>
+          </a:p>
+        </p:txBody>
+      </p:sp>
+    </p:spTree>
+  </p:cSld>
+  <p:clrMapOvr>
+    <a:masterClrMapping/>
+  </p:clrMapOvr>
+</p:sld>
+</file>
+
+<file path=ppt/slides/slide40.xml><?xml version="1.0" encoding="utf-8"?>
+<p:sld xmlns:a="http://schemas.openxmlformats.org/drawingml/2006/main" xmlns:r="http://schemas.openxmlformats.org/officeDocument/2006/relationships" xmlns:p="http://schemas.openxmlformats.org/presentationml/2006/main">
+  <p:cSld name="Slide 15">
+    <p:bg>
+      <p:bgPr>
+        <a:solidFill>
+          <a:srgbClr val="FFFFFF"/>
+        </a:solidFill>
+      </p:bgPr>
+    </p:bg>
+    <p:spTree>
+      <p:nvGrpSpPr>
+        <p:cNvPr id="1" name=""/>
+        <p:cNvGrpSpPr/>
+        <p:nvPr/>
+      </p:nvGrpSpPr>
+      <p:grpSpPr>
+        <a:xfrm>
+          <a:off x="0" y="0"/>
+          <a:ext cx="0" cy="0"/>
+          <a:chOff x="0" y="0"/>
+          <a:chExt cx="0" cy="0"/>
+        </a:xfrm>
+      </p:grpSpPr>
+      <p:sp>
+        <p:nvSpPr>
+          <p:cNvPr id="2" name="Text 0"/>
+          <p:cNvSpPr txBox="1"/>
+          <p:nvPr/>
+        </p:nvSpPr>
+        <p:spPr>
+          <a:xfrm>
+            <a:off x="640080" y="457200"/>
+            <a:ext cx="10058400" cy="365760"/>
+          </a:xfrm>
+          <a:prstGeom prst="rect">
+            <a:avLst/>
+          </a:prstGeom>
+          <a:noFill/>
+          <a:ln/>
+        </p:spPr>
+        <p:txBody>
+          <a:bodyPr wrap="square" lIns="0" tIns="0" rIns="0" bIns="0" rtlCol="0" anchor="ctr"/>
+          <a:lstStyle/>
+          <a:p>
+            <a:pPr algn="l" indent="0" marL="0">
+              <a:buNone/>
+            </a:pPr>
+            <a:r>
+              <a:rPr lang="en-US" sz="1300" b="1" spc="300" kern="0" dirty="0">
+                <a:solidFill>
+                  <a:srgbClr val="FF8A3D"/>
+                </a:solidFill>
+                <a:latin typeface="Calibri" pitchFamily="34" charset="0"/>
+                <a:ea typeface="Calibri" pitchFamily="34" charset="-122"/>
+                <a:cs typeface="Calibri" pitchFamily="34" charset="-120"/>
+              </a:rPr>
+              <a:t>OPERATORS</a:t>
+            </a:r>
+            <a:endParaRPr lang="en-US" sz="1300" dirty="0"/>
+          </a:p>
+        </p:txBody>
+      </p:sp>
+      <p:sp>
+        <p:nvSpPr>
+          <p:cNvPr id="3" name="Text 1"/>
+          <p:cNvSpPr txBox="1"/>
+          <p:nvPr/>
+        </p:nvSpPr>
+        <p:spPr>
+          <a:xfrm>
+            <a:off x="640080" y="841248"/>
+            <a:ext cx="10881360" cy="914400"/>
+          </a:xfrm>
+          <a:prstGeom prst="rect">
+            <a:avLst/>
+          </a:prstGeom>
+          <a:noFill/>
+          <a:ln/>
+        </p:spPr>
+        <p:txBody>
+          <a:bodyPr wrap="square" lIns="0" tIns="0" rIns="0" bIns="0" rtlCol="0" anchor="ctr"/>
+          <a:lstStyle/>
+          <a:p>
+            <a:pPr algn="l" indent="0" marL="0">
+              <a:buNone/>
+            </a:pPr>
+            <a:r>
+              <a:rPr lang="en-US" sz="3400" b="1" dirty="0">
+                <a:solidFill>
+                  <a:srgbClr val="2B2B7A"/>
+                </a:solidFill>
+                <a:latin typeface="Cambria" pitchFamily="34" charset="0"/>
+                <a:ea typeface="Cambria" pitchFamily="34" charset="-122"/>
+                <a:cs typeface="Cambria" pitchFamily="34" charset="-120"/>
+              </a:rPr>
+              <a:t>Type Coercion — Tricky Gotchas</a:t>
+            </a:r>
+            <a:endParaRPr lang="en-US" sz="3400" dirty="0"/>
+          </a:p>
+        </p:txBody>
+      </p:sp>
+      <p:sp>
+        <p:nvSpPr>
+          <p:cNvPr id="4" name="Shape 2"/>
+          <p:cNvSpPr/>
+          <p:nvPr/>
+        </p:nvSpPr>
+        <p:spPr>
+          <a:xfrm>
+            <a:off x="640080" y="1965960"/>
+            <a:ext cx="10911535" cy="2452116"/>
+          </a:xfrm>
+          <a:prstGeom prst="roundRect">
+            <a:avLst>
+              <a:gd name="adj" fmla="val 3887"/>
+            </a:avLst>
+          </a:prstGeom>
+          <a:solidFill>
+            <a:srgbClr val="1E1E4C"/>
+          </a:solidFill>
+          <a:ln/>
+        </p:spPr>
+        <p:txBody>
+          <a:bodyPr/>
+          <a:p/>
+        </p:txBody>
+      </p:sp>
+      <p:sp>
+        <p:nvSpPr>
+          <p:cNvPr id="5" name="Text 3"/>
+          <p:cNvSpPr txBox="1"/>
+          <p:nvPr/>
+        </p:nvSpPr>
+        <p:spPr>
+          <a:xfrm>
+            <a:off x="960120" y="2194560"/>
+            <a:ext cx="10271455" cy="1994916"/>
+          </a:xfrm>
+          <a:prstGeom prst="rect">
+            <a:avLst/>
+          </a:prstGeom>
+          <a:noFill/>
+          <a:ln/>
+        </p:spPr>
+        <p:txBody>
+          <a:bodyPr wrap="square" lIns="0" tIns="0" rIns="0" bIns="0" rtlCol="0" anchor="t"/>
+          <a:lstStyle/>
+          <a:p>
+            <a:pPr indent="0" marL="0">
+              <a:lnSpc>
+                <a:spcPct val="125000"/>
+              </a:lnSpc>
+              <a:buNone/>
+            </a:pPr>
+            <a:r>
+              <a:rPr lang="en-US" sz="1400" dirty="0">
+                <a:solidFill>
+                  <a:srgbClr val="C9D3F5"/>
+                </a:solidFill>
+                <a:latin typeface="Courier New" pitchFamily="34" charset="0"/>
+                <a:ea typeface="Courier New" pitchFamily="34" charset="-122"/>
+                <a:cs typeface="Courier New" pitchFamily="34" charset="-120"/>
+              </a:rPr>
+              <a:t>console.log([] + []);           // ""       -- both arrays coerce to "", then join</a:t>
+            </a:r>
+            <a:endParaRPr lang="en-US" sz="1400" dirty="0"/>
+          </a:p>
+          <a:p>
+            <a:pPr indent="0" marL="0">
+              <a:lnSpc>
+                <a:spcPct val="125000"/>
+              </a:lnSpc>
+              <a:buNone/>
+            </a:pPr>
+            <a:r>
+              <a:rPr lang="en-US" sz="1400" dirty="0">
+                <a:solidFill>
+                  <a:srgbClr val="C9D3F5"/>
+                </a:solidFill>
+                <a:latin typeface="Courier New" pitchFamily="34" charset="0"/>
+                <a:ea typeface="Courier New" pitchFamily="34" charset="-122"/>
+                <a:cs typeface="Courier New" pitchFamily="34" charset="-120"/>
+              </a:rPr>
+              <a:t>console.log([] + {});           // "[object Object]"</a:t>
+            </a:r>
+            <a:endParaRPr lang="en-US" sz="1400" dirty="0"/>
+          </a:p>
+          <a:p>
+            <a:pPr indent="0" marL="0">
+              <a:lnSpc>
+                <a:spcPct val="125000"/>
+              </a:lnSpc>
+              <a:buNone/>
+            </a:pPr>
+            <a:r>
+              <a:rPr lang="en-US" sz="1400" dirty="0">
+                <a:solidFill>
+                  <a:srgbClr val="C9D3F5"/>
+                </a:solidFill>
+                <a:latin typeface="Courier New" pitchFamily="34" charset="0"/>
+                <a:ea typeface="Courier New" pitchFamily="34" charset="-122"/>
+                <a:cs typeface="Courier New" pitchFamily="34" charset="-120"/>
+              </a:rPr>
+              <a:t>console.log([1,2] + [3,4]);     // "1,23,4"  -- arrays coerce via toString(), then join</a:t>
+            </a:r>
+            <a:endParaRPr lang="en-US" sz="1400" dirty="0"/>
+          </a:p>
+          <a:p>
+            <a:pPr indent="0" marL="0">
+              <a:lnSpc>
+                <a:spcPct val="125000"/>
+              </a:lnSpc>
+              <a:buNone/>
+            </a:pPr>
+            <a:r>
+              <a:rPr lang="en-US" sz="1400" dirty="0">
+                <a:solidFill>
+                  <a:srgbClr val="C9D3F5"/>
+                </a:solidFill>
+                <a:latin typeface="Courier New" pitchFamily="34" charset="0"/>
+                <a:ea typeface="Courier New" pitchFamily="34" charset="-122"/>
+                <a:cs typeface="Courier New" pitchFamily="34" charset="-120"/>
+              </a:rPr>
+              <a:t>console.log(1 + "2" + 3);       // "123"     -- left to right: 1+"2"="12", then +3="123"</a:t>
+            </a:r>
+            <a:endParaRPr lang="en-US" sz="1400" dirty="0"/>
+          </a:p>
+          <a:p>
+            <a:pPr indent="0" marL="0">
+              <a:lnSpc>
+                <a:spcPct val="125000"/>
+              </a:lnSpc>
+              <a:buNone/>
+            </a:pPr>
+            <a:r>
+              <a:rPr lang="en-US" sz="1400" dirty="0">
+                <a:solidFill>
+                  <a:srgbClr val="C9D3F5"/>
+                </a:solidFill>
+                <a:latin typeface="Courier New" pitchFamily="34" charset="0"/>
+                <a:ea typeface="Courier New" pitchFamily="34" charset="-122"/>
+                <a:cs typeface="Courier New" pitchFamily="34" charset="-120"/>
+              </a:rPr>
+              <a:t>console.log(1 + 2 + "3");       // "33"      -- left to right: 1+2=3, then 3+"3"="33"</a:t>
+            </a:r>
+            <a:endParaRPr lang="en-US" sz="1400" dirty="0"/>
+          </a:p>
+          <a:p>
+            <a:pPr indent="0" marL="0">
+              <a:lnSpc>
+                <a:spcPct val="125000"/>
+              </a:lnSpc>
+              <a:buNone/>
+            </a:pPr>
+            <a:r>
+              <a:rPr lang="en-US" sz="1400" dirty="0">
+                <a:solidFill>
+                  <a:srgbClr val="C9D3F5"/>
+                </a:solidFill>
+                <a:latin typeface="Courier New" pitchFamily="34" charset="0"/>
+                <a:ea typeface="Courier New" pitchFamily="34" charset="-122"/>
+                <a:cs typeface="Courier New" pitchFamily="34" charset="-120"/>
+              </a:rPr>
+              <a:t>console.log("" == 0);           // true      -- "" coerces to 0</a:t>
+            </a:r>
+            <a:endParaRPr lang="en-US" sz="1400" dirty="0"/>
+          </a:p>
+          <a:p>
+            <a:pPr indent="0" marL="0">
+              <a:lnSpc>
+                <a:spcPct val="125000"/>
+              </a:lnSpc>
+              <a:buNone/>
+            </a:pPr>
+            <a:r>
+              <a:rPr lang="en-US" sz="1400" dirty="0">
+                <a:solidFill>
+                  <a:srgbClr val="C9D3F5"/>
+                </a:solidFill>
+                <a:latin typeface="Courier New" pitchFamily="34" charset="0"/>
+                <a:ea typeface="Courier New" pitchFamily="34" charset="-122"/>
+                <a:cs typeface="Courier New" pitchFamily="34" charset="-120"/>
+              </a:rPr>
+              <a:t>console.log(null == undefined); // true      -- special case; null === undefined is false</a:t>
+            </a:r>
+            <a:endParaRPr lang="en-US" sz="1400" dirty="0"/>
+          </a:p>
+        </p:txBody>
+      </p:sp>
+      <p:sp>
+        <p:nvSpPr>
+          <p:cNvPr id="6" name="Text 4"/>
+          <p:cNvSpPr txBox="1"/>
+          <p:nvPr/>
+        </p:nvSpPr>
+        <p:spPr>
+          <a:xfrm>
+            <a:off x="640080" y="4646676"/>
+            <a:ext cx="10911535" cy="1658988"/>
+          </a:xfrm>
+          <a:prstGeom prst="rect">
+            <a:avLst/>
+          </a:prstGeom>
+          <a:noFill/>
+          <a:ln/>
+        </p:spPr>
+        <p:txBody>
+          <a:bodyPr wrap="square" lIns="0" tIns="0" rIns="0" bIns="0" rtlCol="0" anchor="t"/>
+          <a:lstStyle/>
+          <a:p>
+            <a:pPr indent="0" marL="0">
+              <a:buNone/>
+            </a:pPr>
+            <a:r>
+              <a:rPr lang="en-US" sz="1300" dirty="0">
+                <a:solidFill>
+                  <a:srgbClr val="26262F"/>
+                </a:solidFill>
+                <a:latin typeface="Calibri" pitchFamily="34" charset="0"/>
+                <a:ea typeface="Calibri" pitchFamily="34" charset="-122"/>
+                <a:cs typeface="Calibri" pitchFamily="34" charset="-120"/>
+              </a:rPr>
+              <a:t>Coercion happens strictly left to right, one operation at a time — the ORDER of mixed operands changes the result. These are exactly the surprises === avoids.</a:t>
+            </a:r>
+            <a:endParaRPr lang="en-US" sz="1300" dirty="0"/>
+          </a:p>
+        </p:txBody>
+      </p:sp>
+      <p:sp>
+        <p:nvSpPr>
+          <p:cNvPr id="9" name="cuinotes-footer-mark"/>
+          <p:cNvSpPr txBox="1"/>
+          <p:nvPr/>
+        </p:nvSpPr>
+        <p:spPr>
+          <a:xfrm>
+            <a:off x="9951720" y="6455664"/>
+            <a:ext cx="2011680" cy="292608"/>
+          </a:xfrm>
+          <a:prstGeom prst="rect">
+            <a:avLst/>
+          </a:prstGeom>
+          <a:noFill/>
+        </p:spPr>
+        <p:txBody>
+          <a:bodyPr wrap="none" lIns="0" rIns="0" tIns="0" bIns="0">
+            <a:spAutoFit/>
+          </a:bodyPr>
+          <a:lstStyle/>
+          <a:p>
+            <a:pPr algn="r"/>
+            <a:r>
+              <a:rPr sz="1000">
+                <a:solidFill>
+                  <a:srgbClr val="8A939B"/>
+                </a:solidFill>
+                <a:hlinkClick r:id="rId3"/>
+              </a:rPr>
+              <a:t>cuinotes.com</a:t>
+            </a:r>
+            <a:r>
+              <a:rPr sz="1000">
+                <a:solidFill>
+                  <a:srgbClr val="8A939B"/>
+                </a:solidFill>
+              </a:rPr>
+              <a:t>  ·  15</a:t>
+            </a:r>
+          </a:p>
+        </p:txBody>
+      </p:sp>
+    </p:spTree>
+  </p:cSld>
+  <p:clrMapOvr>
+    <a:masterClrMapping/>
+  </p:clrMapOvr>
+</p:sld>
+</file>
+
+<file path=ppt/slides/slide41.xml><?xml version="1.0" encoding="utf-8"?>
+<p:sld xmlns:a="http://schemas.openxmlformats.org/drawingml/2006/main" xmlns:r="http://schemas.openxmlformats.org/officeDocument/2006/relationships" xmlns:p="http://schemas.openxmlformats.org/presentationml/2006/main">
+  <p:cSld name="Slide 16">
+    <p:bg>
+      <p:bgPr>
+        <a:solidFill>
+          <a:srgbClr val="FFFFFF"/>
+        </a:solidFill>
+      </p:bgPr>
+    </p:bg>
+    <p:spTree>
+      <p:nvGrpSpPr>
+        <p:cNvPr id="1" name=""/>
+        <p:cNvGrpSpPr/>
+        <p:nvPr/>
+      </p:nvGrpSpPr>
+      <p:grpSpPr>
+        <a:xfrm>
+          <a:off x="0" y="0"/>
+          <a:ext cx="0" cy="0"/>
+          <a:chOff x="0" y="0"/>
+          <a:chExt cx="0" cy="0"/>
+        </a:xfrm>
+      </p:grpSpPr>
+      <p:sp>
+        <p:nvSpPr>
+          <p:cNvPr id="2" name="Text 0"/>
+          <p:cNvSpPr txBox="1"/>
+          <p:nvPr/>
+        </p:nvSpPr>
+        <p:spPr>
+          <a:xfrm>
+            <a:off x="640080" y="457200"/>
+            <a:ext cx="10058400" cy="365760"/>
+          </a:xfrm>
+          <a:prstGeom prst="rect">
+            <a:avLst/>
+          </a:prstGeom>
+          <a:noFill/>
+          <a:ln/>
+        </p:spPr>
+        <p:txBody>
+          <a:bodyPr wrap="square" lIns="0" tIns="0" rIns="0" bIns="0" rtlCol="0" anchor="ctr"/>
+          <a:lstStyle/>
+          <a:p>
+            <a:pPr algn="l" indent="0" marL="0">
+              <a:buNone/>
+            </a:pPr>
+            <a:r>
+              <a:rPr lang="en-US" sz="1300" b="1" spc="300" kern="0" dirty="0">
+                <a:solidFill>
+                  <a:srgbClr val="FF8A3D"/>
+                </a:solidFill>
+                <a:latin typeface="Calibri" pitchFamily="34" charset="0"/>
+                <a:ea typeface="Calibri" pitchFamily="34" charset="-122"/>
+                <a:cs typeface="Calibri" pitchFamily="34" charset="-120"/>
+              </a:rPr>
+              <a:t>OPERATORS</a:t>
+            </a:r>
+            <a:endParaRPr lang="en-US" sz="1300" dirty="0"/>
+          </a:p>
+        </p:txBody>
+      </p:sp>
+      <p:sp>
+        <p:nvSpPr>
+          <p:cNvPr id="3" name="Text 1"/>
+          <p:cNvSpPr txBox="1"/>
+          <p:nvPr/>
+        </p:nvSpPr>
+        <p:spPr>
+          <a:xfrm>
+            <a:off x="640080" y="841248"/>
+            <a:ext cx="10881360" cy="914400"/>
+          </a:xfrm>
+          <a:prstGeom prst="rect">
+            <a:avLst/>
+          </a:prstGeom>
+          <a:noFill/>
+          <a:ln/>
+        </p:spPr>
+        <p:txBody>
+          <a:bodyPr wrap="square" lIns="0" tIns="0" rIns="0" bIns="0" rtlCol="0" anchor="ctr"/>
+          <a:lstStyle/>
+          <a:p>
+            <a:pPr algn="l" indent="0" marL="0">
+              <a:buNone/>
+            </a:pPr>
+            <a:r>
+              <a:rPr lang="en-US" sz="3400" b="1" dirty="0">
+                <a:solidFill>
+                  <a:srgbClr val="2B2B7A"/>
+                </a:solidFill>
+                <a:latin typeface="Cambria" pitchFamily="34" charset="0"/>
+                <a:ea typeface="Cambria" pitchFamily="34" charset="-122"/>
+                <a:cs typeface="Cambria" pitchFamily="34" charset="-120"/>
+              </a:rPr>
+              <a:t>Explicit Type Conversion</a:t>
+            </a:r>
+            <a:endParaRPr lang="en-US" sz="3400" dirty="0"/>
+          </a:p>
+        </p:txBody>
+      </p:sp>
+      <p:sp>
+        <p:nvSpPr>
+          <p:cNvPr id="4" name="Shape 2"/>
+          <p:cNvSpPr/>
+          <p:nvPr/>
+        </p:nvSpPr>
+        <p:spPr>
+          <a:xfrm>
+            <a:off x="640080" y="1965960"/>
+            <a:ext cx="10911535" cy="2452116"/>
+          </a:xfrm>
+          <a:prstGeom prst="roundRect">
+            <a:avLst>
+              <a:gd name="adj" fmla="val 3887"/>
+            </a:avLst>
+          </a:prstGeom>
+          <a:solidFill>
+            <a:srgbClr val="1E1E4C"/>
+          </a:solidFill>
+          <a:ln/>
+        </p:spPr>
+        <p:txBody>
+          <a:bodyPr/>
+          <a:p/>
+        </p:txBody>
+      </p:sp>
+      <p:sp>
+        <p:nvSpPr>
+          <p:cNvPr id="5" name="Text 3"/>
+          <p:cNvSpPr txBox="1"/>
+          <p:nvPr/>
+        </p:nvSpPr>
+        <p:spPr>
+          <a:xfrm>
+            <a:off x="960120" y="2194560"/>
+            <a:ext cx="10271455" cy="1994916"/>
+          </a:xfrm>
+          <a:prstGeom prst="rect">
+            <a:avLst/>
+          </a:prstGeom>
+          <a:noFill/>
+          <a:ln/>
+        </p:spPr>
+        <p:txBody>
+          <a:bodyPr wrap="square" lIns="0" tIns="0" rIns="0" bIns="0" rtlCol="0" anchor="t"/>
+          <a:lstStyle/>
+          <a:p>
+            <a:pPr indent="0" marL="0">
+              <a:lnSpc>
+                <a:spcPct val="125000"/>
+              </a:lnSpc>
+              <a:buNone/>
+            </a:pPr>
+            <a:r>
+              <a:rPr lang="en-US" sz="1400" dirty="0">
+                <a:solidFill>
+                  <a:srgbClr val="C9D3F5"/>
+                </a:solidFill>
+                <a:latin typeface="Courier New" pitchFamily="34" charset="0"/>
+                <a:ea typeface="Courier New" pitchFamily="34" charset="-122"/>
+                <a:cs typeface="Courier New" pitchFamily="34" charset="-120"/>
+              </a:rPr>
+              <a:t>console.log(Number("42"));      // 42     -- string to number</a:t>
+            </a:r>
+            <a:endParaRPr lang="en-US" sz="1400" dirty="0"/>
+          </a:p>
+          <a:p>
+            <a:pPr indent="0" marL="0">
+              <a:lnSpc>
+                <a:spcPct val="125000"/>
+              </a:lnSpc>
+              <a:buNone/>
+            </a:pPr>
+            <a:r>
+              <a:rPr lang="en-US" sz="1400" dirty="0">
+                <a:solidFill>
+                  <a:srgbClr val="C9D3F5"/>
+                </a:solidFill>
+                <a:latin typeface="Courier New" pitchFamily="34" charset="0"/>
+                <a:ea typeface="Courier New" pitchFamily="34" charset="-122"/>
+                <a:cs typeface="Courier New" pitchFamily="34" charset="-120"/>
+              </a:rPr>
+              <a:t>console.log(Number(""));        // 0      -- empty string converts to 0</a:t>
+            </a:r>
+            <a:endParaRPr lang="en-US" sz="1400" dirty="0"/>
+          </a:p>
+          <a:p>
+            <a:pPr indent="0" marL="0">
+              <a:lnSpc>
+                <a:spcPct val="125000"/>
+              </a:lnSpc>
+              <a:buNone/>
+            </a:pPr>
+            <a:r>
+              <a:rPr lang="en-US" sz="1400" dirty="0">
+                <a:solidFill>
+                  <a:srgbClr val="C9D3F5"/>
+                </a:solidFill>
+                <a:latin typeface="Courier New" pitchFamily="34" charset="0"/>
+                <a:ea typeface="Courier New" pitchFamily="34" charset="-122"/>
+                <a:cs typeface="Courier New" pitchFamily="34" charset="-120"/>
+              </a:rPr>
+              <a:t>console.log(Number("abc"));     // NaN    -- not a valid number</a:t>
+            </a:r>
+            <a:endParaRPr lang="en-US" sz="1400" dirty="0"/>
+          </a:p>
+          <a:p>
+            <a:pPr indent="0" marL="0">
+              <a:lnSpc>
+                <a:spcPct val="125000"/>
+              </a:lnSpc>
+              <a:buNone/>
+            </a:pPr>
+            <a:r>
+              <a:rPr lang="en-US" sz="1400" dirty="0">
+                <a:solidFill>
+                  <a:srgbClr val="C9D3F5"/>
+                </a:solidFill>
+                <a:latin typeface="Courier New" pitchFamily="34" charset="0"/>
+                <a:ea typeface="Courier New" pitchFamily="34" charset="-122"/>
+                <a:cs typeface="Courier New" pitchFamily="34" charset="-120"/>
+              </a:rPr>
+              <a:t>console.log(String(42));        // "42"   -- number to string</a:t>
+            </a:r>
+            <a:endParaRPr lang="en-US" sz="1400" dirty="0"/>
+          </a:p>
+          <a:p>
+            <a:pPr indent="0" marL="0">
+              <a:lnSpc>
+                <a:spcPct val="125000"/>
+              </a:lnSpc>
+              <a:buNone/>
+            </a:pPr>
+            <a:r>
+              <a:rPr lang="en-US" sz="1400" dirty="0">
+                <a:solidFill>
+                  <a:srgbClr val="C9D3F5"/>
+                </a:solidFill>
+                <a:latin typeface="Courier New" pitchFamily="34" charset="0"/>
+                <a:ea typeface="Courier New" pitchFamily="34" charset="-122"/>
+                <a:cs typeface="Courier New" pitchFamily="34" charset="-120"/>
+              </a:rPr>
+              <a:t>console.log(Boolean(0));        // false  -- falsy: 0, "", null, undefined, NaN</a:t>
+            </a:r>
+            <a:endParaRPr lang="en-US" sz="1400" dirty="0"/>
+          </a:p>
+          <a:p>
+            <a:pPr indent="0" marL="0">
+              <a:lnSpc>
+                <a:spcPct val="125000"/>
+              </a:lnSpc>
+              <a:buNone/>
+            </a:pPr>
+            <a:r>
+              <a:rPr lang="en-US" sz="1400" dirty="0">
+                <a:solidFill>
+                  <a:srgbClr val="C9D3F5"/>
+                </a:solidFill>
+                <a:latin typeface="Courier New" pitchFamily="34" charset="0"/>
+                <a:ea typeface="Courier New" pitchFamily="34" charset="-122"/>
+                <a:cs typeface="Courier New" pitchFamily="34" charset="-120"/>
+              </a:rPr>
+              <a:t>console.log(Boolean("hi"));     // true   -- any non-empty string is truthy</a:t>
+            </a:r>
+            <a:endParaRPr lang="en-US" sz="1400" dirty="0"/>
+          </a:p>
+          <a:p>
+            <a:pPr indent="0" marL="0">
+              <a:lnSpc>
+                <a:spcPct val="125000"/>
+              </a:lnSpc>
+              <a:buNone/>
+            </a:pPr>
+            <a:r>
+              <a:rPr lang="en-US" sz="1400" dirty="0">
+                <a:solidFill>
+                  <a:srgbClr val="C9D3F5"/>
+                </a:solidFill>
+                <a:latin typeface="Courier New" pitchFamily="34" charset="0"/>
+                <a:ea typeface="Courier New" pitchFamily="34" charset="-122"/>
+                <a:cs typeface="Courier New" pitchFamily="34" charset="-120"/>
+              </a:rPr>
+              <a:t>console.log(parseInt("42px"));  // 42     -- parses leading digits, ignores the rest</a:t>
+            </a:r>
+            <a:endParaRPr lang="en-US" sz="1400" dirty="0"/>
+          </a:p>
+        </p:txBody>
+      </p:sp>
+      <p:sp>
+        <p:nvSpPr>
+          <p:cNvPr id="6" name="Text 4"/>
+          <p:cNvSpPr txBox="1"/>
+          <p:nvPr/>
+        </p:nvSpPr>
+        <p:spPr>
+          <a:xfrm>
+            <a:off x="640080" y="4646676"/>
+            <a:ext cx="10911535" cy="1658988"/>
+          </a:xfrm>
+          <a:prstGeom prst="rect">
+            <a:avLst/>
+          </a:prstGeom>
+          <a:noFill/>
+          <a:ln/>
+        </p:spPr>
+        <p:txBody>
+          <a:bodyPr wrap="square" lIns="0" tIns="0" rIns="0" bIns="0" rtlCol="0" anchor="t"/>
+          <a:lstStyle/>
+          <a:p>
+            <a:pPr indent="0" marL="0">
+              <a:buNone/>
+            </a:pPr>
+            <a:r>
+              <a:rPr lang="en-US" sz="1300" dirty="0">
+                <a:solidFill>
+                  <a:srgbClr val="26262F"/>
+                </a:solidFill>
+                <a:latin typeface="Calibri" pitchFamily="34" charset="0"/>
+                <a:ea typeface="Calibri" pitchFamily="34" charset="-122"/>
+                <a:cs typeface="Calibri" pitchFamily="34" charset="-120"/>
+              </a:rPr>
+              <a:t>Number(), String(), and Boolean() explicitly convert a value’s type — unlike coercion, the conversion is intentional and visible in the code. parseInt()/parseFloat() pull a leading number out of a string.</a:t>
+            </a:r>
+            <a:endParaRPr lang="en-US" sz="1300" dirty="0"/>
+          </a:p>
+        </p:txBody>
+      </p:sp>
+      <p:sp>
+        <p:nvSpPr>
+          <p:cNvPr id="9" name="cuinotes-footer-mark"/>
+          <p:cNvSpPr txBox="1"/>
+          <p:nvPr/>
+        </p:nvSpPr>
+        <p:spPr>
+          <a:xfrm>
+            <a:off x="9951720" y="6455664"/>
+            <a:ext cx="2011680" cy="292608"/>
+          </a:xfrm>
+          <a:prstGeom prst="rect">
+            <a:avLst/>
+          </a:prstGeom>
+          <a:noFill/>
+        </p:spPr>
+        <p:txBody>
+          <a:bodyPr wrap="none" lIns="0" rIns="0" tIns="0" bIns="0">
+            <a:spAutoFit/>
+          </a:bodyPr>
+          <a:lstStyle/>
+          <a:p>
+            <a:pPr algn="r"/>
+            <a:r>
+              <a:rPr sz="1000">
+                <a:solidFill>
+                  <a:srgbClr val="8A939B"/>
+                </a:solidFill>
+                <a:hlinkClick r:id="rId3"/>
+              </a:rPr>
+              <a:t>cuinotes.com</a:t>
+            </a:r>
+            <a:r>
+              <a:rPr sz="1000">
+                <a:solidFill>
+                  <a:srgbClr val="8A939B"/>
+                </a:solidFill>
+              </a:rPr>
+              <a:t>  ·  16</a:t>
             </a:r>
           </a:p>
         </p:txBody>

--- a/slides/CSC336-Lecture-11-Core-JavaScript-ES6.pptx
+++ b/slides/CSC336-Lecture-11-Core-JavaScript-ES6.pptx
@@ -36,15 +36,18 @@
     <p:sldId id="282" r:id="rId28"/>
     <p:sldId id="283" r:id="rId29"/>
     <p:sldId id="284" r:id="rId30"/>
+    <p:sldId id="297" r:id="rId48"/>
     <p:sldId id="285" r:id="rId31"/>
     <p:sldId id="286" r:id="rId32"/>
     <p:sldId id="287" r:id="rId33"/>
     <p:sldId id="288" r:id="rId34"/>
     <p:sldId id="289" r:id="rId35"/>
     <p:sldId id="290" r:id="rId36"/>
+    <p:sldId id="298" r:id="rId49"/>
+    <p:sldId id="299" r:id="rId50"/>
     <p:sldId id="291" r:id="rId37"/>
-    <p:sldId id="292" r:id="rId38"/>
-    <p:sldId id="293" r:id="rId39"/>
+    <p:sldId id="300" r:id="rId51"/>
+    <p:sldId id="301" r:id="rId52"/>
     <p:sldId id="294" r:id="rId40"/>
   </p:sldIdLst>
   <p:notesMasterIdLst>
@@ -3118,182 +3121,6 @@
             <a:fld id="{F7021451-1387-4CA6-816F-3879F97B5CBC}" type="slidenum">
               <a:rPr lang="en-US"/>
               <a:t>36</a:t>
-            </a:fld>
-            <a:endParaRPr lang="en-US"/>
-          </a:p>
-        </p:txBody>
-      </p:sp>
-    </p:spTree>
-    <p:extLst>
-      <p:ext uri="{BB962C8B-B14F-4D97-AF65-F5344CB8AC3E}">
-        <p14:creationId xmlns:p14="http://schemas.microsoft.com/office/powerpoint/2010/main" val="1024086991"/>
-      </p:ext>
-    </p:extLst>
-  </p:cSld>
-  <p:clrMapOvr>
-    <a:masterClrMapping/>
-  </p:clrMapOvr>
-</p:notes>
-</file>
-
-<file path=ppt/notesSlides/notesSlide37.xml><?xml version="1.0" encoding="utf-8"?>
-<p:notes xmlns:a="http://schemas.openxmlformats.org/drawingml/2006/main" xmlns:r="http://schemas.openxmlformats.org/officeDocument/2006/relationships" xmlns:p="http://schemas.openxmlformats.org/presentationml/2006/main">
-  <p:cSld>
-    <p:spTree>
-      <p:nvGrpSpPr>
-        <p:cNvPr id="1" name=""/>
-        <p:cNvGrpSpPr/>
-        <p:nvPr/>
-      </p:nvGrpSpPr>
-      <p:grpSpPr>
-        <a:xfrm>
-          <a:off x="0" y="0"/>
-          <a:ext cx="0" cy="0"/>
-          <a:chOff x="0" y="0"/>
-          <a:chExt cx="0" cy="0"/>
-        </a:xfrm>
-      </p:grpSpPr>
-      <p:sp>
-        <p:nvSpPr>
-          <p:cNvPr id="2" name="Slide Image Placeholder 1"/>
-          <p:cNvSpPr>
-            <a:spLocks noGrp="1" noRot="1" noChangeAspect="1"/>
-          </p:cNvSpPr>
-          <p:nvPr>
-            <p:ph type="sldImg"/>
-          </p:nvPr>
-        </p:nvSpPr>
-        <p:spPr/>
-      </p:sp>
-      <p:sp>
-        <p:nvSpPr>
-          <p:cNvPr id="3" name="Notes Placeholder 2"/>
-          <p:cNvSpPr>
-            <a:spLocks noGrp="1"/>
-          </p:cNvSpPr>
-          <p:nvPr>
-            <p:ph type="body" idx="1"/>
-          </p:nvPr>
-        </p:nvSpPr>
-        <p:spPr/>
-        <p:txBody>
-          <a:bodyPr/>
-          <a:lstStyle/>
-          <a:p>
-            <a:r>
-              <a:rPr lang="en-US" dirty="0"/>
-              <a:t/>
-            </a:r>
-            <a:endParaRPr lang="en-US" dirty="0"/>
-          </a:p>
-        </p:txBody>
-      </p:sp>
-      <p:sp>
-        <p:nvSpPr>
-          <p:cNvPr id="4" name="Slide Number Placeholder 3"/>
-          <p:cNvSpPr>
-            <a:spLocks noGrp="1"/>
-          </p:cNvSpPr>
-          <p:nvPr>
-            <p:ph type="sldNum" sz="quarter" idx="10"/>
-          </p:nvPr>
-        </p:nvSpPr>
-        <p:spPr/>
-        <p:txBody>
-          <a:bodyPr/>
-          <a:lstStyle/>
-          <a:p>
-            <a:fld id="{F7021451-1387-4CA6-816F-3879F97B5CBC}" type="slidenum">
-              <a:rPr lang="en-US"/>
-              <a:t>37</a:t>
-            </a:fld>
-            <a:endParaRPr lang="en-US"/>
-          </a:p>
-        </p:txBody>
-      </p:sp>
-    </p:spTree>
-    <p:extLst>
-      <p:ext uri="{BB962C8B-B14F-4D97-AF65-F5344CB8AC3E}">
-        <p14:creationId xmlns:p14="http://schemas.microsoft.com/office/powerpoint/2010/main" val="1024086991"/>
-      </p:ext>
-    </p:extLst>
-  </p:cSld>
-  <p:clrMapOvr>
-    <a:masterClrMapping/>
-  </p:clrMapOvr>
-</p:notes>
-</file>
-
-<file path=ppt/notesSlides/notesSlide38.xml><?xml version="1.0" encoding="utf-8"?>
-<p:notes xmlns:a="http://schemas.openxmlformats.org/drawingml/2006/main" xmlns:r="http://schemas.openxmlformats.org/officeDocument/2006/relationships" xmlns:p="http://schemas.openxmlformats.org/presentationml/2006/main">
-  <p:cSld>
-    <p:spTree>
-      <p:nvGrpSpPr>
-        <p:cNvPr id="1" name=""/>
-        <p:cNvGrpSpPr/>
-        <p:nvPr/>
-      </p:nvGrpSpPr>
-      <p:grpSpPr>
-        <a:xfrm>
-          <a:off x="0" y="0"/>
-          <a:ext cx="0" cy="0"/>
-          <a:chOff x="0" y="0"/>
-          <a:chExt cx="0" cy="0"/>
-        </a:xfrm>
-      </p:grpSpPr>
-      <p:sp>
-        <p:nvSpPr>
-          <p:cNvPr id="2" name="Slide Image Placeholder 1"/>
-          <p:cNvSpPr>
-            <a:spLocks noGrp="1" noRot="1" noChangeAspect="1"/>
-          </p:cNvSpPr>
-          <p:nvPr>
-            <p:ph type="sldImg"/>
-          </p:nvPr>
-        </p:nvSpPr>
-        <p:spPr/>
-      </p:sp>
-      <p:sp>
-        <p:nvSpPr>
-          <p:cNvPr id="3" name="Notes Placeholder 2"/>
-          <p:cNvSpPr>
-            <a:spLocks noGrp="1"/>
-          </p:cNvSpPr>
-          <p:nvPr>
-            <p:ph type="body" idx="1"/>
-          </p:nvPr>
-        </p:nvSpPr>
-        <p:spPr/>
-        <p:txBody>
-          <a:bodyPr/>
-          <a:lstStyle/>
-          <a:p>
-            <a:r>
-              <a:rPr lang="en-US" dirty="0"/>
-              <a:t/>
-            </a:r>
-            <a:endParaRPr lang="en-US" dirty="0"/>
-          </a:p>
-        </p:txBody>
-      </p:sp>
-      <p:sp>
-        <p:nvSpPr>
-          <p:cNvPr id="4" name="Slide Number Placeholder 3"/>
-          <p:cNvSpPr>
-            <a:spLocks noGrp="1"/>
-          </p:cNvSpPr>
-          <p:nvPr>
-            <p:ph type="sldNum" sz="quarter" idx="10"/>
-          </p:nvPr>
-        </p:nvSpPr>
-        <p:spPr/>
-        <p:txBody>
-          <a:bodyPr/>
-          <a:lstStyle/>
-          <a:p>
-            <a:fld id="{F7021451-1387-4CA6-816F-3879F97B5CBC}" type="slidenum">
-              <a:rPr lang="en-US"/>
-              <a:t>38</a:t>
             </a:fld>
             <a:endParaRPr lang="en-US"/>
           </a:p>
@@ -12813,7 +12640,7 @@
 
 <file path=ppt/slides/slide29.xml><?xml version="1.0" encoding="utf-8"?>
 <p:sld xmlns:a="http://schemas.openxmlformats.org/drawingml/2006/main" xmlns:r="http://schemas.openxmlformats.org/officeDocument/2006/relationships" xmlns:p="http://schemas.openxmlformats.org/presentationml/2006/main">
-  <p:cSld name="Slide 29">
+  <p:cSld name="Slide 31">
     <p:bg>
       <p:bgPr>
         <a:solidFill>
@@ -12907,7 +12734,7 @@
                 <a:ea typeface="Cambria" pitchFamily="34" charset="-122"/>
                 <a:cs typeface="Cambria" pitchFamily="34" charset="-120"/>
               </a:rPr>
-              <a:t>call, apply, and bind</a:t>
+              <a:t>call vs. apply</a:t>
             </a:r>
             <a:endParaRPr lang="en-US" sz="3400" dirty="0"/>
           </a:p>
@@ -12922,11 +12749,11 @@
         <p:spPr>
           <a:xfrm>
             <a:off x="640080" y="1965960"/>
-            <a:ext cx="10911535" cy="2948940"/>
+            <a:ext cx="10911535" cy="2452116"/>
           </a:xfrm>
           <a:prstGeom prst="roundRect">
             <a:avLst>
-              <a:gd name="adj" fmla="val 2481"/>
+              <a:gd name="adj" fmla="val 3887"/>
             </a:avLst>
           </a:prstGeom>
           <a:solidFill>
@@ -12948,7 +12775,7 @@
         <p:spPr>
           <a:xfrm>
             <a:off x="960120" y="2194560"/>
-            <a:ext cx="10271455" cy="2491740"/>
+            <a:ext cx="10271455" cy="1994916"/>
           </a:xfrm>
           <a:prstGeom prst="rect">
             <a:avLst/>
@@ -12975,7 +12802,7 @@
                 <a:ea typeface="Courier New" pitchFamily="34" charset="-122"/>
                 <a:cs typeface="Courier New" pitchFamily="34" charset="-120"/>
               </a:rPr>
-              <a:t>function describe(city) {</a:t>
+              <a:t>function introduce(greeting, punctuation) {</a:t>
             </a:r>
             <a:endParaRPr lang="en-US" sz="1400" dirty="0"/>
           </a:p>
@@ -12995,7 +12822,7 @@
                 <a:ea typeface="Courier New" pitchFamily="34" charset="-122"/>
                 <a:cs typeface="Courier New" pitchFamily="34" charset="-120"/>
               </a:rPr>
-              <a:t>  console.log(`${this.brand} is from ${city}`);</a:t>
+              <a:t>  console.log(`${greeting}, I'm ${this.name}${punctuation}`);</a:t>
             </a:r>
             <a:endParaRPr lang="en-US" sz="1400" dirty="0"/>
           </a:p>
@@ -13035,17 +12862,8 @@
                 <a:ea typeface="Courier New" pitchFamily="34" charset="-122"/>
                 <a:cs typeface="Courier New" pitchFamily="34" charset="-120"/>
               </a:rPr>
-              <a:t>const car = { brand: "Honda" };</a:t>
-            </a:r>
-            <a:endParaRPr lang="en-US" sz="1400" dirty="0"/>
-          </a:p>
-          <a:p>
-            <a:pPr indent="0" marL="0">
-              <a:lnSpc>
-                <a:spcPct val="125000"/>
-              </a:lnSpc>
-              <a:buNone/>
-            </a:pPr>
+              <a:t>const user = { name: "Ayesha" };</a:t>
+            </a:r>
             <a:endParaRPr lang="en-US" sz="1400" dirty="0"/>
           </a:p>
           <a:p>
@@ -13064,7 +12882,7 @@
                 <a:ea typeface="Courier New" pitchFamily="34" charset="-122"/>
                 <a:cs typeface="Courier New" pitchFamily="34" charset="-120"/>
               </a:rPr>
-              <a:t>describe.call(car, "Tokyo");    // pass `this` and args individually</a:t>
+              <a:t/>
             </a:r>
             <a:endParaRPr lang="en-US" sz="1400" dirty="0"/>
           </a:p>
@@ -13084,7 +12902,7 @@
                 <a:ea typeface="Courier New" pitchFamily="34" charset="-122"/>
                 <a:cs typeface="Courier New" pitchFamily="34" charset="-120"/>
               </a:rPr>
-              <a:t>describe.apply(car, ["Tokyo"]); // pass `this` and args as an array</a:t>
+              <a:t>introduce.call(user, "Hi", "!");    // args listed one by one</a:t>
             </a:r>
             <a:endParaRPr lang="en-US" sz="1400" dirty="0"/>
           </a:p>
@@ -13104,30 +12922,10 @@
                 <a:ea typeface="Courier New" pitchFamily="34" charset="-122"/>
                 <a:cs typeface="Courier New" pitchFamily="34" charset="-120"/>
               </a:rPr>
-              <a:t>const bound = describe.bind(car); // returns a NEW function, `this` locked in</a:t>
+              <a:t>introduce.apply(user, ["Hi", "!"]); // args passed as an array</a:t>
             </a:r>
             <a:endParaRPr lang="en-US" sz="1400" dirty="0"/>
           </a:p>
-          <a:p>
-            <a:pPr indent="0" marL="0">
-              <a:lnSpc>
-                <a:spcPct val="125000"/>
-              </a:lnSpc>
-              <a:buNone/>
-            </a:pPr>
-            <a:r>
-              <a:rPr lang="en-US" sz="1400" dirty="0">
-                <a:solidFill>
-                  <a:srgbClr val="C9D3F5"/>
-                </a:solidFill>
-                <a:latin typeface="Courier New" pitchFamily="34" charset="0"/>
-                <a:ea typeface="Courier New" pitchFamily="34" charset="-122"/>
-                <a:cs typeface="Courier New" pitchFamily="34" charset="-120"/>
-              </a:rPr>
-              <a:t>bound("Tokyo");</a:t>
-            </a:r>
-            <a:endParaRPr lang="en-US" sz="1400" dirty="0"/>
-          </a:p>
         </p:txBody>
       </p:sp>
       <p:sp>
@@ -13138,8 +12936,8 @@
         </p:nvSpPr>
         <p:spPr>
           <a:xfrm>
-            <a:off x="640080" y="5143500"/>
-            <a:ext cx="10911535" cy="1120140"/>
+            <a:off x="640080" y="4646676"/>
+            <a:ext cx="10911535" cy="1658988"/>
           </a:xfrm>
           <a:prstGeom prst="rect">
             <a:avLst/>
@@ -13163,7 +12961,7 @@
                 <a:ea typeface="Calibri" pitchFamily="34" charset="-122"/>
                 <a:cs typeface="Calibri" pitchFamily="34" charset="-120"/>
               </a:rPr>
-              <a:t>bind does NOT call the function -- it returns a new function permanently bound to thisArg, useful when passing a method as a callback.</a:t>
+              <a:t>call and apply both invoke the function immediately with a given this — they only differ in how you pass the arguments. Use apply when your arguments already live in an array.</a:t>
             </a:r>
             <a:endParaRPr lang="en-US" sz="1300" dirty="0"/>
           </a:p>
@@ -14516,7 +14314,7 @@
                   <a:srgbClr val="8A939B"/>
                 </a:solidFill>
               </a:rPr>
-              <a:t>  ·  32</a:t>
+              <a:t>  ·  33</a:t>
             </a:r>
           </a:p>
         </p:txBody>
@@ -14936,7 +14734,7 @@
                   <a:srgbClr val="8A939B"/>
                 </a:solidFill>
               </a:rPr>
-              <a:t>  ·  33</a:t>
+              <a:t>  ·  34</a:t>
             </a:r>
           </a:p>
         </p:txBody>
@@ -15434,7 +15232,7 @@
                   <a:srgbClr val="8A939B"/>
                 </a:solidFill>
               </a:rPr>
-              <a:t>  ·  34</a:t>
+              <a:t>  ·  35</a:t>
             </a:r>
           </a:p>
         </p:txBody>
@@ -15893,7 +15691,7 @@
                   <a:srgbClr val="8A939B"/>
                 </a:solidFill>
               </a:rPr>
-              <a:t>  ·  35</a:t>
+              <a:t>  ·  36</a:t>
             </a:r>
           </a:p>
         </p:txBody>
@@ -16322,7 +16120,7 @@
                   <a:srgbClr val="8A939B"/>
                 </a:solidFill>
               </a:rPr>
-              <a:t>  ·  36</a:t>
+              <a:t>  ·  37</a:t>
             </a:r>
           </a:p>
         </p:txBody>
@@ -16431,7 +16229,7 @@
                 <a:ea typeface="Cambria" pitchFamily="34" charset="-122"/>
                 <a:cs typeface="Cambria" pitchFamily="34" charset="-120"/>
               </a:rPr>
-              <a:t>Grouping and Listing Data</a:t>
+              <a:t>Reading and Updating Data</a:t>
             </a:r>
             <a:endParaRPr lang="en-US" sz="3400" dirty="0"/>
           </a:p>
@@ -16752,7 +16550,7 @@
                   <a:srgbClr val="8A939B"/>
                 </a:solidFill>
               </a:rPr>
-              <a:t>  ·  37</a:t>
+              <a:t>  ·  38</a:t>
             </a:r>
           </a:p>
         </p:txBody>
@@ -17179,678 +16977,7 @@
                   <a:srgbClr val="8A939B"/>
                 </a:solidFill>
               </a:rPr>
-              <a:t>  ·  38</a:t>
-            </a:r>
-          </a:p>
-        </p:txBody>
-      </p:sp>
-    </p:spTree>
-  </p:cSld>
-  <p:clrMapOvr>
-    <a:masterClrMapping/>
-  </p:clrMapOvr>
-</p:sld>
-</file>
-
-<file path=ppt/slides/slide37.xml><?xml version="1.0" encoding="utf-8"?>
-<p:sld xmlns:a="http://schemas.openxmlformats.org/drawingml/2006/main" xmlns:r="http://schemas.openxmlformats.org/officeDocument/2006/relationships" xmlns:p="http://schemas.openxmlformats.org/presentationml/2006/main">
-  <p:cSld name="Slide 37">
-    <p:bg>
-      <p:bgPr>
-        <a:solidFill>
-          <a:srgbClr val="FFFFFF"/>
-        </a:solidFill>
-      </p:bgPr>
-    </p:bg>
-    <p:spTree>
-      <p:nvGrpSpPr>
-        <p:cNvPr id="1" name=""/>
-        <p:cNvGrpSpPr/>
-        <p:nvPr/>
-      </p:nvGrpSpPr>
-      <p:grpSpPr>
-        <a:xfrm>
-          <a:off x="0" y="0"/>
-          <a:ext cx="0" cy="0"/>
-          <a:chOff x="0" y="0"/>
-          <a:chExt cx="0" cy="0"/>
-        </a:xfrm>
-      </p:grpSpPr>
-      <p:sp>
-        <p:nvSpPr>
-          <p:cNvPr id="2" name="Text 0"/>
-          <p:cNvSpPr txBox="1"/>
-          <p:nvPr/>
-        </p:nvSpPr>
-        <p:spPr>
-          <a:xfrm>
-            <a:off x="640080" y="457200"/>
-            <a:ext cx="10058400" cy="365760"/>
-          </a:xfrm>
-          <a:prstGeom prst="rect">
-            <a:avLst/>
-          </a:prstGeom>
-          <a:noFill/>
-          <a:ln/>
-        </p:spPr>
-        <p:txBody>
-          <a:bodyPr wrap="square" lIns="0" tIns="0" rIns="0" bIns="0" rtlCol="0" anchor="ctr"/>
-          <a:lstStyle/>
-          <a:p>
-            <a:pPr algn="l" indent="0" marL="0">
-              <a:buNone/>
-            </a:pPr>
-            <a:r>
-              <a:rPr lang="en-US" sz="1300" b="1" spc="300" kern="0" dirty="0">
-                <a:solidFill>
-                  <a:srgbClr val="FF8A3D"/>
-                </a:solidFill>
-                <a:latin typeface="Calibri" pitchFamily="34" charset="0"/>
-                <a:ea typeface="Calibri" pitchFamily="34" charset="-122"/>
-                <a:cs typeface="Calibri" pitchFamily="34" charset="-120"/>
-              </a:rPr>
-              <a:t>ES6 MODULES</a:t>
-            </a:r>
-            <a:endParaRPr lang="en-US" sz="1300" dirty="0"/>
-          </a:p>
-        </p:txBody>
-      </p:sp>
-      <p:sp>
-        <p:nvSpPr>
-          <p:cNvPr id="3" name="Text 1"/>
-          <p:cNvSpPr txBox="1"/>
-          <p:nvPr/>
-        </p:nvSpPr>
-        <p:spPr>
-          <a:xfrm>
-            <a:off x="640080" y="841248"/>
-            <a:ext cx="10881360" cy="914400"/>
-          </a:xfrm>
-          <a:prstGeom prst="rect">
-            <a:avLst/>
-          </a:prstGeom>
-          <a:noFill/>
-          <a:ln/>
-        </p:spPr>
-        <p:txBody>
-          <a:bodyPr wrap="square" lIns="0" tIns="0" rIns="0" bIns="0" rtlCol="0" anchor="ctr"/>
-          <a:lstStyle/>
-          <a:p>
-            <a:pPr algn="l" indent="0" marL="0">
-              <a:buNone/>
-            </a:pPr>
-            <a:r>
-              <a:rPr lang="en-US" sz="3400" b="1" dirty="0">
-                <a:solidFill>
-                  <a:srgbClr val="2B2B7A"/>
-                </a:solidFill>
-                <a:latin typeface="Cambria" pitchFamily="34" charset="0"/>
-                <a:ea typeface="Cambria" pitchFamily="34" charset="-122"/>
-                <a:cs typeface="Cambria" pitchFamily="34" charset="-120"/>
-              </a:rPr>
-              <a:t>export and import</a:t>
-            </a:r>
-            <a:endParaRPr lang="en-US" sz="3400" dirty="0"/>
-          </a:p>
-        </p:txBody>
-      </p:sp>
-      <p:sp>
-        <p:nvSpPr>
-          <p:cNvPr id="4" name="Shape 2"/>
-          <p:cNvSpPr/>
-          <p:nvPr/>
-        </p:nvSpPr>
-        <p:spPr>
-          <a:xfrm>
-            <a:off x="640080" y="1965960"/>
-            <a:ext cx="10911535" cy="2948940"/>
-          </a:xfrm>
-          <a:prstGeom prst="roundRect">
-            <a:avLst>
-              <a:gd name="adj" fmla="val 2481"/>
-            </a:avLst>
-          </a:prstGeom>
-          <a:solidFill>
-            <a:srgbClr val="1E1E4C"/>
-          </a:solidFill>
-          <a:ln/>
-        </p:spPr>
-        <p:txBody>
-          <a:bodyPr/>
-          <a:p/>
-        </p:txBody>
-      </p:sp>
-      <p:sp>
-        <p:nvSpPr>
-          <p:cNvPr id="5" name="Text 3"/>
-          <p:cNvSpPr txBox="1"/>
-          <p:nvPr/>
-        </p:nvSpPr>
-        <p:spPr>
-          <a:xfrm>
-            <a:off x="960120" y="2194560"/>
-            <a:ext cx="10271455" cy="2491740"/>
-          </a:xfrm>
-          <a:prstGeom prst="rect">
-            <a:avLst/>
-          </a:prstGeom>
-          <a:noFill/>
-          <a:ln/>
-        </p:spPr>
-        <p:txBody>
-          <a:bodyPr wrap="square" lIns="0" tIns="0" rIns="0" bIns="0" rtlCol="0" anchor="t"/>
-          <a:lstStyle/>
-          <a:p>
-            <a:pPr indent="0" marL="0">
-              <a:lnSpc>
-                <a:spcPct val="125000"/>
-              </a:lnSpc>
-              <a:buNone/>
-            </a:pPr>
-            <a:r>
-              <a:rPr lang="en-US" sz="1400" dirty="0">
-                <a:solidFill>
-                  <a:srgbClr val="C9D3F5"/>
-                </a:solidFill>
-                <a:latin typeface="Courier New" pitchFamily="34" charset="0"/>
-                <a:ea typeface="Courier New" pitchFamily="34" charset="-122"/>
-                <a:cs typeface="Courier New" pitchFamily="34" charset="-120"/>
-              </a:rPr>
-              <a:t>// mathUtils.js</a:t>
-            </a:r>
-            <a:endParaRPr lang="en-US" sz="1400" dirty="0"/>
-          </a:p>
-          <a:p>
-            <a:pPr indent="0" marL="0">
-              <a:lnSpc>
-                <a:spcPct val="125000"/>
-              </a:lnSpc>
-              <a:buNone/>
-            </a:pPr>
-            <a:r>
-              <a:rPr lang="en-US" sz="1400" dirty="0">
-                <a:solidFill>
-                  <a:srgbClr val="C9D3F5"/>
-                </a:solidFill>
-                <a:latin typeface="Courier New" pitchFamily="34" charset="0"/>
-                <a:ea typeface="Courier New" pitchFamily="34" charset="-122"/>
-                <a:cs typeface="Courier New" pitchFamily="34" charset="-120"/>
-              </a:rPr>
-              <a:t>export function add(a, b) { return a + b; }</a:t>
-            </a:r>
-            <a:endParaRPr lang="en-US" sz="1400" dirty="0"/>
-          </a:p>
-          <a:p>
-            <a:pPr indent="0" marL="0">
-              <a:lnSpc>
-                <a:spcPct val="125000"/>
-              </a:lnSpc>
-              <a:buNone/>
-            </a:pPr>
-            <a:r>
-              <a:rPr lang="en-US" sz="1400" dirty="0">
-                <a:solidFill>
-                  <a:srgbClr val="C9D3F5"/>
-                </a:solidFill>
-                <a:latin typeface="Courier New" pitchFamily="34" charset="0"/>
-                <a:ea typeface="Courier New" pitchFamily="34" charset="-122"/>
-                <a:cs typeface="Courier New" pitchFamily="34" charset="-120"/>
-              </a:rPr>
-              <a:t>export const PI = 3.14159;</a:t>
-            </a:r>
-            <a:endParaRPr lang="en-US" sz="1400" dirty="0"/>
-          </a:p>
-          <a:p>
-            <a:pPr indent="0" marL="0">
-              <a:lnSpc>
-                <a:spcPct val="125000"/>
-              </a:lnSpc>
-              <a:buNone/>
-            </a:pPr>
-            <a:r>
-              <a:rPr lang="en-US" sz="1400" dirty="0">
-                <a:solidFill>
-                  <a:srgbClr val="C9D3F5"/>
-                </a:solidFill>
-                <a:latin typeface="Courier New" pitchFamily="34" charset="0"/>
-                <a:ea typeface="Courier New" pitchFamily="34" charset="-122"/>
-                <a:cs typeface="Courier New" pitchFamily="34" charset="-120"/>
-              </a:rPr>
-              <a:t>export default function multiply(a, b) { return a * b; }</a:t>
-            </a:r>
-            <a:endParaRPr lang="en-US" sz="1400" dirty="0"/>
-          </a:p>
-          <a:p>
-            <a:pPr indent="0" marL="0">
-              <a:lnSpc>
-                <a:spcPct val="125000"/>
-              </a:lnSpc>
-              <a:buNone/>
-            </a:pPr>
-            <a:endParaRPr lang="en-US" sz="1400" dirty="0"/>
-          </a:p>
-          <a:p>
-            <a:pPr indent="0" marL="0">
-              <a:lnSpc>
-                <a:spcPct val="125000"/>
-              </a:lnSpc>
-              <a:buNone/>
-            </a:pPr>
-            <a:r>
-              <a:rPr lang="en-US" sz="1400" dirty="0">
-                <a:solidFill>
-                  <a:srgbClr val="C9D3F5"/>
-                </a:solidFill>
-                <a:latin typeface="Courier New" pitchFamily="34" charset="0"/>
-                <a:ea typeface="Courier New" pitchFamily="34" charset="-122"/>
-                <a:cs typeface="Courier New" pitchFamily="34" charset="-120"/>
-              </a:rPr>
-              <a:t>// main.js</a:t>
-            </a:r>
-            <a:endParaRPr lang="en-US" sz="1400" dirty="0"/>
-          </a:p>
-          <a:p>
-            <a:pPr indent="0" marL="0">
-              <a:lnSpc>
-                <a:spcPct val="125000"/>
-              </a:lnSpc>
-              <a:buNone/>
-            </a:pPr>
-            <a:r>
-              <a:rPr lang="en-US" sz="1400" dirty="0">
-                <a:solidFill>
-                  <a:srgbClr val="C9D3F5"/>
-                </a:solidFill>
-                <a:latin typeface="Courier New" pitchFamily="34" charset="0"/>
-                <a:ea typeface="Courier New" pitchFamily="34" charset="-122"/>
-                <a:cs typeface="Courier New" pitchFamily="34" charset="-120"/>
-              </a:rPr>
-              <a:t>import multiply, { add, PI } from "./mathUtils.js";</a:t>
-            </a:r>
-            <a:endParaRPr lang="en-US" sz="1400" dirty="0"/>
-          </a:p>
-          <a:p>
-            <a:pPr indent="0" marL="0">
-              <a:lnSpc>
-                <a:spcPct val="125000"/>
-              </a:lnSpc>
-              <a:buNone/>
-            </a:pPr>
-            <a:r>
-              <a:rPr lang="en-US" sz="1400" dirty="0">
-                <a:solidFill>
-                  <a:srgbClr val="C9D3F5"/>
-                </a:solidFill>
-                <a:latin typeface="Courier New" pitchFamily="34" charset="0"/>
-                <a:ea typeface="Courier New" pitchFamily="34" charset="-122"/>
-                <a:cs typeface="Courier New" pitchFamily="34" charset="-120"/>
-              </a:rPr>
-              <a:t>console.log(add(2, 3));      // 5</a:t>
-            </a:r>
-            <a:endParaRPr lang="en-US" sz="1400" dirty="0"/>
-          </a:p>
-          <a:p>
-            <a:pPr indent="0" marL="0">
-              <a:lnSpc>
-                <a:spcPct val="125000"/>
-              </a:lnSpc>
-              <a:buNone/>
-            </a:pPr>
-            <a:r>
-              <a:rPr lang="en-US" sz="1400" dirty="0">
-                <a:solidFill>
-                  <a:srgbClr val="C9D3F5"/>
-                </a:solidFill>
-                <a:latin typeface="Courier New" pitchFamily="34" charset="0"/>
-                <a:ea typeface="Courier New" pitchFamily="34" charset="-122"/>
-                <a:cs typeface="Courier New" pitchFamily="34" charset="-120"/>
-              </a:rPr>
-              <a:t>console.log(multiply(2, 3)); // 6</a:t>
-            </a:r>
-            <a:endParaRPr lang="en-US" sz="1400" dirty="0"/>
-          </a:p>
-        </p:txBody>
-      </p:sp>
-      <p:sp>
-        <p:nvSpPr>
-          <p:cNvPr id="6" name="Text 4"/>
-          <p:cNvSpPr txBox="1"/>
-          <p:nvPr/>
-        </p:nvSpPr>
-        <p:spPr>
-          <a:xfrm>
-            <a:off x="640080" y="5143500"/>
-            <a:ext cx="10911535" cy="1120140"/>
-          </a:xfrm>
-          <a:prstGeom prst="rect">
-            <a:avLst/>
-          </a:prstGeom>
-          <a:noFill/>
-          <a:ln/>
-        </p:spPr>
-        <p:txBody>
-          <a:bodyPr wrap="square" lIns="0" tIns="0" rIns="0" bIns="0" rtlCol="0" anchor="t"/>
-          <a:lstStyle/>
-          <a:p>
-            <a:pPr indent="0" marL="0">
-              <a:buNone/>
-            </a:pPr>
-            <a:r>
-              <a:rPr lang="en-US" sz="1300" dirty="0">
-                <a:solidFill>
-                  <a:srgbClr val="26262F"/>
-                </a:solidFill>
-                <a:latin typeface="Calibri" pitchFamily="34" charset="0"/>
-                <a:ea typeface="Calibri" pitchFamily="34" charset="-122"/>
-                <a:cs typeface="Calibri" pitchFamily="34" charset="-120"/>
-              </a:rPr>
-              <a:t>A module's variables and functions are private by default -- you must explicitly export what other files can use.</a:t>
-            </a:r>
-            <a:endParaRPr lang="en-US" sz="1300" dirty="0"/>
-          </a:p>
-        </p:txBody>
-      </p:sp>
-      <p:sp>
-        <p:nvSpPr>
-          <p:cNvPr id="9" name="cuinotes-footer-mark"/>
-          <p:cNvSpPr txBox="1"/>
-          <p:nvPr/>
-        </p:nvSpPr>
-        <p:spPr>
-          <a:xfrm>
-            <a:off x="9951720" y="6455664"/>
-            <a:ext cx="2011680" cy="292608"/>
-          </a:xfrm>
-          <a:prstGeom prst="rect">
-            <a:avLst/>
-          </a:prstGeom>
-          <a:noFill/>
-        </p:spPr>
-        <p:txBody>
-          <a:bodyPr wrap="none" lIns="0" rIns="0" tIns="0" bIns="0">
-            <a:spAutoFit/>
-          </a:bodyPr>
-          <a:lstStyle/>
-          <a:p>
-            <a:pPr algn="r"/>
-            <a:r>
-              <a:rPr sz="1000">
-                <a:solidFill>
-                  <a:srgbClr val="8A939B"/>
-                </a:solidFill>
-                <a:hlinkClick r:id="rId3"/>
-              </a:rPr>
-              <a:t>cuinotes.com</a:t>
-            </a:r>
-            <a:r>
-              <a:rPr sz="1000">
-                <a:solidFill>
-                  <a:srgbClr val="8A939B"/>
-                </a:solidFill>
-              </a:rPr>
-              <a:t>  ·  39</a:t>
-            </a:r>
-          </a:p>
-        </p:txBody>
-      </p:sp>
-    </p:spTree>
-  </p:cSld>
-  <p:clrMapOvr>
-    <a:masterClrMapping/>
-  </p:clrMapOvr>
-</p:sld>
-</file>
-
-<file path=ppt/slides/slide38.xml><?xml version="1.0" encoding="utf-8"?>
-<p:sld xmlns:a="http://schemas.openxmlformats.org/drawingml/2006/main" xmlns:r="http://schemas.openxmlformats.org/officeDocument/2006/relationships" xmlns:p="http://schemas.openxmlformats.org/presentationml/2006/main">
-  <p:cSld name="Slide 38">
-    <p:bg>
-      <p:bgPr>
-        <a:solidFill>
-          <a:srgbClr val="FFFFFF"/>
-        </a:solidFill>
-      </p:bgPr>
-    </p:bg>
-    <p:spTree>
-      <p:nvGrpSpPr>
-        <p:cNvPr id="1" name=""/>
-        <p:cNvGrpSpPr/>
-        <p:nvPr/>
-      </p:nvGrpSpPr>
-      <p:grpSpPr>
-        <a:xfrm>
-          <a:off x="0" y="0"/>
-          <a:ext cx="0" cy="0"/>
-          <a:chOff x="0" y="0"/>
-          <a:chExt cx="0" cy="0"/>
-        </a:xfrm>
-      </p:grpSpPr>
-      <p:sp>
-        <p:nvSpPr>
-          <p:cNvPr id="2" name="Text 0"/>
-          <p:cNvSpPr txBox="1"/>
-          <p:nvPr/>
-        </p:nvSpPr>
-        <p:spPr>
-          <a:xfrm>
-            <a:off x="640080" y="457200"/>
-            <a:ext cx="10058400" cy="365760"/>
-          </a:xfrm>
-          <a:prstGeom prst="rect">
-            <a:avLst/>
-          </a:prstGeom>
-          <a:noFill/>
-          <a:ln/>
-        </p:spPr>
-        <p:txBody>
-          <a:bodyPr wrap="square" lIns="0" tIns="0" rIns="0" bIns="0" rtlCol="0" anchor="ctr"/>
-          <a:lstStyle/>
-          <a:p>
-            <a:pPr algn="l" indent="0" marL="0">
-              <a:buNone/>
-            </a:pPr>
-            <a:r>
-              <a:rPr lang="en-US" sz="1300" b="1" spc="300" kern="0" dirty="0">
-                <a:solidFill>
-                  <a:srgbClr val="FF8A3D"/>
-                </a:solidFill>
-                <a:latin typeface="Calibri" pitchFamily="34" charset="0"/>
-                <a:ea typeface="Calibri" pitchFamily="34" charset="-122"/>
-                <a:cs typeface="Calibri" pitchFamily="34" charset="-120"/>
-              </a:rPr>
-              <a:t>ES6 MODULES</a:t>
-            </a:r>
-            <a:endParaRPr lang="en-US" sz="1300" dirty="0"/>
-          </a:p>
-        </p:txBody>
-      </p:sp>
-      <p:sp>
-        <p:nvSpPr>
-          <p:cNvPr id="3" name="Text 1"/>
-          <p:cNvSpPr txBox="1"/>
-          <p:nvPr/>
-        </p:nvSpPr>
-        <p:spPr>
-          <a:xfrm>
-            <a:off x="640080" y="841248"/>
-            <a:ext cx="10881360" cy="914400"/>
-          </a:xfrm>
-          <a:prstGeom prst="rect">
-            <a:avLst/>
-          </a:prstGeom>
-          <a:noFill/>
-          <a:ln/>
-        </p:spPr>
-        <p:txBody>
-          <a:bodyPr wrap="square" lIns="0" tIns="0" rIns="0" bIns="0" rtlCol="0" anchor="ctr"/>
-          <a:lstStyle/>
-          <a:p>
-            <a:pPr algn="l" indent="0" marL="0">
-              <a:buNone/>
-            </a:pPr>
-            <a:r>
-              <a:rPr lang="en-US" sz="3400" b="1" dirty="0">
-                <a:solidFill>
-                  <a:srgbClr val="2B2B7A"/>
-                </a:solidFill>
-                <a:latin typeface="Cambria" pitchFamily="34" charset="0"/>
-                <a:ea typeface="Cambria" pitchFamily="34" charset="-122"/>
-                <a:cs typeface="Cambria" pitchFamily="34" charset="-120"/>
-              </a:rPr>
-              <a:t>Modules Are Deferred Automatically</a:t>
-            </a:r>
-            <a:endParaRPr lang="en-US" sz="3400" dirty="0"/>
-          </a:p>
-        </p:txBody>
-      </p:sp>
-      <p:sp>
-        <p:nvSpPr>
-          <p:cNvPr id="4" name="Shape 2"/>
-          <p:cNvSpPr/>
-          <p:nvPr/>
-        </p:nvSpPr>
-        <p:spPr>
-          <a:xfrm>
-            <a:off x="640080" y="1965960"/>
-            <a:ext cx="10911535" cy="1463040"/>
-          </a:xfrm>
-          <a:prstGeom prst="roundRect">
-            <a:avLst>
-              <a:gd name="adj" fmla="val 3750"/>
-            </a:avLst>
-          </a:prstGeom>
-          <a:solidFill>
-            <a:srgbClr val="E9EDFB"/>
-          </a:solidFill>
-          <a:ln w="12700">
-            <a:solidFill>
-              <a:srgbClr val="6C7FD6"/>
-            </a:solidFill>
-            <a:prstDash val="solid"/>
-          </a:ln>
-        </p:spPr>
-        <p:txBody>
-          <a:bodyPr/>
-          <a:p/>
-        </p:txBody>
-      </p:sp>
-      <p:sp>
-        <p:nvSpPr>
-          <p:cNvPr id="5" name="Text 3"/>
-          <p:cNvSpPr txBox="1"/>
-          <p:nvPr/>
-        </p:nvSpPr>
-        <p:spPr>
-          <a:xfrm>
-            <a:off x="868680" y="2103120"/>
-            <a:ext cx="10454335" cy="274320"/>
-          </a:xfrm>
-          <a:prstGeom prst="rect">
-            <a:avLst/>
-          </a:prstGeom>
-          <a:noFill/>
-          <a:ln/>
-        </p:spPr>
-        <p:txBody>
-          <a:bodyPr wrap="square" lIns="0" tIns="0" rIns="0" bIns="0" rtlCol="0" anchor="ctr"/>
-          <a:lstStyle/>
-          <a:p>
-            <a:pPr indent="0" marL="0">
-              <a:buNone/>
-            </a:pPr>
-            <a:r>
-              <a:rPr lang="en-US" sz="1000" b="1" spc="200" kern="0" dirty="0">
-                <a:solidFill>
-                  <a:srgbClr val="33459E"/>
-                </a:solidFill>
-                <a:latin typeface="Calibri" pitchFamily="34" charset="0"/>
-                <a:ea typeface="Calibri" pitchFamily="34" charset="-122"/>
-                <a:cs typeface="Calibri" pitchFamily="34" charset="-120"/>
-              </a:rPr>
-              <a:t>NOTE</a:t>
-            </a:r>
-            <a:endParaRPr lang="en-US" sz="1000" dirty="0"/>
-          </a:p>
-        </p:txBody>
-      </p:sp>
-      <p:sp>
-        <p:nvSpPr>
-          <p:cNvPr id="6" name="Text 4"/>
-          <p:cNvSpPr txBox="1"/>
-          <p:nvPr/>
-        </p:nvSpPr>
-        <p:spPr>
-          <a:xfrm>
-            <a:off x="868680" y="2404872"/>
-            <a:ext cx="10454335" cy="868680"/>
-          </a:xfrm>
-          <a:prstGeom prst="rect">
-            <a:avLst/>
-          </a:prstGeom>
-          <a:noFill/>
-          <a:ln/>
-        </p:spPr>
-        <p:txBody>
-          <a:bodyPr wrap="square" lIns="0" tIns="0" rIns="0" bIns="0" rtlCol="0" anchor="t"/>
-          <a:lstStyle/>
-          <a:p>
-            <a:pPr indent="0" marL="0">
-              <a:buNone/>
-            </a:pPr>
-            <a:r>
-              <a:rPr lang="en-US" sz="1250" dirty="0">
-                <a:solidFill>
-                  <a:srgbClr val="26262F"/>
-                </a:solidFill>
-                <a:latin typeface="Calibri" pitchFamily="34" charset="0"/>
-                <a:ea typeface="Calibri" pitchFamily="34" charset="-122"/>
-                <a:cs typeface="Calibri" pitchFamily="34" charset="-120"/>
-              </a:rPr>
-              <a:t>Add type="module" to the script tag to use modules in the browser: &lt;script type="module" src="main.js"&gt;&lt;/script&gt;. Module scripts behave like defer by default -- they don't block HTML parsing.</a:t>
-            </a:r>
-            <a:endParaRPr lang="en-US" sz="1250" dirty="0"/>
-          </a:p>
-        </p:txBody>
-      </p:sp>
-      <p:sp>
-        <p:nvSpPr>
-          <p:cNvPr id="9" name="cuinotes-footer-mark"/>
-          <p:cNvSpPr txBox="1"/>
-          <p:nvPr/>
-        </p:nvSpPr>
-        <p:spPr>
-          <a:xfrm>
-            <a:off x="9951720" y="6455664"/>
-            <a:ext cx="2011680" cy="292608"/>
-          </a:xfrm>
-          <a:prstGeom prst="rect">
-            <a:avLst/>
-          </a:prstGeom>
-          <a:noFill/>
-        </p:spPr>
-        <p:txBody>
-          <a:bodyPr wrap="none" lIns="0" rIns="0" tIns="0" bIns="0">
-            <a:spAutoFit/>
-          </a:bodyPr>
-          <a:lstStyle/>
-          <a:p>
-            <a:pPr algn="r"/>
-            <a:r>
-              <a:rPr sz="1000">
-                <a:solidFill>
-                  <a:srgbClr val="8A939B"/>
-                </a:solidFill>
-                <a:hlinkClick r:id="rId3"/>
-              </a:rPr>
-              <a:t>cuinotes.com</a:t>
-            </a:r>
-            <a:r>
-              <a:rPr sz="1000">
-                <a:solidFill>
-                  <a:srgbClr val="8A939B"/>
-                </a:solidFill>
-              </a:rPr>
-              <a:t>  ·  40</a:t>
+              <a:t>  ·  41</a:t>
             </a:r>
           </a:p>
         </p:txBody>
@@ -18717,7 +17844,7 @@
                   <a:srgbClr val="8A939B"/>
                 </a:solidFill>
               </a:rPr>
-              <a:t>  ·  41</a:t>
+              <a:t>  ·  44</a:t>
             </a:r>
           </a:p>
         </p:txBody>
@@ -19896,6 +19023,2086 @@
                 </a:solidFill>
               </a:rPr>
               <a:t>  ·  16</a:t>
+            </a:r>
+          </a:p>
+        </p:txBody>
+      </p:sp>
+    </p:spTree>
+  </p:cSld>
+  <p:clrMapOvr>
+    <a:masterClrMapping/>
+  </p:clrMapOvr>
+</p:sld>
+</file>
+
+<file path=ppt/slides/slide42.xml><?xml version="1.0" encoding="utf-8"?>
+<p:sld xmlns:a="http://schemas.openxmlformats.org/drawingml/2006/main" xmlns:r="http://schemas.openxmlformats.org/officeDocument/2006/relationships" xmlns:p="http://schemas.openxmlformats.org/presentationml/2006/main">
+  <p:cSld name="Slide 32">
+    <p:bg>
+      <p:bgPr>
+        <a:solidFill>
+          <a:srgbClr val="FFFFFF"/>
+        </a:solidFill>
+      </p:bgPr>
+    </p:bg>
+    <p:spTree>
+      <p:nvGrpSpPr>
+        <p:cNvPr id="1" name=""/>
+        <p:cNvGrpSpPr/>
+        <p:nvPr/>
+      </p:nvGrpSpPr>
+      <p:grpSpPr>
+        <a:xfrm>
+          <a:off x="0" y="0"/>
+          <a:ext cx="0" cy="0"/>
+          <a:chOff x="0" y="0"/>
+          <a:chExt cx="0" cy="0"/>
+        </a:xfrm>
+      </p:grpSpPr>
+      <p:sp>
+        <p:nvSpPr>
+          <p:cNvPr id="2" name="Text 0"/>
+          <p:cNvSpPr txBox="1"/>
+          <p:nvPr/>
+        </p:nvSpPr>
+        <p:spPr>
+          <a:xfrm>
+            <a:off x="640080" y="457200"/>
+            <a:ext cx="10058400" cy="365760"/>
+          </a:xfrm>
+          <a:prstGeom prst="rect">
+            <a:avLst/>
+          </a:prstGeom>
+          <a:noFill/>
+          <a:ln/>
+        </p:spPr>
+        <p:txBody>
+          <a:bodyPr wrap="square" lIns="0" tIns="0" rIns="0" bIns="0" rtlCol="0" anchor="ctr"/>
+          <a:lstStyle/>
+          <a:p>
+            <a:pPr algn="l" indent="0" marL="0">
+              <a:buNone/>
+            </a:pPr>
+            <a:r>
+              <a:rPr lang="en-US" sz="1300" b="1" spc="300" kern="0" dirty="0">
+                <a:solidFill>
+                  <a:srgbClr val="FF8A3D"/>
+                </a:solidFill>
+                <a:latin typeface="Calibri" pitchFamily="34" charset="0"/>
+                <a:ea typeface="Calibri" pitchFamily="34" charset="-122"/>
+                <a:cs typeface="Calibri" pitchFamily="34" charset="-120"/>
+              </a:rPr>
+              <a:t>THIS BINDING</a:t>
+            </a:r>
+            <a:endParaRPr lang="en-US" sz="1300" dirty="0"/>
+          </a:p>
+        </p:txBody>
+      </p:sp>
+      <p:sp>
+        <p:nvSpPr>
+          <p:cNvPr id="3" name="Text 1"/>
+          <p:cNvSpPr txBox="1"/>
+          <p:nvPr/>
+        </p:nvSpPr>
+        <p:spPr>
+          <a:xfrm>
+            <a:off x="640080" y="841248"/>
+            <a:ext cx="10881360" cy="914400"/>
+          </a:xfrm>
+          <a:prstGeom prst="rect">
+            <a:avLst/>
+          </a:prstGeom>
+          <a:noFill/>
+          <a:ln/>
+        </p:spPr>
+        <p:txBody>
+          <a:bodyPr wrap="square" lIns="0" tIns="0" rIns="0" bIns="0" rtlCol="0" anchor="ctr"/>
+          <a:lstStyle/>
+          <a:p>
+            <a:pPr algn="l" indent="0" marL="0">
+              <a:buNone/>
+            </a:pPr>
+            <a:r>
+              <a:rPr lang="en-US" sz="3400" b="1" dirty="0">
+                <a:solidFill>
+                  <a:srgbClr val="2B2B7A"/>
+                </a:solidFill>
+                <a:latin typeface="Cambria" pitchFamily="34" charset="0"/>
+                <a:ea typeface="Cambria" pitchFamily="34" charset="-122"/>
+                <a:cs typeface="Cambria" pitchFamily="34" charset="-120"/>
+              </a:rPr>
+              <a:t>bind — Locking in this</a:t>
+            </a:r>
+            <a:endParaRPr lang="en-US" sz="3400" dirty="0"/>
+          </a:p>
+        </p:txBody>
+      </p:sp>
+      <p:sp>
+        <p:nvSpPr>
+          <p:cNvPr id="4" name="Shape 2"/>
+          <p:cNvSpPr/>
+          <p:nvPr/>
+        </p:nvSpPr>
+        <p:spPr>
+          <a:xfrm>
+            <a:off x="640080" y="1965960"/>
+            <a:ext cx="10911535" cy="2737104"/>
+          </a:xfrm>
+          <a:prstGeom prst="roundRect">
+            <a:avLst>
+              <a:gd name="adj" fmla="val 3887"/>
+            </a:avLst>
+          </a:prstGeom>
+          <a:solidFill>
+            <a:srgbClr val="1E1E4C"/>
+          </a:solidFill>
+          <a:ln/>
+        </p:spPr>
+        <p:txBody>
+          <a:bodyPr/>
+          <a:p/>
+        </p:txBody>
+      </p:sp>
+      <p:sp>
+        <p:nvSpPr>
+          <p:cNvPr id="5" name="Text 3"/>
+          <p:cNvSpPr txBox="1"/>
+          <p:nvPr/>
+        </p:nvSpPr>
+        <p:spPr>
+          <a:xfrm>
+            <a:off x="960120" y="2194560"/>
+            <a:ext cx="10271455" cy="2279904"/>
+          </a:xfrm>
+          <a:prstGeom prst="rect">
+            <a:avLst/>
+          </a:prstGeom>
+          <a:noFill/>
+          <a:ln/>
+        </p:spPr>
+        <p:txBody>
+          <a:bodyPr wrap="square" lIns="0" tIns="0" rIns="0" bIns="0" rtlCol="0" anchor="t"/>
+          <a:lstStyle/>
+          <a:p>
+            <a:pPr indent="0" marL="0">
+              <a:lnSpc>
+                <a:spcPct val="125000"/>
+              </a:lnSpc>
+              <a:buNone/>
+            </a:pPr>
+            <a:r>
+              <a:rPr lang="en-US" sz="1400" dirty="0">
+                <a:solidFill>
+                  <a:srgbClr val="C9D3F5"/>
+                </a:solidFill>
+                <a:latin typeface="Courier New" pitchFamily="34" charset="0"/>
+                <a:ea typeface="Courier New" pitchFamily="34" charset="-122"/>
+                <a:cs typeface="Courier New" pitchFamily="34" charset="-120"/>
+              </a:rPr>
+              <a:t>const user = { name: "Ayesha" };</a:t>
+            </a:r>
+            <a:endParaRPr lang="en-US" sz="1400" dirty="0"/>
+          </a:p>
+          <a:p>
+            <a:pPr indent="0" marL="0">
+              <a:lnSpc>
+                <a:spcPct val="125000"/>
+              </a:lnSpc>
+              <a:buNone/>
+            </a:pPr>
+            <a:r>
+              <a:rPr lang="en-US" sz="1400" dirty="0">
+                <a:solidFill>
+                  <a:srgbClr val="C9D3F5"/>
+                </a:solidFill>
+                <a:latin typeface="Courier New" pitchFamily="34" charset="0"/>
+                <a:ea typeface="Courier New" pitchFamily="34" charset="-122"/>
+                <a:cs typeface="Courier New" pitchFamily="34" charset="-120"/>
+              </a:rPr>
+              <a:t>function greet(greeting) {</a:t>
+            </a:r>
+            <a:endParaRPr lang="en-US" sz="1400" dirty="0"/>
+          </a:p>
+          <a:p>
+            <a:pPr indent="0" marL="0">
+              <a:lnSpc>
+                <a:spcPct val="125000"/>
+              </a:lnSpc>
+              <a:buNone/>
+            </a:pPr>
+            <a:r>
+              <a:rPr lang="en-US" sz="1400" dirty="0">
+                <a:solidFill>
+                  <a:srgbClr val="C9D3F5"/>
+                </a:solidFill>
+                <a:latin typeface="Courier New" pitchFamily="34" charset="0"/>
+                <a:ea typeface="Courier New" pitchFamily="34" charset="-122"/>
+                <a:cs typeface="Courier New" pitchFamily="34" charset="-120"/>
+              </a:rPr>
+              <a:t>  console.log(`${greeting}, I'm ${this.name}`);</a:t>
+            </a:r>
+            <a:endParaRPr lang="en-US" sz="1400" dirty="0"/>
+          </a:p>
+          <a:p>
+            <a:pPr indent="0" marL="0">
+              <a:lnSpc>
+                <a:spcPct val="125000"/>
+              </a:lnSpc>
+              <a:buNone/>
+            </a:pPr>
+            <a:r>
+              <a:rPr lang="en-US" sz="1400" dirty="0">
+                <a:solidFill>
+                  <a:srgbClr val="C9D3F5"/>
+                </a:solidFill>
+                <a:latin typeface="Courier New" pitchFamily="34" charset="0"/>
+                <a:ea typeface="Courier New" pitchFamily="34" charset="-122"/>
+                <a:cs typeface="Courier New" pitchFamily="34" charset="-120"/>
+              </a:rPr>
+              <a:t>}</a:t>
+            </a:r>
+            <a:endParaRPr lang="en-US" sz="1400" dirty="0"/>
+          </a:p>
+          <a:p>
+            <a:pPr indent="0" marL="0">
+              <a:lnSpc>
+                <a:spcPct val="125000"/>
+              </a:lnSpc>
+              <a:buNone/>
+            </a:pPr>
+            <a:r>
+              <a:rPr lang="en-US" sz="1400" dirty="0">
+                <a:solidFill>
+                  <a:srgbClr val="C9D3F5"/>
+                </a:solidFill>
+                <a:latin typeface="Courier New" pitchFamily="34" charset="0"/>
+                <a:ea typeface="Courier New" pitchFamily="34" charset="-122"/>
+                <a:cs typeface="Courier New" pitchFamily="34" charset="-120"/>
+              </a:rPr>
+              <a:t/>
+            </a:r>
+            <a:endParaRPr lang="en-US" sz="1400" dirty="0"/>
+          </a:p>
+          <a:p>
+            <a:pPr indent="0" marL="0">
+              <a:lnSpc>
+                <a:spcPct val="125000"/>
+              </a:lnSpc>
+              <a:buNone/>
+            </a:pPr>
+            <a:r>
+              <a:rPr lang="en-US" sz="1400" dirty="0">
+                <a:solidFill>
+                  <a:srgbClr val="C9D3F5"/>
+                </a:solidFill>
+                <a:latin typeface="Courier New" pitchFamily="34" charset="0"/>
+                <a:ea typeface="Courier New" pitchFamily="34" charset="-122"/>
+                <a:cs typeface="Courier New" pitchFamily="34" charset="-120"/>
+              </a:rPr>
+              <a:t>const sayHi = greet.bind(user); // returns a NEW function</a:t>
+            </a:r>
+            <a:endParaRPr lang="en-US" sz="1400" dirty="0"/>
+          </a:p>
+          <a:p>
+            <a:pPr indent="0" marL="0">
+              <a:lnSpc>
+                <a:spcPct val="125000"/>
+              </a:lnSpc>
+              <a:buNone/>
+            </a:pPr>
+            <a:r>
+              <a:rPr lang="en-US" sz="1400" dirty="0">
+                <a:solidFill>
+                  <a:srgbClr val="C9D3F5"/>
+                </a:solidFill>
+                <a:latin typeface="Courier New" pitchFamily="34" charset="0"/>
+                <a:ea typeface="Courier New" pitchFamily="34" charset="-122"/>
+                <a:cs typeface="Courier New" pitchFamily="34" charset="-120"/>
+              </a:rPr>
+              <a:t>sayHi("Hi");                    // "Hi, I'm Ayesha"</a:t>
+            </a:r>
+            <a:endParaRPr lang="en-US" sz="1400" dirty="0"/>
+          </a:p>
+          <a:p>
+            <a:pPr indent="0" marL="0">
+              <a:lnSpc>
+                <a:spcPct val="125000"/>
+              </a:lnSpc>
+              <a:buNone/>
+            </a:pPr>
+            <a:r>
+              <a:rPr lang="en-US" sz="1400" dirty="0">
+                <a:solidFill>
+                  <a:srgbClr val="C9D3F5"/>
+                </a:solidFill>
+                <a:latin typeface="Courier New" pitchFamily="34" charset="0"/>
+                <a:ea typeface="Courier New" pitchFamily="34" charset="-122"/>
+                <a:cs typeface="Courier New" pitchFamily="34" charset="-120"/>
+              </a:rPr>
+              <a:t>setTimeout(sayHi, 100, "Hello"); // still bound when called later</a:t>
+            </a:r>
+            <a:endParaRPr lang="en-US" sz="1400" dirty="0"/>
+          </a:p>
+        </p:txBody>
+      </p:sp>
+      <p:sp>
+        <p:nvSpPr>
+          <p:cNvPr id="6" name="Text 4"/>
+          <p:cNvSpPr txBox="1"/>
+          <p:nvPr/>
+        </p:nvSpPr>
+        <p:spPr>
+          <a:xfrm>
+            <a:off x="640080" y="4931664"/>
+            <a:ext cx="10911535" cy="1374000"/>
+          </a:xfrm>
+          <a:prstGeom prst="rect">
+            <a:avLst/>
+          </a:prstGeom>
+          <a:noFill/>
+          <a:ln/>
+        </p:spPr>
+        <p:txBody>
+          <a:bodyPr wrap="square" lIns="0" tIns="0" rIns="0" bIns="0" rtlCol="0" anchor="t"/>
+          <a:lstStyle/>
+          <a:p>
+            <a:pPr indent="0" marL="0">
+              <a:buNone/>
+            </a:pPr>
+            <a:r>
+              <a:rPr lang="en-US" sz="1300" dirty="0">
+                <a:solidFill>
+                  <a:srgbClr val="26262F"/>
+                </a:solidFill>
+                <a:latin typeface="Calibri" pitchFamily="34" charset="0"/>
+                <a:ea typeface="Calibri" pitchFamily="34" charset="-122"/>
+                <a:cs typeface="Calibri" pitchFamily="34" charset="-120"/>
+              </a:rPr>
+              <a:t>bind does NOT call the function — it returns a new function with this permanently locked in, ready to pass as a callback or call later.</a:t>
+            </a:r>
+            <a:endParaRPr lang="en-US" sz="1300" dirty="0"/>
+          </a:p>
+        </p:txBody>
+      </p:sp>
+      <p:sp>
+        <p:nvSpPr>
+          <p:cNvPr id="9" name="cuinotes-footer-mark"/>
+          <p:cNvSpPr txBox="1"/>
+          <p:nvPr/>
+        </p:nvSpPr>
+        <p:spPr>
+          <a:xfrm>
+            <a:off x="9951720" y="6455664"/>
+            <a:ext cx="2011680" cy="292608"/>
+          </a:xfrm>
+          <a:prstGeom prst="rect">
+            <a:avLst/>
+          </a:prstGeom>
+          <a:noFill/>
+        </p:spPr>
+        <p:txBody>
+          <a:bodyPr wrap="none" lIns="0" rIns="0" tIns="0" bIns="0">
+            <a:spAutoFit/>
+          </a:bodyPr>
+          <a:lstStyle/>
+          <a:p>
+            <a:pPr algn="r"/>
+            <a:r>
+              <a:rPr sz="1000">
+                <a:solidFill>
+                  <a:srgbClr val="8A939B"/>
+                </a:solidFill>
+                <a:hlinkClick r:id="rId3"/>
+              </a:rPr>
+              <a:t>cuinotes.com</a:t>
+            </a:r>
+            <a:r>
+              <a:rPr sz="1000">
+                <a:solidFill>
+                  <a:srgbClr val="8A939B"/>
+                </a:solidFill>
+              </a:rPr>
+              <a:t>  ·  32</a:t>
+            </a:r>
+          </a:p>
+        </p:txBody>
+      </p:sp>
+    </p:spTree>
+  </p:cSld>
+  <p:clrMapOvr>
+    <a:masterClrMapping/>
+  </p:clrMapOvr>
+</p:sld>
+</file>
+
+<file path=ppt/slides/slide43.xml><?xml version="1.0" encoding="utf-8"?>
+<p:sld xmlns:a="http://schemas.openxmlformats.org/drawingml/2006/main" xmlns:r="http://schemas.openxmlformats.org/officeDocument/2006/relationships" xmlns:p="http://schemas.openxmlformats.org/presentationml/2006/main">
+  <p:cSld name="Slide 39">
+    <p:bg>
+      <p:bgPr>
+        <a:solidFill>
+          <a:srgbClr val="FFFFFF"/>
+        </a:solidFill>
+      </p:bgPr>
+    </p:bg>
+    <p:spTree>
+      <p:nvGrpSpPr>
+        <p:cNvPr id="1" name=""/>
+        <p:cNvGrpSpPr/>
+        <p:nvPr/>
+      </p:nvGrpSpPr>
+      <p:grpSpPr>
+        <a:xfrm>
+          <a:off x="0" y="0"/>
+          <a:ext cx="0" cy="0"/>
+          <a:chOff x="0" y="0"/>
+          <a:chExt cx="0" cy="0"/>
+        </a:xfrm>
+      </p:grpSpPr>
+      <p:sp>
+        <p:nvSpPr>
+          <p:cNvPr id="2" name="Text 0"/>
+          <p:cNvSpPr txBox="1"/>
+          <p:nvPr/>
+        </p:nvSpPr>
+        <p:spPr>
+          <a:xfrm>
+            <a:off x="640080" y="457200"/>
+            <a:ext cx="10058400" cy="365760"/>
+          </a:xfrm>
+          <a:prstGeom prst="rect">
+            <a:avLst/>
+          </a:prstGeom>
+          <a:noFill/>
+          <a:ln/>
+        </p:spPr>
+        <p:txBody>
+          <a:bodyPr wrap="square" lIns="0" tIns="0" rIns="0" bIns="0" rtlCol="0" anchor="ctr"/>
+          <a:lstStyle/>
+          <a:p>
+            <a:pPr algn="l" indent="0" marL="0">
+              <a:buNone/>
+            </a:pPr>
+            <a:r>
+              <a:rPr lang="en-US" sz="1300" b="1" spc="300" kern="0" dirty="0">
+                <a:solidFill>
+                  <a:srgbClr val="FF8A3D"/>
+                </a:solidFill>
+                <a:latin typeface="Calibri" pitchFamily="34" charset="0"/>
+                <a:ea typeface="Calibri" pitchFamily="34" charset="-122"/>
+                <a:cs typeface="Calibri" pitchFamily="34" charset="-120"/>
+              </a:rPr>
+              <a:t>JSON</a:t>
+            </a:r>
+            <a:endParaRPr lang="en-US" sz="1300" dirty="0"/>
+          </a:p>
+        </p:txBody>
+      </p:sp>
+      <p:sp>
+        <p:nvSpPr>
+          <p:cNvPr id="3" name="Text 1"/>
+          <p:cNvSpPr txBox="1"/>
+          <p:nvPr/>
+        </p:nvSpPr>
+        <p:spPr>
+          <a:xfrm>
+            <a:off x="640080" y="841248"/>
+            <a:ext cx="10881360" cy="914400"/>
+          </a:xfrm>
+          <a:prstGeom prst="rect">
+            <a:avLst/>
+          </a:prstGeom>
+          <a:noFill/>
+          <a:ln/>
+        </p:spPr>
+        <p:txBody>
+          <a:bodyPr wrap="square" lIns="0" tIns="0" rIns="0" bIns="0" rtlCol="0" anchor="ctr"/>
+          <a:lstStyle/>
+          <a:p>
+            <a:pPr algn="l" indent="0" marL="0">
+              <a:buNone/>
+            </a:pPr>
+            <a:r>
+              <a:rPr lang="en-US" sz="3400" b="1" dirty="0">
+                <a:solidFill>
+                  <a:srgbClr val="2B2B7A"/>
+                </a:solidFill>
+                <a:latin typeface="Cambria" pitchFamily="34" charset="0"/>
+                <a:ea typeface="Cambria" pitchFamily="34" charset="-122"/>
+                <a:cs typeface="Cambria" pitchFamily="34" charset="-120"/>
+              </a:rPr>
+              <a:t>Serializing Data with JSON</a:t>
+            </a:r>
+            <a:endParaRPr lang="en-US" sz="3400" dirty="0"/>
+          </a:p>
+        </p:txBody>
+      </p:sp>
+      <p:sp>
+        <p:nvSpPr>
+          <p:cNvPr id="4" name="Shape 2"/>
+          <p:cNvSpPr/>
+          <p:nvPr/>
+        </p:nvSpPr>
+        <p:spPr>
+          <a:xfrm>
+            <a:off x="640080" y="1965960"/>
+            <a:ext cx="10911535" cy="3022092"/>
+          </a:xfrm>
+          <a:prstGeom prst="roundRect">
+            <a:avLst>
+              <a:gd name="adj" fmla="val 3887"/>
+            </a:avLst>
+          </a:prstGeom>
+          <a:solidFill>
+            <a:srgbClr val="1E1E4C"/>
+          </a:solidFill>
+          <a:ln/>
+        </p:spPr>
+        <p:txBody>
+          <a:bodyPr/>
+          <a:p/>
+        </p:txBody>
+      </p:sp>
+      <p:sp>
+        <p:nvSpPr>
+          <p:cNvPr id="5" name="Text 3"/>
+          <p:cNvSpPr txBox="1"/>
+          <p:nvPr/>
+        </p:nvSpPr>
+        <p:spPr>
+          <a:xfrm>
+            <a:off x="960120" y="2194560"/>
+            <a:ext cx="10271455" cy="2564892"/>
+          </a:xfrm>
+          <a:prstGeom prst="rect">
+            <a:avLst/>
+          </a:prstGeom>
+          <a:noFill/>
+          <a:ln/>
+        </p:spPr>
+        <p:txBody>
+          <a:bodyPr wrap="square" lIns="0" tIns="0" rIns="0" bIns="0" rtlCol="0" anchor="t"/>
+          <a:lstStyle/>
+          <a:p>
+            <a:pPr indent="0" marL="0">
+              <a:lnSpc>
+                <a:spcPct val="125000"/>
+              </a:lnSpc>
+              <a:buNone/>
+            </a:pPr>
+            <a:r>
+              <a:rPr lang="en-US" sz="1400" dirty="0">
+                <a:solidFill>
+                  <a:srgbClr val="C9D3F5"/>
+                </a:solidFill>
+                <a:latin typeface="Courier New" pitchFamily="34" charset="0"/>
+                <a:ea typeface="Courier New" pitchFamily="34" charset="-122"/>
+                <a:cs typeface="Courier New" pitchFamily="34" charset="-120"/>
+              </a:rPr>
+              <a:t>const student = { name: "Bilal", gpa: 3.8, courses: ["CSC336", "CSC270"] };</a:t>
+            </a:r>
+            <a:endParaRPr lang="en-US" sz="1400" dirty="0"/>
+          </a:p>
+          <a:p>
+            <a:pPr indent="0" marL="0">
+              <a:lnSpc>
+                <a:spcPct val="125000"/>
+              </a:lnSpc>
+              <a:buNone/>
+            </a:pPr>
+            <a:r>
+              <a:rPr lang="en-US" sz="1400" dirty="0">
+                <a:solidFill>
+                  <a:srgbClr val="C9D3F5"/>
+                </a:solidFill>
+                <a:latin typeface="Courier New" pitchFamily="34" charset="0"/>
+                <a:ea typeface="Courier New" pitchFamily="34" charset="-122"/>
+                <a:cs typeface="Courier New" pitchFamily="34" charset="-120"/>
+              </a:rPr>
+              <a:t/>
+            </a:r>
+            <a:endParaRPr lang="en-US" sz="1400" dirty="0"/>
+          </a:p>
+          <a:p>
+            <a:pPr indent="0" marL="0">
+              <a:lnSpc>
+                <a:spcPct val="125000"/>
+              </a:lnSpc>
+              <a:buNone/>
+            </a:pPr>
+            <a:r>
+              <a:rPr lang="en-US" sz="1400" dirty="0">
+                <a:solidFill>
+                  <a:srgbClr val="C9D3F5"/>
+                </a:solidFill>
+                <a:latin typeface="Courier New" pitchFamily="34" charset="0"/>
+                <a:ea typeface="Courier New" pitchFamily="34" charset="-122"/>
+                <a:cs typeface="Courier New" pitchFamily="34" charset="-120"/>
+              </a:rPr>
+              <a:t>// Object -&gt; JSON string, for sending over HTTP or saving to a file</a:t>
+            </a:r>
+            <a:endParaRPr lang="en-US" sz="1400" dirty="0"/>
+          </a:p>
+          <a:p>
+            <a:pPr indent="0" marL="0">
+              <a:lnSpc>
+                <a:spcPct val="125000"/>
+              </a:lnSpc>
+              <a:buNone/>
+            </a:pPr>
+            <a:r>
+              <a:rPr lang="en-US" sz="1400" dirty="0">
+                <a:solidFill>
+                  <a:srgbClr val="C9D3F5"/>
+                </a:solidFill>
+                <a:latin typeface="Courier New" pitchFamily="34" charset="0"/>
+                <a:ea typeface="Courier New" pitchFamily="34" charset="-122"/>
+                <a:cs typeface="Courier New" pitchFamily="34" charset="-120"/>
+              </a:rPr>
+              <a:t>const json = JSON.stringify(student);</a:t>
+            </a:r>
+            <a:endParaRPr lang="en-US" sz="1400" dirty="0"/>
+          </a:p>
+          <a:p>
+            <a:pPr indent="0" marL="0">
+              <a:lnSpc>
+                <a:spcPct val="125000"/>
+              </a:lnSpc>
+              <a:buNone/>
+            </a:pPr>
+            <a:r>
+              <a:rPr lang="en-US" sz="1400" dirty="0">
+                <a:solidFill>
+                  <a:srgbClr val="C9D3F5"/>
+                </a:solidFill>
+                <a:latin typeface="Courier New" pitchFamily="34" charset="0"/>
+                <a:ea typeface="Courier New" pitchFamily="34" charset="-122"/>
+                <a:cs typeface="Courier New" pitchFamily="34" charset="-120"/>
+              </a:rPr>
+              <a:t>console.log(json);</a:t>
+            </a:r>
+            <a:endParaRPr lang="en-US" sz="1400" dirty="0"/>
+          </a:p>
+          <a:p>
+            <a:pPr indent="0" marL="0">
+              <a:lnSpc>
+                <a:spcPct val="125000"/>
+              </a:lnSpc>
+              <a:buNone/>
+            </a:pPr>
+            <a:r>
+              <a:rPr lang="en-US" sz="1400" dirty="0">
+                <a:solidFill>
+                  <a:srgbClr val="C9D3F5"/>
+                </a:solidFill>
+                <a:latin typeface="Courier New" pitchFamily="34" charset="0"/>
+                <a:ea typeface="Courier New" pitchFamily="34" charset="-122"/>
+                <a:cs typeface="Courier New" pitchFamily="34" charset="-120"/>
+              </a:rPr>
+              <a:t/>
+            </a:r>
+            <a:endParaRPr lang="en-US" sz="1400" dirty="0"/>
+          </a:p>
+          <a:p>
+            <a:pPr indent="0" marL="0">
+              <a:lnSpc>
+                <a:spcPct val="125000"/>
+              </a:lnSpc>
+              <a:buNone/>
+            </a:pPr>
+            <a:r>
+              <a:rPr lang="en-US" sz="1400" dirty="0">
+                <a:solidFill>
+                  <a:srgbClr val="C9D3F5"/>
+                </a:solidFill>
+                <a:latin typeface="Courier New" pitchFamily="34" charset="0"/>
+                <a:ea typeface="Courier New" pitchFamily="34" charset="-122"/>
+                <a:cs typeface="Courier New" pitchFamily="34" charset="-120"/>
+              </a:rPr>
+              <a:t>// JSON string -&gt; object, for reading data you received</a:t>
+            </a:r>
+            <a:endParaRPr lang="en-US" sz="1400" dirty="0"/>
+          </a:p>
+          <a:p>
+            <a:pPr indent="0" marL="0">
+              <a:lnSpc>
+                <a:spcPct val="125000"/>
+              </a:lnSpc>
+              <a:buNone/>
+            </a:pPr>
+            <a:r>
+              <a:rPr lang="en-US" sz="1400" dirty="0">
+                <a:solidFill>
+                  <a:srgbClr val="C9D3F5"/>
+                </a:solidFill>
+                <a:latin typeface="Courier New" pitchFamily="34" charset="0"/>
+                <a:ea typeface="Courier New" pitchFamily="34" charset="-122"/>
+                <a:cs typeface="Courier New" pitchFamily="34" charset="-120"/>
+              </a:rPr>
+              <a:t>const parsed = JSON.parse(json);</a:t>
+            </a:r>
+            <a:endParaRPr lang="en-US" sz="1400" dirty="0"/>
+          </a:p>
+          <a:p>
+            <a:pPr indent="0" marL="0">
+              <a:lnSpc>
+                <a:spcPct val="125000"/>
+              </a:lnSpc>
+              <a:buNone/>
+            </a:pPr>
+            <a:r>
+              <a:rPr lang="en-US" sz="1400" dirty="0">
+                <a:solidFill>
+                  <a:srgbClr val="C9D3F5"/>
+                </a:solidFill>
+                <a:latin typeface="Courier New" pitchFamily="34" charset="0"/>
+                <a:ea typeface="Courier New" pitchFamily="34" charset="-122"/>
+                <a:cs typeface="Courier New" pitchFamily="34" charset="-120"/>
+              </a:rPr>
+              <a:t>console.log(parsed.name); // "Bilal"</a:t>
+            </a:r>
+            <a:endParaRPr lang="en-US" sz="1400" dirty="0"/>
+          </a:p>
+        </p:txBody>
+      </p:sp>
+      <p:sp>
+        <p:nvSpPr>
+          <p:cNvPr id="6" name="Text 4"/>
+          <p:cNvSpPr txBox="1"/>
+          <p:nvPr/>
+        </p:nvSpPr>
+        <p:spPr>
+          <a:xfrm>
+            <a:off x="640080" y="5216652"/>
+            <a:ext cx="10911535" cy="1089012"/>
+          </a:xfrm>
+          <a:prstGeom prst="rect">
+            <a:avLst/>
+          </a:prstGeom>
+          <a:noFill/>
+          <a:ln/>
+        </p:spPr>
+        <p:txBody>
+          <a:bodyPr wrap="square" lIns="0" tIns="0" rIns="0" bIns="0" rtlCol="0" anchor="t"/>
+          <a:lstStyle/>
+          <a:p>
+            <a:pPr indent="0" marL="0">
+              <a:buNone/>
+            </a:pPr>
+            <a:r>
+              <a:rPr lang="en-US" sz="1300" dirty="0">
+                <a:solidFill>
+                  <a:srgbClr val="26262F"/>
+                </a:solidFill>
+                <a:latin typeface="Calibri" pitchFamily="34" charset="0"/>
+                <a:ea typeface="Calibri" pitchFamily="34" charset="-122"/>
+                <a:cs typeface="Calibri" pitchFamily="34" charset="-120"/>
+              </a:rPr>
+              <a:t>JSON (JavaScript Object Notation) is the standard format APIs use to send data. JSON.stringify() turns a JS value into JSON text; JSON.parse() turns it back.</a:t>
+            </a:r>
+            <a:endParaRPr lang="en-US" sz="1300" dirty="0"/>
+          </a:p>
+        </p:txBody>
+      </p:sp>
+      <p:sp>
+        <p:nvSpPr>
+          <p:cNvPr id="9" name="cuinotes-footer-mark"/>
+          <p:cNvSpPr txBox="1"/>
+          <p:nvPr/>
+        </p:nvSpPr>
+        <p:spPr>
+          <a:xfrm>
+            <a:off x="9951720" y="6455664"/>
+            <a:ext cx="2011680" cy="292608"/>
+          </a:xfrm>
+          <a:prstGeom prst="rect">
+            <a:avLst/>
+          </a:prstGeom>
+          <a:noFill/>
+        </p:spPr>
+        <p:txBody>
+          <a:bodyPr wrap="none" lIns="0" rIns="0" tIns="0" bIns="0">
+            <a:spAutoFit/>
+          </a:bodyPr>
+          <a:lstStyle/>
+          <a:p>
+            <a:pPr algn="r"/>
+            <a:r>
+              <a:rPr sz="1000">
+                <a:solidFill>
+                  <a:srgbClr val="8A939B"/>
+                </a:solidFill>
+                <a:hlinkClick r:id="rId3"/>
+              </a:rPr>
+              <a:t>cuinotes.com</a:t>
+            </a:r>
+            <a:r>
+              <a:rPr sz="1000">
+                <a:solidFill>
+                  <a:srgbClr val="8A939B"/>
+                </a:solidFill>
+              </a:rPr>
+              <a:t>  ·  39</a:t>
+            </a:r>
+          </a:p>
+        </p:txBody>
+      </p:sp>
+    </p:spTree>
+  </p:cSld>
+  <p:clrMapOvr>
+    <a:masterClrMapping/>
+  </p:clrMapOvr>
+</p:sld>
+</file>
+
+<file path=ppt/slides/slide44.xml><?xml version="1.0" encoding="utf-8"?>
+<p:sld xmlns:a="http://schemas.openxmlformats.org/drawingml/2006/main" xmlns:r="http://schemas.openxmlformats.org/officeDocument/2006/relationships" xmlns:p="http://schemas.openxmlformats.org/presentationml/2006/main">
+  <p:cSld name="Slide 40">
+    <p:bg>
+      <p:bgPr>
+        <a:solidFill>
+          <a:srgbClr val="FFFFFF"/>
+        </a:solidFill>
+      </p:bgPr>
+    </p:bg>
+    <p:spTree>
+      <p:nvGrpSpPr>
+        <p:cNvPr id="1" name=""/>
+        <p:cNvGrpSpPr/>
+        <p:nvPr/>
+      </p:nvGrpSpPr>
+      <p:grpSpPr>
+        <a:xfrm>
+          <a:off x="0" y="0"/>
+          <a:ext cx="0" cy="0"/>
+          <a:chOff x="0" y="0"/>
+          <a:chExt cx="0" cy="0"/>
+        </a:xfrm>
+      </p:grpSpPr>
+      <p:sp>
+        <p:nvSpPr>
+          <p:cNvPr id="2" name="Text 0"/>
+          <p:cNvSpPr txBox="1"/>
+          <p:nvPr/>
+        </p:nvSpPr>
+        <p:spPr>
+          <a:xfrm>
+            <a:off x="640080" y="457200"/>
+            <a:ext cx="10058400" cy="365760"/>
+          </a:xfrm>
+          <a:prstGeom prst="rect">
+            <a:avLst/>
+          </a:prstGeom>
+          <a:noFill/>
+          <a:ln/>
+        </p:spPr>
+        <p:txBody>
+          <a:bodyPr wrap="square" lIns="0" tIns="0" rIns="0" bIns="0" rtlCol="0" anchor="ctr"/>
+          <a:lstStyle/>
+          <a:p>
+            <a:pPr algn="l" indent="0" marL="0">
+              <a:buNone/>
+            </a:pPr>
+            <a:r>
+              <a:rPr lang="en-US" sz="1300" b="1" spc="300" kern="0" dirty="0">
+                <a:solidFill>
+                  <a:srgbClr val="FF8A3D"/>
+                </a:solidFill>
+                <a:latin typeface="Calibri" pitchFamily="34" charset="0"/>
+                <a:ea typeface="Calibri" pitchFamily="34" charset="-122"/>
+                <a:cs typeface="Calibri" pitchFamily="34" charset="-120"/>
+              </a:rPr>
+              <a:t>OBJECTS &amp; ARRAYS</a:t>
+            </a:r>
+            <a:endParaRPr lang="en-US" sz="1300" dirty="0"/>
+          </a:p>
+        </p:txBody>
+      </p:sp>
+      <p:sp>
+        <p:nvSpPr>
+          <p:cNvPr id="3" name="Text 1"/>
+          <p:cNvSpPr txBox="1"/>
+          <p:nvPr/>
+        </p:nvSpPr>
+        <p:spPr>
+          <a:xfrm>
+            <a:off x="640080" y="841248"/>
+            <a:ext cx="10881360" cy="914400"/>
+          </a:xfrm>
+          <a:prstGeom prst="rect">
+            <a:avLst/>
+          </a:prstGeom>
+          <a:noFill/>
+          <a:ln/>
+        </p:spPr>
+        <p:txBody>
+          <a:bodyPr wrap="square" lIns="0" tIns="0" rIns="0" bIns="0" rtlCol="0" anchor="ctr"/>
+          <a:lstStyle/>
+          <a:p>
+            <a:pPr algn="l" indent="0" marL="0">
+              <a:buNone/>
+            </a:pPr>
+            <a:r>
+              <a:rPr lang="en-US" sz="3400" b="1" dirty="0">
+                <a:solidFill>
+                  <a:srgbClr val="2B2B7A"/>
+                </a:solidFill>
+                <a:latin typeface="Cambria" pitchFamily="34" charset="0"/>
+                <a:ea typeface="Cambria" pitchFamily="34" charset="-122"/>
+                <a:cs typeface="Cambria" pitchFamily="34" charset="-120"/>
+              </a:rPr>
+              <a:t>Grouping and Listing Data</a:t>
+            </a:r>
+            <a:endParaRPr lang="en-US" sz="3400" dirty="0"/>
+          </a:p>
+        </p:txBody>
+      </p:sp>
+      <p:sp>
+        <p:nvSpPr>
+          <p:cNvPr id="4" name="Shape 2"/>
+          <p:cNvSpPr/>
+          <p:nvPr/>
+        </p:nvSpPr>
+        <p:spPr>
+          <a:xfrm>
+            <a:off x="640080" y="1965960"/>
+            <a:ext cx="10911535" cy="3307080"/>
+          </a:xfrm>
+          <a:prstGeom prst="roundRect">
+            <a:avLst>
+              <a:gd name="adj" fmla="val 3887"/>
+            </a:avLst>
+          </a:prstGeom>
+          <a:solidFill>
+            <a:srgbClr val="1E1E4C"/>
+          </a:solidFill>
+          <a:ln/>
+        </p:spPr>
+        <p:txBody>
+          <a:bodyPr/>
+          <a:p/>
+        </p:txBody>
+      </p:sp>
+      <p:sp>
+        <p:nvSpPr>
+          <p:cNvPr id="5" name="Text 3"/>
+          <p:cNvSpPr txBox="1"/>
+          <p:nvPr/>
+        </p:nvSpPr>
+        <p:spPr>
+          <a:xfrm>
+            <a:off x="960120" y="2194560"/>
+            <a:ext cx="10271455" cy="2849880"/>
+          </a:xfrm>
+          <a:prstGeom prst="rect">
+            <a:avLst/>
+          </a:prstGeom>
+          <a:noFill/>
+          <a:ln/>
+        </p:spPr>
+        <p:txBody>
+          <a:bodyPr wrap="square" lIns="0" tIns="0" rIns="0" bIns="0" rtlCol="0" anchor="t"/>
+          <a:lstStyle/>
+          <a:p>
+            <a:pPr indent="0" marL="0">
+              <a:lnSpc>
+                <a:spcPct val="125000"/>
+              </a:lnSpc>
+              <a:buNone/>
+            </a:pPr>
+            <a:r>
+              <a:rPr lang="en-US" sz="1400" dirty="0">
+                <a:solidFill>
+                  <a:srgbClr val="C9D3F5"/>
+                </a:solidFill>
+                <a:latin typeface="Courier New" pitchFamily="34" charset="0"/>
+                <a:ea typeface="Courier New" pitchFamily="34" charset="-122"/>
+                <a:cs typeface="Courier New" pitchFamily="34" charset="-120"/>
+              </a:rPr>
+              <a:t>const students = [</a:t>
+            </a:r>
+            <a:endParaRPr lang="en-US" sz="1400" dirty="0"/>
+          </a:p>
+          <a:p>
+            <a:pPr indent="0" marL="0">
+              <a:lnSpc>
+                <a:spcPct val="125000"/>
+              </a:lnSpc>
+              <a:buNone/>
+            </a:pPr>
+            <a:r>
+              <a:rPr lang="en-US" sz="1400" dirty="0">
+                <a:solidFill>
+                  <a:srgbClr val="C9D3F5"/>
+                </a:solidFill>
+                <a:latin typeface="Courier New" pitchFamily="34" charset="0"/>
+                <a:ea typeface="Courier New" pitchFamily="34" charset="-122"/>
+                <a:cs typeface="Courier New" pitchFamily="34" charset="-120"/>
+              </a:rPr>
+              <a:t>  { name: "Bilal", year: 2 }, { name: "Hina", year: 3 }, { name: "Ayesha", year: 2 },</a:t>
+            </a:r>
+            <a:endParaRPr lang="en-US" sz="1400" dirty="0"/>
+          </a:p>
+          <a:p>
+            <a:pPr indent="0" marL="0">
+              <a:lnSpc>
+                <a:spcPct val="125000"/>
+              </a:lnSpc>
+              <a:buNone/>
+            </a:pPr>
+            <a:r>
+              <a:rPr lang="en-US" sz="1400" dirty="0">
+                <a:solidFill>
+                  <a:srgbClr val="C9D3F5"/>
+                </a:solidFill>
+                <a:latin typeface="Courier New" pitchFamily="34" charset="0"/>
+                <a:ea typeface="Courier New" pitchFamily="34" charset="-122"/>
+                <a:cs typeface="Courier New" pitchFamily="34" charset="-120"/>
+              </a:rPr>
+              <a:t>];</a:t>
+            </a:r>
+            <a:endParaRPr lang="en-US" sz="1400" dirty="0"/>
+          </a:p>
+          <a:p>
+            <a:pPr indent="0" marL="0">
+              <a:lnSpc>
+                <a:spcPct val="125000"/>
+              </a:lnSpc>
+              <a:buNone/>
+            </a:pPr>
+            <a:r>
+              <a:rPr lang="en-US" sz="1400" dirty="0">
+                <a:solidFill>
+                  <a:srgbClr val="C9D3F5"/>
+                </a:solidFill>
+                <a:latin typeface="Courier New" pitchFamily="34" charset="0"/>
+                <a:ea typeface="Courier New" pitchFamily="34" charset="-122"/>
+                <a:cs typeface="Courier New" pitchFamily="34" charset="-120"/>
+              </a:rPr>
+              <a:t>const byYear = students.reduce((g, s) =&gt; {          // GROUP by year</a:t>
+            </a:r>
+            <a:endParaRPr lang="en-US" sz="1400" dirty="0"/>
+          </a:p>
+          <a:p>
+            <a:pPr indent="0" marL="0">
+              <a:lnSpc>
+                <a:spcPct val="125000"/>
+              </a:lnSpc>
+              <a:buNone/>
+            </a:pPr>
+            <a:r>
+              <a:rPr lang="en-US" sz="1400" dirty="0">
+                <a:solidFill>
+                  <a:srgbClr val="C9D3F5"/>
+                </a:solidFill>
+                <a:latin typeface="Courier New" pitchFamily="34" charset="0"/>
+                <a:ea typeface="Courier New" pitchFamily="34" charset="-122"/>
+                <a:cs typeface="Courier New" pitchFamily="34" charset="-120"/>
+              </a:rPr>
+              <a:t>  if (!g[s.year]) g[s.year] = [];</a:t>
+            </a:r>
+            <a:endParaRPr lang="en-US" sz="1400" dirty="0"/>
+          </a:p>
+          <a:p>
+            <a:pPr indent="0" marL="0">
+              <a:lnSpc>
+                <a:spcPct val="125000"/>
+              </a:lnSpc>
+              <a:buNone/>
+            </a:pPr>
+            <a:r>
+              <a:rPr lang="en-US" sz="1400" dirty="0">
+                <a:solidFill>
+                  <a:srgbClr val="C9D3F5"/>
+                </a:solidFill>
+                <a:latin typeface="Courier New" pitchFamily="34" charset="0"/>
+                <a:ea typeface="Courier New" pitchFamily="34" charset="-122"/>
+                <a:cs typeface="Courier New" pitchFamily="34" charset="-120"/>
+              </a:rPr>
+              <a:t>  g[s.year].push(s.name);</a:t>
+            </a:r>
+            <a:endParaRPr lang="en-US" sz="1400" dirty="0"/>
+          </a:p>
+          <a:p>
+            <a:pPr indent="0" marL="0">
+              <a:lnSpc>
+                <a:spcPct val="125000"/>
+              </a:lnSpc>
+              <a:buNone/>
+            </a:pPr>
+            <a:r>
+              <a:rPr lang="en-US" sz="1400" dirty="0">
+                <a:solidFill>
+                  <a:srgbClr val="C9D3F5"/>
+                </a:solidFill>
+                <a:latin typeface="Courier New" pitchFamily="34" charset="0"/>
+                <a:ea typeface="Courier New" pitchFamily="34" charset="-122"/>
+                <a:cs typeface="Courier New" pitchFamily="34" charset="-120"/>
+              </a:rPr>
+              <a:t>  return g;</a:t>
+            </a:r>
+            <a:endParaRPr lang="en-US" sz="1400" dirty="0"/>
+          </a:p>
+          <a:p>
+            <a:pPr indent="0" marL="0">
+              <a:lnSpc>
+                <a:spcPct val="125000"/>
+              </a:lnSpc>
+              <a:buNone/>
+            </a:pPr>
+            <a:r>
+              <a:rPr lang="en-US" sz="1400" dirty="0">
+                <a:solidFill>
+                  <a:srgbClr val="C9D3F5"/>
+                </a:solidFill>
+                <a:latin typeface="Courier New" pitchFamily="34" charset="0"/>
+                <a:ea typeface="Courier New" pitchFamily="34" charset="-122"/>
+                <a:cs typeface="Courier New" pitchFamily="34" charset="-120"/>
+              </a:rPr>
+              <a:t>}, {});</a:t>
+            </a:r>
+            <a:endParaRPr lang="en-US" sz="1400" dirty="0"/>
+          </a:p>
+          <a:p>
+            <a:pPr indent="0" marL="0">
+              <a:lnSpc>
+                <a:spcPct val="125000"/>
+              </a:lnSpc>
+              <a:buNone/>
+            </a:pPr>
+            <a:r>
+              <a:rPr lang="en-US" sz="1400" dirty="0">
+                <a:solidFill>
+                  <a:srgbClr val="C9D3F5"/>
+                </a:solidFill>
+                <a:latin typeface="Courier New" pitchFamily="34" charset="0"/>
+                <a:ea typeface="Courier New" pitchFamily="34" charset="-122"/>
+                <a:cs typeface="Courier New" pitchFamily="34" charset="-120"/>
+              </a:rPr>
+              <a:t>for (const [year, names] of Object.entries(byYear)) // LIST each group</a:t>
+            </a:r>
+            <a:endParaRPr lang="en-US" sz="1400" dirty="0"/>
+          </a:p>
+          <a:p>
+            <a:pPr indent="0" marL="0">
+              <a:lnSpc>
+                <a:spcPct val="125000"/>
+              </a:lnSpc>
+              <a:buNone/>
+            </a:pPr>
+            <a:r>
+              <a:rPr lang="en-US" sz="1400" dirty="0">
+                <a:solidFill>
+                  <a:srgbClr val="C9D3F5"/>
+                </a:solidFill>
+                <a:latin typeface="Courier New" pitchFamily="34" charset="0"/>
+                <a:ea typeface="Courier New" pitchFamily="34" charset="-122"/>
+                <a:cs typeface="Courier New" pitchFamily="34" charset="-120"/>
+              </a:rPr>
+              <a:t>  console.log(`Year ${year}: ${names.join(", ")}`);</a:t>
+            </a:r>
+            <a:endParaRPr lang="en-US" sz="1400" dirty="0"/>
+          </a:p>
+        </p:txBody>
+      </p:sp>
+      <p:sp>
+        <p:nvSpPr>
+          <p:cNvPr id="6" name="Text 4"/>
+          <p:cNvSpPr txBox="1"/>
+          <p:nvPr/>
+        </p:nvSpPr>
+        <p:spPr>
+          <a:xfrm>
+            <a:off x="640080" y="5501640"/>
+            <a:ext cx="10911535" cy="804024"/>
+          </a:xfrm>
+          <a:prstGeom prst="rect">
+            <a:avLst/>
+          </a:prstGeom>
+          <a:noFill/>
+          <a:ln/>
+        </p:spPr>
+        <p:txBody>
+          <a:bodyPr wrap="square" lIns="0" tIns="0" rIns="0" bIns="0" rtlCol="0" anchor="t"/>
+          <a:lstStyle/>
+          <a:p>
+            <a:pPr indent="0" marL="0">
+              <a:buNone/>
+            </a:pPr>
+            <a:r>
+              <a:rPr lang="en-US" sz="1300" dirty="0">
+                <a:solidFill>
+                  <a:srgbClr val="26262F"/>
+                </a:solidFill>
+                <a:latin typeface="Calibri" pitchFamily="34" charset="0"/>
+                <a:ea typeface="Calibri" pitchFamily="34" charset="-122"/>
+                <a:cs typeface="Calibri" pitchFamily="34" charset="-120"/>
+              </a:rPr>
+              <a:t>reduce groups the list; Object.entries() plus join() lists it back out — a pattern you’ll use constantly.</a:t>
+            </a:r>
+            <a:endParaRPr lang="en-US" sz="1300" dirty="0"/>
+          </a:p>
+        </p:txBody>
+      </p:sp>
+      <p:sp>
+        <p:nvSpPr>
+          <p:cNvPr id="9" name="cuinotes-footer-mark"/>
+          <p:cNvSpPr txBox="1"/>
+          <p:nvPr/>
+        </p:nvSpPr>
+        <p:spPr>
+          <a:xfrm>
+            <a:off x="9951720" y="6455664"/>
+            <a:ext cx="2011680" cy="292608"/>
+          </a:xfrm>
+          <a:prstGeom prst="rect">
+            <a:avLst/>
+          </a:prstGeom>
+          <a:noFill/>
+        </p:spPr>
+        <p:txBody>
+          <a:bodyPr wrap="none" lIns="0" rIns="0" tIns="0" bIns="0">
+            <a:spAutoFit/>
+          </a:bodyPr>
+          <a:lstStyle/>
+          <a:p>
+            <a:pPr algn="r"/>
+            <a:r>
+              <a:rPr sz="1000">
+                <a:solidFill>
+                  <a:srgbClr val="8A939B"/>
+                </a:solidFill>
+                <a:hlinkClick r:id="rId3"/>
+              </a:rPr>
+              <a:t>cuinotes.com</a:t>
+            </a:r>
+            <a:r>
+              <a:rPr sz="1000">
+                <a:solidFill>
+                  <a:srgbClr val="8A939B"/>
+                </a:solidFill>
+              </a:rPr>
+              <a:t>  ·  40</a:t>
+            </a:r>
+          </a:p>
+        </p:txBody>
+      </p:sp>
+    </p:spTree>
+  </p:cSld>
+  <p:clrMapOvr>
+    <a:masterClrMapping/>
+  </p:clrMapOvr>
+</p:sld>
+</file>
+
+<file path=ppt/slides/slide45.xml><?xml version="1.0" encoding="utf-8"?>
+<p:sld xmlns:a="http://schemas.openxmlformats.org/drawingml/2006/main" xmlns:r="http://schemas.openxmlformats.org/officeDocument/2006/relationships" xmlns:p="http://schemas.openxmlformats.org/presentationml/2006/main">
+  <p:cSld name="Slide 42">
+    <p:bg>
+      <p:bgPr>
+        <a:solidFill>
+          <a:srgbClr val="FFFFFF"/>
+        </a:solidFill>
+      </p:bgPr>
+    </p:bg>
+    <p:spTree>
+      <p:nvGrpSpPr>
+        <p:cNvPr id="1" name=""/>
+        <p:cNvGrpSpPr/>
+        <p:nvPr/>
+      </p:nvGrpSpPr>
+      <p:grpSpPr>
+        <a:xfrm>
+          <a:off x="0" y="0"/>
+          <a:ext cx="0" cy="0"/>
+          <a:chOff x="0" y="0"/>
+          <a:chExt cx="0" cy="0"/>
+        </a:xfrm>
+      </p:grpSpPr>
+      <p:sp>
+        <p:nvSpPr>
+          <p:cNvPr id="2" name="Text 0"/>
+          <p:cNvSpPr txBox="1"/>
+          <p:nvPr/>
+        </p:nvSpPr>
+        <p:spPr>
+          <a:xfrm>
+            <a:off x="640080" y="457200"/>
+            <a:ext cx="10058400" cy="365760"/>
+          </a:xfrm>
+          <a:prstGeom prst="rect">
+            <a:avLst/>
+          </a:prstGeom>
+          <a:noFill/>
+          <a:ln/>
+        </p:spPr>
+        <p:txBody>
+          <a:bodyPr wrap="square" lIns="0" tIns="0" rIns="0" bIns="0" rtlCol="0" anchor="ctr"/>
+          <a:lstStyle/>
+          <a:p>
+            <a:pPr algn="l" indent="0" marL="0">
+              <a:buNone/>
+            </a:pPr>
+            <a:r>
+              <a:rPr lang="en-US" sz="1300" b="1" spc="300" kern="0" dirty="0">
+                <a:solidFill>
+                  <a:srgbClr val="FF8A3D"/>
+                </a:solidFill>
+                <a:latin typeface="Calibri" pitchFamily="34" charset="0"/>
+                <a:ea typeface="Calibri" pitchFamily="34" charset="-122"/>
+                <a:cs typeface="Calibri" pitchFamily="34" charset="-120"/>
+              </a:rPr>
+              <a:t>NODE.JS</a:t>
+            </a:r>
+            <a:endParaRPr lang="en-US" sz="1300" dirty="0"/>
+          </a:p>
+        </p:txBody>
+      </p:sp>
+      <p:sp>
+        <p:nvSpPr>
+          <p:cNvPr id="3" name="Text 1"/>
+          <p:cNvSpPr txBox="1"/>
+          <p:nvPr/>
+        </p:nvSpPr>
+        <p:spPr>
+          <a:xfrm>
+            <a:off x="640080" y="841248"/>
+            <a:ext cx="10881360" cy="914400"/>
+          </a:xfrm>
+          <a:prstGeom prst="rect">
+            <a:avLst/>
+          </a:prstGeom>
+          <a:noFill/>
+          <a:ln/>
+        </p:spPr>
+        <p:txBody>
+          <a:bodyPr wrap="square" lIns="0" tIns="0" rIns="0" bIns="0" rtlCol="0" anchor="ctr"/>
+          <a:lstStyle/>
+          <a:p>
+            <a:pPr algn="l" indent="0" marL="0">
+              <a:buNone/>
+            </a:pPr>
+            <a:r>
+              <a:rPr lang="en-US" sz="3400" b="1" dirty="0">
+                <a:solidFill>
+                  <a:srgbClr val="2B2B7A"/>
+                </a:solidFill>
+                <a:latin typeface="Cambria" pitchFamily="34" charset="0"/>
+                <a:ea typeface="Cambria" pitchFamily="34" charset="-122"/>
+                <a:cs typeface="Cambria" pitchFamily="34" charset="-120"/>
+              </a:rPr>
+              <a:t>Running JavaScript Outside the Browser</a:t>
+            </a:r>
+            <a:endParaRPr lang="en-US" sz="3400" dirty="0"/>
+          </a:p>
+        </p:txBody>
+      </p:sp>
+      <p:sp>
+        <p:nvSpPr>
+          <p:cNvPr id="4" name="Shape 2"/>
+          <p:cNvSpPr/>
+          <p:nvPr/>
+        </p:nvSpPr>
+        <p:spPr>
+          <a:xfrm>
+            <a:off x="640080" y="1965960"/>
+            <a:ext cx="10911535" cy="2737104"/>
+          </a:xfrm>
+          <a:prstGeom prst="roundRect">
+            <a:avLst>
+              <a:gd name="adj" fmla="val 3887"/>
+            </a:avLst>
+          </a:prstGeom>
+          <a:solidFill>
+            <a:srgbClr val="1E1E4C"/>
+          </a:solidFill>
+          <a:ln/>
+        </p:spPr>
+        <p:txBody>
+          <a:bodyPr/>
+          <a:p/>
+        </p:txBody>
+      </p:sp>
+      <p:sp>
+        <p:nvSpPr>
+          <p:cNvPr id="5" name="Text 3"/>
+          <p:cNvSpPr txBox="1"/>
+          <p:nvPr/>
+        </p:nvSpPr>
+        <p:spPr>
+          <a:xfrm>
+            <a:off x="960120" y="2194560"/>
+            <a:ext cx="10271455" cy="2279904"/>
+          </a:xfrm>
+          <a:prstGeom prst="rect">
+            <a:avLst/>
+          </a:prstGeom>
+          <a:noFill/>
+          <a:ln/>
+        </p:spPr>
+        <p:txBody>
+          <a:bodyPr wrap="square" lIns="0" tIns="0" rIns="0" bIns="0" rtlCol="0" anchor="t"/>
+          <a:lstStyle/>
+          <a:p>
+            <a:pPr indent="0" marL="0">
+              <a:lnSpc>
+                <a:spcPct val="125000"/>
+              </a:lnSpc>
+              <a:buNone/>
+            </a:pPr>
+            <a:r>
+              <a:rPr lang="en-US" sz="1400" dirty="0">
+                <a:solidFill>
+                  <a:srgbClr val="C9D3F5"/>
+                </a:solidFill>
+                <a:latin typeface="Courier New" pitchFamily="34" charset="0"/>
+                <a:ea typeface="Courier New" pitchFamily="34" charset="-122"/>
+                <a:cs typeface="Courier New" pitchFamily="34" charset="-120"/>
+              </a:rPr>
+              <a:t>// Browser: JS runs inside a page, with access to the DOM,</a:t>
+            </a:r>
+            <a:endParaRPr lang="en-US" sz="1400" dirty="0"/>
+          </a:p>
+          <a:p>
+            <a:pPr indent="0" marL="0">
+              <a:lnSpc>
+                <a:spcPct val="125000"/>
+              </a:lnSpc>
+              <a:buNone/>
+            </a:pPr>
+            <a:r>
+              <a:rPr lang="en-US" sz="1400" dirty="0">
+                <a:solidFill>
+                  <a:srgbClr val="C9D3F5"/>
+                </a:solidFill>
+                <a:latin typeface="Courier New" pitchFamily="34" charset="0"/>
+                <a:ea typeface="Courier New" pitchFamily="34" charset="-122"/>
+                <a:cs typeface="Courier New" pitchFamily="34" charset="-120"/>
+              </a:rPr>
+              <a:t>// window, and document -- but no file system or network access.</a:t>
+            </a:r>
+            <a:endParaRPr lang="en-US" sz="1400" dirty="0"/>
+          </a:p>
+          <a:p>
+            <a:pPr indent="0" marL="0">
+              <a:lnSpc>
+                <a:spcPct val="125000"/>
+              </a:lnSpc>
+              <a:buNone/>
+            </a:pPr>
+            <a:r>
+              <a:rPr lang="en-US" sz="1400" dirty="0">
+                <a:solidFill>
+                  <a:srgbClr val="C9D3F5"/>
+                </a:solidFill>
+                <a:latin typeface="Courier New" pitchFamily="34" charset="0"/>
+                <a:ea typeface="Courier New" pitchFamily="34" charset="-122"/>
+                <a:cs typeface="Courier New" pitchFamily="34" charset="-120"/>
+              </a:rPr>
+              <a:t/>
+            </a:r>
+            <a:endParaRPr lang="en-US" sz="1400" dirty="0"/>
+          </a:p>
+          <a:p>
+            <a:pPr indent="0" marL="0">
+              <a:lnSpc>
+                <a:spcPct val="125000"/>
+              </a:lnSpc>
+              <a:buNone/>
+            </a:pPr>
+            <a:r>
+              <a:rPr lang="en-US" sz="1400" dirty="0">
+                <a:solidFill>
+                  <a:srgbClr val="C9D3F5"/>
+                </a:solidFill>
+                <a:latin typeface="Courier New" pitchFamily="34" charset="0"/>
+                <a:ea typeface="Courier New" pitchFamily="34" charset="-122"/>
+                <a:cs typeface="Courier New" pitchFamily="34" charset="-120"/>
+              </a:rPr>
+              <a:t>// Node.js: the SAME language, running directly on your computer</a:t>
+            </a:r>
+            <a:endParaRPr lang="en-US" sz="1400" dirty="0"/>
+          </a:p>
+          <a:p>
+            <a:pPr indent="0" marL="0">
+              <a:lnSpc>
+                <a:spcPct val="125000"/>
+              </a:lnSpc>
+              <a:buNone/>
+            </a:pPr>
+            <a:r>
+              <a:rPr lang="en-US" sz="1400" dirty="0">
+                <a:solidFill>
+                  <a:srgbClr val="C9D3F5"/>
+                </a:solidFill>
+                <a:latin typeface="Courier New" pitchFamily="34" charset="0"/>
+                <a:ea typeface="Courier New" pitchFamily="34" charset="-122"/>
+                <a:cs typeface="Courier New" pitchFamily="34" charset="-120"/>
+              </a:rPr>
+              <a:t>// or a server -- with file system, network, and OS access.</a:t>
+            </a:r>
+            <a:endParaRPr lang="en-US" sz="1400" dirty="0"/>
+          </a:p>
+          <a:p>
+            <a:pPr indent="0" marL="0">
+              <a:lnSpc>
+                <a:spcPct val="125000"/>
+              </a:lnSpc>
+              <a:buNone/>
+            </a:pPr>
+            <a:r>
+              <a:rPr lang="en-US" sz="1400" dirty="0">
+                <a:solidFill>
+                  <a:srgbClr val="C9D3F5"/>
+                </a:solidFill>
+                <a:latin typeface="Courier New" pitchFamily="34" charset="0"/>
+                <a:ea typeface="Courier New" pitchFamily="34" charset="-122"/>
+                <a:cs typeface="Courier New" pitchFamily="34" charset="-120"/>
+              </a:rPr>
+              <a:t/>
+            </a:r>
+            <a:endParaRPr lang="en-US" sz="1400" dirty="0"/>
+          </a:p>
+          <a:p>
+            <a:pPr indent="0" marL="0">
+              <a:lnSpc>
+                <a:spcPct val="125000"/>
+              </a:lnSpc>
+              <a:buNone/>
+            </a:pPr>
+            <a:r>
+              <a:rPr lang="en-US" sz="1400" dirty="0">
+                <a:solidFill>
+                  <a:srgbClr val="C9D3F5"/>
+                </a:solidFill>
+                <a:latin typeface="Courier New" pitchFamily="34" charset="0"/>
+                <a:ea typeface="Courier New" pitchFamily="34" charset="-122"/>
+                <a:cs typeface="Courier New" pitchFamily="34" charset="-120"/>
+              </a:rPr>
+              <a:t>$ node app.js     // run a JavaScript file directly</a:t>
+            </a:r>
+            <a:endParaRPr lang="en-US" sz="1400" dirty="0"/>
+          </a:p>
+          <a:p>
+            <a:pPr indent="0" marL="0">
+              <a:lnSpc>
+                <a:spcPct val="125000"/>
+              </a:lnSpc>
+              <a:buNone/>
+            </a:pPr>
+            <a:r>
+              <a:rPr lang="en-US" sz="1400" dirty="0">
+                <a:solidFill>
+                  <a:srgbClr val="C9D3F5"/>
+                </a:solidFill>
+                <a:latin typeface="Courier New" pitchFamily="34" charset="0"/>
+                <a:ea typeface="Courier New" pitchFamily="34" charset="-122"/>
+                <a:cs typeface="Courier New" pitchFamily="34" charset="-120"/>
+              </a:rPr>
+              <a:t>$ node            // or start an interactive REPL</a:t>
+            </a:r>
+            <a:endParaRPr lang="en-US" sz="1400" dirty="0"/>
+          </a:p>
+        </p:txBody>
+      </p:sp>
+      <p:sp>
+        <p:nvSpPr>
+          <p:cNvPr id="6" name="Text 4"/>
+          <p:cNvSpPr txBox="1"/>
+          <p:nvPr/>
+        </p:nvSpPr>
+        <p:spPr>
+          <a:xfrm>
+            <a:off x="640080" y="4931664"/>
+            <a:ext cx="10911535" cy="1374000"/>
+          </a:xfrm>
+          <a:prstGeom prst="rect">
+            <a:avLst/>
+          </a:prstGeom>
+          <a:noFill/>
+          <a:ln/>
+        </p:spPr>
+        <p:txBody>
+          <a:bodyPr wrap="square" lIns="0" tIns="0" rIns="0" bIns="0" rtlCol="0" anchor="t"/>
+          <a:lstStyle/>
+          <a:p>
+            <a:pPr indent="0" marL="0">
+              <a:buNone/>
+            </a:pPr>
+            <a:r>
+              <a:rPr lang="en-US" sz="1300" dirty="0">
+                <a:solidFill>
+                  <a:srgbClr val="26262F"/>
+                </a:solidFill>
+                <a:latin typeface="Calibri" pitchFamily="34" charset="0"/>
+                <a:ea typeface="Calibri" pitchFamily="34" charset="-122"/>
+                <a:cs typeface="Calibri" pitchFamily="34" charset="-120"/>
+              </a:rPr>
+              <a:t>Node.js takes the V8 engine (the same one inside Chrome) and runs it standalone — it's the “N” in the MERN stack you'll build on later in this course.</a:t>
+            </a:r>
+            <a:endParaRPr lang="en-US" sz="1300" dirty="0"/>
+          </a:p>
+        </p:txBody>
+      </p:sp>
+      <p:sp>
+        <p:nvSpPr>
+          <p:cNvPr id="9" name="cuinotes-footer-mark"/>
+          <p:cNvSpPr txBox="1"/>
+          <p:nvPr/>
+        </p:nvSpPr>
+        <p:spPr>
+          <a:xfrm>
+            <a:off x="9951720" y="6455664"/>
+            <a:ext cx="2011680" cy="292608"/>
+          </a:xfrm>
+          <a:prstGeom prst="rect">
+            <a:avLst/>
+          </a:prstGeom>
+          <a:noFill/>
+        </p:spPr>
+        <p:txBody>
+          <a:bodyPr wrap="none" lIns="0" rIns="0" tIns="0" bIns="0">
+            <a:spAutoFit/>
+          </a:bodyPr>
+          <a:lstStyle/>
+          <a:p>
+            <a:pPr algn="r"/>
+            <a:r>
+              <a:rPr sz="1000">
+                <a:solidFill>
+                  <a:srgbClr val="8A939B"/>
+                </a:solidFill>
+                <a:hlinkClick r:id="rId3"/>
+              </a:rPr>
+              <a:t>cuinotes.com</a:t>
+            </a:r>
+            <a:r>
+              <a:rPr sz="1000">
+                <a:solidFill>
+                  <a:srgbClr val="8A939B"/>
+                </a:solidFill>
+              </a:rPr>
+              <a:t>  ·  42</a:t>
+            </a:r>
+          </a:p>
+        </p:txBody>
+      </p:sp>
+    </p:spTree>
+  </p:cSld>
+  <p:clrMapOvr>
+    <a:masterClrMapping/>
+  </p:clrMapOvr>
+</p:sld>
+</file>
+
+<file path=ppt/slides/slide46.xml><?xml version="1.0" encoding="utf-8"?>
+<p:sld xmlns:a="http://schemas.openxmlformats.org/drawingml/2006/main" xmlns:r="http://schemas.openxmlformats.org/officeDocument/2006/relationships" xmlns:p="http://schemas.openxmlformats.org/presentationml/2006/main">
+  <p:cSld name="Slide 43">
+    <p:bg>
+      <p:bgPr>
+        <a:solidFill>
+          <a:srgbClr val="FFFFFF"/>
+        </a:solidFill>
+      </p:bgPr>
+    </p:bg>
+    <p:spTree>
+      <p:nvGrpSpPr>
+        <p:cNvPr id="1" name=""/>
+        <p:cNvGrpSpPr/>
+        <p:nvPr/>
+      </p:nvGrpSpPr>
+      <p:grpSpPr>
+        <a:xfrm>
+          <a:off x="0" y="0"/>
+          <a:ext cx="0" cy="0"/>
+          <a:chOff x="0" y="0"/>
+          <a:chExt cx="0" cy="0"/>
+        </a:xfrm>
+      </p:grpSpPr>
+      <p:sp>
+        <p:nvSpPr>
+          <p:cNvPr id="2" name="Text 0"/>
+          <p:cNvSpPr txBox="1"/>
+          <p:nvPr/>
+        </p:nvSpPr>
+        <p:spPr>
+          <a:xfrm>
+            <a:off x="640080" y="457200"/>
+            <a:ext cx="10058400" cy="365760"/>
+          </a:xfrm>
+          <a:prstGeom prst="rect">
+            <a:avLst/>
+          </a:prstGeom>
+          <a:noFill/>
+          <a:ln/>
+        </p:spPr>
+        <p:txBody>
+          <a:bodyPr wrap="square" lIns="0" tIns="0" rIns="0" bIns="0" rtlCol="0" anchor="ctr"/>
+          <a:lstStyle/>
+          <a:p>
+            <a:pPr algn="l" indent="0" marL="0">
+              <a:buNone/>
+            </a:pPr>
+            <a:r>
+              <a:rPr lang="en-US" sz="1300" b="1" spc="300" kern="0" dirty="0">
+                <a:solidFill>
+                  <a:srgbClr val="FF8A3D"/>
+                </a:solidFill>
+                <a:latin typeface="Calibri" pitchFamily="34" charset="0"/>
+                <a:ea typeface="Calibri" pitchFamily="34" charset="-122"/>
+                <a:cs typeface="Calibri" pitchFamily="34" charset="-120"/>
+              </a:rPr>
+              <a:t>NODE.JS</a:t>
+            </a:r>
+            <a:endParaRPr lang="en-US" sz="1300" dirty="0"/>
+          </a:p>
+        </p:txBody>
+      </p:sp>
+      <p:sp>
+        <p:nvSpPr>
+          <p:cNvPr id="3" name="Text 1"/>
+          <p:cNvSpPr txBox="1"/>
+          <p:nvPr/>
+        </p:nvSpPr>
+        <p:spPr>
+          <a:xfrm>
+            <a:off x="640080" y="841248"/>
+            <a:ext cx="10881360" cy="914400"/>
+          </a:xfrm>
+          <a:prstGeom prst="rect">
+            <a:avLst/>
+          </a:prstGeom>
+          <a:noFill/>
+          <a:ln/>
+        </p:spPr>
+        <p:txBody>
+          <a:bodyPr wrap="square" lIns="0" tIns="0" rIns="0" bIns="0" rtlCol="0" anchor="ctr"/>
+          <a:lstStyle/>
+          <a:p>
+            <a:pPr algn="l" indent="0" marL="0">
+              <a:buNone/>
+            </a:pPr>
+            <a:r>
+              <a:rPr lang="en-US" sz="3400" b="1" dirty="0">
+                <a:solidFill>
+                  <a:srgbClr val="2B2B7A"/>
+                </a:solidFill>
+                <a:latin typeface="Cambria" pitchFamily="34" charset="0"/>
+                <a:ea typeface="Cambria" pitchFamily="34" charset="-122"/>
+                <a:cs typeface="Cambria" pitchFamily="34" charset="-120"/>
+              </a:rPr>
+              <a:t>Modules: require vs. import</a:t>
+            </a:r>
+            <a:endParaRPr lang="en-US" sz="3400" dirty="0"/>
+          </a:p>
+        </p:txBody>
+      </p:sp>
+      <p:sp>
+        <p:nvSpPr>
+          <p:cNvPr id="4" name="Shape 2"/>
+          <p:cNvSpPr/>
+          <p:nvPr/>
+        </p:nvSpPr>
+        <p:spPr>
+          <a:xfrm>
+            <a:off x="640080" y="1965960"/>
+            <a:ext cx="10911535" cy="3022092"/>
+          </a:xfrm>
+          <a:prstGeom prst="roundRect">
+            <a:avLst>
+              <a:gd name="adj" fmla="val 3887"/>
+            </a:avLst>
+          </a:prstGeom>
+          <a:solidFill>
+            <a:srgbClr val="1E1E4C"/>
+          </a:solidFill>
+          <a:ln/>
+        </p:spPr>
+        <p:txBody>
+          <a:bodyPr/>
+          <a:p/>
+        </p:txBody>
+      </p:sp>
+      <p:sp>
+        <p:nvSpPr>
+          <p:cNvPr id="5" name="Text 3"/>
+          <p:cNvSpPr txBox="1"/>
+          <p:nvPr/>
+        </p:nvSpPr>
+        <p:spPr>
+          <a:xfrm>
+            <a:off x="960120" y="2194560"/>
+            <a:ext cx="10271455" cy="2564892"/>
+          </a:xfrm>
+          <a:prstGeom prst="rect">
+            <a:avLst/>
+          </a:prstGeom>
+          <a:noFill/>
+          <a:ln/>
+        </p:spPr>
+        <p:txBody>
+          <a:bodyPr wrap="square" lIns="0" tIns="0" rIns="0" bIns="0" rtlCol="0" anchor="t"/>
+          <a:lstStyle/>
+          <a:p>
+            <a:pPr indent="0" marL="0">
+              <a:lnSpc>
+                <a:spcPct val="125000"/>
+              </a:lnSpc>
+              <a:buNone/>
+            </a:pPr>
+            <a:r>
+              <a:rPr lang="en-US" sz="1400" dirty="0">
+                <a:solidFill>
+                  <a:srgbClr val="C9D3F5"/>
+                </a:solidFill>
+                <a:latin typeface="Courier New" pitchFamily="34" charset="0"/>
+                <a:ea typeface="Courier New" pitchFamily="34" charset="-122"/>
+                <a:cs typeface="Courier New" pitchFamily="34" charset="-120"/>
+              </a:rPr>
+              <a:t>// CommonJS -- Node's original module system (default in .js files)</a:t>
+            </a:r>
+            <a:endParaRPr lang="en-US" sz="1400" dirty="0"/>
+          </a:p>
+          <a:p>
+            <a:pPr indent="0" marL="0">
+              <a:lnSpc>
+                <a:spcPct val="125000"/>
+              </a:lnSpc>
+              <a:buNone/>
+            </a:pPr>
+            <a:r>
+              <a:rPr lang="en-US" sz="1400" dirty="0">
+                <a:solidFill>
+                  <a:srgbClr val="C9D3F5"/>
+                </a:solidFill>
+                <a:latin typeface="Courier New" pitchFamily="34" charset="0"/>
+                <a:ea typeface="Courier New" pitchFamily="34" charset="-122"/>
+                <a:cs typeface="Courier New" pitchFamily="34" charset="-120"/>
+              </a:rPr>
+              <a:t>// mathUtils.js</a:t>
+            </a:r>
+            <a:endParaRPr lang="en-US" sz="1400" dirty="0"/>
+          </a:p>
+          <a:p>
+            <a:pPr indent="0" marL="0">
+              <a:lnSpc>
+                <a:spcPct val="125000"/>
+              </a:lnSpc>
+              <a:buNone/>
+            </a:pPr>
+            <a:r>
+              <a:rPr lang="en-US" sz="1400" dirty="0">
+                <a:solidFill>
+                  <a:srgbClr val="C9D3F5"/>
+                </a:solidFill>
+                <a:latin typeface="Courier New" pitchFamily="34" charset="0"/>
+                <a:ea typeface="Courier New" pitchFamily="34" charset="-122"/>
+                <a:cs typeface="Courier New" pitchFamily="34" charset="-120"/>
+              </a:rPr>
+              <a:t>exports.add = (a, b) =&gt; a + b;</a:t>
+            </a:r>
+            <a:endParaRPr lang="en-US" sz="1400" dirty="0"/>
+          </a:p>
+          <a:p>
+            <a:pPr indent="0" marL="0">
+              <a:lnSpc>
+                <a:spcPct val="125000"/>
+              </a:lnSpc>
+              <a:buNone/>
+            </a:pPr>
+            <a:r>
+              <a:rPr lang="en-US" sz="1400" dirty="0">
+                <a:solidFill>
+                  <a:srgbClr val="C9D3F5"/>
+                </a:solidFill>
+                <a:latin typeface="Courier New" pitchFamily="34" charset="0"/>
+                <a:ea typeface="Courier New" pitchFamily="34" charset="-122"/>
+                <a:cs typeface="Courier New" pitchFamily="34" charset="-120"/>
+              </a:rPr>
+              <a:t>// main.js</a:t>
+            </a:r>
+            <a:endParaRPr lang="en-US" sz="1400" dirty="0"/>
+          </a:p>
+          <a:p>
+            <a:pPr indent="0" marL="0">
+              <a:lnSpc>
+                <a:spcPct val="125000"/>
+              </a:lnSpc>
+              <a:buNone/>
+            </a:pPr>
+            <a:r>
+              <a:rPr lang="en-US" sz="1400" dirty="0">
+                <a:solidFill>
+                  <a:srgbClr val="C9D3F5"/>
+                </a:solidFill>
+                <a:latin typeface="Courier New" pitchFamily="34" charset="0"/>
+                <a:ea typeface="Courier New" pitchFamily="34" charset="-122"/>
+                <a:cs typeface="Courier New" pitchFamily="34" charset="-120"/>
+              </a:rPr>
+              <a:t>const { add } = require("./mathUtils");</a:t>
+            </a:r>
+            <a:endParaRPr lang="en-US" sz="1400" dirty="0"/>
+          </a:p>
+          <a:p>
+            <a:pPr indent="0" marL="0">
+              <a:lnSpc>
+                <a:spcPct val="125000"/>
+              </a:lnSpc>
+              <a:buNone/>
+            </a:pPr>
+            <a:r>
+              <a:rPr lang="en-US" sz="1400" dirty="0">
+                <a:solidFill>
+                  <a:srgbClr val="C9D3F5"/>
+                </a:solidFill>
+                <a:latin typeface="Courier New" pitchFamily="34" charset="0"/>
+                <a:ea typeface="Courier New" pitchFamily="34" charset="-122"/>
+                <a:cs typeface="Courier New" pitchFamily="34" charset="-120"/>
+              </a:rPr>
+              <a:t/>
+            </a:r>
+            <a:endParaRPr lang="en-US" sz="1400" dirty="0"/>
+          </a:p>
+          <a:p>
+            <a:pPr indent="0" marL="0">
+              <a:lnSpc>
+                <a:spcPct val="125000"/>
+              </a:lnSpc>
+              <a:buNone/>
+            </a:pPr>
+            <a:r>
+              <a:rPr lang="en-US" sz="1400" dirty="0">
+                <a:solidFill>
+                  <a:srgbClr val="C9D3F5"/>
+                </a:solidFill>
+                <a:latin typeface="Courier New" pitchFamily="34" charset="0"/>
+                <a:ea typeface="Courier New" pitchFamily="34" charset="-122"/>
+                <a:cs typeface="Courier New" pitchFamily="34" charset="-120"/>
+              </a:rPr>
+              <a:t>// ES Modules -- the same import/export syntax browsers use</a:t>
+            </a:r>
+            <a:endParaRPr lang="en-US" sz="1400" dirty="0"/>
+          </a:p>
+          <a:p>
+            <a:pPr indent="0" marL="0">
+              <a:lnSpc>
+                <a:spcPct val="125000"/>
+              </a:lnSpc>
+              <a:buNone/>
+            </a:pPr>
+            <a:r>
+              <a:rPr lang="en-US" sz="1400" dirty="0">
+                <a:solidFill>
+                  <a:srgbClr val="C9D3F5"/>
+                </a:solidFill>
+                <a:latin typeface="Courier New" pitchFamily="34" charset="0"/>
+                <a:ea typeface="Courier New" pitchFamily="34" charset="-122"/>
+                <a:cs typeface="Courier New" pitchFamily="34" charset="-120"/>
+              </a:rPr>
+              <a:t>export const add = (a, b) =&gt; a + b;        // mathUtils.js</a:t>
+            </a:r>
+            <a:endParaRPr lang="en-US" sz="1400" dirty="0"/>
+          </a:p>
+          <a:p>
+            <a:pPr indent="0" marL="0">
+              <a:lnSpc>
+                <a:spcPct val="125000"/>
+              </a:lnSpc>
+              <a:buNone/>
+            </a:pPr>
+            <a:r>
+              <a:rPr lang="en-US" sz="1400" dirty="0">
+                <a:solidFill>
+                  <a:srgbClr val="C9D3F5"/>
+                </a:solidFill>
+                <a:latin typeface="Courier New" pitchFamily="34" charset="0"/>
+                <a:ea typeface="Courier New" pitchFamily="34" charset="-122"/>
+                <a:cs typeface="Courier New" pitchFamily="34" charset="-120"/>
+              </a:rPr>
+              <a:t>import { add } from "./mathUtils.js";       // main.js</a:t>
+            </a:r>
+            <a:endParaRPr lang="en-US" sz="1400" dirty="0"/>
+          </a:p>
+        </p:txBody>
+      </p:sp>
+      <p:sp>
+        <p:nvSpPr>
+          <p:cNvPr id="6" name="Text 4"/>
+          <p:cNvSpPr txBox="1"/>
+          <p:nvPr/>
+        </p:nvSpPr>
+        <p:spPr>
+          <a:xfrm>
+            <a:off x="640080" y="5216652"/>
+            <a:ext cx="10911535" cy="1089012"/>
+          </a:xfrm>
+          <a:prstGeom prst="rect">
+            <a:avLst/>
+          </a:prstGeom>
+          <a:noFill/>
+          <a:ln/>
+        </p:spPr>
+        <p:txBody>
+          <a:bodyPr wrap="square" lIns="0" tIns="0" rIns="0" bIns="0" rtlCol="0" anchor="t"/>
+          <a:lstStyle/>
+          <a:p>
+            <a:pPr indent="0" marL="0">
+              <a:buNone/>
+            </a:pPr>
+            <a:r>
+              <a:rPr lang="en-US" sz="1300" dirty="0">
+                <a:solidFill>
+                  <a:srgbClr val="26262F"/>
+                </a:solidFill>
+                <a:latin typeface="Calibri" pitchFamily="34" charset="0"/>
+                <a:ea typeface="Calibri" pitchFamily="34" charset="-122"/>
+                <a:cs typeface="Calibri" pitchFamily="34" charset="-120"/>
+              </a:rPr>
+              <a:t>Node supports both. CommonJS (require/exports) is the default in .js files; add “type”: “module” to package.json to use import/export instead.</a:t>
+            </a:r>
+            <a:endParaRPr lang="en-US" sz="1300" dirty="0"/>
+          </a:p>
+        </p:txBody>
+      </p:sp>
+      <p:sp>
+        <p:nvSpPr>
+          <p:cNvPr id="9" name="cuinotes-footer-mark"/>
+          <p:cNvSpPr txBox="1"/>
+          <p:nvPr/>
+        </p:nvSpPr>
+        <p:spPr>
+          <a:xfrm>
+            <a:off x="9951720" y="6455664"/>
+            <a:ext cx="2011680" cy="292608"/>
+          </a:xfrm>
+          <a:prstGeom prst="rect">
+            <a:avLst/>
+          </a:prstGeom>
+          <a:noFill/>
+        </p:spPr>
+        <p:txBody>
+          <a:bodyPr wrap="none" lIns="0" rIns="0" tIns="0" bIns="0">
+            <a:spAutoFit/>
+          </a:bodyPr>
+          <a:lstStyle/>
+          <a:p>
+            <a:pPr algn="r"/>
+            <a:r>
+              <a:rPr sz="1000">
+                <a:solidFill>
+                  <a:srgbClr val="8A939B"/>
+                </a:solidFill>
+                <a:hlinkClick r:id="rId3"/>
+              </a:rPr>
+              <a:t>cuinotes.com</a:t>
+            </a:r>
+            <a:r>
+              <a:rPr sz="1000">
+                <a:solidFill>
+                  <a:srgbClr val="8A939B"/>
+                </a:solidFill>
+              </a:rPr>
+              <a:t>  ·  43</a:t>
             </a:r>
           </a:p>
         </p:txBody>

--- a/slides/CSC336-Lecture-11-Core-JavaScript-ES6.pptx
+++ b/slides/CSC336-Lecture-11-Core-JavaScript-ES6.pptx
@@ -4427,7 +4427,7 @@
         <p:spPr>
           <a:xfrm>
             <a:off x="640080" y="1965960"/>
-            <a:ext cx="10911535" cy="1371600"/>
+            <a:ext cx="10911535" cy="3657600"/>
           </a:xfrm>
           <a:prstGeom prst="roundRect">
             <a:avLst>
@@ -4458,7 +4458,7 @@
         <p:spPr>
           <a:xfrm>
             <a:off x="868680" y="2103120"/>
-            <a:ext cx="10454335" cy="274320"/>
+            <a:ext cx="10454335" cy="400000"/>
           </a:xfrm>
           <a:prstGeom prst="rect">
             <a:avLst/>
@@ -4474,7 +4474,7 @@
               <a:buNone/>
             </a:pPr>
             <a:r>
-              <a:rPr lang="en-US" sz="1000" b="1" spc="200" kern="0" dirty="0">
+              <a:rPr lang="en-US" sz="1800" b="1" spc="200" kern="0" dirty="0">
                 <a:solidFill>
                   <a:srgbClr val="8A3A12"/>
                 </a:solidFill>
@@ -4484,7 +4484,7 @@
               </a:rPr>
               <a:t>WARNING</a:t>
             </a:r>
-            <a:endParaRPr lang="en-US" sz="1000" dirty="0"/>
+            <a:endParaRPr lang="en-US" sz="1800" dirty="0"/>
           </a:p>
         </p:txBody>
       </p:sp>
@@ -4496,8 +4496,8 @@
         </p:nvSpPr>
         <p:spPr>
           <a:xfrm>
-            <a:off x="868680" y="2404872"/>
-            <a:ext cx="10454335" cy="777240"/>
+            <a:off x="868680" y="2795960"/>
+            <a:ext cx="10454335" cy="2500000"/>
           </a:xfrm>
           <a:prstGeom prst="rect">
             <a:avLst/>
@@ -4506,14 +4506,14 @@
           <a:ln/>
         </p:spPr>
         <p:txBody>
-          <a:bodyPr wrap="square" lIns="0" tIns="0" rIns="0" bIns="0" rtlCol="0" anchor="t"/>
-          <a:lstStyle/>
-          <a:p>
-            <a:pPr indent="0" marL="0">
-              <a:buNone/>
-            </a:pPr>
-            <a:r>
-              <a:rPr lang="en-US" sz="1250" dirty="0">
+          <a:bodyPr wrap="square" lIns="0" tIns="0" rIns="0" bIns="0" rtlCol="0" anchor="ctr"/>
+          <a:lstStyle/>
+          <a:p>
+            <a:pPr indent="0" marL="0">
+              <a:buNone/>
+            </a:pPr>
+            <a:r>
+              <a:rPr lang="en-US" sz="2800" dirty="0">
                 <a:solidFill>
                   <a:srgbClr val="26262F"/>
                 </a:solidFill>
@@ -4523,7 +4523,7 @@
               </a:rPr>
               <a:t>const only prevents reassigning the variable itself. If the value is an object or array, its contents can still be changed.</a:t>
             </a:r>
-            <a:endParaRPr lang="en-US" sz="1250" dirty="0"/>
+            <a:endParaRPr lang="en-US" sz="2800" dirty="0"/>
           </a:p>
         </p:txBody>
       </p:sp>
@@ -4697,9 +4697,13 @@
             </a:avLst>
           </a:prstGeom>
           <a:solidFill>
-            <a:srgbClr val="1E1E4C"/>
+            <a:srgbClr val="F7F8F9"/>
           </a:solidFill>
-          <a:ln/>
+          <a:ln w="9525">
+            <a:solidFill>
+              <a:srgbClr val="D0D5DD"/>
+            </a:solidFill>
+          </a:ln>
         </p:spPr>
         <p:txBody>
           <a:bodyPr/>
@@ -4736,7 +4740,7 @@
             <a:r>
               <a:rPr lang="en-US" sz="1400" dirty="0">
                 <a:solidFill>
-                  <a:srgbClr val="C9D3F5"/>
+                  <a:srgbClr val="1F2429"/>
                 </a:solidFill>
                 <a:latin typeface="Courier New" pitchFamily="34" charset="0"/>
                 <a:ea typeface="Courier New" pitchFamily="34" charset="-122"/>
@@ -4756,7 +4760,7 @@
             <a:r>
               <a:rPr lang="en-US" sz="1400" dirty="0">
                 <a:solidFill>
-                  <a:srgbClr val="C9D3F5"/>
+                  <a:srgbClr val="1F2429"/>
                 </a:solidFill>
                 <a:latin typeface="Courier New" pitchFamily="34" charset="0"/>
                 <a:ea typeface="Courier New" pitchFamily="34" charset="-122"/>
@@ -4776,7 +4780,7 @@
             <a:r>
               <a:rPr lang="en-US" sz="1400" dirty="0">
                 <a:solidFill>
-                  <a:srgbClr val="C9D3F5"/>
+                  <a:srgbClr val="1F2429"/>
                 </a:solidFill>
                 <a:latin typeface="Courier New" pitchFamily="34" charset="0"/>
                 <a:ea typeface="Courier New" pitchFamily="34" charset="-122"/>
@@ -5955,9 +5959,13 @@
             </a:avLst>
           </a:prstGeom>
           <a:solidFill>
-            <a:srgbClr val="1E1E4C"/>
+            <a:srgbClr val="F7F8F9"/>
           </a:solidFill>
-          <a:ln/>
+          <a:ln w="9525">
+            <a:solidFill>
+              <a:srgbClr val="D0D5DD"/>
+            </a:solidFill>
+          </a:ln>
         </p:spPr>
         <p:txBody>
           <a:bodyPr/>
@@ -5994,7 +6002,7 @@
             <a:r>
               <a:rPr lang="en-US" sz="1309" dirty="0">
                 <a:solidFill>
-                  <a:srgbClr val="C9D3F5"/>
+                  <a:srgbClr val="1F2429"/>
                 </a:solidFill>
                 <a:latin typeface="Courier New" pitchFamily="34" charset="0"/>
                 <a:ea typeface="Courier New" pitchFamily="34" charset="-122"/>
@@ -6014,7 +6022,7 @@
             <a:r>
               <a:rPr lang="en-US" sz="1309" dirty="0">
                 <a:solidFill>
-                  <a:srgbClr val="C9D3F5"/>
+                  <a:srgbClr val="1F2429"/>
                 </a:solidFill>
                 <a:latin typeface="Courier New" pitchFamily="34" charset="0"/>
                 <a:ea typeface="Courier New" pitchFamily="34" charset="-122"/>
@@ -6034,7 +6042,7 @@
             <a:r>
               <a:rPr lang="en-US" sz="1309" dirty="0">
                 <a:solidFill>
-                  <a:srgbClr val="C9D3F5"/>
+                  <a:srgbClr val="1F2429"/>
                 </a:solidFill>
                 <a:latin typeface="Courier New" pitchFamily="34" charset="0"/>
                 <a:ea typeface="Courier New" pitchFamily="34" charset="-122"/>
@@ -6054,7 +6062,7 @@
             <a:r>
               <a:rPr lang="en-US" sz="1309" dirty="0">
                 <a:solidFill>
-                  <a:srgbClr val="C9D3F5"/>
+                  <a:srgbClr val="1F2429"/>
                 </a:solidFill>
                 <a:latin typeface="Courier New" pitchFamily="34" charset="0"/>
                 <a:ea typeface="Courier New" pitchFamily="34" charset="-122"/>
@@ -6074,7 +6082,7 @@
             <a:r>
               <a:rPr lang="en-US" sz="1309" dirty="0">
                 <a:solidFill>
-                  <a:srgbClr val="C9D3F5"/>
+                  <a:srgbClr val="1F2429"/>
                 </a:solidFill>
                 <a:latin typeface="Courier New" pitchFamily="34" charset="0"/>
                 <a:ea typeface="Courier New" pitchFamily="34" charset="-122"/>
@@ -6103,7 +6111,7 @@
             <a:r>
               <a:rPr lang="en-US" sz="1309" dirty="0">
                 <a:solidFill>
-                  <a:srgbClr val="C9D3F5"/>
+                  <a:srgbClr val="1F2429"/>
                 </a:solidFill>
                 <a:latin typeface="Courier New" pitchFamily="34" charset="0"/>
                 <a:ea typeface="Courier New" pitchFamily="34" charset="-122"/>
@@ -6123,7 +6131,7 @@
             <a:r>
               <a:rPr lang="en-US" sz="1309" dirty="0">
                 <a:solidFill>
-                  <a:srgbClr val="C9D3F5"/>
+                  <a:srgbClr val="1F2429"/>
                 </a:solidFill>
                 <a:latin typeface="Courier New" pitchFamily="34" charset="0"/>
                 <a:ea typeface="Courier New" pitchFamily="34" charset="-122"/>
@@ -6143,7 +6151,7 @@
             <a:r>
               <a:rPr lang="en-US" sz="1309" dirty="0">
                 <a:solidFill>
-                  <a:srgbClr val="C9D3F5"/>
+                  <a:srgbClr val="1F2429"/>
                 </a:solidFill>
                 <a:latin typeface="Courier New" pitchFamily="34" charset="0"/>
                 <a:ea typeface="Courier New" pitchFamily="34" charset="-122"/>
@@ -6163,7 +6171,7 @@
             <a:r>
               <a:rPr lang="en-US" sz="1309" dirty="0">
                 <a:solidFill>
-                  <a:srgbClr val="C9D3F5"/>
+                  <a:srgbClr val="1F2429"/>
                 </a:solidFill>
                 <a:latin typeface="Courier New" pitchFamily="34" charset="0"/>
                 <a:ea typeface="Courier New" pitchFamily="34" charset="-122"/>
@@ -6183,7 +6191,7 @@
             <a:r>
               <a:rPr lang="en-US" sz="1309" dirty="0">
                 <a:solidFill>
-                  <a:srgbClr val="C9D3F5"/>
+                  <a:srgbClr val="1F2429"/>
                 </a:solidFill>
                 <a:latin typeface="Courier New" pitchFamily="34" charset="0"/>
                 <a:ea typeface="Courier New" pitchFamily="34" charset="-122"/>
@@ -6404,9 +6412,13 @@
             </a:avLst>
           </a:prstGeom>
           <a:solidFill>
-            <a:srgbClr val="1E1E4C"/>
+            <a:srgbClr val="F7F8F9"/>
           </a:solidFill>
-          <a:ln/>
+          <a:ln w="9525">
+            <a:solidFill>
+              <a:srgbClr val="D0D5DD"/>
+            </a:solidFill>
+          </a:ln>
         </p:spPr>
         <p:txBody>
           <a:bodyPr/>
@@ -6443,7 +6455,7 @@
             <a:r>
               <a:rPr lang="en-US" sz="1400" dirty="0">
                 <a:solidFill>
-                  <a:srgbClr val="C9D3F5"/>
+                  <a:srgbClr val="1F2429"/>
                 </a:solidFill>
                 <a:latin typeface="Courier New" pitchFamily="34" charset="0"/>
                 <a:ea typeface="Courier New" pitchFamily="34" charset="-122"/>
@@ -6463,7 +6475,7 @@
             <a:r>
               <a:rPr lang="en-US" sz="1400" dirty="0">
                 <a:solidFill>
-                  <a:srgbClr val="C9D3F5"/>
+                  <a:srgbClr val="1F2429"/>
                 </a:solidFill>
                 <a:latin typeface="Courier New" pitchFamily="34" charset="0"/>
                 <a:ea typeface="Courier New" pitchFamily="34" charset="-122"/>
@@ -6483,7 +6495,7 @@
             <a:r>
               <a:rPr lang="en-US" sz="1400" dirty="0">
                 <a:solidFill>
-                  <a:srgbClr val="C9D3F5"/>
+                  <a:srgbClr val="1F2429"/>
                 </a:solidFill>
                 <a:latin typeface="Courier New" pitchFamily="34" charset="0"/>
                 <a:ea typeface="Courier New" pitchFamily="34" charset="-122"/>
@@ -6503,7 +6515,7 @@
             <a:r>
               <a:rPr lang="en-US" sz="1400" dirty="0">
                 <a:solidFill>
-                  <a:srgbClr val="C9D3F5"/>
+                  <a:srgbClr val="1F2429"/>
                 </a:solidFill>
                 <a:latin typeface="Courier New" pitchFamily="34" charset="0"/>
                 <a:ea typeface="Courier New" pitchFamily="34" charset="-122"/>
@@ -6523,7 +6535,7 @@
             <a:r>
               <a:rPr lang="en-US" sz="1400" dirty="0">
                 <a:solidFill>
-                  <a:srgbClr val="C9D3F5"/>
+                  <a:srgbClr val="1F2429"/>
                 </a:solidFill>
                 <a:latin typeface="Courier New" pitchFamily="34" charset="0"/>
                 <a:ea typeface="Courier New" pitchFamily="34" charset="-122"/>
@@ -6543,7 +6555,7 @@
             <a:r>
               <a:rPr lang="en-US" sz="1400" dirty="0">
                 <a:solidFill>
-                  <a:srgbClr val="C9D3F5"/>
+                  <a:srgbClr val="1F2429"/>
                 </a:solidFill>
                 <a:latin typeface="Courier New" pitchFamily="34" charset="0"/>
                 <a:ea typeface="Courier New" pitchFamily="34" charset="-122"/>
@@ -6563,7 +6575,7 @@
             <a:r>
               <a:rPr lang="en-US" sz="1400" dirty="0">
                 <a:solidFill>
-                  <a:srgbClr val="C9D3F5"/>
+                  <a:srgbClr val="1F2429"/>
                 </a:solidFill>
                 <a:latin typeface="Courier New" pitchFamily="34" charset="0"/>
                 <a:ea typeface="Courier New" pitchFamily="34" charset="-122"/>
@@ -6776,7 +6788,7 @@
         <p:spPr>
           <a:xfrm>
             <a:off x="640080" y="1965960"/>
-            <a:ext cx="10911535" cy="1554480"/>
+            <a:ext cx="10911535" cy="3657600"/>
           </a:xfrm>
           <a:prstGeom prst="roundRect">
             <a:avLst>
@@ -6807,7 +6819,7 @@
         <p:spPr>
           <a:xfrm>
             <a:off x="868680" y="2103120"/>
-            <a:ext cx="10454335" cy="274320"/>
+            <a:ext cx="10454335" cy="400000"/>
           </a:xfrm>
           <a:prstGeom prst="rect">
             <a:avLst/>
@@ -6823,7 +6835,7 @@
               <a:buNone/>
             </a:pPr>
             <a:r>
-              <a:rPr lang="en-US" sz="1000" b="1" spc="200" kern="0" dirty="0">
+              <a:rPr lang="en-US" sz="1800" b="1" spc="200" kern="0" dirty="0">
                 <a:solidFill>
                   <a:srgbClr val="8A3A12"/>
                 </a:solidFill>
@@ -6833,7 +6845,7 @@
               </a:rPr>
               <a:t>WARNING</a:t>
             </a:r>
-            <a:endParaRPr lang="en-US" sz="1000" dirty="0"/>
+            <a:endParaRPr lang="en-US" sz="1800" dirty="0"/>
           </a:p>
         </p:txBody>
       </p:sp>
@@ -6845,8 +6857,8 @@
         </p:nvSpPr>
         <p:spPr>
           <a:xfrm>
-            <a:off x="868680" y="2404872"/>
-            <a:ext cx="10454335" cy="960120"/>
+            <a:off x="868680" y="2795960"/>
+            <a:ext cx="10454335" cy="2500000"/>
           </a:xfrm>
           <a:prstGeom prst="rect">
             <a:avLst/>
@@ -6855,14 +6867,14 @@
           <a:ln/>
         </p:spPr>
         <p:txBody>
-          <a:bodyPr wrap="square" lIns="0" tIns="0" rIns="0" bIns="0" rtlCol="0" anchor="t"/>
-          <a:lstStyle/>
-          <a:p>
-            <a:pPr indent="0" marL="0">
-              <a:buNone/>
-            </a:pPr>
-            <a:r>
-              <a:rPr lang="en-US" sz="1250" dirty="0">
+          <a:bodyPr wrap="square" lIns="0" tIns="0" rIns="0" bIns="0" rtlCol="0" anchor="ctr"/>
+          <a:lstStyle/>
+          <a:p>
+            <a:pPr indent="0" marL="0">
+              <a:buNone/>
+            </a:pPr>
+            <a:r>
+              <a:rPr lang="en-US" sz="2800" dirty="0">
                 <a:solidFill>
                   <a:srgbClr val="26262F"/>
                 </a:solidFill>
@@ -6872,7 +6884,7 @@
               </a:rPr>
               <a:t>Loose equality produces surprising results ("" == 0 is true, null == undefined is true). Using strict equality by default avoids an entire category of bugs.</a:t>
             </a:r>
-            <a:endParaRPr lang="en-US" sz="1250" dirty="0"/>
+            <a:endParaRPr lang="en-US" sz="2800" dirty="0"/>
           </a:p>
         </p:txBody>
       </p:sp>
@@ -7046,9 +7058,13 @@
             </a:avLst>
           </a:prstGeom>
           <a:solidFill>
-            <a:srgbClr val="1E1E4C"/>
+            <a:srgbClr val="F7F8F9"/>
           </a:solidFill>
-          <a:ln/>
+          <a:ln w="9525">
+            <a:solidFill>
+              <a:srgbClr val="D0D5DD"/>
+            </a:solidFill>
+          </a:ln>
         </p:spPr>
         <p:txBody>
           <a:bodyPr/>
@@ -7085,7 +7101,7 @@
             <a:r>
               <a:rPr lang="en-US" sz="1400" dirty="0">
                 <a:solidFill>
-                  <a:srgbClr val="C9D3F5"/>
+                  <a:srgbClr val="1F2429"/>
                 </a:solidFill>
                 <a:latin typeface="Courier New" pitchFamily="34" charset="0"/>
                 <a:ea typeface="Courier New" pitchFamily="34" charset="-122"/>
@@ -7105,7 +7121,7 @@
             <a:r>
               <a:rPr lang="en-US" sz="1400" dirty="0">
                 <a:solidFill>
-                  <a:srgbClr val="C9D3F5"/>
+                  <a:srgbClr val="1F2429"/>
                 </a:solidFill>
                 <a:latin typeface="Courier New" pitchFamily="34" charset="0"/>
                 <a:ea typeface="Courier New" pitchFamily="34" charset="-122"/>
@@ -7125,7 +7141,7 @@
             <a:r>
               <a:rPr lang="en-US" sz="1400" dirty="0">
                 <a:solidFill>
-                  <a:srgbClr val="C9D3F5"/>
+                  <a:srgbClr val="1F2429"/>
                 </a:solidFill>
                 <a:latin typeface="Courier New" pitchFamily="34" charset="0"/>
                 <a:ea typeface="Courier New" pitchFamily="34" charset="-122"/>
@@ -7145,7 +7161,7 @@
             <a:r>
               <a:rPr lang="en-US" sz="1400" dirty="0">
                 <a:solidFill>
-                  <a:srgbClr val="C9D3F5"/>
+                  <a:srgbClr val="1F2429"/>
                 </a:solidFill>
                 <a:latin typeface="Courier New" pitchFamily="34" charset="0"/>
                 <a:ea typeface="Courier New" pitchFamily="34" charset="-122"/>
@@ -7165,7 +7181,7 @@
             <a:r>
               <a:rPr lang="en-US" sz="1400" dirty="0">
                 <a:solidFill>
-                  <a:srgbClr val="C9D3F5"/>
+                  <a:srgbClr val="1F2429"/>
                 </a:solidFill>
                 <a:latin typeface="Courier New" pitchFamily="34" charset="0"/>
                 <a:ea typeface="Courier New" pitchFamily="34" charset="-122"/>
@@ -7185,7 +7201,7 @@
             <a:r>
               <a:rPr lang="en-US" sz="1400" dirty="0">
                 <a:solidFill>
-                  <a:srgbClr val="C9D3F5"/>
+                  <a:srgbClr val="1F2429"/>
                 </a:solidFill>
                 <a:latin typeface="Courier New" pitchFamily="34" charset="0"/>
                 <a:ea typeface="Courier New" pitchFamily="34" charset="-122"/>
@@ -7205,7 +7221,7 @@
             <a:r>
               <a:rPr lang="en-US" sz="1400" dirty="0">
                 <a:solidFill>
-                  <a:srgbClr val="C9D3F5"/>
+                  <a:srgbClr val="1F2429"/>
                 </a:solidFill>
                 <a:latin typeface="Courier New" pitchFamily="34" charset="0"/>
                 <a:ea typeface="Courier New" pitchFamily="34" charset="-122"/>
@@ -7225,7 +7241,7 @@
             <a:r>
               <a:rPr lang="en-US" sz="1400" dirty="0">
                 <a:solidFill>
-                  <a:srgbClr val="C9D3F5"/>
+                  <a:srgbClr val="1F2429"/>
                 </a:solidFill>
                 <a:latin typeface="Courier New" pitchFamily="34" charset="0"/>
                 <a:ea typeface="Courier New" pitchFamily="34" charset="-122"/>
@@ -7254,7 +7270,7 @@
             <a:r>
               <a:rPr lang="en-US" sz="1400" dirty="0">
                 <a:solidFill>
-                  <a:srgbClr val="C9D3F5"/>
+                  <a:srgbClr val="1F2429"/>
                 </a:solidFill>
                 <a:latin typeface="Courier New" pitchFamily="34" charset="0"/>
                 <a:ea typeface="Courier New" pitchFamily="34" charset="-122"/>
@@ -7274,7 +7290,7 @@
             <a:r>
               <a:rPr lang="en-US" sz="1400" dirty="0">
                 <a:solidFill>
-                  <a:srgbClr val="C9D3F5"/>
+                  <a:srgbClr val="1F2429"/>
                 </a:solidFill>
                 <a:latin typeface="Courier New" pitchFamily="34" charset="0"/>
                 <a:ea typeface="Courier New" pitchFamily="34" charset="-122"/>
@@ -7294,7 +7310,7 @@
             <a:r>
               <a:rPr lang="en-US" sz="1400" dirty="0">
                 <a:solidFill>
-                  <a:srgbClr val="C9D3F5"/>
+                  <a:srgbClr val="1F2429"/>
                 </a:solidFill>
                 <a:latin typeface="Courier New" pitchFamily="34" charset="0"/>
                 <a:ea typeface="Courier New" pitchFamily="34" charset="-122"/>
@@ -7476,9 +7492,13 @@
             </a:avLst>
           </a:prstGeom>
           <a:solidFill>
-            <a:srgbClr val="1E1E4C"/>
+            <a:srgbClr val="F7F8F9"/>
           </a:solidFill>
-          <a:ln/>
+          <a:ln w="9525">
+            <a:solidFill>
+              <a:srgbClr val="D0D5DD"/>
+            </a:solidFill>
+          </a:ln>
         </p:spPr>
         <p:txBody>
           <a:bodyPr/>
@@ -7515,7 +7535,7 @@
             <a:r>
               <a:rPr lang="en-US" sz="1400" dirty="0">
                 <a:solidFill>
-                  <a:srgbClr val="C9D3F5"/>
+                  <a:srgbClr val="1F2429"/>
                 </a:solidFill>
                 <a:latin typeface="Courier New" pitchFamily="34" charset="0"/>
                 <a:ea typeface="Courier New" pitchFamily="34" charset="-122"/>
@@ -7535,7 +7555,7 @@
             <a:r>
               <a:rPr lang="en-US" sz="1400" dirty="0">
                 <a:solidFill>
-                  <a:srgbClr val="C9D3F5"/>
+                  <a:srgbClr val="1F2429"/>
                 </a:solidFill>
                 <a:latin typeface="Courier New" pitchFamily="34" charset="0"/>
                 <a:ea typeface="Courier New" pitchFamily="34" charset="-122"/>
@@ -7555,7 +7575,7 @@
             <a:r>
               <a:rPr lang="en-US" sz="1400" dirty="0">
                 <a:solidFill>
-                  <a:srgbClr val="C9D3F5"/>
+                  <a:srgbClr val="1F2429"/>
                 </a:solidFill>
                 <a:latin typeface="Courier New" pitchFamily="34" charset="0"/>
                 <a:ea typeface="Courier New" pitchFamily="34" charset="-122"/>
@@ -7575,7 +7595,7 @@
             <a:r>
               <a:rPr lang="en-US" sz="1400" dirty="0">
                 <a:solidFill>
-                  <a:srgbClr val="C9D3F5"/>
+                  <a:srgbClr val="1F2429"/>
                 </a:solidFill>
                 <a:latin typeface="Courier New" pitchFamily="34" charset="0"/>
                 <a:ea typeface="Courier New" pitchFamily="34" charset="-122"/>
@@ -7595,7 +7615,7 @@
             <a:r>
               <a:rPr lang="en-US" sz="1400" dirty="0">
                 <a:solidFill>
-                  <a:srgbClr val="C9D3F5"/>
+                  <a:srgbClr val="1F2429"/>
                 </a:solidFill>
                 <a:latin typeface="Courier New" pitchFamily="34" charset="0"/>
                 <a:ea typeface="Courier New" pitchFamily="34" charset="-122"/>
@@ -7615,7 +7635,7 @@
             <a:r>
               <a:rPr lang="en-US" sz="1400" dirty="0">
                 <a:solidFill>
-                  <a:srgbClr val="C9D3F5"/>
+                  <a:srgbClr val="1F2429"/>
                 </a:solidFill>
                 <a:latin typeface="Courier New" pitchFamily="34" charset="0"/>
                 <a:ea typeface="Courier New" pitchFamily="34" charset="-122"/>
@@ -7635,7 +7655,7 @@
             <a:r>
               <a:rPr lang="en-US" sz="1400" dirty="0">
                 <a:solidFill>
-                  <a:srgbClr val="C9D3F5"/>
+                  <a:srgbClr val="1F2429"/>
                 </a:solidFill>
                 <a:latin typeface="Courier New" pitchFamily="34" charset="0"/>
                 <a:ea typeface="Courier New" pitchFamily="34" charset="-122"/>
@@ -7655,7 +7675,7 @@
             <a:r>
               <a:rPr lang="en-US" sz="1400" dirty="0">
                 <a:solidFill>
-                  <a:srgbClr val="C9D3F5"/>
+                  <a:srgbClr val="1F2429"/>
                 </a:solidFill>
                 <a:latin typeface="Courier New" pitchFamily="34" charset="0"/>
                 <a:ea typeface="Courier New" pitchFamily="34" charset="-122"/>
@@ -7675,7 +7695,7 @@
             <a:r>
               <a:rPr lang="en-US" sz="1400" dirty="0">
                 <a:solidFill>
-                  <a:srgbClr val="C9D3F5"/>
+                  <a:srgbClr val="1F2429"/>
                 </a:solidFill>
                 <a:latin typeface="Courier New" pitchFamily="34" charset="0"/>
                 <a:ea typeface="Courier New" pitchFamily="34" charset="-122"/>
@@ -8355,9 +8375,13 @@
             </a:avLst>
           </a:prstGeom>
           <a:solidFill>
-            <a:srgbClr val="1E1E4C"/>
+            <a:srgbClr val="F7F8F9"/>
           </a:solidFill>
-          <a:ln/>
+          <a:ln w="9525">
+            <a:solidFill>
+              <a:srgbClr val="D0D5DD"/>
+            </a:solidFill>
+          </a:ln>
         </p:spPr>
         <p:txBody>
           <a:bodyPr/>
@@ -8394,7 +8418,7 @@
             <a:r>
               <a:rPr lang="en-US" sz="1400" dirty="0">
                 <a:solidFill>
-                  <a:srgbClr val="C9D3F5"/>
+                  <a:srgbClr val="1F2429"/>
                 </a:solidFill>
                 <a:latin typeface="Courier New" pitchFamily="34" charset="0"/>
                 <a:ea typeface="Courier New" pitchFamily="34" charset="-122"/>
@@ -8414,7 +8438,7 @@
             <a:r>
               <a:rPr lang="en-US" sz="1400" dirty="0">
                 <a:solidFill>
-                  <a:srgbClr val="C9D3F5"/>
+                  <a:srgbClr val="1F2429"/>
                 </a:solidFill>
                 <a:latin typeface="Courier New" pitchFamily="34" charset="0"/>
                 <a:ea typeface="Courier New" pitchFamily="34" charset="-122"/>
@@ -8434,7 +8458,7 @@
             <a:r>
               <a:rPr lang="en-US" sz="1400" dirty="0">
                 <a:solidFill>
-                  <a:srgbClr val="C9D3F5"/>
+                  <a:srgbClr val="1F2429"/>
                 </a:solidFill>
                 <a:latin typeface="Courier New" pitchFamily="34" charset="0"/>
                 <a:ea typeface="Courier New" pitchFamily="34" charset="-122"/>
@@ -8454,7 +8478,7 @@
             <a:r>
               <a:rPr lang="en-US" sz="1400" dirty="0">
                 <a:solidFill>
-                  <a:srgbClr val="C9D3F5"/>
+                  <a:srgbClr val="1F2429"/>
                 </a:solidFill>
                 <a:latin typeface="Courier New" pitchFamily="34" charset="0"/>
                 <a:ea typeface="Courier New" pitchFamily="34" charset="-122"/>
@@ -8474,7 +8498,7 @@
             <a:r>
               <a:rPr lang="en-US" sz="1400" dirty="0">
                 <a:solidFill>
-                  <a:srgbClr val="C9D3F5"/>
+                  <a:srgbClr val="1F2429"/>
                 </a:solidFill>
                 <a:latin typeface="Courier New" pitchFamily="34" charset="0"/>
                 <a:ea typeface="Courier New" pitchFamily="34" charset="-122"/>
@@ -8494,7 +8518,7 @@
             <a:r>
               <a:rPr lang="en-US" sz="1400" dirty="0">
                 <a:solidFill>
-                  <a:srgbClr val="C9D3F5"/>
+                  <a:srgbClr val="1F2429"/>
                 </a:solidFill>
                 <a:latin typeface="Courier New" pitchFamily="34" charset="0"/>
                 <a:ea typeface="Courier New" pitchFamily="34" charset="-122"/>
@@ -8514,7 +8538,7 @@
             <a:r>
               <a:rPr lang="en-US" sz="1400" dirty="0">
                 <a:solidFill>
-                  <a:srgbClr val="C9D3F5"/>
+                  <a:srgbClr val="1F2429"/>
                 </a:solidFill>
                 <a:latin typeface="Courier New" pitchFamily="34" charset="0"/>
                 <a:ea typeface="Courier New" pitchFamily="34" charset="-122"/>
@@ -8534,7 +8558,7 @@
             <a:r>
               <a:rPr lang="en-US" sz="1400" dirty="0">
                 <a:solidFill>
-                  <a:srgbClr val="C9D3F5"/>
+                  <a:srgbClr val="1F2429"/>
                 </a:solidFill>
                 <a:latin typeface="Courier New" pitchFamily="34" charset="0"/>
                 <a:ea typeface="Courier New" pitchFamily="34" charset="-122"/>
@@ -9685,9 +9709,13 @@
             </a:avLst>
           </a:prstGeom>
           <a:solidFill>
-            <a:srgbClr val="1E1E4C"/>
+            <a:srgbClr val="F7F8F9"/>
           </a:solidFill>
-          <a:ln/>
+          <a:ln w="9525">
+            <a:solidFill>
+              <a:srgbClr val="D0D5DD"/>
+            </a:solidFill>
+          </a:ln>
         </p:spPr>
         <p:txBody>
           <a:bodyPr/>
@@ -9724,7 +9752,7 @@
             <a:r>
               <a:rPr lang="en-US" sz="1400" dirty="0">
                 <a:solidFill>
-                  <a:srgbClr val="C9D3F5"/>
+                  <a:srgbClr val="1F2429"/>
                 </a:solidFill>
                 <a:latin typeface="Courier New" pitchFamily="34" charset="0"/>
                 <a:ea typeface="Courier New" pitchFamily="34" charset="-122"/>
@@ -9744,7 +9772,7 @@
             <a:r>
               <a:rPr lang="en-US" sz="1400" dirty="0">
                 <a:solidFill>
-                  <a:srgbClr val="C9D3F5"/>
+                  <a:srgbClr val="1F2429"/>
                 </a:solidFill>
                 <a:latin typeface="Courier New" pitchFamily="34" charset="0"/>
                 <a:ea typeface="Courier New" pitchFamily="34" charset="-122"/>
@@ -9773,7 +9801,7 @@
             <a:r>
               <a:rPr lang="en-US" sz="1400" dirty="0">
                 <a:solidFill>
-                  <a:srgbClr val="C9D3F5"/>
+                  <a:srgbClr val="1F2429"/>
                 </a:solidFill>
                 <a:latin typeface="Courier New" pitchFamily="34" charset="0"/>
                 <a:ea typeface="Courier New" pitchFamily="34" charset="-122"/>
@@ -9793,7 +9821,7 @@
             <a:r>
               <a:rPr lang="en-US" sz="1400" dirty="0">
                 <a:solidFill>
-                  <a:srgbClr val="C9D3F5"/>
+                  <a:srgbClr val="1F2429"/>
                 </a:solidFill>
                 <a:latin typeface="Courier New" pitchFamily="34" charset="0"/>
                 <a:ea typeface="Courier New" pitchFamily="34" charset="-122"/>
@@ -10006,7 +10034,7 @@
         <p:spPr>
           <a:xfrm>
             <a:off x="640080" y="1965960"/>
-            <a:ext cx="10911535" cy="1554480"/>
+            <a:ext cx="10911535" cy="3657600"/>
           </a:xfrm>
           <a:prstGeom prst="roundRect">
             <a:avLst>
@@ -10037,7 +10065,7 @@
         <p:spPr>
           <a:xfrm>
             <a:off x="868680" y="2103120"/>
-            <a:ext cx="10454335" cy="274320"/>
+            <a:ext cx="10454335" cy="400000"/>
           </a:xfrm>
           <a:prstGeom prst="rect">
             <a:avLst/>
@@ -10053,7 +10081,7 @@
               <a:buNone/>
             </a:pPr>
             <a:r>
-              <a:rPr lang="en-US" sz="1000" b="1" spc="200" kern="0" dirty="0">
+              <a:rPr lang="en-US" sz="1800" b="1" spc="200" kern="0" dirty="0">
                 <a:solidFill>
                   <a:srgbClr val="33459E"/>
                 </a:solidFill>
@@ -10063,7 +10091,7 @@
               </a:rPr>
               <a:t>NOTE</a:t>
             </a:r>
-            <a:endParaRPr lang="en-US" sz="1000" dirty="0"/>
+            <a:endParaRPr lang="en-US" sz="1800" dirty="0"/>
           </a:p>
         </p:txBody>
       </p:sp>
@@ -10075,8 +10103,8 @@
         </p:nvSpPr>
         <p:spPr>
           <a:xfrm>
-            <a:off x="868680" y="2404872"/>
-            <a:ext cx="10454335" cy="960120"/>
+            <a:off x="868680" y="2795960"/>
+            <a:ext cx="10454335" cy="2500000"/>
           </a:xfrm>
           <a:prstGeom prst="rect">
             <a:avLst/>
@@ -10085,14 +10113,14 @@
           <a:ln/>
         </p:spPr>
         <p:txBody>
-          <a:bodyPr wrap="square" lIns="0" tIns="0" rIns="0" bIns="0" rtlCol="0" anchor="t"/>
-          <a:lstStyle/>
-          <a:p>
-            <a:pPr indent="0" marL="0">
-              <a:buNone/>
-            </a:pPr>
-            <a:r>
-              <a:rPr lang="en-US" sz="1250" dirty="0">
+          <a:bodyPr wrap="square" lIns="0" tIns="0" rIns="0" bIns="0" rtlCol="0" anchor="ctr"/>
+          <a:lstStyle/>
+          <a:p>
+            <a:pPr indent="0" marL="0">
+              <a:buNone/>
+            </a:pPr>
+            <a:r>
+              <a:rPr lang="en-US" sz="2800" dirty="0">
                 <a:solidFill>
                   <a:srgbClr val="26262F"/>
                 </a:solidFill>
@@ -10102,7 +10130,7 @@
               </a:rPr>
               <a:t>The TDZ turns a silent bug (accidentally using a variable before it has a real value) into a loud, immediate error, which makes mistakes far easier to catch.</a:t>
             </a:r>
-            <a:endParaRPr lang="en-US" sz="1250" dirty="0"/>
+            <a:endParaRPr lang="en-US" sz="2800" dirty="0"/>
           </a:p>
         </p:txBody>
       </p:sp>
@@ -10276,9 +10304,13 @@
             </a:avLst>
           </a:prstGeom>
           <a:solidFill>
-            <a:srgbClr val="1E1E4C"/>
+            <a:srgbClr val="F7F8F9"/>
           </a:solidFill>
-          <a:ln/>
+          <a:ln w="9525">
+            <a:solidFill>
+              <a:srgbClr val="D0D5DD"/>
+            </a:solidFill>
+          </a:ln>
         </p:spPr>
         <p:txBody>
           <a:bodyPr/>
@@ -10315,7 +10347,7 @@
             <a:r>
               <a:rPr lang="en-US" sz="1366" dirty="0">
                 <a:solidFill>
-                  <a:srgbClr val="C9D3F5"/>
+                  <a:srgbClr val="1F2429"/>
                 </a:solidFill>
                 <a:latin typeface="Courier New" pitchFamily="34" charset="0"/>
                 <a:ea typeface="Courier New" pitchFamily="34" charset="-122"/>
@@ -10335,7 +10367,7 @@
             <a:r>
               <a:rPr lang="en-US" sz="1366" dirty="0">
                 <a:solidFill>
-                  <a:srgbClr val="C9D3F5"/>
+                  <a:srgbClr val="1F2429"/>
                 </a:solidFill>
                 <a:latin typeface="Courier New" pitchFamily="34" charset="0"/>
                 <a:ea typeface="Courier New" pitchFamily="34" charset="-122"/>
@@ -10355,7 +10387,7 @@
             <a:r>
               <a:rPr lang="en-US" sz="1366" dirty="0">
                 <a:solidFill>
-                  <a:srgbClr val="C9D3F5"/>
+                  <a:srgbClr val="1F2429"/>
                 </a:solidFill>
                 <a:latin typeface="Courier New" pitchFamily="34" charset="0"/>
                 <a:ea typeface="Courier New" pitchFamily="34" charset="-122"/>
@@ -10375,7 +10407,7 @@
             <a:r>
               <a:rPr lang="en-US" sz="1366" dirty="0">
                 <a:solidFill>
-                  <a:srgbClr val="C9D3F5"/>
+                  <a:srgbClr val="1F2429"/>
                 </a:solidFill>
                 <a:latin typeface="Courier New" pitchFamily="34" charset="0"/>
                 <a:ea typeface="Courier New" pitchFamily="34" charset="-122"/>
@@ -10404,7 +10436,7 @@
             <a:r>
               <a:rPr lang="en-US" sz="1366" dirty="0">
                 <a:solidFill>
-                  <a:srgbClr val="C9D3F5"/>
+                  <a:srgbClr val="1F2429"/>
                 </a:solidFill>
                 <a:latin typeface="Courier New" pitchFamily="34" charset="0"/>
                 <a:ea typeface="Courier New" pitchFamily="34" charset="-122"/>
@@ -10424,7 +10456,7 @@
             <a:r>
               <a:rPr lang="en-US" sz="1366" dirty="0">
                 <a:solidFill>
-                  <a:srgbClr val="C9D3F5"/>
+                  <a:srgbClr val="1F2429"/>
                 </a:solidFill>
                 <a:latin typeface="Courier New" pitchFamily="34" charset="0"/>
                 <a:ea typeface="Courier New" pitchFamily="34" charset="-122"/>
@@ -10444,7 +10476,7 @@
             <a:r>
               <a:rPr lang="en-US" sz="1366" dirty="0">
                 <a:solidFill>
-                  <a:srgbClr val="C9D3F5"/>
+                  <a:srgbClr val="1F2429"/>
                 </a:solidFill>
                 <a:latin typeface="Courier New" pitchFamily="34" charset="0"/>
                 <a:ea typeface="Courier New" pitchFamily="34" charset="-122"/>
@@ -10464,7 +10496,7 @@
             <a:r>
               <a:rPr lang="en-US" sz="1366" dirty="0">
                 <a:solidFill>
-                  <a:srgbClr val="C9D3F5"/>
+                  <a:srgbClr val="1F2429"/>
                 </a:solidFill>
                 <a:latin typeface="Courier New" pitchFamily="34" charset="0"/>
                 <a:ea typeface="Courier New" pitchFamily="34" charset="-122"/>
@@ -10493,7 +10525,7 @@
             <a:r>
               <a:rPr lang="en-US" sz="1366" dirty="0">
                 <a:solidFill>
-                  <a:srgbClr val="C9D3F5"/>
+                  <a:srgbClr val="1F2429"/>
                 </a:solidFill>
                 <a:latin typeface="Courier New" pitchFamily="34" charset="0"/>
                 <a:ea typeface="Courier New" pitchFamily="34" charset="-122"/>
@@ -10513,7 +10545,7 @@
             <a:r>
               <a:rPr lang="en-US" sz="1366" dirty="0">
                 <a:solidFill>
-                  <a:srgbClr val="C9D3F5"/>
+                  <a:srgbClr val="1F2429"/>
                 </a:solidFill>
                 <a:latin typeface="Courier New" pitchFamily="34" charset="0"/>
                 <a:ea typeface="Courier New" pitchFamily="34" charset="-122"/>
@@ -10533,7 +10565,7 @@
             <a:r>
               <a:rPr lang="en-US" sz="1366" dirty="0">
                 <a:solidFill>
-                  <a:srgbClr val="C9D3F5"/>
+                  <a:srgbClr val="1F2429"/>
                 </a:solidFill>
                 <a:latin typeface="Courier New" pitchFamily="34" charset="0"/>
                 <a:ea typeface="Courier New" pitchFamily="34" charset="-122"/>
@@ -10707,7 +10739,7 @@
         <p:spPr>
           <a:xfrm>
             <a:off x="640080" y="1965960"/>
-            <a:ext cx="10911535" cy="1554480"/>
+            <a:ext cx="10911535" cy="3657600"/>
           </a:xfrm>
           <a:prstGeom prst="roundRect">
             <a:avLst>
@@ -10738,7 +10770,7 @@
         <p:spPr>
           <a:xfrm>
             <a:off x="868680" y="2103120"/>
-            <a:ext cx="10454335" cy="274320"/>
+            <a:ext cx="10454335" cy="400000"/>
           </a:xfrm>
           <a:prstGeom prst="rect">
             <a:avLst/>
@@ -10754,7 +10786,7 @@
               <a:buNone/>
             </a:pPr>
             <a:r>
-              <a:rPr lang="en-US" sz="1000" b="1" spc="200" kern="0" dirty="0">
+              <a:rPr lang="en-US" sz="1800" b="1" spc="200" kern="0" dirty="0">
                 <a:solidFill>
                   <a:srgbClr val="1F7A46"/>
                 </a:solidFill>
@@ -10764,7 +10796,7 @@
               </a:rPr>
               <a:t>TIP</a:t>
             </a:r>
-            <a:endParaRPr lang="en-US" sz="1000" dirty="0"/>
+            <a:endParaRPr lang="en-US" sz="1800" dirty="0"/>
           </a:p>
         </p:txBody>
       </p:sp>
@@ -10776,8 +10808,8 @@
         </p:nvSpPr>
         <p:spPr>
           <a:xfrm>
-            <a:off x="868680" y="2404872"/>
-            <a:ext cx="10454335" cy="960120"/>
+            <a:off x="868680" y="2795960"/>
+            <a:ext cx="10454335" cy="2500000"/>
           </a:xfrm>
           <a:prstGeom prst="rect">
             <a:avLst/>
@@ -10786,14 +10818,14 @@
           <a:ln/>
         </p:spPr>
         <p:txBody>
-          <a:bodyPr wrap="square" lIns="0" tIns="0" rIns="0" bIns="0" rtlCol="0" anchor="t"/>
-          <a:lstStyle/>
-          <a:p>
-            <a:pPr indent="0" marL="0">
-              <a:buNone/>
-            </a:pPr>
-            <a:r>
-              <a:rPr lang="en-US" sz="1250" dirty="0">
+          <a:bodyPr wrap="square" lIns="0" tIns="0" rIns="0" bIns="0" rtlCol="0" anchor="ctr"/>
+          <a:lstStyle/>
+          <a:p>
+            <a:pPr indent="0" marL="0">
+              <a:buNone/>
+            </a:pPr>
+            <a:r>
+              <a:rPr lang="en-US" sz="2800" dirty="0">
                 <a:solidFill>
                   <a:srgbClr val="26262F"/>
                 </a:solidFill>
@@ -10803,7 +10835,7 @@
               </a:rPr>
               <a:t>Use function declarations for top-level, named functions -- they are easy to read and are hoisted. Use arrow functions for short, inline callbacks.</a:t>
             </a:r>
-            <a:endParaRPr lang="en-US" sz="1250" dirty="0"/>
+            <a:endParaRPr lang="en-US" sz="2800" dirty="0"/>
           </a:p>
         </p:txBody>
       </p:sp>
@@ -10977,9 +11009,13 @@
             </a:avLst>
           </a:prstGeom>
           <a:solidFill>
-            <a:srgbClr val="1E1E4C"/>
+            <a:srgbClr val="F7F8F9"/>
           </a:solidFill>
-          <a:ln/>
+          <a:ln w="9525">
+            <a:solidFill>
+              <a:srgbClr val="D0D5DD"/>
+            </a:solidFill>
+          </a:ln>
         </p:spPr>
         <p:txBody>
           <a:bodyPr/>
@@ -11016,7 +11052,7 @@
             <a:r>
               <a:rPr lang="en-US" sz="1400" dirty="0">
                 <a:solidFill>
-                  <a:srgbClr val="C9D3F5"/>
+                  <a:srgbClr val="1F2429"/>
                 </a:solidFill>
                 <a:latin typeface="Courier New" pitchFamily="34" charset="0"/>
                 <a:ea typeface="Courier New" pitchFamily="34" charset="-122"/>
@@ -11036,7 +11072,7 @@
             <a:r>
               <a:rPr lang="en-US" sz="1400" dirty="0">
                 <a:solidFill>
-                  <a:srgbClr val="C9D3F5"/>
+                  <a:srgbClr val="1F2429"/>
                 </a:solidFill>
                 <a:latin typeface="Courier New" pitchFamily="34" charset="0"/>
                 <a:ea typeface="Courier New" pitchFamily="34" charset="-122"/>
@@ -11056,7 +11092,7 @@
             <a:r>
               <a:rPr lang="en-US" sz="1400" dirty="0">
                 <a:solidFill>
-                  <a:srgbClr val="C9D3F5"/>
+                  <a:srgbClr val="1F2429"/>
                 </a:solidFill>
                 <a:latin typeface="Courier New" pitchFamily="34" charset="0"/>
                 <a:ea typeface="Courier New" pitchFamily="34" charset="-122"/>
@@ -11076,7 +11112,7 @@
             <a:r>
               <a:rPr lang="en-US" sz="1400" dirty="0">
                 <a:solidFill>
-                  <a:srgbClr val="C9D3F5"/>
+                  <a:srgbClr val="1F2429"/>
                 </a:solidFill>
                 <a:latin typeface="Courier New" pitchFamily="34" charset="0"/>
                 <a:ea typeface="Courier New" pitchFamily="34" charset="-122"/>
@@ -11096,7 +11132,7 @@
             <a:r>
               <a:rPr lang="en-US" sz="1400" dirty="0">
                 <a:solidFill>
-                  <a:srgbClr val="C9D3F5"/>
+                  <a:srgbClr val="1F2429"/>
                 </a:solidFill>
                 <a:latin typeface="Courier New" pitchFamily="34" charset="0"/>
                 <a:ea typeface="Courier New" pitchFamily="34" charset="-122"/>
@@ -11125,7 +11161,7 @@
             <a:r>
               <a:rPr lang="en-US" sz="1400" dirty="0">
                 <a:solidFill>
-                  <a:srgbClr val="C9D3F5"/>
+                  <a:srgbClr val="1F2429"/>
                 </a:solidFill>
                 <a:latin typeface="Courier New" pitchFamily="34" charset="0"/>
                 <a:ea typeface="Courier New" pitchFamily="34" charset="-122"/>
@@ -11145,7 +11181,7 @@
             <a:r>
               <a:rPr lang="en-US" sz="1400" dirty="0">
                 <a:solidFill>
-                  <a:srgbClr val="C9D3F5"/>
+                  <a:srgbClr val="1F2429"/>
                 </a:solidFill>
                 <a:latin typeface="Courier New" pitchFamily="34" charset="0"/>
                 <a:ea typeface="Courier New" pitchFamily="34" charset="-122"/>
@@ -11165,7 +11201,7 @@
             <a:r>
               <a:rPr lang="en-US" sz="1400" dirty="0">
                 <a:solidFill>
-                  <a:srgbClr val="C9D3F5"/>
+                  <a:srgbClr val="1F2429"/>
                 </a:solidFill>
                 <a:latin typeface="Courier New" pitchFamily="34" charset="0"/>
                 <a:ea typeface="Courier New" pitchFamily="34" charset="-122"/>
@@ -11185,7 +11221,7 @@
             <a:r>
               <a:rPr lang="en-US" sz="1400" dirty="0">
                 <a:solidFill>
-                  <a:srgbClr val="C9D3F5"/>
+                  <a:srgbClr val="1F2429"/>
                 </a:solidFill>
                 <a:latin typeface="Courier New" pitchFamily="34" charset="0"/>
                 <a:ea typeface="Courier New" pitchFamily="34" charset="-122"/>
@@ -11367,9 +11403,13 @@
             </a:avLst>
           </a:prstGeom>
           <a:solidFill>
-            <a:srgbClr val="1E1E4C"/>
+            <a:srgbClr val="F7F8F9"/>
           </a:solidFill>
-          <a:ln/>
+          <a:ln w="9525">
+            <a:solidFill>
+              <a:srgbClr val="D0D5DD"/>
+            </a:solidFill>
+          </a:ln>
         </p:spPr>
         <p:txBody>
           <a:bodyPr/>
@@ -11406,7 +11446,7 @@
             <a:r>
               <a:rPr lang="en-US" sz="1400" dirty="0">
                 <a:solidFill>
-                  <a:srgbClr val="C9D3F5"/>
+                  <a:srgbClr val="1F2429"/>
                 </a:solidFill>
                 <a:latin typeface="Courier New" pitchFamily="34" charset="0"/>
                 <a:ea typeface="Courier New" pitchFamily="34" charset="-122"/>
@@ -11426,7 +11466,7 @@
             <a:r>
               <a:rPr lang="en-US" sz="1400" dirty="0">
                 <a:solidFill>
-                  <a:srgbClr val="C9D3F5"/>
+                  <a:srgbClr val="1F2429"/>
                 </a:solidFill>
                 <a:latin typeface="Courier New" pitchFamily="34" charset="0"/>
                 <a:ea typeface="Courier New" pitchFamily="34" charset="-122"/>
@@ -11455,7 +11495,7 @@
             <a:r>
               <a:rPr lang="en-US" sz="1400" dirty="0">
                 <a:solidFill>
-                  <a:srgbClr val="C9D3F5"/>
+                  <a:srgbClr val="1F2429"/>
                 </a:solidFill>
                 <a:latin typeface="Courier New" pitchFamily="34" charset="0"/>
                 <a:ea typeface="Courier New" pitchFamily="34" charset="-122"/>
@@ -11475,7 +11515,7 @@
             <a:r>
               <a:rPr lang="en-US" sz="1400" dirty="0">
                 <a:solidFill>
-                  <a:srgbClr val="C9D3F5"/>
+                  <a:srgbClr val="1F2429"/>
                 </a:solidFill>
                 <a:latin typeface="Courier New" pitchFamily="34" charset="0"/>
                 <a:ea typeface="Courier New" pitchFamily="34" charset="-122"/>
@@ -11495,7 +11535,7 @@
             <a:r>
               <a:rPr lang="en-US" sz="1400" dirty="0">
                 <a:solidFill>
-                  <a:srgbClr val="C9D3F5"/>
+                  <a:srgbClr val="1F2429"/>
                 </a:solidFill>
                 <a:latin typeface="Courier New" pitchFamily="34" charset="0"/>
                 <a:ea typeface="Courier New" pitchFamily="34" charset="-122"/>
@@ -11524,7 +11564,7 @@
             <a:r>
               <a:rPr lang="en-US" sz="1400" dirty="0">
                 <a:solidFill>
-                  <a:srgbClr val="C9D3F5"/>
+                  <a:srgbClr val="1F2429"/>
                 </a:solidFill>
                 <a:latin typeface="Courier New" pitchFamily="34" charset="0"/>
                 <a:ea typeface="Courier New" pitchFamily="34" charset="-122"/>
@@ -11544,7 +11584,7 @@
             <a:r>
               <a:rPr lang="en-US" sz="1400" dirty="0">
                 <a:solidFill>
-                  <a:srgbClr val="C9D3F5"/>
+                  <a:srgbClr val="1F2429"/>
                 </a:solidFill>
                 <a:latin typeface="Courier New" pitchFamily="34" charset="0"/>
                 <a:ea typeface="Courier New" pitchFamily="34" charset="-122"/>
@@ -11718,7 +11758,7 @@
         <p:spPr>
           <a:xfrm>
             <a:off x="640080" y="1965960"/>
-            <a:ext cx="10911535" cy="1554480"/>
+            <a:ext cx="10911535" cy="3657600"/>
           </a:xfrm>
           <a:prstGeom prst="roundRect">
             <a:avLst>
@@ -11749,7 +11789,7 @@
         <p:spPr>
           <a:xfrm>
             <a:off x="868680" y="2103120"/>
-            <a:ext cx="10454335" cy="274320"/>
+            <a:ext cx="10454335" cy="400000"/>
           </a:xfrm>
           <a:prstGeom prst="rect">
             <a:avLst/>
@@ -11765,7 +11805,7 @@
               <a:buNone/>
             </a:pPr>
             <a:r>
-              <a:rPr lang="en-US" sz="1000" b="1" spc="200" kern="0" dirty="0">
+              <a:rPr lang="en-US" sz="1800" b="1" spc="200" kern="0" dirty="0">
                 <a:solidFill>
                   <a:srgbClr val="33459E"/>
                 </a:solidFill>
@@ -11775,7 +11815,7 @@
               </a:rPr>
               <a:t>NOTE</a:t>
             </a:r>
-            <a:endParaRPr lang="en-US" sz="1000" dirty="0"/>
+            <a:endParaRPr lang="en-US" sz="1800" dirty="0"/>
           </a:p>
         </p:txBody>
       </p:sp>
@@ -11787,8 +11827,8 @@
         </p:nvSpPr>
         <p:spPr>
           <a:xfrm>
-            <a:off x="868680" y="2404872"/>
-            <a:ext cx="10454335" cy="960120"/>
+            <a:off x="868680" y="2795960"/>
+            <a:ext cx="10454335" cy="2500000"/>
           </a:xfrm>
           <a:prstGeom prst="rect">
             <a:avLst/>
@@ -11797,14 +11837,14 @@
           <a:ln/>
         </p:spPr>
         <p:txBody>
-          <a:bodyPr wrap="square" lIns="0" tIns="0" rIns="0" bIns="0" rtlCol="0" anchor="t"/>
-          <a:lstStyle/>
-          <a:p>
-            <a:pPr indent="0" marL="0">
-              <a:buNone/>
-            </a:pPr>
-            <a:r>
-              <a:rPr lang="en-US" sz="1250" dirty="0">
+          <a:bodyPr wrap="square" lIns="0" tIns="0" rIns="0" bIns="0" rtlCol="0" anchor="ctr"/>
+          <a:lstStyle/>
+          <a:p>
+            <a:pPr indent="0" marL="0">
+              <a:buNone/>
+            </a:pPr>
+            <a:r>
+              <a:rPr lang="en-US" sz="2800" dirty="0">
                 <a:solidFill>
                   <a:srgbClr val="26262F"/>
                 </a:solidFill>
@@ -11814,7 +11854,7 @@
               </a:rPr>
               <a:t>Rest gathers many values into one array (used in a function's parameter list). Spread expands one array or object into many values (used when calling a function or building a new array/object).</a:t>
             </a:r>
-            <a:endParaRPr lang="en-US" sz="1250" dirty="0"/>
+            <a:endParaRPr lang="en-US" sz="2800" dirty="0"/>
           </a:p>
         </p:txBody>
       </p:sp>
@@ -11988,9 +12028,13 @@
             </a:avLst>
           </a:prstGeom>
           <a:solidFill>
-            <a:srgbClr val="1E1E4C"/>
+            <a:srgbClr val="F7F8F9"/>
           </a:solidFill>
-          <a:ln/>
+          <a:ln w="9525">
+            <a:solidFill>
+              <a:srgbClr val="D0D5DD"/>
+            </a:solidFill>
+          </a:ln>
         </p:spPr>
         <p:txBody>
           <a:bodyPr/>
@@ -12027,7 +12071,7 @@
             <a:r>
               <a:rPr lang="en-US" sz="1400" dirty="0">
                 <a:solidFill>
-                  <a:srgbClr val="C9D3F5"/>
+                  <a:srgbClr val="1F2429"/>
                 </a:solidFill>
                 <a:latin typeface="Courier New" pitchFamily="34" charset="0"/>
                 <a:ea typeface="Courier New" pitchFamily="34" charset="-122"/>
@@ -12047,7 +12091,7 @@
             <a:r>
               <a:rPr lang="en-US" sz="1400" dirty="0">
                 <a:solidFill>
-                  <a:srgbClr val="C9D3F5"/>
+                  <a:srgbClr val="1F2429"/>
                 </a:solidFill>
                 <a:latin typeface="Courier New" pitchFamily="34" charset="0"/>
                 <a:ea typeface="Courier New" pitchFamily="34" charset="-122"/>
@@ -12067,7 +12111,7 @@
             <a:r>
               <a:rPr lang="en-US" sz="1400" dirty="0">
                 <a:solidFill>
-                  <a:srgbClr val="C9D3F5"/>
+                  <a:srgbClr val="1F2429"/>
                 </a:solidFill>
                 <a:latin typeface="Courier New" pitchFamily="34" charset="0"/>
                 <a:ea typeface="Courier New" pitchFamily="34" charset="-122"/>
@@ -12096,7 +12140,7 @@
             <a:r>
               <a:rPr lang="en-US" sz="1400" dirty="0">
                 <a:solidFill>
-                  <a:srgbClr val="C9D3F5"/>
+                  <a:srgbClr val="1F2429"/>
                 </a:solidFill>
                 <a:latin typeface="Courier New" pitchFamily="34" charset="0"/>
                 <a:ea typeface="Courier New" pitchFamily="34" charset="-122"/>
@@ -12116,7 +12160,7 @@
             <a:r>
               <a:rPr lang="en-US" sz="1400" dirty="0">
                 <a:solidFill>
-                  <a:srgbClr val="C9D3F5"/>
+                  <a:srgbClr val="1F2429"/>
                 </a:solidFill>
                 <a:latin typeface="Courier New" pitchFamily="34" charset="0"/>
                 <a:ea typeface="Courier New" pitchFamily="34" charset="-122"/>
@@ -12136,7 +12180,7 @@
             <a:r>
               <a:rPr lang="en-US" sz="1400" dirty="0">
                 <a:solidFill>
-                  <a:srgbClr val="C9D3F5"/>
+                  <a:srgbClr val="1F2429"/>
                 </a:solidFill>
                 <a:latin typeface="Courier New" pitchFamily="34" charset="0"/>
                 <a:ea typeface="Courier New" pitchFamily="34" charset="-122"/>
@@ -12165,7 +12209,7 @@
             <a:r>
               <a:rPr lang="en-US" sz="1400" dirty="0">
                 <a:solidFill>
-                  <a:srgbClr val="C9D3F5"/>
+                  <a:srgbClr val="1F2429"/>
                 </a:solidFill>
                 <a:latin typeface="Courier New" pitchFamily="34" charset="0"/>
                 <a:ea typeface="Courier New" pitchFamily="34" charset="-122"/>
@@ -12185,7 +12229,7 @@
             <a:r>
               <a:rPr lang="en-US" sz="1400" dirty="0">
                 <a:solidFill>
-                  <a:srgbClr val="C9D3F5"/>
+                  <a:srgbClr val="1F2429"/>
                 </a:solidFill>
                 <a:latin typeface="Courier New" pitchFamily="34" charset="0"/>
                 <a:ea typeface="Courier New" pitchFamily="34" charset="-122"/>
@@ -12367,9 +12411,13 @@
             </a:avLst>
           </a:prstGeom>
           <a:solidFill>
-            <a:srgbClr val="1E1E4C"/>
+            <a:srgbClr val="F7F8F9"/>
           </a:solidFill>
-          <a:ln/>
+          <a:ln w="9525">
+            <a:solidFill>
+              <a:srgbClr val="D0D5DD"/>
+            </a:solidFill>
+          </a:ln>
         </p:spPr>
         <p:txBody>
           <a:bodyPr/>
@@ -12406,7 +12454,7 @@
             <a:r>
               <a:rPr lang="en-US" sz="1400" dirty="0">
                 <a:solidFill>
-                  <a:srgbClr val="C9D3F5"/>
+                  <a:srgbClr val="1F2429"/>
                 </a:solidFill>
                 <a:latin typeface="Courier New" pitchFamily="34" charset="0"/>
                 <a:ea typeface="Courier New" pitchFamily="34" charset="-122"/>
@@ -12426,7 +12474,7 @@
             <a:r>
               <a:rPr lang="en-US" sz="1400" dirty="0">
                 <a:solidFill>
-                  <a:srgbClr val="C9D3F5"/>
+                  <a:srgbClr val="1F2429"/>
                 </a:solidFill>
                 <a:latin typeface="Courier New" pitchFamily="34" charset="0"/>
                 <a:ea typeface="Courier New" pitchFamily="34" charset="-122"/>
@@ -12446,7 +12494,7 @@
             <a:r>
               <a:rPr lang="en-US" sz="1400" dirty="0">
                 <a:solidFill>
-                  <a:srgbClr val="C9D3F5"/>
+                  <a:srgbClr val="1F2429"/>
                 </a:solidFill>
                 <a:latin typeface="Courier New" pitchFamily="34" charset="0"/>
                 <a:ea typeface="Courier New" pitchFamily="34" charset="-122"/>
@@ -12466,7 +12514,7 @@
             <a:r>
               <a:rPr lang="en-US" sz="1400" dirty="0">
                 <a:solidFill>
-                  <a:srgbClr val="C9D3F5"/>
+                  <a:srgbClr val="1F2429"/>
                 </a:solidFill>
                 <a:latin typeface="Courier New" pitchFamily="34" charset="0"/>
                 <a:ea typeface="Courier New" pitchFamily="34" charset="-122"/>
@@ -12486,7 +12534,7 @@
             <a:r>
               <a:rPr lang="en-US" sz="1400" dirty="0">
                 <a:solidFill>
-                  <a:srgbClr val="C9D3F5"/>
+                  <a:srgbClr val="1F2429"/>
                 </a:solidFill>
                 <a:latin typeface="Courier New" pitchFamily="34" charset="0"/>
                 <a:ea typeface="Courier New" pitchFamily="34" charset="-122"/>
@@ -12506,7 +12554,7 @@
             <a:r>
               <a:rPr lang="en-US" sz="1400" dirty="0">
                 <a:solidFill>
-                  <a:srgbClr val="C9D3F5"/>
+                  <a:srgbClr val="1F2429"/>
                 </a:solidFill>
                 <a:latin typeface="Courier New" pitchFamily="34" charset="0"/>
                 <a:ea typeface="Courier New" pitchFamily="34" charset="-122"/>
@@ -12526,7 +12574,7 @@
             <a:r>
               <a:rPr lang="en-US" sz="1400" dirty="0">
                 <a:solidFill>
-                  <a:srgbClr val="C9D3F5"/>
+                  <a:srgbClr val="1F2429"/>
                 </a:solidFill>
                 <a:latin typeface="Courier New" pitchFamily="34" charset="0"/>
                 <a:ea typeface="Courier New" pitchFamily="34" charset="-122"/>
@@ -12555,7 +12603,7 @@
             <a:r>
               <a:rPr lang="en-US" sz="1400" dirty="0">
                 <a:solidFill>
-                  <a:srgbClr val="C9D3F5"/>
+                  <a:srgbClr val="1F2429"/>
                 </a:solidFill>
                 <a:latin typeface="Courier New" pitchFamily="34" charset="0"/>
                 <a:ea typeface="Courier New" pitchFamily="34" charset="-122"/>
@@ -12575,7 +12623,7 @@
             <a:r>
               <a:rPr lang="en-US" sz="1400" dirty="0">
                 <a:solidFill>
-                  <a:srgbClr val="C9D3F5"/>
+                  <a:srgbClr val="1F2429"/>
                 </a:solidFill>
                 <a:latin typeface="Courier New" pitchFamily="34" charset="0"/>
                 <a:ea typeface="Courier New" pitchFamily="34" charset="-122"/>
@@ -12757,9 +12805,13 @@
             </a:avLst>
           </a:prstGeom>
           <a:solidFill>
-            <a:srgbClr val="1E1E4C"/>
+            <a:srgbClr val="F7F8F9"/>
           </a:solidFill>
-          <a:ln/>
+          <a:ln w="9525">
+            <a:solidFill>
+              <a:srgbClr val="D0D5DD"/>
+            </a:solidFill>
+          </a:ln>
         </p:spPr>
         <p:txBody>
           <a:bodyPr/>
@@ -12796,7 +12848,7 @@
             <a:r>
               <a:rPr lang="en-US" sz="1400" dirty="0">
                 <a:solidFill>
-                  <a:srgbClr val="C9D3F5"/>
+                  <a:srgbClr val="1F2429"/>
                 </a:solidFill>
                 <a:latin typeface="Courier New" pitchFamily="34" charset="0"/>
                 <a:ea typeface="Courier New" pitchFamily="34" charset="-122"/>
@@ -12816,7 +12868,7 @@
             <a:r>
               <a:rPr lang="en-US" sz="1400" dirty="0">
                 <a:solidFill>
-                  <a:srgbClr val="C9D3F5"/>
+                  <a:srgbClr val="1F2429"/>
                 </a:solidFill>
                 <a:latin typeface="Courier New" pitchFamily="34" charset="0"/>
                 <a:ea typeface="Courier New" pitchFamily="34" charset="-122"/>
@@ -12836,7 +12888,7 @@
             <a:r>
               <a:rPr lang="en-US" sz="1400" dirty="0">
                 <a:solidFill>
-                  <a:srgbClr val="C9D3F5"/>
+                  <a:srgbClr val="1F2429"/>
                 </a:solidFill>
                 <a:latin typeface="Courier New" pitchFamily="34" charset="0"/>
                 <a:ea typeface="Courier New" pitchFamily="34" charset="-122"/>
@@ -12856,7 +12908,7 @@
             <a:r>
               <a:rPr lang="en-US" sz="1400" dirty="0">
                 <a:solidFill>
-                  <a:srgbClr val="C9D3F5"/>
+                  <a:srgbClr val="1F2429"/>
                 </a:solidFill>
                 <a:latin typeface="Courier New" pitchFamily="34" charset="0"/>
                 <a:ea typeface="Courier New" pitchFamily="34" charset="-122"/>
@@ -12876,7 +12928,7 @@
             <a:r>
               <a:rPr lang="en-US" sz="1400" dirty="0">
                 <a:solidFill>
-                  <a:srgbClr val="C9D3F5"/>
+                  <a:srgbClr val="1F2429"/>
                 </a:solidFill>
                 <a:latin typeface="Courier New" pitchFamily="34" charset="0"/>
                 <a:ea typeface="Courier New" pitchFamily="34" charset="-122"/>
@@ -12896,7 +12948,7 @@
             <a:r>
               <a:rPr lang="en-US" sz="1400" dirty="0">
                 <a:solidFill>
-                  <a:srgbClr val="C9D3F5"/>
+                  <a:srgbClr val="1F2429"/>
                 </a:solidFill>
                 <a:latin typeface="Courier New" pitchFamily="34" charset="0"/>
                 <a:ea typeface="Courier New" pitchFamily="34" charset="-122"/>
@@ -12916,7 +12968,7 @@
             <a:r>
               <a:rPr lang="en-US" sz="1400" dirty="0">
                 <a:solidFill>
-                  <a:srgbClr val="C9D3F5"/>
+                  <a:srgbClr val="1F2429"/>
                 </a:solidFill>
                 <a:latin typeface="Courier New" pitchFamily="34" charset="0"/>
                 <a:ea typeface="Courier New" pitchFamily="34" charset="-122"/>
@@ -14176,7 +14228,7 @@
         <p:spPr>
           <a:xfrm>
             <a:off x="640080" y="1965960"/>
-            <a:ext cx="10911535" cy="1554480"/>
+            <a:ext cx="10911535" cy="3657600"/>
           </a:xfrm>
           <a:prstGeom prst="roundRect">
             <a:avLst>
@@ -14207,7 +14259,7 @@
         <p:spPr>
           <a:xfrm>
             <a:off x="868680" y="2103120"/>
-            <a:ext cx="10454335" cy="274320"/>
+            <a:ext cx="10454335" cy="400000"/>
           </a:xfrm>
           <a:prstGeom prst="rect">
             <a:avLst/>
@@ -14223,7 +14275,7 @@
               <a:buNone/>
             </a:pPr>
             <a:r>
-              <a:rPr lang="en-US" sz="1000" b="1" spc="200" kern="0" dirty="0">
+              <a:rPr lang="en-US" sz="1800" b="1" spc="200" kern="0" dirty="0">
                 <a:solidFill>
                   <a:srgbClr val="8A3A12"/>
                 </a:solidFill>
@@ -14233,7 +14285,7 @@
               </a:rPr>
               <a:t>WARNING</a:t>
             </a:r>
-            <a:endParaRPr lang="en-US" sz="1000" dirty="0"/>
+            <a:endParaRPr lang="en-US" sz="1800" dirty="0"/>
           </a:p>
         </p:txBody>
       </p:sp>
@@ -14245,8 +14297,8 @@
         </p:nvSpPr>
         <p:spPr>
           <a:xfrm>
-            <a:off x="868680" y="2404872"/>
-            <a:ext cx="10454335" cy="960120"/>
+            <a:off x="868680" y="2795960"/>
+            <a:ext cx="10454335" cy="2500000"/>
           </a:xfrm>
           <a:prstGeom prst="rect">
             <a:avLst/>
@@ -14255,14 +14307,14 @@
           <a:ln/>
         </p:spPr>
         <p:txBody>
-          <a:bodyPr wrap="square" lIns="0" tIns="0" rIns="0" bIns="0" rtlCol="0" anchor="t"/>
-          <a:lstStyle/>
-          <a:p>
-            <a:pPr indent="0" marL="0">
-              <a:buNone/>
-            </a:pPr>
-            <a:r>
-              <a:rPr lang="en-US" sz="1250" dirty="0">
+          <a:bodyPr wrap="square" lIns="0" tIns="0" rIns="0" bIns="0" rtlCol="0" anchor="ctr"/>
+          <a:lstStyle/>
+          <a:p>
+            <a:pPr indent="0" marL="0">
+              <a:buNone/>
+            </a:pPr>
+            <a:r>
+              <a:rPr lang="en-US" sz="2800" dirty="0">
                 <a:solidFill>
                   <a:srgbClr val="26262F"/>
                 </a:solidFill>
@@ -14272,7 +14324,7 @@
               </a:rPr>
               <a:t>Arrow functions do not have their own this. Instead they use this from the surrounding ("lexical") scope where they were defined -- ideal for callbacks inside methods.</a:t>
             </a:r>
-            <a:endParaRPr lang="en-US" sz="1250" dirty="0"/>
+            <a:endParaRPr lang="en-US" sz="2800" dirty="0"/>
           </a:p>
         </p:txBody>
       </p:sp>
@@ -14446,9 +14498,13 @@
             </a:avLst>
           </a:prstGeom>
           <a:solidFill>
-            <a:srgbClr val="1E1E4C"/>
+            <a:srgbClr val="F7F8F9"/>
           </a:solidFill>
-          <a:ln/>
+          <a:ln w="9525">
+            <a:solidFill>
+              <a:srgbClr val="D0D5DD"/>
+            </a:solidFill>
+          </a:ln>
         </p:spPr>
         <p:txBody>
           <a:bodyPr/>
@@ -14485,7 +14541,7 @@
             <a:r>
               <a:rPr lang="en-US" sz="1400" dirty="0">
                 <a:solidFill>
-                  <a:srgbClr val="C9D3F5"/>
+                  <a:srgbClr val="1F2429"/>
                 </a:solidFill>
                 <a:latin typeface="Courier New" pitchFamily="34" charset="0"/>
                 <a:ea typeface="Courier New" pitchFamily="34" charset="-122"/>
@@ -14505,7 +14561,7 @@
             <a:r>
               <a:rPr lang="en-US" sz="1400" dirty="0">
                 <a:solidFill>
-                  <a:srgbClr val="C9D3F5"/>
+                  <a:srgbClr val="1F2429"/>
                 </a:solidFill>
                 <a:latin typeface="Courier New" pitchFamily="34" charset="0"/>
                 <a:ea typeface="Courier New" pitchFamily="34" charset="-122"/>
@@ -14525,7 +14581,7 @@
             <a:r>
               <a:rPr lang="en-US" sz="1400" dirty="0">
                 <a:solidFill>
-                  <a:srgbClr val="C9D3F5"/>
+                  <a:srgbClr val="1F2429"/>
                 </a:solidFill>
                 <a:latin typeface="Courier New" pitchFamily="34" charset="0"/>
                 <a:ea typeface="Courier New" pitchFamily="34" charset="-122"/>
@@ -14545,7 +14601,7 @@
             <a:r>
               <a:rPr lang="en-US" sz="1400" dirty="0">
                 <a:solidFill>
-                  <a:srgbClr val="C9D3F5"/>
+                  <a:srgbClr val="1F2429"/>
                 </a:solidFill>
                 <a:latin typeface="Courier New" pitchFamily="34" charset="0"/>
                 <a:ea typeface="Courier New" pitchFamily="34" charset="-122"/>
@@ -14565,7 +14621,7 @@
             <a:r>
               <a:rPr lang="en-US" sz="1400" dirty="0">
                 <a:solidFill>
-                  <a:srgbClr val="C9D3F5"/>
+                  <a:srgbClr val="1F2429"/>
                 </a:solidFill>
                 <a:latin typeface="Courier New" pitchFamily="34" charset="0"/>
                 <a:ea typeface="Courier New" pitchFamily="34" charset="-122"/>
@@ -14585,7 +14641,7 @@
             <a:r>
               <a:rPr lang="en-US" sz="1400" dirty="0">
                 <a:solidFill>
-                  <a:srgbClr val="C9D3F5"/>
+                  <a:srgbClr val="1F2429"/>
                 </a:solidFill>
                 <a:latin typeface="Courier New" pitchFamily="34" charset="0"/>
                 <a:ea typeface="Courier New" pitchFamily="34" charset="-122"/>
@@ -14605,7 +14661,7 @@
             <a:r>
               <a:rPr lang="en-US" sz="1400" dirty="0">
                 <a:solidFill>
-                  <a:srgbClr val="C9D3F5"/>
+                  <a:srgbClr val="1F2429"/>
                 </a:solidFill>
                 <a:latin typeface="Courier New" pitchFamily="34" charset="0"/>
                 <a:ea typeface="Courier New" pitchFamily="34" charset="-122"/>
@@ -14625,7 +14681,7 @@
             <a:r>
               <a:rPr lang="en-US" sz="1400" dirty="0">
                 <a:solidFill>
-                  <a:srgbClr val="C9D3F5"/>
+                  <a:srgbClr val="1F2429"/>
                 </a:solidFill>
                 <a:latin typeface="Courier New" pitchFamily="34" charset="0"/>
                 <a:ea typeface="Courier New" pitchFamily="34" charset="-122"/>
@@ -14645,7 +14701,7 @@
             <a:r>
               <a:rPr lang="en-US" sz="1400" dirty="0">
                 <a:solidFill>
-                  <a:srgbClr val="C9D3F5"/>
+                  <a:srgbClr val="1F2429"/>
                 </a:solidFill>
                 <a:latin typeface="Courier New" pitchFamily="34" charset="0"/>
                 <a:ea typeface="Courier New" pitchFamily="34" charset="-122"/>
@@ -14866,9 +14922,13 @@
             </a:avLst>
           </a:prstGeom>
           <a:solidFill>
-            <a:srgbClr val="1E1E4C"/>
+            <a:srgbClr val="F7F8F9"/>
           </a:solidFill>
-          <a:ln/>
+          <a:ln w="9525">
+            <a:solidFill>
+              <a:srgbClr val="D0D5DD"/>
+            </a:solidFill>
+          </a:ln>
         </p:spPr>
         <p:txBody>
           <a:bodyPr/>
@@ -14905,7 +14965,7 @@
             <a:r>
               <a:rPr lang="en-US" sz="1029" dirty="0">
                 <a:solidFill>
-                  <a:srgbClr val="C9D3F5"/>
+                  <a:srgbClr val="1F2429"/>
                 </a:solidFill>
                 <a:latin typeface="Courier New" pitchFamily="34" charset="0"/>
                 <a:ea typeface="Courier New" pitchFamily="34" charset="-122"/>
@@ -14925,7 +14985,7 @@
             <a:r>
               <a:rPr lang="en-US" sz="1029" dirty="0">
                 <a:solidFill>
-                  <a:srgbClr val="C9D3F5"/>
+                  <a:srgbClr val="1F2429"/>
                 </a:solidFill>
                 <a:latin typeface="Courier New" pitchFamily="34" charset="0"/>
                 <a:ea typeface="Courier New" pitchFamily="34" charset="-122"/>
@@ -14945,7 +15005,7 @@
             <a:r>
               <a:rPr lang="en-US" sz="1029" dirty="0">
                 <a:solidFill>
-                  <a:srgbClr val="C9D3F5"/>
+                  <a:srgbClr val="1F2429"/>
                 </a:solidFill>
                 <a:latin typeface="Courier New" pitchFamily="34" charset="0"/>
                 <a:ea typeface="Courier New" pitchFamily="34" charset="-122"/>
@@ -14965,7 +15025,7 @@
             <a:r>
               <a:rPr lang="en-US" sz="1029" dirty="0">
                 <a:solidFill>
-                  <a:srgbClr val="C9D3F5"/>
+                  <a:srgbClr val="1F2429"/>
                 </a:solidFill>
                 <a:latin typeface="Courier New" pitchFamily="34" charset="0"/>
                 <a:ea typeface="Courier New" pitchFamily="34" charset="-122"/>
@@ -14985,7 +15045,7 @@
             <a:r>
               <a:rPr lang="en-US" sz="1029" dirty="0">
                 <a:solidFill>
-                  <a:srgbClr val="C9D3F5"/>
+                  <a:srgbClr val="1F2429"/>
                 </a:solidFill>
                 <a:latin typeface="Courier New" pitchFamily="34" charset="0"/>
                 <a:ea typeface="Courier New" pitchFamily="34" charset="-122"/>
@@ -15005,7 +15065,7 @@
             <a:r>
               <a:rPr lang="en-US" sz="1029" dirty="0">
                 <a:solidFill>
-                  <a:srgbClr val="C9D3F5"/>
+                  <a:srgbClr val="1F2429"/>
                 </a:solidFill>
                 <a:latin typeface="Courier New" pitchFamily="34" charset="0"/>
                 <a:ea typeface="Courier New" pitchFamily="34" charset="-122"/>
@@ -15025,7 +15085,7 @@
             <a:r>
               <a:rPr lang="en-US" sz="1029" dirty="0">
                 <a:solidFill>
-                  <a:srgbClr val="C9D3F5"/>
+                  <a:srgbClr val="1F2429"/>
                 </a:solidFill>
                 <a:latin typeface="Courier New" pitchFamily="34" charset="0"/>
                 <a:ea typeface="Courier New" pitchFamily="34" charset="-122"/>
@@ -15054,7 +15114,7 @@
             <a:r>
               <a:rPr lang="en-US" sz="1029" dirty="0">
                 <a:solidFill>
-                  <a:srgbClr val="C9D3F5"/>
+                  <a:srgbClr val="1F2429"/>
                 </a:solidFill>
                 <a:latin typeface="Courier New" pitchFamily="34" charset="0"/>
                 <a:ea typeface="Courier New" pitchFamily="34" charset="-122"/>
@@ -15074,7 +15134,7 @@
             <a:r>
               <a:rPr lang="en-US" sz="1029" dirty="0">
                 <a:solidFill>
-                  <a:srgbClr val="C9D3F5"/>
+                  <a:srgbClr val="1F2429"/>
                 </a:solidFill>
                 <a:latin typeface="Courier New" pitchFamily="34" charset="0"/>
                 <a:ea typeface="Courier New" pitchFamily="34" charset="-122"/>
@@ -15094,7 +15154,7 @@
             <a:r>
               <a:rPr lang="en-US" sz="1029" dirty="0">
                 <a:solidFill>
-                  <a:srgbClr val="C9D3F5"/>
+                  <a:srgbClr val="1F2429"/>
                 </a:solidFill>
                 <a:latin typeface="Courier New" pitchFamily="34" charset="0"/>
                 <a:ea typeface="Courier New" pitchFamily="34" charset="-122"/>
@@ -15123,7 +15183,7 @@
             <a:r>
               <a:rPr lang="en-US" sz="1029" dirty="0">
                 <a:solidFill>
-                  <a:srgbClr val="C9D3F5"/>
+                  <a:srgbClr val="1F2429"/>
                 </a:solidFill>
                 <a:latin typeface="Courier New" pitchFamily="34" charset="0"/>
                 <a:ea typeface="Courier New" pitchFamily="34" charset="-122"/>
@@ -15143,7 +15203,7 @@
             <a:r>
               <a:rPr lang="en-US" sz="1029" dirty="0">
                 <a:solidFill>
-                  <a:srgbClr val="C9D3F5"/>
+                  <a:srgbClr val="1F2429"/>
                 </a:solidFill>
                 <a:latin typeface="Courier New" pitchFamily="34" charset="0"/>
                 <a:ea typeface="Courier New" pitchFamily="34" charset="-122"/>
@@ -15823,9 +15883,13 @@
             </a:avLst>
           </a:prstGeom>
           <a:solidFill>
-            <a:srgbClr val="1E1E4C"/>
+            <a:srgbClr val="F7F8F9"/>
           </a:solidFill>
-          <a:ln/>
+          <a:ln w="9525">
+            <a:solidFill>
+              <a:srgbClr val="D0D5DD"/>
+            </a:solidFill>
+          </a:ln>
         </p:spPr>
         <p:txBody>
           <a:bodyPr/>
@@ -15862,7 +15926,7 @@
             <a:r>
               <a:rPr lang="en-US" sz="1400" dirty="0">
                 <a:solidFill>
-                  <a:srgbClr val="C9D3F5"/>
+                  <a:srgbClr val="1F2429"/>
                 </a:solidFill>
                 <a:latin typeface="Courier New" pitchFamily="34" charset="0"/>
                 <a:ea typeface="Courier New" pitchFamily="34" charset="-122"/>
@@ -15882,7 +15946,7 @@
             <a:r>
               <a:rPr lang="en-US" sz="1400" dirty="0">
                 <a:solidFill>
-                  <a:srgbClr val="C9D3F5"/>
+                  <a:srgbClr val="1F2429"/>
                 </a:solidFill>
                 <a:latin typeface="Courier New" pitchFamily="34" charset="0"/>
                 <a:ea typeface="Courier New" pitchFamily="34" charset="-122"/>
@@ -15902,7 +15966,7 @@
             <a:r>
               <a:rPr lang="en-US" sz="1400" dirty="0">
                 <a:solidFill>
-                  <a:srgbClr val="C9D3F5"/>
+                  <a:srgbClr val="1F2429"/>
                 </a:solidFill>
                 <a:latin typeface="Courier New" pitchFamily="34" charset="0"/>
                 <a:ea typeface="Courier New" pitchFamily="34" charset="-122"/>
@@ -15922,7 +15986,7 @@
             <a:r>
               <a:rPr lang="en-US" sz="1400" dirty="0">
                 <a:solidFill>
-                  <a:srgbClr val="C9D3F5"/>
+                  <a:srgbClr val="1F2429"/>
                 </a:solidFill>
                 <a:latin typeface="Courier New" pitchFamily="34" charset="0"/>
                 <a:ea typeface="Courier New" pitchFamily="34" charset="-122"/>
@@ -15942,7 +16006,7 @@
             <a:r>
               <a:rPr lang="en-US" sz="1400" dirty="0">
                 <a:solidFill>
-                  <a:srgbClr val="C9D3F5"/>
+                  <a:srgbClr val="1F2429"/>
                 </a:solidFill>
                 <a:latin typeface="Courier New" pitchFamily="34" charset="0"/>
                 <a:ea typeface="Courier New" pitchFamily="34" charset="-122"/>
@@ -15971,7 +16035,7 @@
             <a:r>
               <a:rPr lang="en-US" sz="1400" dirty="0">
                 <a:solidFill>
-                  <a:srgbClr val="C9D3F5"/>
+                  <a:srgbClr val="1F2429"/>
                 </a:solidFill>
                 <a:latin typeface="Courier New" pitchFamily="34" charset="0"/>
                 <a:ea typeface="Courier New" pitchFamily="34" charset="-122"/>
@@ -15991,7 +16055,7 @@
             <a:r>
               <a:rPr lang="en-US" sz="1400" dirty="0">
                 <a:solidFill>
-                  <a:srgbClr val="C9D3F5"/>
+                  <a:srgbClr val="1F2429"/>
                 </a:solidFill>
                 <a:latin typeface="Courier New" pitchFamily="34" charset="0"/>
                 <a:ea typeface="Courier New" pitchFamily="34" charset="-122"/>
@@ -16011,7 +16075,7 @@
             <a:r>
               <a:rPr lang="en-US" sz="1400" dirty="0">
                 <a:solidFill>
-                  <a:srgbClr val="C9D3F5"/>
+                  <a:srgbClr val="1F2429"/>
                 </a:solidFill>
                 <a:latin typeface="Courier New" pitchFamily="34" charset="0"/>
                 <a:ea typeface="Courier New" pitchFamily="34" charset="-122"/>
@@ -16031,7 +16095,7 @@
             <a:r>
               <a:rPr lang="en-US" sz="1400" dirty="0">
                 <a:solidFill>
-                  <a:srgbClr val="C9D3F5"/>
+                  <a:srgbClr val="1F2429"/>
                 </a:solidFill>
                 <a:latin typeface="Courier New" pitchFamily="34" charset="0"/>
                 <a:ea typeface="Courier New" pitchFamily="34" charset="-122"/>
@@ -16252,9 +16316,13 @@
             </a:avLst>
           </a:prstGeom>
           <a:solidFill>
-            <a:srgbClr val="1E1E4C"/>
+            <a:srgbClr val="F7F8F9"/>
           </a:solidFill>
-          <a:ln/>
+          <a:ln w="9525">
+            <a:solidFill>
+              <a:srgbClr val="D0D5DD"/>
+            </a:solidFill>
+          </a:ln>
         </p:spPr>
         <p:txBody>
           <a:bodyPr/>
@@ -16291,7 +16359,7 @@
             <a:r>
               <a:rPr lang="en-US" sz="1400" dirty="0">
                 <a:solidFill>
-                  <a:srgbClr val="C9D3F5"/>
+                  <a:srgbClr val="1F2429"/>
                 </a:solidFill>
                 <a:latin typeface="Courier New" pitchFamily="34" charset="0"/>
                 <a:ea typeface="Courier New" pitchFamily="34" charset="-122"/>
@@ -16311,7 +16379,7 @@
             <a:r>
               <a:rPr lang="en-US" sz="1400" dirty="0">
                 <a:solidFill>
-                  <a:srgbClr val="C9D3F5"/>
+                  <a:srgbClr val="1F2429"/>
                 </a:solidFill>
                 <a:latin typeface="Courier New" pitchFamily="34" charset="0"/>
                 <a:ea typeface="Courier New" pitchFamily="34" charset="-122"/>
@@ -16331,7 +16399,7 @@
             <a:r>
               <a:rPr lang="en-US" sz="1400" dirty="0">
                 <a:solidFill>
-                  <a:srgbClr val="C9D3F5"/>
+                  <a:srgbClr val="1F2429"/>
                 </a:solidFill>
                 <a:latin typeface="Courier New" pitchFamily="34" charset="0"/>
                 <a:ea typeface="Courier New" pitchFamily="34" charset="-122"/>
@@ -16351,7 +16419,7 @@
             <a:r>
               <a:rPr lang="en-US" sz="1400" dirty="0">
                 <a:solidFill>
-                  <a:srgbClr val="C9D3F5"/>
+                  <a:srgbClr val="1F2429"/>
                 </a:solidFill>
                 <a:latin typeface="Courier New" pitchFamily="34" charset="0"/>
                 <a:ea typeface="Courier New" pitchFamily="34" charset="-122"/>
@@ -16371,7 +16439,7 @@
             <a:r>
               <a:rPr lang="en-US" sz="1400" dirty="0">
                 <a:solidFill>
-                  <a:srgbClr val="C9D3F5"/>
+                  <a:srgbClr val="1F2429"/>
                 </a:solidFill>
                 <a:latin typeface="Courier New" pitchFamily="34" charset="0"/>
                 <a:ea typeface="Courier New" pitchFamily="34" charset="-122"/>
@@ -16391,7 +16459,7 @@
             <a:r>
               <a:rPr lang="en-US" sz="1400" dirty="0">
                 <a:solidFill>
-                  <a:srgbClr val="C9D3F5"/>
+                  <a:srgbClr val="1F2429"/>
                 </a:solidFill>
                 <a:latin typeface="Courier New" pitchFamily="34" charset="0"/>
                 <a:ea typeface="Courier New" pitchFamily="34" charset="-122"/>
@@ -16411,7 +16479,7 @@
             <a:r>
               <a:rPr lang="en-US" sz="1400" dirty="0">
                 <a:solidFill>
-                  <a:srgbClr val="C9D3F5"/>
+                  <a:srgbClr val="1F2429"/>
                 </a:solidFill>
                 <a:latin typeface="Courier New" pitchFamily="34" charset="0"/>
                 <a:ea typeface="Courier New" pitchFamily="34" charset="-122"/>
@@ -16431,7 +16499,7 @@
             <a:r>
               <a:rPr lang="en-US" sz="1400" dirty="0">
                 <a:solidFill>
-                  <a:srgbClr val="C9D3F5"/>
+                  <a:srgbClr val="1F2429"/>
                 </a:solidFill>
                 <a:latin typeface="Courier New" pitchFamily="34" charset="0"/>
                 <a:ea typeface="Courier New" pitchFamily="34" charset="-122"/>
@@ -16460,7 +16528,7 @@
             <a:r>
               <a:rPr lang="en-US" sz="1400" dirty="0">
                 <a:solidFill>
-                  <a:srgbClr val="C9D3F5"/>
+                  <a:srgbClr val="1F2429"/>
                 </a:solidFill>
                 <a:latin typeface="Courier New" pitchFamily="34" charset="0"/>
                 <a:ea typeface="Courier New" pitchFamily="34" charset="-122"/>
@@ -16480,7 +16548,7 @@
             <a:r>
               <a:rPr lang="en-US" sz="1400" dirty="0">
                 <a:solidFill>
-                  <a:srgbClr val="C9D3F5"/>
+                  <a:srgbClr val="1F2429"/>
                 </a:solidFill>
                 <a:latin typeface="Courier New" pitchFamily="34" charset="0"/>
                 <a:ea typeface="Courier New" pitchFamily="34" charset="-122"/>
@@ -16500,7 +16568,7 @@
             <a:r>
               <a:rPr lang="en-US" sz="1400" dirty="0">
                 <a:solidFill>
-                  <a:srgbClr val="C9D3F5"/>
+                  <a:srgbClr val="1F2429"/>
                 </a:solidFill>
                 <a:latin typeface="Courier New" pitchFamily="34" charset="0"/>
                 <a:ea typeface="Courier New" pitchFamily="34" charset="-122"/>
@@ -16682,9 +16750,13 @@
             </a:avLst>
           </a:prstGeom>
           <a:solidFill>
-            <a:srgbClr val="1E1E4C"/>
+            <a:srgbClr val="F7F8F9"/>
           </a:solidFill>
-          <a:ln/>
+          <a:ln w="9525">
+            <a:solidFill>
+              <a:srgbClr val="D0D5DD"/>
+            </a:solidFill>
+          </a:ln>
         </p:spPr>
         <p:txBody>
           <a:bodyPr/>
@@ -16721,7 +16793,7 @@
             <a:r>
               <a:rPr lang="en-US" sz="1309" dirty="0">
                 <a:solidFill>
-                  <a:srgbClr val="C9D3F5"/>
+                  <a:srgbClr val="1F2429"/>
                 </a:solidFill>
                 <a:latin typeface="Courier New" pitchFamily="34" charset="0"/>
                 <a:ea typeface="Courier New" pitchFamily="34" charset="-122"/>
@@ -16741,7 +16813,7 @@
             <a:r>
               <a:rPr lang="en-US" sz="1309" dirty="0">
                 <a:solidFill>
-                  <a:srgbClr val="C9D3F5"/>
+                  <a:srgbClr val="1F2429"/>
                 </a:solidFill>
                 <a:latin typeface="Courier New" pitchFamily="34" charset="0"/>
                 <a:ea typeface="Courier New" pitchFamily="34" charset="-122"/>
@@ -16770,7 +16842,7 @@
             <a:r>
               <a:rPr lang="en-US" sz="1309" dirty="0">
                 <a:solidFill>
-                  <a:srgbClr val="C9D3F5"/>
+                  <a:srgbClr val="1F2429"/>
                 </a:solidFill>
                 <a:latin typeface="Courier New" pitchFamily="34" charset="0"/>
                 <a:ea typeface="Courier New" pitchFamily="34" charset="-122"/>
@@ -16790,7 +16862,7 @@
             <a:r>
               <a:rPr lang="en-US" sz="1309" dirty="0">
                 <a:solidFill>
-                  <a:srgbClr val="C9D3F5"/>
+                  <a:srgbClr val="1F2429"/>
                 </a:solidFill>
                 <a:latin typeface="Courier New" pitchFamily="34" charset="0"/>
                 <a:ea typeface="Courier New" pitchFamily="34" charset="-122"/>
@@ -16819,7 +16891,7 @@
             <a:r>
               <a:rPr lang="en-US" sz="1309" dirty="0">
                 <a:solidFill>
-                  <a:srgbClr val="C9D3F5"/>
+                  <a:srgbClr val="1F2429"/>
                 </a:solidFill>
                 <a:latin typeface="Courier New" pitchFamily="34" charset="0"/>
                 <a:ea typeface="Courier New" pitchFamily="34" charset="-122"/>
@@ -16839,7 +16911,7 @@
             <a:r>
               <a:rPr lang="en-US" sz="1309" dirty="0">
                 <a:solidFill>
-                  <a:srgbClr val="C9D3F5"/>
+                  <a:srgbClr val="1F2429"/>
                 </a:solidFill>
                 <a:latin typeface="Courier New" pitchFamily="34" charset="0"/>
                 <a:ea typeface="Courier New" pitchFamily="34" charset="-122"/>
@@ -16868,7 +16940,7 @@
             <a:r>
               <a:rPr lang="en-US" sz="1309" dirty="0">
                 <a:solidFill>
-                  <a:srgbClr val="C9D3F5"/>
+                  <a:srgbClr val="1F2429"/>
                 </a:solidFill>
                 <a:latin typeface="Courier New" pitchFamily="34" charset="0"/>
                 <a:ea typeface="Courier New" pitchFamily="34" charset="-122"/>
@@ -16888,7 +16960,7 @@
             <a:r>
               <a:rPr lang="en-US" sz="1309" dirty="0">
                 <a:solidFill>
-                  <a:srgbClr val="C9D3F5"/>
+                  <a:srgbClr val="1F2429"/>
                 </a:solidFill>
                 <a:latin typeface="Courier New" pitchFamily="34" charset="0"/>
                 <a:ea typeface="Courier New" pitchFamily="34" charset="-122"/>
@@ -17976,9 +18048,13 @@
             </a:avLst>
           </a:prstGeom>
           <a:solidFill>
-            <a:srgbClr val="1E1E4C"/>
+            <a:srgbClr val="F7F8F9"/>
           </a:solidFill>
-          <a:ln/>
+          <a:ln w="9525">
+            <a:solidFill>
+              <a:srgbClr val="D0D5DD"/>
+            </a:solidFill>
+          </a:ln>
         </p:spPr>
         <p:txBody>
           <a:bodyPr/>
@@ -18015,7 +18091,7 @@
             <a:r>
               <a:rPr lang="en-US" sz="1400" dirty="0">
                 <a:solidFill>
-                  <a:srgbClr val="C9D3F5"/>
+                  <a:srgbClr val="1F2429"/>
                 </a:solidFill>
                 <a:latin typeface="Courier New" pitchFamily="34" charset="0"/>
                 <a:ea typeface="Courier New" pitchFamily="34" charset="-122"/>
@@ -18035,7 +18111,7 @@
             <a:r>
               <a:rPr lang="en-US" sz="1400" dirty="0">
                 <a:solidFill>
-                  <a:srgbClr val="C9D3F5"/>
+                  <a:srgbClr val="1F2429"/>
                 </a:solidFill>
                 <a:latin typeface="Courier New" pitchFamily="34" charset="0"/>
                 <a:ea typeface="Courier New" pitchFamily="34" charset="-122"/>
@@ -18064,7 +18140,7 @@
             <a:r>
               <a:rPr lang="en-US" sz="1400" dirty="0">
                 <a:solidFill>
-                  <a:srgbClr val="C9D3F5"/>
+                  <a:srgbClr val="1F2429"/>
                 </a:solidFill>
                 <a:latin typeface="Courier New" pitchFamily="34" charset="0"/>
                 <a:ea typeface="Courier New" pitchFamily="34" charset="-122"/>
@@ -18084,7 +18160,7 @@
             <a:r>
               <a:rPr lang="en-US" sz="1400" dirty="0">
                 <a:solidFill>
-                  <a:srgbClr val="C9D3F5"/>
+                  <a:srgbClr val="1F2429"/>
                 </a:solidFill>
                 <a:latin typeface="Courier New" pitchFamily="34" charset="0"/>
                 <a:ea typeface="Courier New" pitchFamily="34" charset="-122"/>
@@ -18104,7 +18180,7 @@
             <a:r>
               <a:rPr lang="en-US" sz="1400" dirty="0">
                 <a:solidFill>
-                  <a:srgbClr val="C9D3F5"/>
+                  <a:srgbClr val="1F2429"/>
                 </a:solidFill>
                 <a:latin typeface="Courier New" pitchFamily="34" charset="0"/>
                 <a:ea typeface="Courier New" pitchFamily="34" charset="-122"/>
@@ -18124,7 +18200,7 @@
             <a:r>
               <a:rPr lang="en-US" sz="1400" dirty="0">
                 <a:solidFill>
-                  <a:srgbClr val="C9D3F5"/>
+                  <a:srgbClr val="1F2429"/>
                 </a:solidFill>
                 <a:latin typeface="Courier New" pitchFamily="34" charset="0"/>
                 <a:ea typeface="Courier New" pitchFamily="34" charset="-122"/>
@@ -18153,7 +18229,7 @@
             <a:r>
               <a:rPr lang="en-US" sz="1400" dirty="0">
                 <a:solidFill>
-                  <a:srgbClr val="C9D3F5"/>
+                  <a:srgbClr val="1F2429"/>
                 </a:solidFill>
                 <a:latin typeface="Courier New" pitchFamily="34" charset="0"/>
                 <a:ea typeface="Courier New" pitchFamily="34" charset="-122"/>
@@ -18173,7 +18249,7 @@
             <a:r>
               <a:rPr lang="en-US" sz="1400" dirty="0">
                 <a:solidFill>
-                  <a:srgbClr val="C9D3F5"/>
+                  <a:srgbClr val="1F2429"/>
                 </a:solidFill>
                 <a:latin typeface="Courier New" pitchFamily="34" charset="0"/>
                 <a:ea typeface="Courier New" pitchFamily="34" charset="-122"/>
@@ -18394,9 +18470,13 @@
             </a:avLst>
           </a:prstGeom>
           <a:solidFill>
-            <a:srgbClr val="1E1E4C"/>
+            <a:srgbClr val="F7F8F9"/>
           </a:solidFill>
-          <a:ln/>
+          <a:ln w="9525">
+            <a:solidFill>
+              <a:srgbClr val="D0D5DD"/>
+            </a:solidFill>
+          </a:ln>
         </p:spPr>
         <p:txBody>
           <a:bodyPr/>
@@ -18433,7 +18513,7 @@
             <a:r>
               <a:rPr lang="en-US" sz="1400" dirty="0">
                 <a:solidFill>
-                  <a:srgbClr val="C9D3F5"/>
+                  <a:srgbClr val="1F2429"/>
                 </a:solidFill>
                 <a:latin typeface="Courier New" pitchFamily="34" charset="0"/>
                 <a:ea typeface="Courier New" pitchFamily="34" charset="-122"/>
@@ -18453,7 +18533,7 @@
             <a:r>
               <a:rPr lang="en-US" sz="1400" dirty="0">
                 <a:solidFill>
-                  <a:srgbClr val="C9D3F5"/>
+                  <a:srgbClr val="1F2429"/>
                 </a:solidFill>
                 <a:latin typeface="Courier New" pitchFamily="34" charset="0"/>
                 <a:ea typeface="Courier New" pitchFamily="34" charset="-122"/>
@@ -18473,7 +18553,7 @@
             <a:r>
               <a:rPr lang="en-US" sz="1400" dirty="0">
                 <a:solidFill>
-                  <a:srgbClr val="C9D3F5"/>
+                  <a:srgbClr val="1F2429"/>
                 </a:solidFill>
                 <a:latin typeface="Courier New" pitchFamily="34" charset="0"/>
                 <a:ea typeface="Courier New" pitchFamily="34" charset="-122"/>
@@ -18493,7 +18573,7 @@
             <a:r>
               <a:rPr lang="en-US" sz="1400" dirty="0">
                 <a:solidFill>
-                  <a:srgbClr val="C9D3F5"/>
+                  <a:srgbClr val="1F2429"/>
                 </a:solidFill>
                 <a:latin typeface="Courier New" pitchFamily="34" charset="0"/>
                 <a:ea typeface="Courier New" pitchFamily="34" charset="-122"/>
@@ -18513,7 +18593,7 @@
             <a:r>
               <a:rPr lang="en-US" sz="1400" dirty="0">
                 <a:solidFill>
-                  <a:srgbClr val="C9D3F5"/>
+                  <a:srgbClr val="1F2429"/>
                 </a:solidFill>
                 <a:latin typeface="Courier New" pitchFamily="34" charset="0"/>
                 <a:ea typeface="Courier New" pitchFamily="34" charset="-122"/>
@@ -18533,7 +18613,7 @@
             <a:r>
               <a:rPr lang="en-US" sz="1400" dirty="0">
                 <a:solidFill>
-                  <a:srgbClr val="C9D3F5"/>
+                  <a:srgbClr val="1F2429"/>
                 </a:solidFill>
                 <a:latin typeface="Courier New" pitchFamily="34" charset="0"/>
                 <a:ea typeface="Courier New" pitchFamily="34" charset="-122"/>
@@ -18553,7 +18633,7 @@
             <a:r>
               <a:rPr lang="en-US" sz="1400" dirty="0">
                 <a:solidFill>
-                  <a:srgbClr val="C9D3F5"/>
+                  <a:srgbClr val="1F2429"/>
                 </a:solidFill>
                 <a:latin typeface="Courier New" pitchFamily="34" charset="0"/>
                 <a:ea typeface="Courier New" pitchFamily="34" charset="-122"/>
@@ -18774,9 +18854,13 @@
             </a:avLst>
           </a:prstGeom>
           <a:solidFill>
-            <a:srgbClr val="1E1E4C"/>
+            <a:srgbClr val="F7F8F9"/>
           </a:solidFill>
-          <a:ln/>
+          <a:ln w="9525">
+            <a:solidFill>
+              <a:srgbClr val="D0D5DD"/>
+            </a:solidFill>
+          </a:ln>
         </p:spPr>
         <p:txBody>
           <a:bodyPr/>
@@ -18813,7 +18897,7 @@
             <a:r>
               <a:rPr lang="en-US" sz="1400" dirty="0">
                 <a:solidFill>
-                  <a:srgbClr val="C9D3F5"/>
+                  <a:srgbClr val="1F2429"/>
                 </a:solidFill>
                 <a:latin typeface="Courier New" pitchFamily="34" charset="0"/>
                 <a:ea typeface="Courier New" pitchFamily="34" charset="-122"/>
@@ -18833,7 +18917,7 @@
             <a:r>
               <a:rPr lang="en-US" sz="1400" dirty="0">
                 <a:solidFill>
-                  <a:srgbClr val="C9D3F5"/>
+                  <a:srgbClr val="1F2429"/>
                 </a:solidFill>
                 <a:latin typeface="Courier New" pitchFamily="34" charset="0"/>
                 <a:ea typeface="Courier New" pitchFamily="34" charset="-122"/>
@@ -18853,7 +18937,7 @@
             <a:r>
               <a:rPr lang="en-US" sz="1400" dirty="0">
                 <a:solidFill>
-                  <a:srgbClr val="C9D3F5"/>
+                  <a:srgbClr val="1F2429"/>
                 </a:solidFill>
                 <a:latin typeface="Courier New" pitchFamily="34" charset="0"/>
                 <a:ea typeface="Courier New" pitchFamily="34" charset="-122"/>
@@ -18873,7 +18957,7 @@
             <a:r>
               <a:rPr lang="en-US" sz="1400" dirty="0">
                 <a:solidFill>
-                  <a:srgbClr val="C9D3F5"/>
+                  <a:srgbClr val="1F2429"/>
                 </a:solidFill>
                 <a:latin typeface="Courier New" pitchFamily="34" charset="0"/>
                 <a:ea typeface="Courier New" pitchFamily="34" charset="-122"/>
@@ -18893,7 +18977,7 @@
             <a:r>
               <a:rPr lang="en-US" sz="1400" dirty="0">
                 <a:solidFill>
-                  <a:srgbClr val="C9D3F5"/>
+                  <a:srgbClr val="1F2429"/>
                 </a:solidFill>
                 <a:latin typeface="Courier New" pitchFamily="34" charset="0"/>
                 <a:ea typeface="Courier New" pitchFamily="34" charset="-122"/>
@@ -18913,7 +18997,7 @@
             <a:r>
               <a:rPr lang="en-US" sz="1400" dirty="0">
                 <a:solidFill>
-                  <a:srgbClr val="C9D3F5"/>
+                  <a:srgbClr val="1F2429"/>
                 </a:solidFill>
                 <a:latin typeface="Courier New" pitchFamily="34" charset="0"/>
                 <a:ea typeface="Courier New" pitchFamily="34" charset="-122"/>
@@ -18933,7 +19017,7 @@
             <a:r>
               <a:rPr lang="en-US" sz="1400" dirty="0">
                 <a:solidFill>
-                  <a:srgbClr val="C9D3F5"/>
+                  <a:srgbClr val="1F2429"/>
                 </a:solidFill>
                 <a:latin typeface="Courier New" pitchFamily="34" charset="0"/>
                 <a:ea typeface="Courier New" pitchFamily="34" charset="-122"/>
@@ -19154,9 +19238,13 @@
             </a:avLst>
           </a:prstGeom>
           <a:solidFill>
-            <a:srgbClr val="1E1E4C"/>
+            <a:srgbClr val="F7F8F9"/>
           </a:solidFill>
-          <a:ln/>
+          <a:ln w="9525">
+            <a:solidFill>
+              <a:srgbClr val="D0D5DD"/>
+            </a:solidFill>
+          </a:ln>
         </p:spPr>
         <p:txBody>
           <a:bodyPr/>
@@ -19193,7 +19281,7 @@
             <a:r>
               <a:rPr lang="en-US" sz="1400" dirty="0">
                 <a:solidFill>
-                  <a:srgbClr val="C9D3F5"/>
+                  <a:srgbClr val="1F2429"/>
                 </a:solidFill>
                 <a:latin typeface="Courier New" pitchFamily="34" charset="0"/>
                 <a:ea typeface="Courier New" pitchFamily="34" charset="-122"/>
@@ -19213,7 +19301,7 @@
             <a:r>
               <a:rPr lang="en-US" sz="1400" dirty="0">
                 <a:solidFill>
-                  <a:srgbClr val="C9D3F5"/>
+                  <a:srgbClr val="1F2429"/>
                 </a:solidFill>
                 <a:latin typeface="Courier New" pitchFamily="34" charset="0"/>
                 <a:ea typeface="Courier New" pitchFamily="34" charset="-122"/>
@@ -19233,7 +19321,7 @@
             <a:r>
               <a:rPr lang="en-US" sz="1400" dirty="0">
                 <a:solidFill>
-                  <a:srgbClr val="C9D3F5"/>
+                  <a:srgbClr val="1F2429"/>
                 </a:solidFill>
                 <a:latin typeface="Courier New" pitchFamily="34" charset="0"/>
                 <a:ea typeface="Courier New" pitchFamily="34" charset="-122"/>
@@ -19253,7 +19341,7 @@
             <a:r>
               <a:rPr lang="en-US" sz="1400" dirty="0">
                 <a:solidFill>
-                  <a:srgbClr val="C9D3F5"/>
+                  <a:srgbClr val="1F2429"/>
                 </a:solidFill>
                 <a:latin typeface="Courier New" pitchFamily="34" charset="0"/>
                 <a:ea typeface="Courier New" pitchFamily="34" charset="-122"/>
@@ -19273,7 +19361,7 @@
             <a:r>
               <a:rPr lang="en-US" sz="1400" dirty="0">
                 <a:solidFill>
-                  <a:srgbClr val="C9D3F5"/>
+                  <a:srgbClr val="1F2429"/>
                 </a:solidFill>
                 <a:latin typeface="Courier New" pitchFamily="34" charset="0"/>
                 <a:ea typeface="Courier New" pitchFamily="34" charset="-122"/>
@@ -19293,7 +19381,7 @@
             <a:r>
               <a:rPr lang="en-US" sz="1400" dirty="0">
                 <a:solidFill>
-                  <a:srgbClr val="C9D3F5"/>
+                  <a:srgbClr val="1F2429"/>
                 </a:solidFill>
                 <a:latin typeface="Courier New" pitchFamily="34" charset="0"/>
                 <a:ea typeface="Courier New" pitchFamily="34" charset="-122"/>
@@ -19313,7 +19401,7 @@
             <a:r>
               <a:rPr lang="en-US" sz="1400" dirty="0">
                 <a:solidFill>
-                  <a:srgbClr val="C9D3F5"/>
+                  <a:srgbClr val="1F2429"/>
                 </a:solidFill>
                 <a:latin typeface="Courier New" pitchFamily="34" charset="0"/>
                 <a:ea typeface="Courier New" pitchFamily="34" charset="-122"/>
@@ -19333,7 +19421,7 @@
             <a:r>
               <a:rPr lang="en-US" sz="1400" dirty="0">
                 <a:solidFill>
-                  <a:srgbClr val="C9D3F5"/>
+                  <a:srgbClr val="1F2429"/>
                 </a:solidFill>
                 <a:latin typeface="Courier New" pitchFamily="34" charset="0"/>
                 <a:ea typeface="Courier New" pitchFamily="34" charset="-122"/>
@@ -19554,9 +19642,13 @@
             </a:avLst>
           </a:prstGeom>
           <a:solidFill>
-            <a:srgbClr val="1E1E4C"/>
+            <a:srgbClr val="F7F8F9"/>
           </a:solidFill>
-          <a:ln/>
+          <a:ln w="9525">
+            <a:solidFill>
+              <a:srgbClr val="D0D5DD"/>
+            </a:solidFill>
+          </a:ln>
         </p:spPr>
         <p:txBody>
           <a:bodyPr/>
@@ -19593,7 +19685,7 @@
             <a:r>
               <a:rPr lang="en-US" sz="1400" dirty="0">
                 <a:solidFill>
-                  <a:srgbClr val="C9D3F5"/>
+                  <a:srgbClr val="1F2429"/>
                 </a:solidFill>
                 <a:latin typeface="Courier New" pitchFamily="34" charset="0"/>
                 <a:ea typeface="Courier New" pitchFamily="34" charset="-122"/>
@@ -19613,7 +19705,7 @@
             <a:r>
               <a:rPr lang="en-US" sz="1400" dirty="0">
                 <a:solidFill>
-                  <a:srgbClr val="C9D3F5"/>
+                  <a:srgbClr val="1F2429"/>
                 </a:solidFill>
                 <a:latin typeface="Courier New" pitchFamily="34" charset="0"/>
                 <a:ea typeface="Courier New" pitchFamily="34" charset="-122"/>
@@ -19633,7 +19725,7 @@
             <a:r>
               <a:rPr lang="en-US" sz="1400" dirty="0">
                 <a:solidFill>
-                  <a:srgbClr val="C9D3F5"/>
+                  <a:srgbClr val="1F2429"/>
                 </a:solidFill>
                 <a:latin typeface="Courier New" pitchFamily="34" charset="0"/>
                 <a:ea typeface="Courier New" pitchFamily="34" charset="-122"/>
@@ -19653,7 +19745,7 @@
             <a:r>
               <a:rPr lang="en-US" sz="1400" dirty="0">
                 <a:solidFill>
-                  <a:srgbClr val="C9D3F5"/>
+                  <a:srgbClr val="1F2429"/>
                 </a:solidFill>
                 <a:latin typeface="Courier New" pitchFamily="34" charset="0"/>
                 <a:ea typeface="Courier New" pitchFamily="34" charset="-122"/>
@@ -19673,7 +19765,7 @@
             <a:r>
               <a:rPr lang="en-US" sz="1400" dirty="0">
                 <a:solidFill>
-                  <a:srgbClr val="C9D3F5"/>
+                  <a:srgbClr val="1F2429"/>
                 </a:solidFill>
                 <a:latin typeface="Courier New" pitchFamily="34" charset="0"/>
                 <a:ea typeface="Courier New" pitchFamily="34" charset="-122"/>
@@ -19693,7 +19785,7 @@
             <a:r>
               <a:rPr lang="en-US" sz="1400" dirty="0">
                 <a:solidFill>
-                  <a:srgbClr val="C9D3F5"/>
+                  <a:srgbClr val="1F2429"/>
                 </a:solidFill>
                 <a:latin typeface="Courier New" pitchFamily="34" charset="0"/>
                 <a:ea typeface="Courier New" pitchFamily="34" charset="-122"/>
@@ -19713,7 +19805,7 @@
             <a:r>
               <a:rPr lang="en-US" sz="1400" dirty="0">
                 <a:solidFill>
-                  <a:srgbClr val="C9D3F5"/>
+                  <a:srgbClr val="1F2429"/>
                 </a:solidFill>
                 <a:latin typeface="Courier New" pitchFamily="34" charset="0"/>
                 <a:ea typeface="Courier New" pitchFamily="34" charset="-122"/>
@@ -19733,7 +19825,7 @@
             <a:r>
               <a:rPr lang="en-US" sz="1400" dirty="0">
                 <a:solidFill>
-                  <a:srgbClr val="C9D3F5"/>
+                  <a:srgbClr val="1F2429"/>
                 </a:solidFill>
                 <a:latin typeface="Courier New" pitchFamily="34" charset="0"/>
                 <a:ea typeface="Courier New" pitchFamily="34" charset="-122"/>
@@ -19753,7 +19845,7 @@
             <a:r>
               <a:rPr lang="en-US" sz="1400" dirty="0">
                 <a:solidFill>
-                  <a:srgbClr val="C9D3F5"/>
+                  <a:srgbClr val="1F2429"/>
                 </a:solidFill>
                 <a:latin typeface="Courier New" pitchFamily="34" charset="0"/>
                 <a:ea typeface="Courier New" pitchFamily="34" charset="-122"/>
@@ -19974,9 +20066,13 @@
             </a:avLst>
           </a:prstGeom>
           <a:solidFill>
-            <a:srgbClr val="1E1E4C"/>
+            <a:srgbClr val="F7F8F9"/>
           </a:solidFill>
-          <a:ln/>
+          <a:ln w="9525">
+            <a:solidFill>
+              <a:srgbClr val="D0D5DD"/>
+            </a:solidFill>
+          </a:ln>
         </p:spPr>
         <p:txBody>
           <a:bodyPr/>
@@ -20013,7 +20109,7 @@
             <a:r>
               <a:rPr lang="en-US" sz="1400" dirty="0">
                 <a:solidFill>
-                  <a:srgbClr val="C9D3F5"/>
+                  <a:srgbClr val="1F2429"/>
                 </a:solidFill>
                 <a:latin typeface="Courier New" pitchFamily="34" charset="0"/>
                 <a:ea typeface="Courier New" pitchFamily="34" charset="-122"/>
@@ -20033,7 +20129,7 @@
             <a:r>
               <a:rPr lang="en-US" sz="1400" dirty="0">
                 <a:solidFill>
-                  <a:srgbClr val="C9D3F5"/>
+                  <a:srgbClr val="1F2429"/>
                 </a:solidFill>
                 <a:latin typeface="Courier New" pitchFamily="34" charset="0"/>
                 <a:ea typeface="Courier New" pitchFamily="34" charset="-122"/>
@@ -20053,7 +20149,7 @@
             <a:r>
               <a:rPr lang="en-US" sz="1400" dirty="0">
                 <a:solidFill>
-                  <a:srgbClr val="C9D3F5"/>
+                  <a:srgbClr val="1F2429"/>
                 </a:solidFill>
                 <a:latin typeface="Courier New" pitchFamily="34" charset="0"/>
                 <a:ea typeface="Courier New" pitchFamily="34" charset="-122"/>
@@ -20073,7 +20169,7 @@
             <a:r>
               <a:rPr lang="en-US" sz="1400" dirty="0">
                 <a:solidFill>
-                  <a:srgbClr val="C9D3F5"/>
+                  <a:srgbClr val="1F2429"/>
                 </a:solidFill>
                 <a:latin typeface="Courier New" pitchFamily="34" charset="0"/>
                 <a:ea typeface="Courier New" pitchFamily="34" charset="-122"/>
@@ -20093,7 +20189,7 @@
             <a:r>
               <a:rPr lang="en-US" sz="1400" dirty="0">
                 <a:solidFill>
-                  <a:srgbClr val="C9D3F5"/>
+                  <a:srgbClr val="1F2429"/>
                 </a:solidFill>
                 <a:latin typeface="Courier New" pitchFamily="34" charset="0"/>
                 <a:ea typeface="Courier New" pitchFamily="34" charset="-122"/>
@@ -20113,7 +20209,7 @@
             <a:r>
               <a:rPr lang="en-US" sz="1400" dirty="0">
                 <a:solidFill>
-                  <a:srgbClr val="C9D3F5"/>
+                  <a:srgbClr val="1F2429"/>
                 </a:solidFill>
                 <a:latin typeface="Courier New" pitchFamily="34" charset="0"/>
                 <a:ea typeface="Courier New" pitchFamily="34" charset="-122"/>
@@ -20133,7 +20229,7 @@
             <a:r>
               <a:rPr lang="en-US" sz="1400" dirty="0">
                 <a:solidFill>
-                  <a:srgbClr val="C9D3F5"/>
+                  <a:srgbClr val="1F2429"/>
                 </a:solidFill>
                 <a:latin typeface="Courier New" pitchFamily="34" charset="0"/>
                 <a:ea typeface="Courier New" pitchFamily="34" charset="-122"/>
@@ -20153,7 +20249,7 @@
             <a:r>
               <a:rPr lang="en-US" sz="1400" dirty="0">
                 <a:solidFill>
-                  <a:srgbClr val="C9D3F5"/>
+                  <a:srgbClr val="1F2429"/>
                 </a:solidFill>
                 <a:latin typeface="Courier New" pitchFamily="34" charset="0"/>
                 <a:ea typeface="Courier New" pitchFamily="34" charset="-122"/>
@@ -20173,7 +20269,7 @@
             <a:r>
               <a:rPr lang="en-US" sz="1400" dirty="0">
                 <a:solidFill>
-                  <a:srgbClr val="C9D3F5"/>
+                  <a:srgbClr val="1F2429"/>
                 </a:solidFill>
                 <a:latin typeface="Courier New" pitchFamily="34" charset="0"/>
                 <a:ea typeface="Courier New" pitchFamily="34" charset="-122"/>
@@ -20193,7 +20289,7 @@
             <a:r>
               <a:rPr lang="en-US" sz="1400" dirty="0">
                 <a:solidFill>
-                  <a:srgbClr val="C9D3F5"/>
+                  <a:srgbClr val="1F2429"/>
                 </a:solidFill>
                 <a:latin typeface="Courier New" pitchFamily="34" charset="0"/>
                 <a:ea typeface="Courier New" pitchFamily="34" charset="-122"/>
@@ -20414,9 +20510,13 @@
             </a:avLst>
           </a:prstGeom>
           <a:solidFill>
-            <a:srgbClr val="1E1E4C"/>
+            <a:srgbClr val="F7F8F9"/>
           </a:solidFill>
-          <a:ln/>
+          <a:ln w="9525">
+            <a:solidFill>
+              <a:srgbClr val="D0D5DD"/>
+            </a:solidFill>
+          </a:ln>
         </p:spPr>
         <p:txBody>
           <a:bodyPr/>
@@ -20453,7 +20553,7 @@
             <a:r>
               <a:rPr lang="en-US" sz="1400" dirty="0">
                 <a:solidFill>
-                  <a:srgbClr val="C9D3F5"/>
+                  <a:srgbClr val="1F2429"/>
                 </a:solidFill>
                 <a:latin typeface="Courier New" pitchFamily="34" charset="0"/>
                 <a:ea typeface="Courier New" pitchFamily="34" charset="-122"/>
@@ -20473,7 +20573,7 @@
             <a:r>
               <a:rPr lang="en-US" sz="1400" dirty="0">
                 <a:solidFill>
-                  <a:srgbClr val="C9D3F5"/>
+                  <a:srgbClr val="1F2429"/>
                 </a:solidFill>
                 <a:latin typeface="Courier New" pitchFamily="34" charset="0"/>
                 <a:ea typeface="Courier New" pitchFamily="34" charset="-122"/>
@@ -20493,7 +20593,7 @@
             <a:r>
               <a:rPr lang="en-US" sz="1400" dirty="0">
                 <a:solidFill>
-                  <a:srgbClr val="C9D3F5"/>
+                  <a:srgbClr val="1F2429"/>
                 </a:solidFill>
                 <a:latin typeface="Courier New" pitchFamily="34" charset="0"/>
                 <a:ea typeface="Courier New" pitchFamily="34" charset="-122"/>
@@ -20513,7 +20613,7 @@
             <a:r>
               <a:rPr lang="en-US" sz="1400" dirty="0">
                 <a:solidFill>
-                  <a:srgbClr val="C9D3F5"/>
+                  <a:srgbClr val="1F2429"/>
                 </a:solidFill>
                 <a:latin typeface="Courier New" pitchFamily="34" charset="0"/>
                 <a:ea typeface="Courier New" pitchFamily="34" charset="-122"/>
@@ -20533,7 +20633,7 @@
             <a:r>
               <a:rPr lang="en-US" sz="1400" dirty="0">
                 <a:solidFill>
-                  <a:srgbClr val="C9D3F5"/>
+                  <a:srgbClr val="1F2429"/>
                 </a:solidFill>
                 <a:latin typeface="Courier New" pitchFamily="34" charset="0"/>
                 <a:ea typeface="Courier New" pitchFamily="34" charset="-122"/>
@@ -20553,7 +20653,7 @@
             <a:r>
               <a:rPr lang="en-US" sz="1400" dirty="0">
                 <a:solidFill>
-                  <a:srgbClr val="C9D3F5"/>
+                  <a:srgbClr val="1F2429"/>
                 </a:solidFill>
                 <a:latin typeface="Courier New" pitchFamily="34" charset="0"/>
                 <a:ea typeface="Courier New" pitchFamily="34" charset="-122"/>
@@ -20573,7 +20673,7 @@
             <a:r>
               <a:rPr lang="en-US" sz="1400" dirty="0">
                 <a:solidFill>
-                  <a:srgbClr val="C9D3F5"/>
+                  <a:srgbClr val="1F2429"/>
                 </a:solidFill>
                 <a:latin typeface="Courier New" pitchFamily="34" charset="0"/>
                 <a:ea typeface="Courier New" pitchFamily="34" charset="-122"/>
@@ -20593,7 +20693,7 @@
             <a:r>
               <a:rPr lang="en-US" sz="1400" dirty="0">
                 <a:solidFill>
-                  <a:srgbClr val="C9D3F5"/>
+                  <a:srgbClr val="1F2429"/>
                 </a:solidFill>
                 <a:latin typeface="Courier New" pitchFamily="34" charset="0"/>
                 <a:ea typeface="Courier New" pitchFamily="34" charset="-122"/>
@@ -20814,9 +20914,13 @@
             </a:avLst>
           </a:prstGeom>
           <a:solidFill>
-            <a:srgbClr val="1E1E4C"/>
+            <a:srgbClr val="F7F8F9"/>
           </a:solidFill>
-          <a:ln/>
+          <a:ln w="9525">
+            <a:solidFill>
+              <a:srgbClr val="D0D5DD"/>
+            </a:solidFill>
+          </a:ln>
         </p:spPr>
         <p:txBody>
           <a:bodyPr/>
@@ -20853,7 +20957,7 @@
             <a:r>
               <a:rPr lang="en-US" sz="1400" dirty="0">
                 <a:solidFill>
-                  <a:srgbClr val="C9D3F5"/>
+                  <a:srgbClr val="1F2429"/>
                 </a:solidFill>
                 <a:latin typeface="Courier New" pitchFamily="34" charset="0"/>
                 <a:ea typeface="Courier New" pitchFamily="34" charset="-122"/>
@@ -20873,7 +20977,7 @@
             <a:r>
               <a:rPr lang="en-US" sz="1400" dirty="0">
                 <a:solidFill>
-                  <a:srgbClr val="C9D3F5"/>
+                  <a:srgbClr val="1F2429"/>
                 </a:solidFill>
                 <a:latin typeface="Courier New" pitchFamily="34" charset="0"/>
                 <a:ea typeface="Courier New" pitchFamily="34" charset="-122"/>
@@ -20893,7 +20997,7 @@
             <a:r>
               <a:rPr lang="en-US" sz="1400" dirty="0">
                 <a:solidFill>
-                  <a:srgbClr val="C9D3F5"/>
+                  <a:srgbClr val="1F2429"/>
                 </a:solidFill>
                 <a:latin typeface="Courier New" pitchFamily="34" charset="0"/>
                 <a:ea typeface="Courier New" pitchFamily="34" charset="-122"/>
@@ -20913,7 +21017,7 @@
             <a:r>
               <a:rPr lang="en-US" sz="1400" dirty="0">
                 <a:solidFill>
-                  <a:srgbClr val="C9D3F5"/>
+                  <a:srgbClr val="1F2429"/>
                 </a:solidFill>
                 <a:latin typeface="Courier New" pitchFamily="34" charset="0"/>
                 <a:ea typeface="Courier New" pitchFamily="34" charset="-122"/>
@@ -20933,7 +21037,7 @@
             <a:r>
               <a:rPr lang="en-US" sz="1400" dirty="0">
                 <a:solidFill>
-                  <a:srgbClr val="C9D3F5"/>
+                  <a:srgbClr val="1F2429"/>
                 </a:solidFill>
                 <a:latin typeface="Courier New" pitchFamily="34" charset="0"/>
                 <a:ea typeface="Courier New" pitchFamily="34" charset="-122"/>
@@ -20953,7 +21057,7 @@
             <a:r>
               <a:rPr lang="en-US" sz="1400" dirty="0">
                 <a:solidFill>
-                  <a:srgbClr val="C9D3F5"/>
+                  <a:srgbClr val="1F2429"/>
                 </a:solidFill>
                 <a:latin typeface="Courier New" pitchFamily="34" charset="0"/>
                 <a:ea typeface="Courier New" pitchFamily="34" charset="-122"/>
@@ -20973,7 +21077,7 @@
             <a:r>
               <a:rPr lang="en-US" sz="1400" dirty="0">
                 <a:solidFill>
-                  <a:srgbClr val="C9D3F5"/>
+                  <a:srgbClr val="1F2429"/>
                 </a:solidFill>
                 <a:latin typeface="Courier New" pitchFamily="34" charset="0"/>
                 <a:ea typeface="Courier New" pitchFamily="34" charset="-122"/>
@@ -20993,7 +21097,7 @@
             <a:r>
               <a:rPr lang="en-US" sz="1400" dirty="0">
                 <a:solidFill>
-                  <a:srgbClr val="C9D3F5"/>
+                  <a:srgbClr val="1F2429"/>
                 </a:solidFill>
                 <a:latin typeface="Courier New" pitchFamily="34" charset="0"/>
                 <a:ea typeface="Courier New" pitchFamily="34" charset="-122"/>
@@ -21013,7 +21117,7 @@
             <a:r>
               <a:rPr lang="en-US" sz="1400" dirty="0">
                 <a:solidFill>
-                  <a:srgbClr val="C9D3F5"/>
+                  <a:srgbClr val="1F2429"/>
                 </a:solidFill>
                 <a:latin typeface="Courier New" pitchFamily="34" charset="0"/>
                 <a:ea typeface="Courier New" pitchFamily="34" charset="-122"/>
@@ -21234,9 +21338,13 @@
             </a:avLst>
           </a:prstGeom>
           <a:solidFill>
-            <a:srgbClr val="1E1E4C"/>
+            <a:srgbClr val="F7F8F9"/>
           </a:solidFill>
-          <a:ln/>
+          <a:ln w="9525">
+            <a:solidFill>
+              <a:srgbClr val="D0D5DD"/>
+            </a:solidFill>
+          </a:ln>
         </p:spPr>
         <p:txBody>
           <a:bodyPr/>
@@ -21273,7 +21381,7 @@
             <a:r>
               <a:rPr lang="en-US" sz="1400" dirty="0">
                 <a:solidFill>
-                  <a:srgbClr val="C9D3F5"/>
+                  <a:srgbClr val="1F2429"/>
                 </a:solidFill>
                 <a:latin typeface="Courier New" pitchFamily="34" charset="0"/>
                 <a:ea typeface="Courier New" pitchFamily="34" charset="-122"/>
@@ -21293,7 +21401,7 @@
             <a:r>
               <a:rPr lang="en-US" sz="1400" dirty="0">
                 <a:solidFill>
-                  <a:srgbClr val="C9D3F5"/>
+                  <a:srgbClr val="1F2429"/>
                 </a:solidFill>
                 <a:latin typeface="Courier New" pitchFamily="34" charset="0"/>
                 <a:ea typeface="Courier New" pitchFamily="34" charset="-122"/>
@@ -22714,7 +22822,7 @@
         <p:spPr>
           <a:xfrm>
             <a:off x="640080" y="1965960"/>
-            <a:ext cx="10911535" cy="1554480"/>
+            <a:ext cx="10911535" cy="3657600"/>
           </a:xfrm>
           <a:prstGeom prst="roundRect">
             <a:avLst>
@@ -22745,7 +22853,7 @@
         <p:spPr>
           <a:xfrm>
             <a:off x="868680" y="2103120"/>
-            <a:ext cx="10454335" cy="274320"/>
+            <a:ext cx="10454335" cy="400000"/>
           </a:xfrm>
           <a:prstGeom prst="rect">
             <a:avLst/>
@@ -22761,7 +22869,7 @@
               <a:buNone/>
             </a:pPr>
             <a:r>
-              <a:rPr lang="en-US" sz="1000" b="1" spc="200" kern="0" dirty="0">
+              <a:rPr lang="en-US" sz="1800" b="1" spc="200" kern="0" dirty="0">
                 <a:solidFill>
                   <a:srgbClr val="1F7A46"/>
                 </a:solidFill>
@@ -22771,7 +22879,7 @@
               </a:rPr>
               <a:t>TIP</a:t>
             </a:r>
-            <a:endParaRPr lang="en-US" sz="1000" dirty="0"/>
+            <a:endParaRPr lang="en-US" sz="1800" dirty="0"/>
           </a:p>
         </p:txBody>
       </p:sp>
@@ -22783,8 +22891,8 @@
         </p:nvSpPr>
         <p:spPr>
           <a:xfrm>
-            <a:off x="868680" y="2404872"/>
-            <a:ext cx="10454335" cy="960120"/>
+            <a:off x="868680" y="2795960"/>
+            <a:ext cx="10454335" cy="2500000"/>
           </a:xfrm>
           <a:prstGeom prst="rect">
             <a:avLst/>
@@ -22793,14 +22901,14 @@
           <a:ln/>
         </p:spPr>
         <p:txBody>
-          <a:bodyPr wrap="square" lIns="0" tIns="0" rIns="0" bIns="0" rtlCol="0" anchor="t"/>
-          <a:lstStyle/>
-          <a:p>
-            <a:pPr indent="0" marL="0">
-              <a:buNone/>
-            </a:pPr>
-            <a:r>
-              <a:rPr lang="en-US" sz="1250" dirty="0">
+          <a:bodyPr wrap="square" lIns="0" tIns="0" rIns="0" bIns="0" rtlCol="0" anchor="ctr"/>
+          <a:lstStyle/>
+          <a:p>
+            <a:pPr indent="0" marL="0">
+              <a:buNone/>
+            </a:pPr>
+            <a:r>
+              <a:rPr lang="en-US" sz="2800" dirty="0">
                 <a:solidFill>
                   <a:srgbClr val="26262F"/>
                 </a:solidFill>
@@ -22810,7 +22918,7 @@
               </a:rPr>
               <a:t>Put defer on almost every script you write. Reach for async only for scripts that do not depend on the DOM and do not need to run in a specific order.</a:t>
             </a:r>
-            <a:endParaRPr lang="en-US" sz="1250" dirty="0"/>
+            <a:endParaRPr lang="en-US" sz="2800" dirty="0"/>
           </a:p>
         </p:txBody>
       </p:sp>
@@ -22984,9 +23092,13 @@
             </a:avLst>
           </a:prstGeom>
           <a:solidFill>
-            <a:srgbClr val="1E1E4C"/>
+            <a:srgbClr val="F7F8F9"/>
           </a:solidFill>
-          <a:ln/>
+          <a:ln w="9525">
+            <a:solidFill>
+              <a:srgbClr val="D0D5DD"/>
+            </a:solidFill>
+          </a:ln>
         </p:spPr>
         <p:txBody>
           <a:bodyPr/>
@@ -23023,7 +23135,7 @@
             <a:r>
               <a:rPr lang="en-US" sz="1400" dirty="0">
                 <a:solidFill>
-                  <a:srgbClr val="C9D3F5"/>
+                  <a:srgbClr val="1F2429"/>
                 </a:solidFill>
                 <a:latin typeface="Courier New" pitchFamily="34" charset="0"/>
                 <a:ea typeface="Courier New" pitchFamily="34" charset="-122"/>
@@ -23043,7 +23155,7 @@
             <a:r>
               <a:rPr lang="en-US" sz="1400" dirty="0">
                 <a:solidFill>
-                  <a:srgbClr val="C9D3F5"/>
+                  <a:srgbClr val="1F2429"/>
                 </a:solidFill>
                 <a:latin typeface="Courier New" pitchFamily="34" charset="0"/>
                 <a:ea typeface="Courier New" pitchFamily="34" charset="-122"/>
@@ -23063,7 +23175,7 @@
             <a:r>
               <a:rPr lang="en-US" sz="1400" dirty="0">
                 <a:solidFill>
-                  <a:srgbClr val="C9D3F5"/>
+                  <a:srgbClr val="1F2429"/>
                 </a:solidFill>
                 <a:latin typeface="Courier New" pitchFamily="34" charset="0"/>
                 <a:ea typeface="Courier New" pitchFamily="34" charset="-122"/>
